--- a/presentation/MCQA_pitch_ready.pptx
+++ b/presentation/MCQA_pitch_ready.pptx
@@ -2,22 +2,22 @@
 <file path=ppt/presentation.xml><?xml version="1.0" encoding="utf-8"?>
 <p:presentation xmlns:p="http://schemas.openxmlformats.org/presentationml/2006/main">
   <p:sldMasterIdLst>
-    <p:sldMasterId xmlns:r="http://schemas.openxmlformats.org/officeDocument/2006/relationships" id="2147483648" r:id="R2c7918411dce4703"/>
+    <p:sldMasterId xmlns:r="http://schemas.openxmlformats.org/officeDocument/2006/relationships" id="2147483648" r:id="R190b2f4b639041e4"/>
   </p:sldMasterIdLst>
   <p:notesMasterIdLst>
-    <p:notesMasterId xmlns:r="http://schemas.openxmlformats.org/officeDocument/2006/relationships" r:id="R1c8769eaf1e647d1"/>
+    <p:notesMasterId xmlns:r="http://schemas.openxmlformats.org/officeDocument/2006/relationships" r:id="R64f24ec0b94d4571"/>
   </p:notesMasterIdLst>
   <p:sldIdLst>
-    <p:sldId xmlns:r="http://schemas.openxmlformats.org/officeDocument/2006/relationships" id="256" r:id="R3b4cf3517f02450b"/>
-    <p:sldId xmlns:r="http://schemas.openxmlformats.org/officeDocument/2006/relationships" id="257" r:id="R07f739feb1814926"/>
-    <p:sldId xmlns:r="http://schemas.openxmlformats.org/officeDocument/2006/relationships" id="258" r:id="R23b784bd304f4b23"/>
-    <p:sldId xmlns:r="http://schemas.openxmlformats.org/officeDocument/2006/relationships" id="259" r:id="R8ba829a958c04a73"/>
-    <p:sldId xmlns:r="http://schemas.openxmlformats.org/officeDocument/2006/relationships" id="260" r:id="R543f4f4fa7cd4e03"/>
-    <p:sldId xmlns:r="http://schemas.openxmlformats.org/officeDocument/2006/relationships" id="261" r:id="R174ec344c8874123"/>
-    <p:sldId xmlns:r="http://schemas.openxmlformats.org/officeDocument/2006/relationships" id="262" r:id="Rd3705c2051864694"/>
-    <p:sldId xmlns:r="http://schemas.openxmlformats.org/officeDocument/2006/relationships" id="263" r:id="Rbcdf1f07338049e1"/>
-    <p:sldId xmlns:r="http://schemas.openxmlformats.org/officeDocument/2006/relationships" id="264" r:id="Rbacde573f5074cee"/>
-    <p:sldId xmlns:r="http://schemas.openxmlformats.org/officeDocument/2006/relationships" id="265" r:id="R1f8fc50dc5c042c6"/>
+    <p:sldId xmlns:r="http://schemas.openxmlformats.org/officeDocument/2006/relationships" id="256" r:id="Rfe83c29357aa4b9d"/>
+    <p:sldId xmlns:r="http://schemas.openxmlformats.org/officeDocument/2006/relationships" id="257" r:id="R18373deac7274be0"/>
+    <p:sldId xmlns:r="http://schemas.openxmlformats.org/officeDocument/2006/relationships" id="258" r:id="R8333a68fb0344e46"/>
+    <p:sldId xmlns:r="http://schemas.openxmlformats.org/officeDocument/2006/relationships" id="259" r:id="R565255f52e914b81"/>
+    <p:sldId xmlns:r="http://schemas.openxmlformats.org/officeDocument/2006/relationships" id="260" r:id="Rb5cf93e36d9147c6"/>
+    <p:sldId xmlns:r="http://schemas.openxmlformats.org/officeDocument/2006/relationships" id="261" r:id="R95b7afb8cfdc47f3"/>
+    <p:sldId xmlns:r="http://schemas.openxmlformats.org/officeDocument/2006/relationships" id="262" r:id="Rdfc8013daafd455c"/>
+    <p:sldId xmlns:r="http://schemas.openxmlformats.org/officeDocument/2006/relationships" id="263" r:id="R9352036c52514de9"/>
+    <p:sldId xmlns:r="http://schemas.openxmlformats.org/officeDocument/2006/relationships" id="264" r:id="R4944e7699a684895"/>
+    <p:sldId xmlns:r="http://schemas.openxmlformats.org/officeDocument/2006/relationships" id="265" r:id="Rd82e17622c4b444d"/>
   </p:sldIdLst>
   <p:sldSz cx="12192000" cy="6858000"/>
   <p:notesSz cx="6858000" cy="9144000"/>
@@ -1539,7 +1539,7 @@
   </p:cSld>
   <p:clrMap bg1="lt1" tx1="dk1" bg2="lt2" tx2="dk2" accent1="accent1" accent2="accent2" accent3="accent3" accent4="accent4" accent5="accent5" accent6="accent6" hlink="hlink" folHlink="folHlink"/>
   <p:sldLayoutIdLst>
-    <p:sldLayoutId xmlns:r="http://schemas.openxmlformats.org/officeDocument/2006/relationships" id="2147483649" r:id="R578d420c65ef47c4"/>
+    <p:sldLayoutId xmlns:r="http://schemas.openxmlformats.org/officeDocument/2006/relationships" id="2147483649" r:id="R252b6bb054d34730"/>
   </p:sldLayoutIdLst>
   <p:txStyles>
     <p:titleStyle>
@@ -2119,6 +2119,7 @@
           <a:lstStyle xmlns:a="http://schemas.openxmlformats.org/drawingml/2006/main"/>
           <a:p xmlns:a="http://schemas.openxmlformats.org/drawingml/2006/main">
             <a:pPr algn="r">
+              <a:buNone/>
               <a:defRPr sz="1500" b="0">
                 <a:solidFill>
                   <a:srgbClr val="A5BEAD"/>
@@ -2176,6 +2177,7 @@
           <a:lstStyle xmlns:a="http://schemas.openxmlformats.org/drawingml/2006/main"/>
           <a:p xmlns:a="http://schemas.openxmlformats.org/drawingml/2006/main">
             <a:pPr algn="l">
+              <a:buNone/>
               <a:defRPr sz="7800" b="1">
                 <a:solidFill>
                   <a:srgbClr val="FFFFFF"/>
@@ -2233,6 +2235,7 @@
           <a:lstStyle xmlns:a="http://schemas.openxmlformats.org/drawingml/2006/main"/>
           <a:p xmlns:a="http://schemas.openxmlformats.org/drawingml/2006/main">
             <a:pPr algn="l">
+              <a:buNone/>
               <a:defRPr sz="3600" b="0">
                 <a:solidFill>
                   <a:srgbClr val="FFFFFF"/>
@@ -2290,6 +2293,7 @@
           <a:lstStyle xmlns:a="http://schemas.openxmlformats.org/drawingml/2006/main"/>
           <a:p xmlns:a="http://schemas.openxmlformats.org/drawingml/2006/main">
             <a:pPr algn="l">
+              <a:buNone/>
               <a:defRPr sz="2250" b="0">
                 <a:solidFill>
                   <a:srgbClr val="CEE2D3"/>
@@ -2347,6 +2351,7 @@
           <a:lstStyle xmlns:a="http://schemas.openxmlformats.org/drawingml/2006/main"/>
           <a:p xmlns:a="http://schemas.openxmlformats.org/drawingml/2006/main">
             <a:pPr algn="l">
+              <a:buNone/>
               <a:defRPr sz="1950" b="0">
                 <a:solidFill>
                   <a:srgbClr val="A7D0B5"/>
@@ -2386,8 +2391,8 @@
         </p:nvSpPr>
         <p:spPr>
           <a:xfrm xmlns:a="http://schemas.openxmlformats.org/drawingml/2006/main">
-            <a:off x="647700" y="5810250"/>
-            <a:ext cx="10001250" cy="400050"/>
+            <a:off x="647700" y="5514975"/>
+            <a:ext cx="10001250" cy="742950"/>
           </a:xfrm>
           <a:prstGeom xmlns:a="http://schemas.openxmlformats.org/drawingml/2006/main" prst="rect">
             <a:avLst/>
@@ -2401,9 +2406,21 @@
           <a:bodyPr xmlns:a="http://schemas.openxmlformats.org/drawingml/2006/main" wrap="square" lIns="0" tIns="0" rIns="0" bIns="0">
             <a:noAutofit/>
           </a:bodyPr>
-          <a:lstStyle xmlns:a="http://schemas.openxmlformats.org/drawingml/2006/main"/>
+          <a:lstStyle xmlns:a="http://schemas.openxmlformats.org/drawingml/2006/main">
+            <a:defPPr algn="l">
+              <a:defRPr sz="1800">
+                <a:solidFill>
+                  <a:srgbClr val="FFFFFF"/>
+                </a:solidFill>
+                <a:latin typeface="Tahoma"/>
+                <a:ea typeface="Tahoma"/>
+                <a:cs typeface="Tahoma"/>
+              </a:defRPr>
+            </a:defPPr>
+          </a:lstStyle>
           <a:p xmlns:a="http://schemas.openxmlformats.org/drawingml/2006/main">
             <a:pPr algn="l">
+              <a:buNone/>
               <a:defRPr sz="1800" b="0">
                 <a:solidFill>
                   <a:srgbClr val="FFFFFF"/>
@@ -2422,7 +2439,31 @@
                 <a:ea typeface="Tahoma"/>
                 <a:cs typeface="Tahoma"/>
               </a:rPr>
-              <a:t>Team: add the real names of your 3–4 members</a:t>
+              <a:t>Natdanai Phurintanachot (67070230)</a:t>
+            </a:r>
+          </a:p>
+          <a:p xmlns:a="http://schemas.openxmlformats.org/drawingml/2006/main">
+            <a:pPr algn="l">
+              <a:buNone/>
+              <a:defRPr sz="1800" b="0">
+                <a:solidFill>
+                  <a:srgbClr val="FFFFFF"/>
+                </a:solidFill>
+                <a:latin typeface="Tahoma"/>
+                <a:ea typeface="Tahoma"/>
+                <a:cs typeface="Tahoma"/>
+              </a:defRPr>
+            </a:pPr>
+            <a:r>
+              <a:rPr sz="1800" b="0">
+                <a:solidFill>
+                  <a:srgbClr val="FFFFFF"/>
+                </a:solidFill>
+                <a:latin typeface="Tahoma"/>
+                <a:ea typeface="Tahoma"/>
+                <a:cs typeface="Tahoma"/>
+              </a:rPr>
+              <a:t>Nattapong Suphawirojlert (67070051)</a:t>
             </a:r>
           </a:p>
         </p:txBody>
@@ -2490,6 +2531,7 @@
           <a:lstStyle xmlns:a="http://schemas.openxmlformats.org/drawingml/2006/main"/>
           <a:p xmlns:a="http://schemas.openxmlformats.org/drawingml/2006/main">
             <a:pPr algn="l">
+              <a:buNone/>
               <a:defRPr sz="3300" b="1">
                 <a:solidFill>
                   <a:srgbClr val="142B2A"/>
@@ -2547,6 +2589,7 @@
           <a:lstStyle xmlns:a="http://schemas.openxmlformats.org/drawingml/2006/main"/>
           <a:p xmlns:a="http://schemas.openxmlformats.org/drawingml/2006/main">
             <a:pPr algn="r">
+              <a:buNone/>
               <a:defRPr sz="1500" b="0">
                 <a:solidFill>
                   <a:srgbClr val="536563"/>
@@ -2604,6 +2647,7 @@
           <a:lstStyle xmlns:a="http://schemas.openxmlformats.org/drawingml/2006/main"/>
           <a:p xmlns:a="http://schemas.openxmlformats.org/drawingml/2006/main">
             <a:pPr algn="l">
+              <a:buNone/>
               <a:defRPr sz="2400" b="1">
                 <a:solidFill>
                   <a:srgbClr val="24774F"/>
@@ -2661,6 +2705,7 @@
           <a:lstStyle xmlns:a="http://schemas.openxmlformats.org/drawingml/2006/main"/>
           <a:p xmlns:a="http://schemas.openxmlformats.org/drawingml/2006/main">
             <a:pPr algn="l">
+              <a:buNone/>
               <a:defRPr sz="2175" b="0">
                 <a:solidFill>
                   <a:srgbClr val="142B2A"/>
@@ -2718,6 +2763,7 @@
           <a:lstStyle xmlns:a="http://schemas.openxmlformats.org/drawingml/2006/main"/>
           <a:p xmlns:a="http://schemas.openxmlformats.org/drawingml/2006/main">
             <a:pPr algn="l">
+              <a:buNone/>
               <a:defRPr sz="2175" b="0">
                 <a:solidFill>
                   <a:srgbClr val="142B2A"/>
@@ -2775,6 +2821,7 @@
           <a:lstStyle xmlns:a="http://schemas.openxmlformats.org/drawingml/2006/main"/>
           <a:p xmlns:a="http://schemas.openxmlformats.org/drawingml/2006/main">
             <a:pPr algn="l">
+              <a:buNone/>
               <a:defRPr sz="2175" b="0">
                 <a:solidFill>
                   <a:srgbClr val="142B2A"/>
@@ -2832,6 +2879,7 @@
           <a:lstStyle xmlns:a="http://schemas.openxmlformats.org/drawingml/2006/main"/>
           <a:p xmlns:a="http://schemas.openxmlformats.org/drawingml/2006/main">
             <a:pPr algn="l">
+              <a:buNone/>
               <a:defRPr sz="2400" b="1">
                 <a:solidFill>
                   <a:srgbClr val="24774F"/>
@@ -2889,6 +2937,7 @@
           <a:lstStyle xmlns:a="http://schemas.openxmlformats.org/drawingml/2006/main"/>
           <a:p xmlns:a="http://schemas.openxmlformats.org/drawingml/2006/main">
             <a:pPr algn="l">
+              <a:buNone/>
               <a:defRPr sz="2100" b="0">
                 <a:solidFill>
                   <a:srgbClr val="142B2A"/>
@@ -2912,6 +2961,7 @@
           </a:p>
           <a:p xmlns:a="http://schemas.openxmlformats.org/drawingml/2006/main">
             <a:pPr algn="l">
+              <a:buNone/>
               <a:defRPr sz="2100" b="0">
                 <a:solidFill>
                   <a:srgbClr val="142B2A"/>
@@ -2969,6 +3019,7 @@
           <a:lstStyle xmlns:a="http://schemas.openxmlformats.org/drawingml/2006/main"/>
           <a:p xmlns:a="http://schemas.openxmlformats.org/drawingml/2006/main">
             <a:pPr algn="l">
+              <a:buNone/>
               <a:defRPr sz="1575" b="0">
                 <a:solidFill>
                   <a:srgbClr val="536563"/>
@@ -3055,6 +3106,7 @@
           <a:lstStyle xmlns:a="http://schemas.openxmlformats.org/drawingml/2006/main"/>
           <a:p xmlns:a="http://schemas.openxmlformats.org/drawingml/2006/main">
             <a:pPr algn="l">
+              <a:buNone/>
               <a:defRPr sz="3300" b="1">
                 <a:solidFill>
                   <a:srgbClr val="142B2A"/>
@@ -3112,6 +3164,7 @@
           <a:lstStyle xmlns:a="http://schemas.openxmlformats.org/drawingml/2006/main"/>
           <a:p xmlns:a="http://schemas.openxmlformats.org/drawingml/2006/main">
             <a:pPr algn="r">
+              <a:buNone/>
               <a:defRPr sz="1500" b="0">
                 <a:solidFill>
                   <a:srgbClr val="536563"/>
@@ -3169,6 +3222,7 @@
           <a:lstStyle xmlns:a="http://schemas.openxmlformats.org/drawingml/2006/main"/>
           <a:p xmlns:a="http://schemas.openxmlformats.org/drawingml/2006/main">
             <a:pPr algn="l">
+              <a:buNone/>
               <a:defRPr sz="2400" b="1">
                 <a:solidFill>
                   <a:srgbClr val="24774F"/>
@@ -3226,6 +3280,7 @@
           <a:lstStyle xmlns:a="http://schemas.openxmlformats.org/drawingml/2006/main"/>
           <a:p xmlns:a="http://schemas.openxmlformats.org/drawingml/2006/main">
             <a:pPr algn="l">
+              <a:buNone/>
               <a:defRPr sz="2700" b="0">
                 <a:solidFill>
                   <a:srgbClr val="142B2A"/>
@@ -3249,6 +3304,7 @@
           </a:p>
           <a:p xmlns:a="http://schemas.openxmlformats.org/drawingml/2006/main">
             <a:pPr algn="l">
+              <a:buNone/>
               <a:defRPr sz="2700" b="0">
                 <a:solidFill>
                   <a:srgbClr val="142B2A"/>
@@ -3306,6 +3362,7 @@
           <a:lstStyle xmlns:a="http://schemas.openxmlformats.org/drawingml/2006/main"/>
           <a:p xmlns:a="http://schemas.openxmlformats.org/drawingml/2006/main">
             <a:pPr algn="l">
+              <a:buNone/>
               <a:defRPr sz="2250" b="0">
                 <a:solidFill>
                   <a:srgbClr val="536563"/>
@@ -3329,6 +3386,7 @@
           </a:p>
           <a:p xmlns:a="http://schemas.openxmlformats.org/drawingml/2006/main">
             <a:pPr algn="l">
+              <a:buNone/>
               <a:defRPr sz="2250" b="0">
                 <a:solidFill>
                   <a:srgbClr val="536563"/>
@@ -3386,6 +3444,7 @@
           <a:lstStyle xmlns:a="http://schemas.openxmlformats.org/drawingml/2006/main"/>
           <a:p xmlns:a="http://schemas.openxmlformats.org/drawingml/2006/main">
             <a:pPr algn="l">
+              <a:buNone/>
               <a:defRPr sz="2400" b="1">
                 <a:solidFill>
                   <a:srgbClr val="24774F"/>
@@ -3443,6 +3502,7 @@
           <a:lstStyle xmlns:a="http://schemas.openxmlformats.org/drawingml/2006/main"/>
           <a:p xmlns:a="http://schemas.openxmlformats.org/drawingml/2006/main">
             <a:pPr algn="l">
+              <a:buNone/>
               <a:defRPr sz="2700" b="0">
                 <a:solidFill>
                   <a:srgbClr val="142B2A"/>
@@ -3466,6 +3526,7 @@
           </a:p>
           <a:p xmlns:a="http://schemas.openxmlformats.org/drawingml/2006/main">
             <a:pPr algn="l">
+              <a:buNone/>
               <a:defRPr sz="2700" b="0">
                 <a:solidFill>
                   <a:srgbClr val="142B2A"/>
@@ -3523,6 +3584,7 @@
           <a:lstStyle xmlns:a="http://schemas.openxmlformats.org/drawingml/2006/main"/>
           <a:p xmlns:a="http://schemas.openxmlformats.org/drawingml/2006/main">
             <a:pPr algn="l">
+              <a:buNone/>
               <a:defRPr sz="2250" b="0">
                 <a:solidFill>
                   <a:srgbClr val="536563"/>
@@ -3546,6 +3608,7 @@
           </a:p>
           <a:p xmlns:a="http://schemas.openxmlformats.org/drawingml/2006/main">
             <a:pPr algn="l">
+              <a:buNone/>
               <a:defRPr sz="2250" b="0">
                 <a:solidFill>
                   <a:srgbClr val="536563"/>
@@ -3603,6 +3666,7 @@
           <a:lstStyle xmlns:a="http://schemas.openxmlformats.org/drawingml/2006/main"/>
           <a:p xmlns:a="http://schemas.openxmlformats.org/drawingml/2006/main">
             <a:pPr algn="l">
+              <a:buNone/>
               <a:defRPr sz="1725" b="0">
                 <a:solidFill>
                   <a:srgbClr val="536563"/>
@@ -3657,7 +3721,13 @@
       </p:grpSpPr>
       <p:cxnSp>
         <p:nvCxnSpPr>
-          <p:cNvPr id="26" name=""/>
+          <p:cNvPr id="26" name="">
+            <a:extLst xmlns:a="http://schemas.openxmlformats.org/drawingml/2006/main">
+              <a:ext uri="{FF2B5EF4-FFF2-40B4-BE49-F238E27FC236}">
+                <a16:creationId xmlns:a16="http://schemas.microsoft.com/office/drawing/2014/main" id="{0542C0DA-62E3-4236-A481-71A52E0626CE}"/>
+              </a:ext>
+            </a:extLst>
+          </p:cNvPr>
           <p:cNvCxnSpPr>
             <a:stCxn xmlns:a="http://schemas.openxmlformats.org/drawingml/2006/main" id="11" idx="2"/>
             <a:endCxn xmlns:a="http://schemas.openxmlformats.org/drawingml/2006/main" id="18" idx="0"/>
@@ -3687,7 +3757,13 @@
       </p:cxnSp>
       <p:cxnSp>
         <p:nvCxnSpPr>
-          <p:cNvPr id="27" name=""/>
+          <p:cNvPr id="27" name="">
+            <a:extLst xmlns:a="http://schemas.openxmlformats.org/drawingml/2006/main">
+              <a:ext uri="{FF2B5EF4-FFF2-40B4-BE49-F238E27FC236}">
+                <a16:creationId xmlns:a16="http://schemas.microsoft.com/office/drawing/2014/main" id="{113657C3-FCEA-4C06-BE5A-79D7114EC13F}"/>
+              </a:ext>
+            </a:extLst>
+          </p:cNvPr>
           <p:cNvCxnSpPr>
             <a:stCxn xmlns:a="http://schemas.openxmlformats.org/drawingml/2006/main" id="8" idx="2"/>
             <a:endCxn xmlns:a="http://schemas.openxmlformats.org/drawingml/2006/main" id="17" idx="0"/>
@@ -3717,7 +3793,13 @@
       </p:cxnSp>
       <p:cxnSp>
         <p:nvCxnSpPr>
-          <p:cNvPr id="28" name=""/>
+          <p:cNvPr id="28" name="">
+            <a:extLst xmlns:a="http://schemas.openxmlformats.org/drawingml/2006/main">
+              <a:ext uri="{FF2B5EF4-FFF2-40B4-BE49-F238E27FC236}">
+                <a16:creationId xmlns:a16="http://schemas.microsoft.com/office/drawing/2014/main" id="{F1F0CD15-0903-49F4-85AD-5A674B16617C}"/>
+              </a:ext>
+            </a:extLst>
+          </p:cNvPr>
           <p:cNvCxnSpPr>
             <a:stCxn xmlns:a="http://schemas.openxmlformats.org/drawingml/2006/main" id="17" idx="3"/>
             <a:endCxn xmlns:a="http://schemas.openxmlformats.org/drawingml/2006/main" id="18" idx="1"/>
@@ -3744,7 +3826,13 @@
       </p:cxnSp>
       <p:cxnSp>
         <p:nvCxnSpPr>
-          <p:cNvPr id="29" name=""/>
+          <p:cNvPr id="29" name="">
+            <a:extLst xmlns:a="http://schemas.openxmlformats.org/drawingml/2006/main">
+              <a:ext uri="{FF2B5EF4-FFF2-40B4-BE49-F238E27FC236}">
+                <a16:creationId xmlns:a16="http://schemas.microsoft.com/office/drawing/2014/main" id="{9D823F7A-C877-4E00-AE68-FF9590C6CFB7}"/>
+              </a:ext>
+            </a:extLst>
+          </p:cNvPr>
           <p:cNvCxnSpPr>
             <a:stCxn xmlns:a="http://schemas.openxmlformats.org/drawingml/2006/main" id="16" idx="3"/>
             <a:endCxn xmlns:a="http://schemas.openxmlformats.org/drawingml/2006/main" id="17" idx="1"/>
@@ -3771,7 +3859,13 @@
       </p:cxnSp>
       <p:cxnSp>
         <p:nvCxnSpPr>
-          <p:cNvPr id="30" name=""/>
+          <p:cNvPr id="30" name="">
+            <a:extLst xmlns:a="http://schemas.openxmlformats.org/drawingml/2006/main">
+              <a:ext uri="{FF2B5EF4-FFF2-40B4-BE49-F238E27FC236}">
+                <a16:creationId xmlns:a16="http://schemas.microsoft.com/office/drawing/2014/main" id="{3698A58C-7E46-4A5D-84CF-AF6649D7882F}"/>
+              </a:ext>
+            </a:extLst>
+          </p:cNvPr>
           <p:cNvCxnSpPr>
             <a:stCxn xmlns:a="http://schemas.openxmlformats.org/drawingml/2006/main" id="5" idx="2"/>
             <a:endCxn xmlns:a="http://schemas.openxmlformats.org/drawingml/2006/main" id="9" idx="0"/>
@@ -3801,7 +3895,13 @@
       </p:cxnSp>
       <p:cxnSp>
         <p:nvCxnSpPr>
-          <p:cNvPr id="31" name=""/>
+          <p:cNvPr id="31" name="">
+            <a:extLst xmlns:a="http://schemas.openxmlformats.org/drawingml/2006/main">
+              <a:ext uri="{FF2B5EF4-FFF2-40B4-BE49-F238E27FC236}">
+                <a16:creationId xmlns:a16="http://schemas.microsoft.com/office/drawing/2014/main" id="{425E7DFE-312F-43DC-984E-3D3C943EE863}"/>
+              </a:ext>
+            </a:extLst>
+          </p:cNvPr>
           <p:cNvCxnSpPr>
             <a:stCxn xmlns:a="http://schemas.openxmlformats.org/drawingml/2006/main" id="10" idx="3"/>
             <a:endCxn xmlns:a="http://schemas.openxmlformats.org/drawingml/2006/main" id="11" idx="1"/>
@@ -3828,7 +3928,13 @@
       </p:cxnSp>
       <p:cxnSp>
         <p:nvCxnSpPr>
-          <p:cNvPr id="32" name=""/>
+          <p:cNvPr id="32" name="">
+            <a:extLst xmlns:a="http://schemas.openxmlformats.org/drawingml/2006/main">
+              <a:ext uri="{FF2B5EF4-FFF2-40B4-BE49-F238E27FC236}">
+                <a16:creationId xmlns:a16="http://schemas.microsoft.com/office/drawing/2014/main" id="{432AE780-3F48-4262-9045-E4DD0C77EB20}"/>
+              </a:ext>
+            </a:extLst>
+          </p:cNvPr>
           <p:cNvCxnSpPr>
             <a:stCxn xmlns:a="http://schemas.openxmlformats.org/drawingml/2006/main" id="9" idx="3"/>
             <a:endCxn xmlns:a="http://schemas.openxmlformats.org/drawingml/2006/main" id="10" idx="1"/>
@@ -3855,7 +3961,13 @@
       </p:cxnSp>
       <p:cxnSp>
         <p:nvCxnSpPr>
-          <p:cNvPr id="33" name=""/>
+          <p:cNvPr id="33" name="">
+            <a:extLst xmlns:a="http://schemas.openxmlformats.org/drawingml/2006/main">
+              <a:ext uri="{FF2B5EF4-FFF2-40B4-BE49-F238E27FC236}">
+                <a16:creationId xmlns:a16="http://schemas.microsoft.com/office/drawing/2014/main" id="{AD1812CF-928B-4E79-B6FE-8DCAC41D7618}"/>
+              </a:ext>
+            </a:extLst>
+          </p:cNvPr>
           <p:cNvCxnSpPr>
             <a:stCxn xmlns:a="http://schemas.openxmlformats.org/drawingml/2006/main" id="8" idx="3"/>
             <a:endCxn xmlns:a="http://schemas.openxmlformats.org/drawingml/2006/main" id="9" idx="1"/>
@@ -3882,7 +3994,13 @@
       </p:cxnSp>
       <p:cxnSp>
         <p:nvCxnSpPr>
-          <p:cNvPr id="34" name=""/>
+          <p:cNvPr id="34" name="">
+            <a:extLst xmlns:a="http://schemas.openxmlformats.org/drawingml/2006/main">
+              <a:ext uri="{FF2B5EF4-FFF2-40B4-BE49-F238E27FC236}">
+                <a16:creationId xmlns:a16="http://schemas.microsoft.com/office/drawing/2014/main" id="{CDB59689-5C6B-4D47-AEF8-4D86686022A7}"/>
+              </a:ext>
+            </a:extLst>
+          </p:cNvPr>
           <p:cNvCxnSpPr>
             <a:stCxn xmlns:a="http://schemas.openxmlformats.org/drawingml/2006/main" id="4" idx="3"/>
             <a:endCxn xmlns:a="http://schemas.openxmlformats.org/drawingml/2006/main" id="5" idx="1"/>
@@ -3909,7 +4027,13 @@
       </p:cxnSp>
       <p:cxnSp>
         <p:nvCxnSpPr>
-          <p:cNvPr id="35" name=""/>
+          <p:cNvPr id="35" name="">
+            <a:extLst xmlns:a="http://schemas.openxmlformats.org/drawingml/2006/main">
+              <a:ext uri="{FF2B5EF4-FFF2-40B4-BE49-F238E27FC236}">
+                <a16:creationId xmlns:a16="http://schemas.microsoft.com/office/drawing/2014/main" id="{67DBCFF6-2FBB-4508-A18C-FDBB5424519C}"/>
+              </a:ext>
+            </a:extLst>
+          </p:cNvPr>
           <p:cNvCxnSpPr>
             <a:stCxn xmlns:a="http://schemas.openxmlformats.org/drawingml/2006/main" id="3" idx="3"/>
             <a:endCxn xmlns:a="http://schemas.openxmlformats.org/drawingml/2006/main" id="4" idx="1"/>
@@ -3968,6 +4092,7 @@
           <a:lstStyle xmlns:a="http://schemas.openxmlformats.org/drawingml/2006/main"/>
           <a:p xmlns:a="http://schemas.openxmlformats.org/drawingml/2006/main">
             <a:pPr algn="l">
+              <a:buNone/>
               <a:defRPr sz="3300" b="1">
                 <a:solidFill>
                   <a:srgbClr val="142B2A"/>
@@ -4025,6 +4150,7 @@
           <a:lstStyle xmlns:a="http://schemas.openxmlformats.org/drawingml/2006/main"/>
           <a:p xmlns:a="http://schemas.openxmlformats.org/drawingml/2006/main">
             <a:pPr algn="r">
+              <a:buNone/>
               <a:defRPr sz="1500" b="0">
                 <a:solidFill>
                   <a:srgbClr val="536563"/>
@@ -4086,6 +4212,7 @@
           <a:lstStyle xmlns:a="http://schemas.openxmlformats.org/drawingml/2006/main"/>
           <a:p xmlns:a="http://schemas.openxmlformats.org/drawingml/2006/main">
             <a:pPr algn="ctr">
+              <a:buNone/>
               <a:defRPr sz="1800" b="0">
                 <a:solidFill>
                   <a:srgbClr val="142B2A"/>
@@ -4109,6 +4236,7 @@
           </a:p>
           <a:p xmlns:a="http://schemas.openxmlformats.org/drawingml/2006/main">
             <a:pPr algn="ctr">
+              <a:buNone/>
               <a:defRPr sz="1800" b="0">
                 <a:solidFill>
                   <a:srgbClr val="142B2A"/>
@@ -4170,6 +4298,7 @@
           <a:lstStyle xmlns:a="http://schemas.openxmlformats.org/drawingml/2006/main"/>
           <a:p xmlns:a="http://schemas.openxmlformats.org/drawingml/2006/main">
             <a:pPr algn="ctr">
+              <a:buNone/>
               <a:defRPr sz="1800" b="0">
                 <a:solidFill>
                   <a:srgbClr val="142B2A"/>
@@ -4193,6 +4322,7 @@
           </a:p>
           <a:p xmlns:a="http://schemas.openxmlformats.org/drawingml/2006/main">
             <a:pPr algn="ctr">
+              <a:buNone/>
               <a:defRPr sz="1800" b="0">
                 <a:solidFill>
                   <a:srgbClr val="142B2A"/>
@@ -4254,6 +4384,7 @@
           <a:lstStyle xmlns:a="http://schemas.openxmlformats.org/drawingml/2006/main"/>
           <a:p xmlns:a="http://schemas.openxmlformats.org/drawingml/2006/main">
             <a:pPr algn="ctr">
+              <a:buNone/>
               <a:defRPr sz="1800" b="0">
                 <a:solidFill>
                   <a:srgbClr val="142B2A"/>
@@ -4277,6 +4408,7 @@
           </a:p>
           <a:p xmlns:a="http://schemas.openxmlformats.org/drawingml/2006/main">
             <a:pPr algn="ctr">
+              <a:buNone/>
               <a:defRPr sz="1800" b="0">
                 <a:solidFill>
                   <a:srgbClr val="142B2A"/>
@@ -4338,6 +4470,7 @@
           <a:lstStyle xmlns:a="http://schemas.openxmlformats.org/drawingml/2006/main"/>
           <a:p xmlns:a="http://schemas.openxmlformats.org/drawingml/2006/main">
             <a:pPr algn="ctr">
+              <a:buNone/>
               <a:defRPr sz="1800" b="0">
                 <a:solidFill>
                   <a:srgbClr val="142B2A"/>
@@ -4361,6 +4494,7 @@
           </a:p>
           <a:p xmlns:a="http://schemas.openxmlformats.org/drawingml/2006/main">
             <a:pPr algn="ctr">
+              <a:buNone/>
               <a:defRPr sz="1800" b="0">
                 <a:solidFill>
                   <a:srgbClr val="142B2A"/>
@@ -4422,6 +4556,7 @@
           <a:lstStyle xmlns:a="http://schemas.openxmlformats.org/drawingml/2006/main"/>
           <a:p xmlns:a="http://schemas.openxmlformats.org/drawingml/2006/main">
             <a:pPr algn="ctr">
+              <a:buNone/>
               <a:defRPr sz="1800" b="0">
                 <a:solidFill>
                   <a:srgbClr val="142B2A"/>
@@ -4445,6 +4580,7 @@
           </a:p>
           <a:p xmlns:a="http://schemas.openxmlformats.org/drawingml/2006/main">
             <a:pPr algn="ctr">
+              <a:buNone/>
               <a:defRPr sz="1800" b="0">
                 <a:solidFill>
                   <a:srgbClr val="142B2A"/>
@@ -4506,6 +4642,7 @@
           <a:lstStyle xmlns:a="http://schemas.openxmlformats.org/drawingml/2006/main"/>
           <a:p xmlns:a="http://schemas.openxmlformats.org/drawingml/2006/main">
             <a:pPr algn="ctr">
+              <a:buNone/>
               <a:defRPr sz="1800" b="0">
                 <a:solidFill>
                   <a:srgbClr val="142B2A"/>
@@ -4529,6 +4666,7 @@
           </a:p>
           <a:p xmlns:a="http://schemas.openxmlformats.org/drawingml/2006/main">
             <a:pPr algn="ctr">
+              <a:buNone/>
               <a:defRPr sz="1800" b="0">
                 <a:solidFill>
                   <a:srgbClr val="142B2A"/>
@@ -4590,6 +4728,7 @@
           <a:lstStyle xmlns:a="http://schemas.openxmlformats.org/drawingml/2006/main"/>
           <a:p xmlns:a="http://schemas.openxmlformats.org/drawingml/2006/main">
             <a:pPr algn="ctr">
+              <a:buNone/>
               <a:defRPr sz="1800" b="0">
                 <a:solidFill>
                   <a:srgbClr val="FFFFFF"/>
@@ -4613,6 +4752,7 @@
           </a:p>
           <a:p xmlns:a="http://schemas.openxmlformats.org/drawingml/2006/main">
             <a:pPr algn="ctr">
+              <a:buNone/>
               <a:defRPr sz="1800" b="0">
                 <a:solidFill>
                   <a:srgbClr val="FFFFFF"/>
@@ -4674,6 +4814,7 @@
           <a:lstStyle xmlns:a="http://schemas.openxmlformats.org/drawingml/2006/main"/>
           <a:p xmlns:a="http://schemas.openxmlformats.org/drawingml/2006/main">
             <a:pPr algn="ctr">
+              <a:buNone/>
               <a:defRPr sz="1800" b="0">
                 <a:solidFill>
                   <a:srgbClr val="142B2A"/>
@@ -4697,6 +4838,7 @@
           </a:p>
           <a:p xmlns:a="http://schemas.openxmlformats.org/drawingml/2006/main">
             <a:pPr algn="ctr">
+              <a:buNone/>
               <a:defRPr sz="1800" b="0">
                 <a:solidFill>
                   <a:srgbClr val="142B2A"/>
@@ -4758,6 +4900,7 @@
           <a:lstStyle xmlns:a="http://schemas.openxmlformats.org/drawingml/2006/main"/>
           <a:p xmlns:a="http://schemas.openxmlformats.org/drawingml/2006/main">
             <a:pPr algn="ctr">
+              <a:buNone/>
               <a:defRPr sz="1800" b="0">
                 <a:solidFill>
                   <a:srgbClr val="FFFFFF"/>
@@ -4781,6 +4924,7 @@
           </a:p>
           <a:p xmlns:a="http://schemas.openxmlformats.org/drawingml/2006/main">
             <a:pPr algn="ctr">
+              <a:buNone/>
               <a:defRPr sz="1800" b="0">
                 <a:solidFill>
                   <a:srgbClr val="FFFFFF"/>
@@ -4842,6 +4986,7 @@
           <a:lstStyle xmlns:a="http://schemas.openxmlformats.org/drawingml/2006/main"/>
           <a:p xmlns:a="http://schemas.openxmlformats.org/drawingml/2006/main">
             <a:pPr algn="ctr">
+              <a:buNone/>
               <a:defRPr sz="1800" b="0">
                 <a:solidFill>
                   <a:srgbClr val="142B2A"/>
@@ -4865,6 +5010,7 @@
           </a:p>
           <a:p xmlns:a="http://schemas.openxmlformats.org/drawingml/2006/main">
             <a:pPr algn="ctr">
+              <a:buNone/>
               <a:defRPr sz="1800" b="0">
                 <a:solidFill>
                   <a:srgbClr val="142B2A"/>
@@ -4922,6 +5068,7 @@
           <a:lstStyle xmlns:a="http://schemas.openxmlformats.org/drawingml/2006/main"/>
           <a:p xmlns:a="http://schemas.openxmlformats.org/drawingml/2006/main">
             <a:pPr algn="l">
+              <a:buNone/>
               <a:defRPr sz="1725" b="0">
                 <a:solidFill>
                   <a:srgbClr val="24774F"/>
@@ -4979,6 +5126,7 @@
           <a:lstStyle xmlns:a="http://schemas.openxmlformats.org/drawingml/2006/main"/>
           <a:p xmlns:a="http://schemas.openxmlformats.org/drawingml/2006/main">
             <a:pPr algn="l">
+              <a:buNone/>
               <a:defRPr sz="1725" b="0">
                 <a:solidFill>
                   <a:srgbClr val="536563"/>
@@ -5036,6 +5184,7 @@
           <a:lstStyle xmlns:a="http://schemas.openxmlformats.org/drawingml/2006/main"/>
           <a:p xmlns:a="http://schemas.openxmlformats.org/drawingml/2006/main">
             <a:pPr algn="l">
+              <a:buNone/>
               <a:defRPr sz="1725" b="0">
                 <a:solidFill>
                   <a:srgbClr val="536563"/>
@@ -5122,6 +5271,7 @@
           <a:lstStyle xmlns:a="http://schemas.openxmlformats.org/drawingml/2006/main"/>
           <a:p xmlns:a="http://schemas.openxmlformats.org/drawingml/2006/main">
             <a:pPr algn="l">
+              <a:buNone/>
               <a:defRPr sz="3300" b="1">
                 <a:solidFill>
                   <a:srgbClr val="142B2A"/>
@@ -5179,6 +5329,7 @@
           <a:lstStyle xmlns:a="http://schemas.openxmlformats.org/drawingml/2006/main"/>
           <a:p xmlns:a="http://schemas.openxmlformats.org/drawingml/2006/main">
             <a:pPr algn="r">
+              <a:buNone/>
               <a:defRPr sz="1500" b="0">
                 <a:solidFill>
                   <a:srgbClr val="536563"/>
@@ -5236,6 +5387,7 @@
           <a:lstStyle xmlns:a="http://schemas.openxmlformats.org/drawingml/2006/main"/>
           <a:p xmlns:a="http://schemas.openxmlformats.org/drawingml/2006/main">
             <a:pPr algn="l">
+              <a:buNone/>
               <a:defRPr sz="7200" b="1">
                 <a:solidFill>
                   <a:srgbClr val="24774F"/>
@@ -5293,6 +5445,7 @@
           <a:lstStyle xmlns:a="http://schemas.openxmlformats.org/drawingml/2006/main"/>
           <a:p xmlns:a="http://schemas.openxmlformats.org/drawingml/2006/main">
             <a:pPr algn="l">
+              <a:buNone/>
               <a:defRPr sz="2400" b="0">
                 <a:solidFill>
                   <a:srgbClr val="142B2A"/>
@@ -5350,6 +5503,7 @@
           <a:lstStyle xmlns:a="http://schemas.openxmlformats.org/drawingml/2006/main"/>
           <a:p xmlns:a="http://schemas.openxmlformats.org/drawingml/2006/main">
             <a:pPr algn="l">
+              <a:buNone/>
               <a:defRPr sz="2100" b="0">
                 <a:solidFill>
                   <a:srgbClr val="536563"/>
@@ -5373,6 +5527,7 @@
           </a:p>
           <a:p xmlns:a="http://schemas.openxmlformats.org/drawingml/2006/main">
             <a:pPr algn="l">
+              <a:buNone/>
               <a:defRPr sz="2100" b="0">
                 <a:solidFill>
                   <a:srgbClr val="536563"/>
@@ -5430,6 +5585,7 @@
           <a:lstStyle xmlns:a="http://schemas.openxmlformats.org/drawingml/2006/main"/>
           <a:p xmlns:a="http://schemas.openxmlformats.org/drawingml/2006/main">
             <a:pPr algn="l">
+              <a:buNone/>
               <a:defRPr sz="2700" b="1">
                 <a:solidFill>
                   <a:srgbClr val="24774F"/>
@@ -5487,6 +5643,7 @@
           <a:lstStyle xmlns:a="http://schemas.openxmlformats.org/drawingml/2006/main"/>
           <a:p xmlns:a="http://schemas.openxmlformats.org/drawingml/2006/main">
             <a:pPr algn="l">
+              <a:buNone/>
               <a:defRPr sz="2100" b="0">
                 <a:solidFill>
                   <a:srgbClr val="142B2A"/>
@@ -5510,6 +5667,7 @@
           </a:p>
           <a:p xmlns:a="http://schemas.openxmlformats.org/drawingml/2006/main">
             <a:pPr algn="l">
+              <a:buNone/>
               <a:defRPr sz="2100" b="0">
                 <a:solidFill>
                   <a:srgbClr val="142B2A"/>
@@ -5533,6 +5691,7 @@
           </a:p>
           <a:p xmlns:a="http://schemas.openxmlformats.org/drawingml/2006/main">
             <a:pPr algn="l">
+              <a:buNone/>
               <a:defRPr sz="2100" b="0">
                 <a:solidFill>
                   <a:srgbClr val="142B2A"/>
@@ -5590,6 +5749,7 @@
           <a:lstStyle xmlns:a="http://schemas.openxmlformats.org/drawingml/2006/main"/>
           <a:p xmlns:a="http://schemas.openxmlformats.org/drawingml/2006/main">
             <a:pPr algn="l">
+              <a:buNone/>
               <a:defRPr sz="1950" b="0">
                 <a:solidFill>
                   <a:srgbClr val="536563"/>
@@ -5613,6 +5773,7 @@
           </a:p>
           <a:p xmlns:a="http://schemas.openxmlformats.org/drawingml/2006/main">
             <a:pPr algn="l">
+              <a:buNone/>
               <a:defRPr sz="1950" b="0">
                 <a:solidFill>
                   <a:srgbClr val="536563"/>
@@ -5636,6 +5797,7 @@
           </a:p>
           <a:p xmlns:a="http://schemas.openxmlformats.org/drawingml/2006/main">
             <a:pPr algn="l">
+              <a:buNone/>
               <a:defRPr sz="1950" b="0">
                 <a:solidFill>
                   <a:srgbClr val="536563"/>
@@ -5693,6 +5855,7 @@
           <a:lstStyle xmlns:a="http://schemas.openxmlformats.org/drawingml/2006/main"/>
           <a:p xmlns:a="http://schemas.openxmlformats.org/drawingml/2006/main">
             <a:pPr algn="l">
+              <a:buNone/>
               <a:defRPr sz="1725" b="0">
                 <a:solidFill>
                   <a:srgbClr val="536563"/>
@@ -5779,6 +5942,7 @@
           <a:lstStyle xmlns:a="http://schemas.openxmlformats.org/drawingml/2006/main"/>
           <a:p xmlns:a="http://schemas.openxmlformats.org/drawingml/2006/main">
             <a:pPr algn="l">
+              <a:buNone/>
               <a:defRPr sz="3300" b="1">
                 <a:solidFill>
                   <a:srgbClr val="142B2A"/>
@@ -5836,6 +6000,7 @@
           <a:lstStyle xmlns:a="http://schemas.openxmlformats.org/drawingml/2006/main"/>
           <a:p xmlns:a="http://schemas.openxmlformats.org/drawingml/2006/main">
             <a:pPr algn="r">
+              <a:buNone/>
               <a:defRPr sz="1500" b="0">
                 <a:solidFill>
                   <a:srgbClr val="536563"/>
@@ -5861,7 +6026,13 @@
       </p:sp>
       <p:graphicFrame>
         <p:nvGraphicFramePr>
-          <p:cNvPr id="8" name=""/>
+          <p:cNvPr id="8" name="">
+            <a:extLst xmlns:a="http://schemas.openxmlformats.org/drawingml/2006/main">
+              <a:ext uri="{FF2B5EF4-FFF2-40B4-BE49-F238E27FC236}">
+                <a16:creationId xmlns:a16="http://schemas.microsoft.com/office/drawing/2014/main" id="{101A7916-3E91-4642-B4DA-C69FA60DDEA4}"/>
+              </a:ext>
+            </a:extLst>
+          </p:cNvPr>
           <p:cNvGraphicFramePr/>
           <p:nvPr/>
         </p:nvGraphicFramePr>
@@ -6286,6 +6457,7 @@
           <a:lstStyle xmlns:a="http://schemas.openxmlformats.org/drawingml/2006/main"/>
           <a:p xmlns:a="http://schemas.openxmlformats.org/drawingml/2006/main">
             <a:pPr algn="l">
+              <a:buNone/>
               <a:defRPr sz="1950" b="0">
                 <a:solidFill>
                   <a:srgbClr val="24774F"/>
@@ -6343,6 +6515,7 @@
           <a:lstStyle xmlns:a="http://schemas.openxmlformats.org/drawingml/2006/main"/>
           <a:p xmlns:a="http://schemas.openxmlformats.org/drawingml/2006/main">
             <a:pPr algn="l">
+              <a:buNone/>
               <a:defRPr sz="1725" b="0">
                 <a:solidFill>
                   <a:srgbClr val="536563"/>
@@ -6429,6 +6602,7 @@
           <a:lstStyle xmlns:a="http://schemas.openxmlformats.org/drawingml/2006/main"/>
           <a:p xmlns:a="http://schemas.openxmlformats.org/drawingml/2006/main">
             <a:pPr algn="l">
+              <a:buNone/>
               <a:defRPr sz="3300" b="1">
                 <a:solidFill>
                   <a:srgbClr val="142B2A"/>
@@ -6486,6 +6660,7 @@
           <a:lstStyle xmlns:a="http://schemas.openxmlformats.org/drawingml/2006/main"/>
           <a:p xmlns:a="http://schemas.openxmlformats.org/drawingml/2006/main">
             <a:pPr algn="r">
+              <a:buNone/>
               <a:defRPr sz="1500" b="0">
                 <a:solidFill>
                   <a:srgbClr val="536563"/>
@@ -6511,7 +6686,13 @@
       </p:sp>
       <p:graphicFrame>
         <p:nvGraphicFramePr>
-          <p:cNvPr id="9" name=""/>
+          <p:cNvPr id="9" name="">
+            <a:extLst xmlns:a="http://schemas.openxmlformats.org/drawingml/2006/main">
+              <a:ext uri="{FF2B5EF4-FFF2-40B4-BE49-F238E27FC236}">
+                <a16:creationId xmlns:a16="http://schemas.microsoft.com/office/drawing/2014/main" id="{81954367-D9AE-4D1E-909A-0934E858935A}"/>
+              </a:ext>
+            </a:extLst>
+          </p:cNvPr>
           <p:cNvGraphicFramePr/>
           <p:nvPr/>
         </p:nvGraphicFramePr>
@@ -6862,6 +7043,7 @@
           <a:lstStyle xmlns:a="http://schemas.openxmlformats.org/drawingml/2006/main"/>
           <a:p xmlns:a="http://schemas.openxmlformats.org/drawingml/2006/main">
             <a:pPr algn="l">
+              <a:buNone/>
               <a:defRPr sz="2400" b="1">
                 <a:solidFill>
                   <a:srgbClr val="24774F"/>
@@ -6919,6 +7101,7 @@
           <a:lstStyle xmlns:a="http://schemas.openxmlformats.org/drawingml/2006/main"/>
           <a:p xmlns:a="http://schemas.openxmlformats.org/drawingml/2006/main">
             <a:pPr algn="l">
+              <a:buNone/>
               <a:defRPr sz="2025" b="0">
                 <a:solidFill>
                   <a:srgbClr val="142B2A"/>
@@ -6976,6 +7159,7 @@
           <a:lstStyle xmlns:a="http://schemas.openxmlformats.org/drawingml/2006/main"/>
           <a:p xmlns:a="http://schemas.openxmlformats.org/drawingml/2006/main">
             <a:pPr algn="l">
+              <a:buNone/>
               <a:defRPr sz="1650" b="0">
                 <a:solidFill>
                   <a:srgbClr val="536563"/>
@@ -7062,6 +7246,7 @@
           <a:lstStyle xmlns:a="http://schemas.openxmlformats.org/drawingml/2006/main"/>
           <a:p xmlns:a="http://schemas.openxmlformats.org/drawingml/2006/main">
             <a:pPr algn="l">
+              <a:buNone/>
               <a:defRPr sz="3300" b="1">
                 <a:solidFill>
                   <a:srgbClr val="142B2A"/>
@@ -7119,6 +7304,7 @@
           <a:lstStyle xmlns:a="http://schemas.openxmlformats.org/drawingml/2006/main"/>
           <a:p xmlns:a="http://schemas.openxmlformats.org/drawingml/2006/main">
             <a:pPr algn="r">
+              <a:buNone/>
               <a:defRPr sz="1500" b="0">
                 <a:solidFill>
                   <a:srgbClr val="536563"/>
@@ -7144,7 +7330,13 @@
       </p:sp>
       <p:graphicFrame>
         <p:nvGraphicFramePr>
-          <p:cNvPr id="9" name=""/>
+          <p:cNvPr id="9" name="">
+            <a:extLst xmlns:a="http://schemas.openxmlformats.org/drawingml/2006/main">
+              <a:ext uri="{FF2B5EF4-FFF2-40B4-BE49-F238E27FC236}">
+                <a16:creationId xmlns:a16="http://schemas.microsoft.com/office/drawing/2014/main" id="{F87CE901-E860-4018-B396-1B789361D48E}"/>
+              </a:ext>
+            </a:extLst>
+          </p:cNvPr>
           <p:cNvGraphicFramePr/>
           <p:nvPr/>
         </p:nvGraphicFramePr>
@@ -7421,6 +7613,7 @@
           <a:lstStyle xmlns:a="http://schemas.openxmlformats.org/drawingml/2006/main"/>
           <a:p xmlns:a="http://schemas.openxmlformats.org/drawingml/2006/main">
             <a:pPr algn="l">
+              <a:buNone/>
               <a:defRPr sz="2325" b="1">
                 <a:solidFill>
                   <a:srgbClr val="24774F"/>
@@ -7478,6 +7671,7 @@
           <a:lstStyle xmlns:a="http://schemas.openxmlformats.org/drawingml/2006/main"/>
           <a:p xmlns:a="http://schemas.openxmlformats.org/drawingml/2006/main">
             <a:pPr algn="l">
+              <a:buNone/>
               <a:defRPr sz="2100" b="0">
                 <a:solidFill>
                   <a:srgbClr val="142B2A"/>
@@ -7535,6 +7729,7 @@
           <a:lstStyle xmlns:a="http://schemas.openxmlformats.org/drawingml/2006/main"/>
           <a:p xmlns:a="http://schemas.openxmlformats.org/drawingml/2006/main">
             <a:pPr algn="l">
+              <a:buNone/>
               <a:defRPr sz="1650" b="0">
                 <a:solidFill>
                   <a:srgbClr val="536563"/>
@@ -7621,6 +7816,7 @@
           <a:lstStyle xmlns:a="http://schemas.openxmlformats.org/drawingml/2006/main"/>
           <a:p xmlns:a="http://schemas.openxmlformats.org/drawingml/2006/main">
             <a:pPr algn="l">
+              <a:buNone/>
               <a:defRPr sz="3300" b="1">
                 <a:solidFill>
                   <a:srgbClr val="142B2A"/>
@@ -7678,6 +7874,7 @@
           <a:lstStyle xmlns:a="http://schemas.openxmlformats.org/drawingml/2006/main"/>
           <a:p xmlns:a="http://schemas.openxmlformats.org/drawingml/2006/main">
             <a:pPr algn="r">
+              <a:buNone/>
               <a:defRPr sz="1500" b="0">
                 <a:solidFill>
                   <a:srgbClr val="536563"/>
@@ -7703,7 +7900,13 @@
       </p:sp>
       <p:graphicFrame>
         <p:nvGraphicFramePr>
-          <p:cNvPr id="9" name=""/>
+          <p:cNvPr id="9" name="">
+            <a:extLst xmlns:a="http://schemas.openxmlformats.org/drawingml/2006/main">
+              <a:ext uri="{FF2B5EF4-FFF2-40B4-BE49-F238E27FC236}">
+                <a16:creationId xmlns:a16="http://schemas.microsoft.com/office/drawing/2014/main" id="{087EB39E-DD39-45ED-BAA2-45849243182D}"/>
+              </a:ext>
+            </a:extLst>
+          </p:cNvPr>
           <p:cNvGraphicFramePr/>
           <p:nvPr/>
         </p:nvGraphicFramePr>
@@ -7980,6 +8183,7 @@
           <a:lstStyle xmlns:a="http://schemas.openxmlformats.org/drawingml/2006/main"/>
           <a:p xmlns:a="http://schemas.openxmlformats.org/drawingml/2006/main">
             <a:pPr algn="l">
+              <a:buNone/>
               <a:defRPr sz="2325" b="1">
                 <a:solidFill>
                   <a:srgbClr val="24774F"/>
@@ -8037,6 +8241,7 @@
           <a:lstStyle xmlns:a="http://schemas.openxmlformats.org/drawingml/2006/main"/>
           <a:p xmlns:a="http://schemas.openxmlformats.org/drawingml/2006/main">
             <a:pPr algn="l">
+              <a:buNone/>
               <a:defRPr sz="2025" b="0">
                 <a:solidFill>
                   <a:srgbClr val="142B2A"/>
@@ -8094,6 +8299,7 @@
           <a:lstStyle xmlns:a="http://schemas.openxmlformats.org/drawingml/2006/main"/>
           <a:p xmlns:a="http://schemas.openxmlformats.org/drawingml/2006/main">
             <a:pPr algn="l">
+              <a:buNone/>
               <a:defRPr sz="1650" b="0">
                 <a:solidFill>
                   <a:srgbClr val="536563"/>
@@ -8180,6 +8386,7 @@
           <a:lstStyle xmlns:a="http://schemas.openxmlformats.org/drawingml/2006/main"/>
           <a:p xmlns:a="http://schemas.openxmlformats.org/drawingml/2006/main">
             <a:pPr algn="l">
+              <a:buNone/>
               <a:defRPr sz="3300" b="1">
                 <a:solidFill>
                   <a:srgbClr val="142B2A"/>
@@ -8237,6 +8444,7 @@
           <a:lstStyle xmlns:a="http://schemas.openxmlformats.org/drawingml/2006/main"/>
           <a:p xmlns:a="http://schemas.openxmlformats.org/drawingml/2006/main">
             <a:pPr algn="r">
+              <a:buNone/>
               <a:defRPr sz="1500" b="0">
                 <a:solidFill>
                   <a:srgbClr val="536563"/>
@@ -8262,7 +8470,13 @@
       </p:sp>
       <p:graphicFrame>
         <p:nvGraphicFramePr>
-          <p:cNvPr id="8" name=""/>
+          <p:cNvPr id="8" name="">
+            <a:extLst xmlns:a="http://schemas.openxmlformats.org/drawingml/2006/main">
+              <a:ext uri="{FF2B5EF4-FFF2-40B4-BE49-F238E27FC236}">
+                <a16:creationId xmlns:a16="http://schemas.microsoft.com/office/drawing/2014/main" id="{92DB226A-8567-48A0-8986-827EA4B9AF6D}"/>
+              </a:ext>
+            </a:extLst>
+          </p:cNvPr>
           <p:cNvGraphicFramePr/>
           <p:nvPr/>
         </p:nvGraphicFramePr>
@@ -8516,6 +8730,7 @@
           <a:lstStyle xmlns:a="http://schemas.openxmlformats.org/drawingml/2006/main"/>
           <a:p xmlns:a="http://schemas.openxmlformats.org/drawingml/2006/main">
             <a:pPr algn="l">
+              <a:buNone/>
               <a:defRPr sz="2325" b="1">
                 <a:solidFill>
                   <a:srgbClr val="24774F"/>
@@ -8573,6 +8788,7 @@
           <a:lstStyle xmlns:a="http://schemas.openxmlformats.org/drawingml/2006/main"/>
           <a:p xmlns:a="http://schemas.openxmlformats.org/drawingml/2006/main">
             <a:pPr algn="l">
+              <a:buNone/>
               <a:defRPr sz="1725" b="0">
                 <a:solidFill>
                   <a:srgbClr val="536563"/>

--- a/presentation/MCQA_pitch_ready.pptx
+++ b/presentation/MCQA_pitch_ready.pptx
@@ -2550,7 +2550,7 @@
                 <a:ea typeface="Tahoma"/>
                 <a:cs typeface="Tahoma"/>
               </a:rPr>
-              <a:t>AI audit: decisions and an error we caught</a:t>
+              <a:t>AI audit: three decisions and one caught error</a:t>
             </a:r>
           </a:p>
         </p:txBody>
@@ -3038,7 +3038,7 @@
                 <a:ea typeface="Tahoma"/>
                 <a:cs typeface="Tahoma"/>
               </a:rPr>
-              <a:t>Claude Code and Codex built and checked the system. Human contributions must be recorded honestly.</a:t>
+              <a:t>Claude Code and Codex built and checked the system.</a:t>
             </a:r>
           </a:p>
         </p:txBody>
@@ -3521,7 +3521,7 @@
                 <a:ea typeface="Tahoma"/>
                 <a:cs typeface="Tahoma"/>
               </a:rPr>
-              <a:t>“How many iron ingots</a:t>
+              <a:t>"How many iron ingots</a:t>
             </a:r>
           </a:p>
           <a:p xmlns:a="http://schemas.openxmlformats.org/drawingml/2006/main">
@@ -3545,7 +3545,7 @@
                 <a:ea typeface="Tahoma"/>
                 <a:cs typeface="Tahoma"/>
               </a:rPr>
-              <a:t>for 3 hoppers?”</a:t>
+              <a:t>for 3 hoppers?"</a:t>
             </a:r>
           </a:p>
         </p:txBody>
@@ -5290,7 +5290,7 @@
                 <a:ea typeface="Tahoma"/>
                 <a:cs typeface="Tahoma"/>
               </a:rPr>
-              <a:t>Real pages, compact evidence</a:t>
+              <a:t>Corpus and chunking</a:t>
             </a:r>
           </a:p>
         </p:txBody>
@@ -5816,7 +5816,7 @@
                 <a:ea typeface="Tahoma"/>
                 <a:cs typeface="Tahoma"/>
               </a:rPr>
-              <a:t>were similar: 74.1%–74.5%.</a:t>
+              <a:t>were similar: 74.1% to 74.5%.</a:t>
             </a:r>
           </a:p>
         </p:txBody>
@@ -7690,7 +7690,7 @@
                 <a:ea typeface="Tahoma"/>
                 <a:cs typeface="Tahoma"/>
               </a:rPr>
-              <a:t>All 3 misses made no tool call. Routing still matters.</a:t>
+              <a:t>All 3 misses made no tool call, so routing is the weak point.</a:t>
             </a:r>
           </a:p>
         </p:txBody>

--- a/presentation/MCQA_pitch_ready.pptx
+++ b/presentation/MCQA_pitch_ready.pptx
@@ -1,35 +1,130 @@
 
 <file path=ppt/presentation.xml><?xml version="1.0" encoding="utf-8"?>
-<p:presentation xmlns:p="http://schemas.openxmlformats.org/presentationml/2006/main">
+<p:presentation xmlns:a="http://schemas.openxmlformats.org/drawingml/2006/main" xmlns:r="http://schemas.openxmlformats.org/officeDocument/2006/relationships" xmlns:p="http://schemas.openxmlformats.org/presentationml/2006/main">
   <p:sldMasterIdLst>
-    <p:sldMasterId xmlns:r="http://schemas.openxmlformats.org/officeDocument/2006/relationships" id="2147483648" r:id="R190b2f4b639041e4"/>
+    <p:sldMasterId id="2147483648" r:id="rId1"/>
   </p:sldMasterIdLst>
   <p:notesMasterIdLst>
-    <p:notesMasterId xmlns:r="http://schemas.openxmlformats.org/officeDocument/2006/relationships" r:id="R64f24ec0b94d4571"/>
+    <p:notesMasterId r:id="rId12"/>
   </p:notesMasterIdLst>
   <p:sldIdLst>
-    <p:sldId xmlns:r="http://schemas.openxmlformats.org/officeDocument/2006/relationships" id="256" r:id="Rfe83c29357aa4b9d"/>
-    <p:sldId xmlns:r="http://schemas.openxmlformats.org/officeDocument/2006/relationships" id="257" r:id="R18373deac7274be0"/>
-    <p:sldId xmlns:r="http://schemas.openxmlformats.org/officeDocument/2006/relationships" id="258" r:id="R8333a68fb0344e46"/>
-    <p:sldId xmlns:r="http://schemas.openxmlformats.org/officeDocument/2006/relationships" id="259" r:id="R565255f52e914b81"/>
-    <p:sldId xmlns:r="http://schemas.openxmlformats.org/officeDocument/2006/relationships" id="260" r:id="Rb5cf93e36d9147c6"/>
-    <p:sldId xmlns:r="http://schemas.openxmlformats.org/officeDocument/2006/relationships" id="261" r:id="R95b7afb8cfdc47f3"/>
-    <p:sldId xmlns:r="http://schemas.openxmlformats.org/officeDocument/2006/relationships" id="262" r:id="Rdfc8013daafd455c"/>
-    <p:sldId xmlns:r="http://schemas.openxmlformats.org/officeDocument/2006/relationships" id="263" r:id="R9352036c52514de9"/>
-    <p:sldId xmlns:r="http://schemas.openxmlformats.org/officeDocument/2006/relationships" id="264" r:id="R4944e7699a684895"/>
-    <p:sldId xmlns:r="http://schemas.openxmlformats.org/officeDocument/2006/relationships" id="265" r:id="Rd82e17622c4b444d"/>
+    <p:sldId id="256" r:id="rId2"/>
+    <p:sldId id="257" r:id="rId3"/>
+    <p:sldId id="258" r:id="rId4"/>
+    <p:sldId id="259" r:id="rId5"/>
+    <p:sldId id="260" r:id="rId6"/>
+    <p:sldId id="261" r:id="rId7"/>
+    <p:sldId id="262" r:id="rId8"/>
+    <p:sldId id="263" r:id="rId9"/>
+    <p:sldId id="264" r:id="rId10"/>
+    <p:sldId id="265" r:id="rId11"/>
   </p:sldIdLst>
   <p:sldSz cx="12192000" cy="6858000"/>
   <p:notesSz cx="6858000" cy="9144000"/>
+  <p:defaultTextStyle>
+    <a:defPPr>
+      <a:defRPr lang="en-US"/>
+    </a:defPPr>
+    <a:lvl1pPr marL="0" algn="l" defTabSz="914400" rtl="0" eaLnBrk="1" latinLnBrk="0" hangingPunct="1">
+      <a:defRPr sz="1800" kern="1200">
+        <a:solidFill>
+          <a:schemeClr val="tx1"/>
+        </a:solidFill>
+        <a:latin typeface="+mn-lt"/>
+        <a:ea typeface="+mn-ea"/>
+        <a:cs typeface="+mn-cs"/>
+      </a:defRPr>
+    </a:lvl1pPr>
+    <a:lvl2pPr marL="457200" algn="l" defTabSz="914400" rtl="0" eaLnBrk="1" latinLnBrk="0" hangingPunct="1">
+      <a:defRPr sz="1800" kern="1200">
+        <a:solidFill>
+          <a:schemeClr val="tx1"/>
+        </a:solidFill>
+        <a:latin typeface="+mn-lt"/>
+        <a:ea typeface="+mn-ea"/>
+        <a:cs typeface="+mn-cs"/>
+      </a:defRPr>
+    </a:lvl2pPr>
+    <a:lvl3pPr marL="914400" algn="l" defTabSz="914400" rtl="0" eaLnBrk="1" latinLnBrk="0" hangingPunct="1">
+      <a:defRPr sz="1800" kern="1200">
+        <a:solidFill>
+          <a:schemeClr val="tx1"/>
+        </a:solidFill>
+        <a:latin typeface="+mn-lt"/>
+        <a:ea typeface="+mn-ea"/>
+        <a:cs typeface="+mn-cs"/>
+      </a:defRPr>
+    </a:lvl3pPr>
+    <a:lvl4pPr marL="1371600" algn="l" defTabSz="914400" rtl="0" eaLnBrk="1" latinLnBrk="0" hangingPunct="1">
+      <a:defRPr sz="1800" kern="1200">
+        <a:solidFill>
+          <a:schemeClr val="tx1"/>
+        </a:solidFill>
+        <a:latin typeface="+mn-lt"/>
+        <a:ea typeface="+mn-ea"/>
+        <a:cs typeface="+mn-cs"/>
+      </a:defRPr>
+    </a:lvl4pPr>
+    <a:lvl5pPr marL="1828800" algn="l" defTabSz="914400" rtl="0" eaLnBrk="1" latinLnBrk="0" hangingPunct="1">
+      <a:defRPr sz="1800" kern="1200">
+        <a:solidFill>
+          <a:schemeClr val="tx1"/>
+        </a:solidFill>
+        <a:latin typeface="+mn-lt"/>
+        <a:ea typeface="+mn-ea"/>
+        <a:cs typeface="+mn-cs"/>
+      </a:defRPr>
+    </a:lvl5pPr>
+    <a:lvl6pPr marL="2286000" algn="l" defTabSz="914400" rtl="0" eaLnBrk="1" latinLnBrk="0" hangingPunct="1">
+      <a:defRPr sz="1800" kern="1200">
+        <a:solidFill>
+          <a:schemeClr val="tx1"/>
+        </a:solidFill>
+        <a:latin typeface="+mn-lt"/>
+        <a:ea typeface="+mn-ea"/>
+        <a:cs typeface="+mn-cs"/>
+      </a:defRPr>
+    </a:lvl6pPr>
+    <a:lvl7pPr marL="2743200" algn="l" defTabSz="914400" rtl="0" eaLnBrk="1" latinLnBrk="0" hangingPunct="1">
+      <a:defRPr sz="1800" kern="1200">
+        <a:solidFill>
+          <a:schemeClr val="tx1"/>
+        </a:solidFill>
+        <a:latin typeface="+mn-lt"/>
+        <a:ea typeface="+mn-ea"/>
+        <a:cs typeface="+mn-cs"/>
+      </a:defRPr>
+    </a:lvl7pPr>
+    <a:lvl8pPr marL="3200400" algn="l" defTabSz="914400" rtl="0" eaLnBrk="1" latinLnBrk="0" hangingPunct="1">
+      <a:defRPr sz="1800" kern="1200">
+        <a:solidFill>
+          <a:schemeClr val="tx1"/>
+        </a:solidFill>
+        <a:latin typeface="+mn-lt"/>
+        <a:ea typeface="+mn-ea"/>
+        <a:cs typeface="+mn-cs"/>
+      </a:defRPr>
+    </a:lvl8pPr>
+    <a:lvl9pPr marL="3657600" algn="l" defTabSz="914400" rtl="0" eaLnBrk="1" latinLnBrk="0" hangingPunct="1">
+      <a:defRPr sz="1800" kern="1200">
+        <a:solidFill>
+          <a:schemeClr val="tx1"/>
+        </a:solidFill>
+        <a:latin typeface="+mn-lt"/>
+        <a:ea typeface="+mn-ea"/>
+        <a:cs typeface="+mn-cs"/>
+      </a:defRPr>
+    </a:lvl9pPr>
+  </p:defaultTextStyle>
 </p:presentation>
 </file>
 
 <file path=ppt/notesMasters/notesMaster1.xml><?xml version="1.0" encoding="utf-8"?>
-<p:notesMaster xmlns:p="http://schemas.openxmlformats.org/presentationml/2006/main">
+<p:notesMaster xmlns:a="http://schemas.openxmlformats.org/drawingml/2006/main" xmlns:r="http://schemas.openxmlformats.org/officeDocument/2006/relationships" xmlns:p="http://schemas.openxmlformats.org/presentationml/2006/main">
   <p:cSld>
     <p:bg>
       <p:bgRef idx="1001">
-        <a:schemeClr xmlns:a="http://schemas.openxmlformats.org/drawingml/2006/main" val="bg1"/>
+        <a:schemeClr val="bg1"/>
       </p:bgRef>
     </p:bg>
     <p:spTree>
@@ -39,380 +134,164 @@
         <p:nvPr/>
       </p:nvGrpSpPr>
       <p:grpSpPr>
-        <a:xfrm xmlns:a="http://schemas.openxmlformats.org/drawingml/2006/main"/>
+        <a:xfrm>
+          <a:off x="0" y="0"/>
+          <a:ext cx="0" cy="0"/>
+          <a:chOff x="0" y="0"/>
+          <a:chExt cx="0" cy="0"/>
+        </a:xfrm>
       </p:grpSpPr>
       <p:sp>
         <p:nvSpPr>
           <p:cNvPr id="2" name="Header Placeholder"/>
-          <p:cNvSpPr/>
+          <p:cNvSpPr>
+            <a:spLocks noGrp="1"/>
+          </p:cNvSpPr>
           <p:nvPr>
             <p:ph type="hdr" sz="quarter"/>
           </p:nvPr>
         </p:nvSpPr>
         <p:spPr>
-          <a:prstGeom xmlns:a="http://schemas.openxmlformats.org/drawingml/2006/main" prst="rect">
+          <a:prstGeom prst="rect">
             <a:avLst/>
           </a:prstGeom>
         </p:spPr>
         <p:txBody>
-          <a:bodyPr xmlns:a="http://schemas.openxmlformats.org/drawingml/2006/main"/>
-          <a:lstStyle xmlns:a="http://schemas.openxmlformats.org/drawingml/2006/main"/>
-          <a:p xmlns:a="http://schemas.openxmlformats.org/drawingml/2006/main"/>
+          <a:bodyPr/>
+          <a:lstStyle/>
+          <a:p>
+            <a:endParaRPr/>
+          </a:p>
         </p:txBody>
       </p:sp>
       <p:sp>
         <p:nvSpPr>
           <p:cNvPr id="3" name="Date Placeholder"/>
-          <p:cNvSpPr/>
+          <p:cNvSpPr>
+            <a:spLocks noGrp="1"/>
+          </p:cNvSpPr>
           <p:nvPr>
             <p:ph type="dt" sz="quarter" idx="1"/>
           </p:nvPr>
         </p:nvSpPr>
         <p:spPr>
-          <a:prstGeom xmlns:a="http://schemas.openxmlformats.org/drawingml/2006/main" prst="rect">
+          <a:prstGeom prst="rect">
             <a:avLst/>
           </a:prstGeom>
         </p:spPr>
         <p:txBody>
-          <a:bodyPr xmlns:a="http://schemas.openxmlformats.org/drawingml/2006/main"/>
-          <a:lstStyle xmlns:a="http://schemas.openxmlformats.org/drawingml/2006/main"/>
-          <a:p xmlns:a="http://schemas.openxmlformats.org/drawingml/2006/main"/>
+          <a:bodyPr/>
+          <a:lstStyle/>
+          <a:p>
+            <a:endParaRPr/>
+          </a:p>
         </p:txBody>
       </p:sp>
       <p:sp>
         <p:nvSpPr>
           <p:cNvPr id="4" name="Slide Image Placeholder"/>
-          <p:cNvSpPr/>
+          <p:cNvSpPr>
+            <a:spLocks noGrp="1" noRot="1" noChangeAspect="1"/>
+          </p:cNvSpPr>
           <p:nvPr>
             <p:ph type="sldImg" idx="2"/>
           </p:nvPr>
         </p:nvSpPr>
         <p:spPr>
-          <a:prstGeom xmlns:a="http://schemas.openxmlformats.org/drawingml/2006/main" prst="rect">
+          <a:prstGeom prst="rect">
             <a:avLst/>
           </a:prstGeom>
         </p:spPr>
         <p:txBody>
-          <a:bodyPr xmlns:a="http://schemas.openxmlformats.org/drawingml/2006/main"/>
-          <a:lstStyle xmlns:a="http://schemas.openxmlformats.org/drawingml/2006/main"/>
-          <a:p xmlns:a="http://schemas.openxmlformats.org/drawingml/2006/main"/>
+          <a:bodyPr/>
+          <a:lstStyle/>
+          <a:p>
+            <a:endParaRPr/>
+          </a:p>
         </p:txBody>
       </p:sp>
       <p:sp>
         <p:nvSpPr>
           <p:cNvPr id="5" name="Notes Placeholder"/>
-          <p:cNvSpPr/>
+          <p:cNvSpPr>
+            <a:spLocks noGrp="1"/>
+          </p:cNvSpPr>
           <p:nvPr>
             <p:ph type="body" sz="quarter" idx="3"/>
           </p:nvPr>
         </p:nvSpPr>
         <p:spPr>
-          <a:prstGeom xmlns:a="http://schemas.openxmlformats.org/drawingml/2006/main" prst="rect">
+          <a:prstGeom prst="rect">
             <a:avLst/>
           </a:prstGeom>
         </p:spPr>
         <p:txBody>
-          <a:bodyPr xmlns:a="http://schemas.openxmlformats.org/drawingml/2006/main"/>
-          <a:lstStyle xmlns:a="http://schemas.openxmlformats.org/drawingml/2006/main"/>
-          <a:p xmlns:a="http://schemas.openxmlformats.org/drawingml/2006/main"/>
+          <a:bodyPr/>
+          <a:lstStyle/>
+          <a:p>
+            <a:endParaRPr/>
+          </a:p>
         </p:txBody>
       </p:sp>
       <p:sp>
         <p:nvSpPr>
           <p:cNvPr id="6" name="Footer Placeholder"/>
-          <p:cNvSpPr/>
+          <p:cNvSpPr>
+            <a:spLocks noGrp="1"/>
+          </p:cNvSpPr>
           <p:nvPr>
             <p:ph type="ftr" sz="quarter" idx="4"/>
           </p:nvPr>
         </p:nvSpPr>
         <p:spPr>
-          <a:prstGeom xmlns:a="http://schemas.openxmlformats.org/drawingml/2006/main" prst="rect">
+          <a:prstGeom prst="rect">
             <a:avLst/>
           </a:prstGeom>
         </p:spPr>
         <p:txBody>
-          <a:bodyPr xmlns:a="http://schemas.openxmlformats.org/drawingml/2006/main"/>
-          <a:lstStyle xmlns:a="http://schemas.openxmlformats.org/drawingml/2006/main"/>
-          <a:p xmlns:a="http://schemas.openxmlformats.org/drawingml/2006/main"/>
+          <a:bodyPr/>
+          <a:lstStyle/>
+          <a:p>
+            <a:endParaRPr/>
+          </a:p>
         </p:txBody>
       </p:sp>
       <p:sp>
         <p:nvSpPr>
           <p:cNvPr id="7" name="Slide Number Placeholder"/>
-          <p:cNvSpPr/>
+          <p:cNvSpPr>
+            <a:spLocks noGrp="1"/>
+          </p:cNvSpPr>
           <p:nvPr>
             <p:ph type="sldNum" sz="quarter" idx="5"/>
           </p:nvPr>
         </p:nvSpPr>
         <p:spPr>
-          <a:prstGeom xmlns:a="http://schemas.openxmlformats.org/drawingml/2006/main" prst="rect">
+          <a:prstGeom prst="rect">
             <a:avLst/>
           </a:prstGeom>
         </p:spPr>
         <p:txBody>
-          <a:bodyPr xmlns:a="http://schemas.openxmlformats.org/drawingml/2006/main"/>
-          <a:lstStyle xmlns:a="http://schemas.openxmlformats.org/drawingml/2006/main"/>
-          <a:p xmlns:a="http://schemas.openxmlformats.org/drawingml/2006/main"/>
+          <a:bodyPr/>
+          <a:lstStyle/>
+          <a:p>
+            <a:endParaRPr/>
+          </a:p>
         </p:txBody>
       </p:sp>
     </p:spTree>
   </p:cSld>
   <p:clrMap bg1="lt1" tx1="dk1" bg2="lt2" tx2="dk2" accent1="accent1" accent2="accent2" accent3="accent3" accent4="accent4" accent5="accent5" accent6="accent6" hlink="hlink" folHlink="folHlink"/>
   <p:notesStyle>
-    <a:lvl1pPr xmlns:a="http://schemas.openxmlformats.org/drawingml/2006/main" marL="0" algn="l" defTabSz="914400" rtl="0" eaLnBrk="1" latinLnBrk="0" hangingPunct="1">
+    <a:lvl1pPr marL="0" algn="l" defTabSz="914400" rtl="0" eaLnBrk="1" latinLnBrk="0" hangingPunct="1">
       <a:defRPr sz="1200" kern="1200"/>
     </a:lvl1pPr>
   </p:notesStyle>
 </p:notesMaster>
 </file>
 
-<file path=ppt/notesMasters/theme/theme3.xml><?xml version="1.0" encoding="utf-8"?>
-<a:theme xmlns:a="http://schemas.openxmlformats.org/drawingml/2006/main" name="ChatGPT">
-  <a:themeElements>
-    <a:clrScheme name="ChatGPT">
-      <a:dk1>
-        <a:srgbClr val="000000"/>
-      </a:dk1>
-      <a:lt1>
-        <a:srgbClr val="FFFFFF"/>
-      </a:lt1>
-      <a:dk2>
-        <a:srgbClr val="0E2841"/>
-      </a:dk2>
-      <a:lt2>
-        <a:srgbClr val="E8E8E8"/>
-      </a:lt2>
-      <a:accent1>
-        <a:srgbClr val="156082"/>
-      </a:accent1>
-      <a:accent2>
-        <a:srgbClr val="E97132"/>
-      </a:accent2>
-      <a:accent3>
-        <a:srgbClr val="196B24"/>
-      </a:accent3>
-      <a:accent4>
-        <a:srgbClr val="0F9ED5"/>
-      </a:accent4>
-      <a:accent5>
-        <a:srgbClr val="A02B93"/>
-      </a:accent5>
-      <a:accent6>
-        <a:srgbClr val="4EA72E"/>
-      </a:accent6>
-      <a:hlink>
-        <a:srgbClr val="467886"/>
-      </a:hlink>
-      <a:folHlink>
-        <a:srgbClr val="96607D"/>
-      </a:folHlink>
-    </a:clrScheme>
-    <a:fontScheme name="">
-      <a:majorFont>
-        <a:latin typeface="Aptos"/>
-        <a:ea typeface=""/>
-        <a:cs typeface=""/>
-      </a:majorFont>
-      <a:minorFont>
-        <a:latin typeface="Aptos"/>
-        <a:ea typeface=""/>
-        <a:cs typeface=""/>
-      </a:minorFont>
-    </a:fontScheme>
-    <a:fmtScheme name="ChatGPT">
-      <a:fillStyleLst>
-        <a:solidFill>
-          <a:schemeClr val="phClr"/>
-        </a:solidFill>
-        <a:gradFill>
-          <a:gsLst>
-            <a:gs pos="0">
-              <a:schemeClr val="phClr">
-                <a:tint val="67000"/>
-                <a:lumMod val="110000"/>
-                <a:satMod val="105000"/>
-              </a:schemeClr>
-            </a:gs>
-            <a:gs pos="50000">
-              <a:schemeClr val="phClr">
-                <a:tint val="73000"/>
-                <a:lumMod val="105000"/>
-                <a:satMod val="103000"/>
-              </a:schemeClr>
-            </a:gs>
-            <a:gs pos="100000">
-              <a:schemeClr val="phClr">
-                <a:tint val="81000"/>
-                <a:lumMod val="105000"/>
-                <a:satMod val="109000"/>
-              </a:schemeClr>
-            </a:gs>
-          </a:gsLst>
-          <a:lin ang="5400000" scaled="0"/>
-        </a:gradFill>
-        <a:gradFill>
-          <a:gsLst>
-            <a:gs pos="0">
-              <a:schemeClr val="phClr">
-                <a:tint val="94000"/>
-                <a:lumMod val="102000"/>
-                <a:satMod val="103000"/>
-              </a:schemeClr>
-            </a:gs>
-            <a:gs pos="50000">
-              <a:schemeClr val="phClr">
-                <a:shade val="100000"/>
-                <a:lumMod val="100000"/>
-                <a:satMod val="110000"/>
-              </a:schemeClr>
-            </a:gs>
-            <a:gs pos="100000">
-              <a:schemeClr val="phClr">
-                <a:shade val="78000"/>
-                <a:lumMod val="99000"/>
-                <a:satMod val="120000"/>
-              </a:schemeClr>
-            </a:gs>
-          </a:gsLst>
-          <a:lin ang="5400000" scaled="0"/>
-        </a:gradFill>
-      </a:fillStyleLst>
-      <a:lnStyleLst>
-        <a:ln w="12700">
-          <a:solidFill>
-            <a:schemeClr val="phClr"/>
-          </a:solidFill>
-          <a:prstDash val="solid"/>
-        </a:ln>
-        <a:ln w="19050">
-          <a:solidFill>
-            <a:schemeClr val="phClr"/>
-          </a:solidFill>
-          <a:prstDash val="solid"/>
-        </a:ln>
-        <a:ln w="25400">
-          <a:solidFill>
-            <a:schemeClr val="phClr"/>
-          </a:solidFill>
-          <a:prstDash val="solid"/>
-        </a:ln>
-      </a:lnStyleLst>
-      <a:effectStyleLst>
-        <a:effectStyle>
-          <a:effectLst/>
-        </a:effectStyle>
-        <a:effectStyle>
-          <a:effectLst/>
-        </a:effectStyle>
-        <a:effectStyle>
-          <a:effectLst>
-            <a:outerShdw blurRad="57150" dist="19050" dir="5400000">
-              <a:srgbClr val="000000">
-                <a:alpha val="16000"/>
-              </a:srgbClr>
-            </a:outerShdw>
-          </a:effectLst>
-        </a:effectStyle>
-        <a:effectStyle>
-          <a:effectLst>
-            <a:outerShdw blurRad="19050" dist="9525" dir="5400000">
-              <a:srgbClr val="000000">
-                <a:alpha val="6000"/>
-              </a:srgbClr>
-            </a:outerShdw>
-          </a:effectLst>
-        </a:effectStyle>
-        <a:effectStyle>
-          <a:effectLst>
-            <a:outerShdw blurRad="28575" dist="9525" dir="5400000">
-              <a:srgbClr val="000000">
-                <a:alpha val="8000"/>
-              </a:srgbClr>
-            </a:outerShdw>
-          </a:effectLst>
-        </a:effectStyle>
-        <a:effectStyle>
-          <a:effectLst>
-            <a:outerShdw blurRad="57150" dist="19050" dir="5400000">
-              <a:srgbClr val="000000">
-                <a:alpha val="10000"/>
-              </a:srgbClr>
-            </a:outerShdw>
-          </a:effectLst>
-        </a:effectStyle>
-        <a:effectStyle>
-          <a:effectLst>
-            <a:outerShdw blurRad="114300" dist="38100" dir="5400000">
-              <a:srgbClr val="000000">
-                <a:alpha val="12000"/>
-              </a:srgbClr>
-            </a:outerShdw>
-          </a:effectLst>
-        </a:effectStyle>
-        <a:effectStyle>
-          <a:effectLst>
-            <a:outerShdw blurRad="171450" dist="57150" dir="5400000">
-              <a:srgbClr val="000000">
-                <a:alpha val="16000"/>
-              </a:srgbClr>
-            </a:outerShdw>
-          </a:effectLst>
-        </a:effectStyle>
-        <a:effectStyle>
-          <a:effectLst>
-            <a:outerShdw blurRad="266700" dist="95250" dir="5400000">
-              <a:srgbClr val="000000">
-                <a:alpha val="24000"/>
-              </a:srgbClr>
-            </a:outerShdw>
-          </a:effectLst>
-        </a:effectStyle>
-      </a:effectStyleLst>
-      <a:bgFillStyleLst>
-        <a:solidFill>
-          <a:schemeClr val="phClr"/>
-        </a:solidFill>
-        <a:solidFill>
-          <a:schemeClr val="phClr">
-            <a:tint val="95000"/>
-            <a:satMod val="170000"/>
-          </a:schemeClr>
-        </a:solidFill>
-        <a:gradFill>
-          <a:gsLst>
-            <a:gs pos="0">
-              <a:schemeClr val="phClr">
-                <a:tint val="93000"/>
-                <a:shade val="98000"/>
-                <a:lumMod val="102000"/>
-                <a:satMod val="150000"/>
-              </a:schemeClr>
-            </a:gs>
-            <a:gs pos="50000">
-              <a:schemeClr val="phClr">
-                <a:tint val="98000"/>
-                <a:shade val="90000"/>
-                <a:lumMod val="103000"/>
-                <a:satMod val="130000"/>
-              </a:schemeClr>
-            </a:gs>
-            <a:gs pos="100000">
-              <a:schemeClr val="phClr">
-                <a:shade val="63000"/>
-                <a:satMod val="120000"/>
-              </a:schemeClr>
-            </a:gs>
-          </a:gsLst>
-          <a:lin ang="5400000" scaled="0"/>
-        </a:gradFill>
-      </a:bgFillStyleLst>
-    </a:fmtScheme>
-  </a:themeElements>
-</a:theme>
-</file>
-
 <file path=ppt/notesSlides/notesSlide1.xml><?xml version="1.0" encoding="utf-8"?>
-<p:notes xmlns:p="http://schemas.openxmlformats.org/presentationml/2006/main">
+<p:notes xmlns:a="http://schemas.openxmlformats.org/drawingml/2006/main" xmlns:r="http://schemas.openxmlformats.org/officeDocument/2006/relationships" xmlns:p="http://schemas.openxmlformats.org/presentationml/2006/main">
   <p:cSld>
     <p:spTree>
       <p:nvGrpSpPr>
@@ -421,16 +300,21 @@
         <p:nvPr/>
       </p:nvGrpSpPr>
       <p:grpSpPr>
-        <a:xfrm xmlns:a="http://schemas.openxmlformats.org/drawingml/2006/main"/>
+        <a:xfrm>
+          <a:off x="0" y="0"/>
+          <a:ext cx="0" cy="0"/>
+          <a:chOff x="0" y="0"/>
+          <a:chExt cx="0" cy="0"/>
+        </a:xfrm>
       </p:grpSpPr>
       <p:sp>
         <p:nvSpPr>
           <p:cNvPr id="2" name="Slide Image Placeholder 1"/>
           <p:cNvSpPr>
-            <a:spLocks xmlns:a="http://schemas.openxmlformats.org/drawingml/2006/main" noGrp="1"/>
+            <a:spLocks noGrp="1" noRot="1" noChangeAspect="1"/>
           </p:cNvSpPr>
           <p:nvPr>
-            <p:ph type="sldImg" idx="0"/>
+            <p:ph type="sldImg"/>
           </p:nvPr>
         </p:nvSpPr>
         <p:spPr/>
@@ -439,7 +323,7 @@
         <p:nvSpPr>
           <p:cNvPr id="3" name="Notes Placeholder 2"/>
           <p:cNvSpPr>
-            <a:spLocks xmlns:a="http://schemas.openxmlformats.org/drawingml/2006/main" noGrp="1"/>
+            <a:spLocks noGrp="1"/>
           </p:cNvSpPr>
           <p:nvPr>
             <p:ph type="body" idx="1"/>
@@ -447,44 +331,40 @@
         </p:nvSpPr>
         <p:spPr/>
         <p:txBody>
-          <a:bodyPr xmlns:a="http://schemas.openxmlformats.org/drawingml/2006/main"/>
-          <a:lstStyle xmlns:a="http://schemas.openxmlformats.org/drawingml/2006/main"/>
-          <a:p xmlns:a="http://schemas.openxmlformats.org/drawingml/2006/main">
+          <a:bodyPr/>
+          <a:lstStyle/>
+          <a:p>
             <a:r>
               <a:t>0:00–0:25</a:t>
             </a:r>
           </a:p>
-          <a:p xmlns:a="http://schemas.openxmlformats.org/drawingml/2006/main">
-            <a:r>
-              <a:t/>
-            </a:r>
-          </a:p>
-          <a:p xmlns:a="http://schemas.openxmlformats.org/drawingml/2006/main">
+          <a:p>
+            <a:endParaRPr/>
+          </a:p>
+          <a:p>
             <a:r>
               <a:t>โปรเจกต์ของเราชื่อ MCQA เป็นผู้ช่วยตอบคำถาม Minecraft Java ที่ทำงานบนเครื่องทั้งหมดครับ คำถามเกี่ยวกับเกมจะค้นเอกสารและแสดงแหล่งอ้างอิง ส่วนจำนวนวัตถุดิบจะคำนวณจากสูตรทางการ เป้าหมายคือให้ผู้เล่นตรวจสอบคำตอบได้ และลดการเดาตัวเลขของโมเดลครับ</a:t>
             </a:r>
           </a:p>
-          <a:p xmlns:a="http://schemas.openxmlformats.org/drawingml/2006/main">
-            <a:r>
-              <a:t/>
-            </a:r>
-          </a:p>
-          <a:p xmlns:a="http://schemas.openxmlformats.org/drawingml/2006/main">
+          <a:p>
+            <a:endParaRPr/>
+          </a:p>
+          <a:p>
             <a:r>
               <a:t>Sources (project-relative paths):</a:t>
             </a:r>
           </a:p>
-          <a:p xmlns:a="http://schemas.openxmlformats.org/drawingml/2006/main">
+          <a:p>
             <a:r>
               <a:t>docs/sources.md</a:t>
             </a:r>
           </a:p>
-          <a:p xmlns:a="http://schemas.openxmlformats.org/drawingml/2006/main">
+          <a:p>
             <a:r>
               <a:t>README.md</a:t>
             </a:r>
           </a:p>
-          <a:p xmlns:a="http://schemas.openxmlformats.org/drawingml/2006/main">
+          <a:p>
             <a:r>
               <a:t>AI_AUDIT.md</a:t>
             </a:r>
@@ -495,7 +375,7 @@
         <p:nvSpPr>
           <p:cNvPr id="4" name="Slide Number Placeholder 3"/>
           <p:cNvSpPr>
-            <a:spLocks xmlns:a="http://schemas.openxmlformats.org/drawingml/2006/main" noGrp="1"/>
+            <a:spLocks noGrp="1"/>
           </p:cNvSpPr>
           <p:nvPr>
             <p:ph type="sldNum" idx="5"/>
@@ -503,21 +383,23 @@
         </p:nvSpPr>
         <p:spPr/>
         <p:txBody>
-          <a:bodyPr xmlns:a="http://schemas.openxmlformats.org/drawingml/2006/main"/>
-          <a:lstStyle xmlns:a="http://schemas.openxmlformats.org/drawingml/2006/main"/>
-          <a:p xmlns:a="http://schemas.openxmlformats.org/drawingml/2006/main"/>
+          <a:bodyPr/>
+          <a:lstStyle/>
+          <a:p>
+            <a:endParaRPr/>
+          </a:p>
         </p:txBody>
       </p:sp>
     </p:spTree>
   </p:cSld>
   <p:clrMapOvr>
-    <a:masterClrMapping xmlns:a="http://schemas.openxmlformats.org/drawingml/2006/main"/>
+    <a:masterClrMapping/>
   </p:clrMapOvr>
 </p:notes>
 </file>
 
 <file path=ppt/notesSlides/notesSlide10.xml><?xml version="1.0" encoding="utf-8"?>
-<p:notes xmlns:p="http://schemas.openxmlformats.org/presentationml/2006/main">
+<p:notes xmlns:a="http://schemas.openxmlformats.org/drawingml/2006/main" xmlns:r="http://schemas.openxmlformats.org/officeDocument/2006/relationships" xmlns:p="http://schemas.openxmlformats.org/presentationml/2006/main">
   <p:cSld>
     <p:spTree>
       <p:nvGrpSpPr>
@@ -526,16 +408,21 @@
         <p:nvPr/>
       </p:nvGrpSpPr>
       <p:grpSpPr>
-        <a:xfrm xmlns:a="http://schemas.openxmlformats.org/drawingml/2006/main"/>
+        <a:xfrm>
+          <a:off x="0" y="0"/>
+          <a:ext cx="0" cy="0"/>
+          <a:chOff x="0" y="0"/>
+          <a:chExt cx="0" cy="0"/>
+        </a:xfrm>
       </p:grpSpPr>
       <p:sp>
         <p:nvSpPr>
           <p:cNvPr id="2" name="Slide Image Placeholder 1"/>
           <p:cNvSpPr>
-            <a:spLocks xmlns:a="http://schemas.openxmlformats.org/drawingml/2006/main" noGrp="1"/>
+            <a:spLocks noGrp="1" noRot="1" noChangeAspect="1"/>
           </p:cNvSpPr>
           <p:nvPr>
-            <p:ph type="sldImg" idx="0"/>
+            <p:ph type="sldImg"/>
           </p:nvPr>
         </p:nvSpPr>
         <p:spPr/>
@@ -544,7 +431,7 @@
         <p:nvSpPr>
           <p:cNvPr id="3" name="Notes Placeholder 2"/>
           <p:cNvSpPr>
-            <a:spLocks xmlns:a="http://schemas.openxmlformats.org/drawingml/2006/main" noGrp="1"/>
+            <a:spLocks noGrp="1"/>
           </p:cNvSpPr>
           <p:nvPr>
             <p:ph type="body" idx="1"/>
@@ -552,54 +439,50 @@
         </p:nvSpPr>
         <p:spPr/>
         <p:txBody>
-          <a:bodyPr xmlns:a="http://schemas.openxmlformats.org/drawingml/2006/main"/>
-          <a:lstStyle xmlns:a="http://schemas.openxmlformats.org/drawingml/2006/main"/>
-          <a:p xmlns:a="http://schemas.openxmlformats.org/drawingml/2006/main">
+          <a:bodyPr/>
+          <a:lstStyle/>
+          <a:p>
             <a:r>
               <a:t>9:20–10:00; then individual Q&amp;A</a:t>
             </a:r>
           </a:p>
-          <a:p xmlns:a="http://schemas.openxmlformats.org/drawingml/2006/main">
-            <a:r>
-              <a:t/>
-            </a:r>
-          </a:p>
-          <a:p xmlns:a="http://schemas.openxmlformats.org/drawingml/2006/main">
+          <a:p>
+            <a:endParaRPr/>
+          </a:p>
+          <a:p>
             <a:r>
               <a:t>ใน AI Audit เราระบุอย่างตรงไปตรงมาว่า AI เป็นผู้เลือกสามแนวทางนี้ ได้แก่ chunk ขนาด 256 โทเคน โมเดล BGE ที่ทำงานบน CPU และการคำนวณสูตรทางการแบบตรง โดยเก็บ tool loop สำหรับคำถามที่ซับซ้อน ตัวอย่างข้อผิดพลาดที่พบคือ ตัวให้คะแนนเดิมหยิบเลขตัวแรกจากคำตอบ แม้คำตอบนั้นจะปฏิเสธและแค่ทวนจำนวนในคำถาม จึงถูกแก้ให้ตรวจจำนวนวัตถุดิบที่ถาม และไม่ให้คะแนนคำปฏิเสธครับ</a:t>
             </a:r>
           </a:p>
-          <a:p xmlns:a="http://schemas.openxmlformats.org/drawingml/2006/main">
-            <a:r>
-              <a:t/>
-            </a:r>
-          </a:p>
-          <a:p xmlns:a="http://schemas.openxmlformats.org/drawingml/2006/main">
+          <a:p>
+            <a:endParaRPr/>
+          </a:p>
+          <a:p>
             <a:r>
               <a:t>Sources (project-relative paths):</a:t>
             </a:r>
           </a:p>
-          <a:p xmlns:a="http://schemas.openxmlformats.org/drawingml/2006/main">
+          <a:p>
             <a:r>
               <a:t>AI_AUDIT.md: Decision Journal and Error Catch Log</a:t>
             </a:r>
           </a:p>
-          <a:p xmlns:a="http://schemas.openxmlformats.org/drawingml/2006/main">
+          <a:p>
             <a:r>
               <a:t>docs/codex_prompt_history.md</a:t>
             </a:r>
           </a:p>
-          <a:p xmlns:a="http://schemas.openxmlformats.org/drawingml/2006/main">
+          <a:p>
             <a:r>
               <a:t>codextodo.md</a:t>
             </a:r>
           </a:p>
-          <a:p xmlns:a="http://schemas.openxmlformats.org/drawingml/2006/main">
+          <a:p>
             <a:r>
               <a:t>docs/codex_review.md</a:t>
             </a:r>
           </a:p>
-          <a:p xmlns:a="http://schemas.openxmlformats.org/drawingml/2006/main">
+          <a:p>
             <a:r>
               <a:t>test_eval.py</a:t>
             </a:r>
@@ -610,7 +493,7 @@
         <p:nvSpPr>
           <p:cNvPr id="4" name="Slide Number Placeholder 3"/>
           <p:cNvSpPr>
-            <a:spLocks xmlns:a="http://schemas.openxmlformats.org/drawingml/2006/main" noGrp="1"/>
+            <a:spLocks noGrp="1"/>
           </p:cNvSpPr>
           <p:nvPr>
             <p:ph type="sldNum" idx="5"/>
@@ -618,21 +501,23 @@
         </p:nvSpPr>
         <p:spPr/>
         <p:txBody>
-          <a:bodyPr xmlns:a="http://schemas.openxmlformats.org/drawingml/2006/main"/>
-          <a:lstStyle xmlns:a="http://schemas.openxmlformats.org/drawingml/2006/main"/>
-          <a:p xmlns:a="http://schemas.openxmlformats.org/drawingml/2006/main"/>
+          <a:bodyPr/>
+          <a:lstStyle/>
+          <a:p>
+            <a:endParaRPr/>
+          </a:p>
         </p:txBody>
       </p:sp>
     </p:spTree>
   </p:cSld>
   <p:clrMapOvr>
-    <a:masterClrMapping xmlns:a="http://schemas.openxmlformats.org/drawingml/2006/main"/>
+    <a:masterClrMapping/>
   </p:clrMapOvr>
 </p:notes>
 </file>
 
 <file path=ppt/notesSlides/notesSlide2.xml><?xml version="1.0" encoding="utf-8"?>
-<p:notes xmlns:p="http://schemas.openxmlformats.org/presentationml/2006/main">
+<p:notes xmlns:a="http://schemas.openxmlformats.org/drawingml/2006/main" xmlns:r="http://schemas.openxmlformats.org/officeDocument/2006/relationships" xmlns:p="http://schemas.openxmlformats.org/presentationml/2006/main">
   <p:cSld>
     <p:spTree>
       <p:nvGrpSpPr>
@@ -641,16 +526,21 @@
         <p:nvPr/>
       </p:nvGrpSpPr>
       <p:grpSpPr>
-        <a:xfrm xmlns:a="http://schemas.openxmlformats.org/drawingml/2006/main"/>
+        <a:xfrm>
+          <a:off x="0" y="0"/>
+          <a:ext cx="0" cy="0"/>
+          <a:chOff x="0" y="0"/>
+          <a:chExt cx="0" cy="0"/>
+        </a:xfrm>
       </p:grpSpPr>
       <p:sp>
         <p:nvSpPr>
           <p:cNvPr id="2" name="Slide Image Placeholder 1"/>
           <p:cNvSpPr>
-            <a:spLocks xmlns:a="http://schemas.openxmlformats.org/drawingml/2006/main" noGrp="1"/>
+            <a:spLocks noGrp="1" noRot="1" noChangeAspect="1"/>
           </p:cNvSpPr>
           <p:nvPr>
-            <p:ph type="sldImg" idx="0"/>
+            <p:ph type="sldImg"/>
           </p:nvPr>
         </p:nvSpPr>
         <p:spPr/>
@@ -659,7 +549,7 @@
         <p:nvSpPr>
           <p:cNvPr id="3" name="Notes Placeholder 2"/>
           <p:cNvSpPr>
-            <a:spLocks xmlns:a="http://schemas.openxmlformats.org/drawingml/2006/main" noGrp="1"/>
+            <a:spLocks noGrp="1"/>
           </p:cNvSpPr>
           <p:nvPr>
             <p:ph type="body" idx="1"/>
@@ -667,44 +557,40 @@
         </p:nvSpPr>
         <p:spPr/>
         <p:txBody>
-          <a:bodyPr xmlns:a="http://schemas.openxmlformats.org/drawingml/2006/main"/>
-          <a:lstStyle xmlns:a="http://schemas.openxmlformats.org/drawingml/2006/main"/>
-          <a:p xmlns:a="http://schemas.openxmlformats.org/drawingml/2006/main">
+          <a:bodyPr/>
+          <a:lstStyle/>
+          <a:p>
             <a:r>
               <a:t>0:25–1:00</a:t>
             </a:r>
           </a:p>
-          <a:p xmlns:a="http://schemas.openxmlformats.org/drawingml/2006/main">
-            <a:r>
-              <a:t/>
-            </a:r>
-          </a:p>
-          <a:p xmlns:a="http://schemas.openxmlformats.org/drawingml/2006/main">
+          <a:p>
+            <a:endParaRPr/>
+          </a:p>
+          <a:p>
             <a:r>
               <a:t>ปัญหามีทั้งคำตอบในวิกิที่ปนหลายเวอร์ชัน และการคำนวณจำนวนวัตถุดิบครับ เช่น ถ้าต้องการ Hopper สามชิ้น ผู้เล่นต้องรู้จำนวน Iron Ingots ที่ต้องใช้ เราจึงแยกวิธีตอบ คำถามข้อเท็จจริงใช้หลักฐาน ส่วนตัวเลขใช้เครื่องมือคำนวณ และตั้งขอบเขตเป็น Java Edition ระบบนี้ใช้งานโดยไม่เสียค่า API หลังจากเตรียมโมเดลไว้ในเครื่องครับ</a:t>
             </a:r>
           </a:p>
-          <a:p xmlns:a="http://schemas.openxmlformats.org/drawingml/2006/main">
-            <a:r>
-              <a:t/>
-            </a:r>
-          </a:p>
-          <a:p xmlns:a="http://schemas.openxmlformats.org/drawingml/2006/main">
+          <a:p>
+            <a:endParaRPr/>
+          </a:p>
+          <a:p>
             <a:r>
               <a:t>Sources (project-relative paths):</a:t>
             </a:r>
           </a:p>
-          <a:p xmlns:a="http://schemas.openxmlformats.org/drawingml/2006/main">
+          <a:p>
             <a:r>
               <a:t>docs/sources.md</a:t>
             </a:r>
           </a:p>
-          <a:p xmlns:a="http://schemas.openxmlformats.org/drawingml/2006/main">
+          <a:p>
             <a:r>
               <a:t>README.md</a:t>
             </a:r>
           </a:p>
-          <a:p xmlns:a="http://schemas.openxmlformats.org/drawingml/2006/main">
+          <a:p>
             <a:r>
               <a:t>docs/failure_analysis.md</a:t>
             </a:r>
@@ -715,7 +601,7 @@
         <p:nvSpPr>
           <p:cNvPr id="4" name="Slide Number Placeholder 3"/>
           <p:cNvSpPr>
-            <a:spLocks xmlns:a="http://schemas.openxmlformats.org/drawingml/2006/main" noGrp="1"/>
+            <a:spLocks noGrp="1"/>
           </p:cNvSpPr>
           <p:nvPr>
             <p:ph type="sldNum" idx="5"/>
@@ -723,21 +609,23 @@
         </p:nvSpPr>
         <p:spPr/>
         <p:txBody>
-          <a:bodyPr xmlns:a="http://schemas.openxmlformats.org/drawingml/2006/main"/>
-          <a:lstStyle xmlns:a="http://schemas.openxmlformats.org/drawingml/2006/main"/>
-          <a:p xmlns:a="http://schemas.openxmlformats.org/drawingml/2006/main"/>
+          <a:bodyPr/>
+          <a:lstStyle/>
+          <a:p>
+            <a:endParaRPr/>
+          </a:p>
         </p:txBody>
       </p:sp>
     </p:spTree>
   </p:cSld>
   <p:clrMapOvr>
-    <a:masterClrMapping xmlns:a="http://schemas.openxmlformats.org/drawingml/2006/main"/>
+    <a:masterClrMapping/>
   </p:clrMapOvr>
 </p:notes>
 </file>
 
 <file path=ppt/notesSlides/notesSlide3.xml><?xml version="1.0" encoding="utf-8"?>
-<p:notes xmlns:p="http://schemas.openxmlformats.org/presentationml/2006/main">
+<p:notes xmlns:a="http://schemas.openxmlformats.org/drawingml/2006/main" xmlns:r="http://schemas.openxmlformats.org/officeDocument/2006/relationships" xmlns:p="http://schemas.openxmlformats.org/presentationml/2006/main">
   <p:cSld>
     <p:spTree>
       <p:nvGrpSpPr>
@@ -746,16 +634,21 @@
         <p:nvPr/>
       </p:nvGrpSpPr>
       <p:grpSpPr>
-        <a:xfrm xmlns:a="http://schemas.openxmlformats.org/drawingml/2006/main"/>
+        <a:xfrm>
+          <a:off x="0" y="0"/>
+          <a:ext cx="0" cy="0"/>
+          <a:chOff x="0" y="0"/>
+          <a:chExt cx="0" cy="0"/>
+        </a:xfrm>
       </p:grpSpPr>
       <p:sp>
         <p:nvSpPr>
           <p:cNvPr id="2" name="Slide Image Placeholder 1"/>
           <p:cNvSpPr>
-            <a:spLocks xmlns:a="http://schemas.openxmlformats.org/drawingml/2006/main" noGrp="1"/>
+            <a:spLocks noGrp="1" noRot="1" noChangeAspect="1"/>
           </p:cNvSpPr>
           <p:nvPr>
-            <p:ph type="sldImg" idx="0"/>
+            <p:ph type="sldImg"/>
           </p:nvPr>
         </p:nvSpPr>
         <p:spPr/>
@@ -764,7 +657,7 @@
         <p:nvSpPr>
           <p:cNvPr id="3" name="Notes Placeholder 2"/>
           <p:cNvSpPr>
-            <a:spLocks xmlns:a="http://schemas.openxmlformats.org/drawingml/2006/main" noGrp="1"/>
+            <a:spLocks noGrp="1"/>
           </p:cNvSpPr>
           <p:nvPr>
             <p:ph type="body" idx="1"/>
@@ -772,44 +665,40 @@
         </p:nvSpPr>
         <p:spPr/>
         <p:txBody>
-          <a:bodyPr xmlns:a="http://schemas.openxmlformats.org/drawingml/2006/main"/>
-          <a:lstStyle xmlns:a="http://schemas.openxmlformats.org/drawingml/2006/main"/>
-          <a:p xmlns:a="http://schemas.openxmlformats.org/drawingml/2006/main">
+          <a:bodyPr/>
+          <a:lstStyle/>
+          <a:p>
             <a:r>
               <a:t>1:00–2:00</a:t>
             </a:r>
           </a:p>
-          <a:p xmlns:a="http://schemas.openxmlformats.org/drawingml/2006/main">
-            <a:r>
-              <a:t/>
-            </a:r>
-          </a:p>
-          <a:p xmlns:a="http://schemas.openxmlformats.org/drawingml/2006/main">
+          <a:p>
+            <a:endParaRPr/>
+          </a:p>
+          <a:p>
             <a:r>
               <a:t>แถวบนคือการเตรียมข้อมูลครับ เราเก็บวิกิพร้อม revision แบ่งข้อความตาม section แล้วสร้าง dense index บน CPU พร้อม BM25 เวลารับคำถาม ระบบตรวจขอบเขตก่อน ถ้าเป็นสูตรและจำนวนที่อ่านได้ชัดเจน จะส่งไปคำนวณตรงทันที คำถามอื่นจะค้นเอกสาร รวมอันดับด้วย RRF และเรียงใหม่ก่อนส่งให้ Qwen ตอบพร้อม citation ถ้าเป็นคำถามซับซ้อน โมเดลยังสามารถเรียกเครื่องมือสูตรได้ผ่าน tool loop ครับ</a:t>
             </a:r>
           </a:p>
-          <a:p xmlns:a="http://schemas.openxmlformats.org/drawingml/2006/main">
-            <a:r>
-              <a:t/>
-            </a:r>
-          </a:p>
-          <a:p xmlns:a="http://schemas.openxmlformats.org/drawingml/2006/main">
+          <a:p>
+            <a:endParaRPr/>
+          </a:p>
+          <a:p>
             <a:r>
               <a:t>Sources (project-relative paths):</a:t>
             </a:r>
           </a:p>
-          <a:p xmlns:a="http://schemas.openxmlformats.org/drawingml/2006/main">
+          <a:p>
             <a:r>
               <a:t>mcqa.py: chunks, Retriever, crafting_intent, answer, _agent_answer</a:t>
             </a:r>
           </a:p>
-          <a:p xmlns:a="http://schemas.openxmlformats.org/drawingml/2006/main">
+          <a:p>
             <a:r>
               <a:t>docs/sources.md</a:t>
             </a:r>
           </a:p>
-          <a:p xmlns:a="http://schemas.openxmlformats.org/drawingml/2006/main">
+          <a:p>
             <a:r>
               <a:t>README.md</a:t>
             </a:r>
@@ -820,7 +709,7 @@
         <p:nvSpPr>
           <p:cNvPr id="4" name="Slide Number Placeholder 3"/>
           <p:cNvSpPr>
-            <a:spLocks xmlns:a="http://schemas.openxmlformats.org/drawingml/2006/main" noGrp="1"/>
+            <a:spLocks noGrp="1"/>
           </p:cNvSpPr>
           <p:nvPr>
             <p:ph type="sldNum" idx="5"/>
@@ -828,21 +717,23 @@
         </p:nvSpPr>
         <p:spPr/>
         <p:txBody>
-          <a:bodyPr xmlns:a="http://schemas.openxmlformats.org/drawingml/2006/main"/>
-          <a:lstStyle xmlns:a="http://schemas.openxmlformats.org/drawingml/2006/main"/>
-          <a:p xmlns:a="http://schemas.openxmlformats.org/drawingml/2006/main"/>
+          <a:bodyPr/>
+          <a:lstStyle/>
+          <a:p>
+            <a:endParaRPr/>
+          </a:p>
         </p:txBody>
       </p:sp>
     </p:spTree>
   </p:cSld>
   <p:clrMapOvr>
-    <a:masterClrMapping xmlns:a="http://schemas.openxmlformats.org/drawingml/2006/main"/>
+    <a:masterClrMapping/>
   </p:clrMapOvr>
 </p:notes>
 </file>
 
 <file path=ppt/notesSlides/notesSlide4.xml><?xml version="1.0" encoding="utf-8"?>
-<p:notes xmlns:p="http://schemas.openxmlformats.org/presentationml/2006/main">
+<p:notes xmlns:a="http://schemas.openxmlformats.org/drawingml/2006/main" xmlns:r="http://schemas.openxmlformats.org/officeDocument/2006/relationships" xmlns:p="http://schemas.openxmlformats.org/presentationml/2006/main">
   <p:cSld>
     <p:spTree>
       <p:nvGrpSpPr>
@@ -851,16 +742,21 @@
         <p:nvPr/>
       </p:nvGrpSpPr>
       <p:grpSpPr>
-        <a:xfrm xmlns:a="http://schemas.openxmlformats.org/drawingml/2006/main"/>
+        <a:xfrm>
+          <a:off x="0" y="0"/>
+          <a:ext cx="0" cy="0"/>
+          <a:chOff x="0" y="0"/>
+          <a:chExt cx="0" cy="0"/>
+        </a:xfrm>
       </p:grpSpPr>
       <p:sp>
         <p:nvSpPr>
           <p:cNvPr id="2" name="Slide Image Placeholder 1"/>
           <p:cNvSpPr>
-            <a:spLocks xmlns:a="http://schemas.openxmlformats.org/drawingml/2006/main" noGrp="1"/>
+            <a:spLocks noGrp="1" noRot="1" noChangeAspect="1"/>
           </p:cNvSpPr>
           <p:nvPr>
-            <p:ph type="sldImg" idx="0"/>
+            <p:ph type="sldImg"/>
           </p:nvPr>
         </p:nvSpPr>
         <p:spPr/>
@@ -869,7 +765,7 @@
         <p:nvSpPr>
           <p:cNvPr id="3" name="Notes Placeholder 2"/>
           <p:cNvSpPr>
-            <a:spLocks xmlns:a="http://schemas.openxmlformats.org/drawingml/2006/main" noGrp="1"/>
+            <a:spLocks noGrp="1"/>
           </p:cNvSpPr>
           <p:nvPr>
             <p:ph type="body" idx="1"/>
@@ -877,54 +773,50 @@
         </p:nvSpPr>
         <p:spPr/>
         <p:txBody>
-          <a:bodyPr xmlns:a="http://schemas.openxmlformats.org/drawingml/2006/main"/>
-          <a:lstStyle xmlns:a="http://schemas.openxmlformats.org/drawingml/2006/main"/>
-          <a:p xmlns:a="http://schemas.openxmlformats.org/drawingml/2006/main">
+          <a:bodyPr/>
+          <a:lstStyle/>
+          <a:p>
             <a:r>
               <a:t>2:00–2:45</a:t>
             </a:r>
           </a:p>
-          <a:p xmlns:a="http://schemas.openxmlformats.org/drawingml/2006/main">
-            <a:r>
-              <a:t/>
-            </a:r>
-          </a:p>
-          <a:p xmlns:a="http://schemas.openxmlformats.org/drawingml/2006/main">
+          <a:p>
+            <a:endParaRPr/>
+          </a:p>
+          <a:p>
             <a:r>
               <a:t>ข้อมูลค้นคืนเป็นบทความจริงจาก Minecraft Wiki ไม่ใช่ชุดถามตอบสังเคราะห์ครับ มี 312 หน้าที่ไม่ซ้ำกันและประมาณแปดแสนหนึ่งหมื่นเจ็ดพันคำ เราเก็บ revision ของแต่ละหน้าไว้ เราเปรียบเทียบ chunk ขนาด 128, 256 และ 512 โทเคน ผล source-page hit เดิมใกล้กัน จึงใช้ 256 เพื่อรักษาบริบทโดยไม่เพิ่มต้นทุนมาก แบ่งตาม section และ paragraph ก่อน ถ้ายาวเกินจึงแบ่งย่อย ไม่มี overlap ข้อจำกัดคือ corpus ยังมีข้อมูลเก่า และ 312 หน้าไม่ได้ครอบคลุมทุกเรื่องในเกมครับ</a:t>
             </a:r>
           </a:p>
-          <a:p xmlns:a="http://schemas.openxmlformats.org/drawingml/2006/main">
-            <a:r>
-              <a:t/>
-            </a:r>
-          </a:p>
-          <a:p xmlns:a="http://schemas.openxmlformats.org/drawingml/2006/main">
+          <a:p>
+            <a:endParaRPr/>
+          </a:p>
+          <a:p>
             <a:r>
               <a:t>Sources (project-relative paths):</a:t>
             </a:r>
           </a:p>
-          <a:p xmlns:a="http://schemas.openxmlformats.org/drawingml/2006/main">
+          <a:p>
             <a:r>
               <a:t>docs/sources.md</a:t>
             </a:r>
           </a:p>
-          <a:p xmlns:a="http://schemas.openxmlformats.org/drawingml/2006/main">
+          <a:p>
             <a:r>
               <a:t>docs/corpus_inventory.csv</a:t>
             </a:r>
           </a:p>
-          <a:p xmlns:a="http://schemas.openxmlformats.org/drawingml/2006/main">
+          <a:p>
             <a:r>
               <a:t>results/RESULTS.md</a:t>
             </a:r>
           </a:p>
-          <a:p xmlns:a="http://schemas.openxmlformats.org/drawingml/2006/main">
+          <a:p>
             <a:r>
               <a:t>mcqa.py: chunks</a:t>
             </a:r>
           </a:p>
-          <a:p xmlns:a="http://schemas.openxmlformats.org/drawingml/2006/main">
+          <a:p>
             <a:r>
               <a:t>README.md</a:t>
             </a:r>
@@ -935,7 +827,7 @@
         <p:nvSpPr>
           <p:cNvPr id="4" name="Slide Number Placeholder 3"/>
           <p:cNvSpPr>
-            <a:spLocks xmlns:a="http://schemas.openxmlformats.org/drawingml/2006/main" noGrp="1"/>
+            <a:spLocks noGrp="1"/>
           </p:cNvSpPr>
           <p:nvPr>
             <p:ph type="sldNum" idx="5"/>
@@ -943,21 +835,23 @@
         </p:nvSpPr>
         <p:spPr/>
         <p:txBody>
-          <a:bodyPr xmlns:a="http://schemas.openxmlformats.org/drawingml/2006/main"/>
-          <a:lstStyle xmlns:a="http://schemas.openxmlformats.org/drawingml/2006/main"/>
-          <a:p xmlns:a="http://schemas.openxmlformats.org/drawingml/2006/main"/>
+          <a:bodyPr/>
+          <a:lstStyle/>
+          <a:p>
+            <a:endParaRPr/>
+          </a:p>
         </p:txBody>
       </p:sp>
     </p:spTree>
   </p:cSld>
   <p:clrMapOvr>
-    <a:masterClrMapping xmlns:a="http://schemas.openxmlformats.org/drawingml/2006/main"/>
+    <a:masterClrMapping/>
   </p:clrMapOvr>
 </p:notes>
 </file>
 
 <file path=ppt/notesSlides/notesSlide5.xml><?xml version="1.0" encoding="utf-8"?>
-<p:notes xmlns:p="http://schemas.openxmlformats.org/presentationml/2006/main">
+<p:notes xmlns:a="http://schemas.openxmlformats.org/drawingml/2006/main" xmlns:r="http://schemas.openxmlformats.org/officeDocument/2006/relationships" xmlns:p="http://schemas.openxmlformats.org/presentationml/2006/main">
   <p:cSld>
     <p:spTree>
       <p:nvGrpSpPr>
@@ -966,16 +860,21 @@
         <p:nvPr/>
       </p:nvGrpSpPr>
       <p:grpSpPr>
-        <a:xfrm xmlns:a="http://schemas.openxmlformats.org/drawingml/2006/main"/>
+        <a:xfrm>
+          <a:off x="0" y="0"/>
+          <a:ext cx="0" cy="0"/>
+          <a:chOff x="0" y="0"/>
+          <a:chExt cx="0" cy="0"/>
+        </a:xfrm>
       </p:grpSpPr>
       <p:sp>
         <p:nvSpPr>
           <p:cNvPr id="2" name="Slide Image Placeholder 1"/>
           <p:cNvSpPr>
-            <a:spLocks xmlns:a="http://schemas.openxmlformats.org/drawingml/2006/main" noGrp="1"/>
+            <a:spLocks noGrp="1" noRot="1" noChangeAspect="1"/>
           </p:cNvSpPr>
           <p:nvPr>
-            <p:ph type="sldImg" idx="0"/>
+            <p:ph type="sldImg"/>
           </p:nvPr>
         </p:nvSpPr>
         <p:spPr/>
@@ -984,7 +883,7 @@
         <p:nvSpPr>
           <p:cNvPr id="3" name="Notes Placeholder 2"/>
           <p:cNvSpPr>
-            <a:spLocks xmlns:a="http://schemas.openxmlformats.org/drawingml/2006/main" noGrp="1"/>
+            <a:spLocks noGrp="1"/>
           </p:cNvSpPr>
           <p:nvPr>
             <p:ph type="body" idx="1"/>
@@ -992,44 +891,40 @@
         </p:nvSpPr>
         <p:spPr/>
         <p:txBody>
-          <a:bodyPr xmlns:a="http://schemas.openxmlformats.org/drawingml/2006/main"/>
-          <a:lstStyle xmlns:a="http://schemas.openxmlformats.org/drawingml/2006/main"/>
-          <a:p xmlns:a="http://schemas.openxmlformats.org/drawingml/2006/main">
+          <a:bodyPr/>
+          <a:lstStyle/>
+          <a:p>
             <a:r>
               <a:t>2:45–4:00; then switch to the live demo until 7:00</a:t>
             </a:r>
           </a:p>
-          <a:p xmlns:a="http://schemas.openxmlformats.org/drawingml/2006/main">
-            <a:r>
-              <a:t/>
-            </a:r>
-          </a:p>
-          <a:p xmlns:a="http://schemas.openxmlformats.org/drawingml/2006/main">
+          <a:p>
+            <a:endParaRPr/>
+          </a:p>
+          <a:p>
             <a:r>
               <a:t>เราใช้ BGE-small ทำ embedding บน CPU ครับ BM25 ช่วยเรื่องชื่อ item ที่ตรงคำ ส่วน dense retrieval ช่วยจับความหมาย RRF รวมอันดับโดยไม่ต้องทำให้คะแนนสองระบบอยู่ในสเกลเดียวกัน จากนั้น cross-encoder จะอ่านคำถามกับ passage คู่กันแล้วเลือกห้าอันดับแรก ส่วน Qwen 4B ทำหน้าที่ตอบและวางแผนเรียกเครื่องมือ โมเดลทั้งหมดมีอยู่ในเครื่อง แต่เราไม่สรุปว่าการเพิ่ม reranker จะทำให้ดีกว่าเสมอ ต้องดูผล ablation ต่อไปครับ</a:t>
             </a:r>
           </a:p>
-          <a:p xmlns:a="http://schemas.openxmlformats.org/drawingml/2006/main">
-            <a:r>
-              <a:t/>
-            </a:r>
-          </a:p>
-          <a:p xmlns:a="http://schemas.openxmlformats.org/drawingml/2006/main">
+          <a:p>
+            <a:endParaRPr/>
+          </a:p>
+          <a:p>
             <a:r>
               <a:t>Sources (project-relative paths):</a:t>
             </a:r>
           </a:p>
-          <a:p xmlns:a="http://schemas.openxmlformats.org/drawingml/2006/main">
+          <a:p>
             <a:r>
               <a:t>docs/sources.md</a:t>
             </a:r>
           </a:p>
-          <a:p xmlns:a="http://schemas.openxmlformats.org/drawingml/2006/main">
+          <a:p>
             <a:r>
               <a:t>mcqa.py: embedder, reranker, Retriever, chat</a:t>
             </a:r>
           </a:p>
-          <a:p xmlns:a="http://schemas.openxmlformats.org/drawingml/2006/main">
+          <a:p>
             <a:r>
               <a:t>results/verified/test/summary.json</a:t>
             </a:r>
@@ -1040,7 +935,7 @@
         <p:nvSpPr>
           <p:cNvPr id="4" name="Slide Number Placeholder 3"/>
           <p:cNvSpPr>
-            <a:spLocks xmlns:a="http://schemas.openxmlformats.org/drawingml/2006/main" noGrp="1"/>
+            <a:spLocks noGrp="1"/>
           </p:cNvSpPr>
           <p:nvPr>
             <p:ph type="sldNum" idx="5"/>
@@ -1048,21 +943,23 @@
         </p:nvSpPr>
         <p:spPr/>
         <p:txBody>
-          <a:bodyPr xmlns:a="http://schemas.openxmlformats.org/drawingml/2006/main"/>
-          <a:lstStyle xmlns:a="http://schemas.openxmlformats.org/drawingml/2006/main"/>
-          <a:p xmlns:a="http://schemas.openxmlformats.org/drawingml/2006/main"/>
+          <a:bodyPr/>
+          <a:lstStyle/>
+          <a:p>
+            <a:endParaRPr/>
+          </a:p>
         </p:txBody>
       </p:sp>
     </p:spTree>
   </p:cSld>
   <p:clrMapOvr>
-    <a:masterClrMapping xmlns:a="http://schemas.openxmlformats.org/drawingml/2006/main"/>
+    <a:masterClrMapping/>
   </p:clrMapOvr>
 </p:notes>
 </file>
 
 <file path=ppt/notesSlides/notesSlide6.xml><?xml version="1.0" encoding="utf-8"?>
-<p:notes xmlns:p="http://schemas.openxmlformats.org/presentationml/2006/main">
+<p:notes xmlns:a="http://schemas.openxmlformats.org/drawingml/2006/main" xmlns:r="http://schemas.openxmlformats.org/officeDocument/2006/relationships" xmlns:p="http://schemas.openxmlformats.org/presentationml/2006/main">
   <p:cSld>
     <p:spTree>
       <p:nvGrpSpPr>
@@ -1071,16 +968,21 @@
         <p:nvPr/>
       </p:nvGrpSpPr>
       <p:grpSpPr>
-        <a:xfrm xmlns:a="http://schemas.openxmlformats.org/drawingml/2006/main"/>
+        <a:xfrm>
+          <a:off x="0" y="0"/>
+          <a:ext cx="0" cy="0"/>
+          <a:chOff x="0" y="0"/>
+          <a:chExt cx="0" cy="0"/>
+        </a:xfrm>
       </p:grpSpPr>
       <p:sp>
         <p:nvSpPr>
           <p:cNvPr id="2" name="Slide Image Placeholder 1"/>
           <p:cNvSpPr>
-            <a:spLocks xmlns:a="http://schemas.openxmlformats.org/drawingml/2006/main" noGrp="1"/>
+            <a:spLocks noGrp="1" noRot="1" noChangeAspect="1"/>
           </p:cNvSpPr>
           <p:nvPr>
-            <p:ph type="sldImg" idx="0"/>
+            <p:ph type="sldImg"/>
           </p:nvPr>
         </p:nvSpPr>
         <p:spPr/>
@@ -1089,7 +991,7 @@
         <p:nvSpPr>
           <p:cNvPr id="3" name="Notes Placeholder 2"/>
           <p:cNvSpPr>
-            <a:spLocks xmlns:a="http://schemas.openxmlformats.org/drawingml/2006/main" noGrp="1"/>
+            <a:spLocks noGrp="1"/>
           </p:cNvSpPr>
           <p:nvPr>
             <p:ph type="body" idx="1"/>
@@ -1097,49 +999,45 @@
         </p:nvSpPr>
         <p:spPr/>
         <p:txBody>
-          <a:bodyPr xmlns:a="http://schemas.openxmlformats.org/drawingml/2006/main"/>
-          <a:lstStyle xmlns:a="http://schemas.openxmlformats.org/drawingml/2006/main"/>
-          <a:p xmlns:a="http://schemas.openxmlformats.org/drawingml/2006/main">
+          <a:bodyPr/>
+          <a:lstStyle/>
+          <a:p>
             <a:r>
               <a:t>7:00–7:35</a:t>
             </a:r>
           </a:p>
-          <a:p xmlns:a="http://schemas.openxmlformats.org/drawingml/2006/main">
-            <a:r>
-              <a:t/>
-            </a:r>
-          </a:p>
-          <a:p xmlns:a="http://schemas.openxmlformats.org/drawingml/2006/main">
+          <a:p>
+            <a:endParaRPr/>
+          </a:p>
+          <a:p>
             <a:r>
               <a:t>เริ่มจากผลทดลองชุดแรก ซึ่งมีคำถามข้อเท็จจริง 34 ข้อครับ ถ้าให้โมเดลตอบโดยไม่ค้นเอกสาร จะตอบถูก 9 ข้อ เมื่อใช้ dense retrieval เพิ่มเป็น 27 ข้อ ส่วน hybrid ที่มี reranker ได้ 26 ข้อ ผลนี้สนับสนุนว่าการค้นเอกสารช่วยได้ แต่ยังไม่เห็นข้อได้เปรียบชัดเจนของ reranker คะแนนเหล่านี้มาจากการทดลองรุ่นเดิมที่เก็บไว้ และใช้โมเดลเป็นผู้ประเมินครับ</a:t>
             </a:r>
           </a:p>
-          <a:p xmlns:a="http://schemas.openxmlformats.org/drawingml/2006/main">
-            <a:r>
-              <a:t/>
-            </a:r>
-          </a:p>
-          <a:p xmlns:a="http://schemas.openxmlformats.org/drawingml/2006/main">
+          <a:p>
+            <a:endParaRPr/>
+          </a:p>
+          <a:p>
             <a:r>
               <a:t>Sources (project-relative paths):</a:t>
             </a:r>
           </a:p>
-          <a:p xmlns:a="http://schemas.openxmlformats.org/drawingml/2006/main">
+          <a:p>
             <a:r>
               <a:t>results/verified/test/summary.json</a:t>
             </a:r>
           </a:p>
-          <a:p xmlns:a="http://schemas.openxmlformats.org/drawingml/2006/main">
+          <a:p>
             <a:r>
               <a:t>results/verified/test/RESULTS.md</a:t>
             </a:r>
           </a:p>
-          <a:p xmlns:a="http://schemas.openxmlformats.org/drawingml/2006/main">
+          <a:p>
             <a:r>
               <a:t>results/verified/test/config.json</a:t>
             </a:r>
           </a:p>
-          <a:p xmlns:a="http://schemas.openxmlformats.org/drawingml/2006/main">
+          <a:p>
             <a:r>
               <a:t>data/java_benchmark.jsonl</a:t>
             </a:r>
@@ -1150,7 +1048,7 @@
         <p:nvSpPr>
           <p:cNvPr id="4" name="Slide Number Placeholder 3"/>
           <p:cNvSpPr>
-            <a:spLocks xmlns:a="http://schemas.openxmlformats.org/drawingml/2006/main" noGrp="1"/>
+            <a:spLocks noGrp="1"/>
           </p:cNvSpPr>
           <p:nvPr>
             <p:ph type="sldNum" idx="5"/>
@@ -1158,21 +1056,23 @@
         </p:nvSpPr>
         <p:spPr/>
         <p:txBody>
-          <a:bodyPr xmlns:a="http://schemas.openxmlformats.org/drawingml/2006/main"/>
-          <a:lstStyle xmlns:a="http://schemas.openxmlformats.org/drawingml/2006/main"/>
-          <a:p xmlns:a="http://schemas.openxmlformats.org/drawingml/2006/main"/>
+          <a:bodyPr/>
+          <a:lstStyle/>
+          <a:p>
+            <a:endParaRPr/>
+          </a:p>
         </p:txBody>
       </p:sp>
     </p:spTree>
   </p:cSld>
   <p:clrMapOvr>
-    <a:masterClrMapping xmlns:a="http://schemas.openxmlformats.org/drawingml/2006/main"/>
+    <a:masterClrMapping/>
   </p:clrMapOvr>
 </p:notes>
 </file>
 
 <file path=ppt/notesSlides/notesSlide7.xml><?xml version="1.0" encoding="utf-8"?>
-<p:notes xmlns:p="http://schemas.openxmlformats.org/presentationml/2006/main">
+<p:notes xmlns:a="http://schemas.openxmlformats.org/drawingml/2006/main" xmlns:r="http://schemas.openxmlformats.org/officeDocument/2006/relationships" xmlns:p="http://schemas.openxmlformats.org/presentationml/2006/main">
   <p:cSld>
     <p:spTree>
       <p:nvGrpSpPr>
@@ -1181,16 +1081,21 @@
         <p:nvPr/>
       </p:nvGrpSpPr>
       <p:grpSpPr>
-        <a:xfrm xmlns:a="http://schemas.openxmlformats.org/drawingml/2006/main"/>
+        <a:xfrm>
+          <a:off x="0" y="0"/>
+          <a:ext cx="0" cy="0"/>
+          <a:chOff x="0" y="0"/>
+          <a:chExt cx="0" cy="0"/>
+        </a:xfrm>
       </p:grpSpPr>
       <p:sp>
         <p:nvSpPr>
           <p:cNvPr id="2" name="Slide Image Placeholder 1"/>
           <p:cNvSpPr>
-            <a:spLocks xmlns:a="http://schemas.openxmlformats.org/drawingml/2006/main" noGrp="1"/>
+            <a:spLocks noGrp="1" noRot="1" noChangeAspect="1"/>
           </p:cNvSpPr>
           <p:nvPr>
-            <p:ph type="sldImg" idx="0"/>
+            <p:ph type="sldImg"/>
           </p:nvPr>
         </p:nvSpPr>
         <p:spPr/>
@@ -1199,7 +1104,7 @@
         <p:nvSpPr>
           <p:cNvPr id="3" name="Notes Placeholder 2"/>
           <p:cNvSpPr>
-            <a:spLocks xmlns:a="http://schemas.openxmlformats.org/drawingml/2006/main" noGrp="1"/>
+            <a:spLocks noGrp="1"/>
           </p:cNvSpPr>
           <p:nvPr>
             <p:ph type="body" idx="1"/>
@@ -1207,49 +1112,45 @@
         </p:nvSpPr>
         <p:spPr/>
         <p:txBody>
-          <a:bodyPr xmlns:a="http://schemas.openxmlformats.org/drawingml/2006/main"/>
-          <a:lstStyle xmlns:a="http://schemas.openxmlformats.org/drawingml/2006/main"/>
-          <a:p xmlns:a="http://schemas.openxmlformats.org/drawingml/2006/main">
+          <a:bodyPr/>
+          <a:lstStyle/>
+          <a:p>
             <a:r>
               <a:t>7:35–8:10</a:t>
             </a:r>
           </a:p>
-          <a:p xmlns:a="http://schemas.openxmlformats.org/drawingml/2006/main">
-            <a:r>
-              <a:t/>
-            </a:r>
-          </a:p>
-          <a:p xmlns:a="http://schemas.openxmlformats.org/drawingml/2006/main">
+          <a:p>
+            <a:endParaRPr/>
+          </a:p>
+          <a:p>
             <a:r>
               <a:t>สำหรับการคำนวณวัตถุดิบ เราเปรียบเทียบคำถาม 40 ข้อ โดยเปิดและปิดเครื่องมือ เมื่อไม่มีเครื่องมือ ตอบจำนวนถูกเพียง 1 ข้อ แต่เมื่อใช้เครื่องมือ ถูก 37 ข้อ เครื่องมืออ่านสูตรทางการแล้วคำนวณจำนวนรอบการคราฟต์ให้ ส่วนสามข้อที่ผิดไม่ได้เรียกเครื่องมือเลย จุดที่ยังติดจึงเป็นการส่งคำถามไปใช้เครื่องมือ ผลนี้วัดจำนวนวัตถุดิบโดยตรง ยังไม่ครอบคลุมการวางแผนจากของทั้งหมดในคลังครับ</a:t>
             </a:r>
           </a:p>
-          <a:p xmlns:a="http://schemas.openxmlformats.org/drawingml/2006/main">
-            <a:r>
-              <a:t/>
-            </a:r>
-          </a:p>
-          <a:p xmlns:a="http://schemas.openxmlformats.org/drawingml/2006/main">
+          <a:p>
+            <a:endParaRPr/>
+          </a:p>
+          <a:p>
             <a:r>
               <a:t>Sources (project-relative paths):</a:t>
             </a:r>
           </a:p>
-          <a:p xmlns:a="http://schemas.openxmlformats.org/drawingml/2006/main">
+          <a:p>
             <a:r>
               <a:t>results/verified/tool_final/summary.json</a:t>
             </a:r>
           </a:p>
-          <a:p xmlns:a="http://schemas.openxmlformats.org/drawingml/2006/main">
+          <a:p>
             <a:r>
               <a:t>results/verified/tool_final/RESULTS.md</a:t>
             </a:r>
           </a:p>
-          <a:p xmlns:a="http://schemas.openxmlformats.org/drawingml/2006/main">
+          <a:p>
             <a:r>
               <a:t>results/verified/tool_final/answers.jsonl</a:t>
             </a:r>
           </a:p>
-          <a:p xmlns:a="http://schemas.openxmlformats.org/drawingml/2006/main">
+          <a:p>
             <a:r>
               <a:t>docs/sources.md</a:t>
             </a:r>
@@ -1260,7 +1161,7 @@
         <p:nvSpPr>
           <p:cNvPr id="4" name="Slide Number Placeholder 3"/>
           <p:cNvSpPr>
-            <a:spLocks xmlns:a="http://schemas.openxmlformats.org/drawingml/2006/main" noGrp="1"/>
+            <a:spLocks noGrp="1"/>
           </p:cNvSpPr>
           <p:nvPr>
             <p:ph type="sldNum" idx="5"/>
@@ -1268,21 +1169,23 @@
         </p:nvSpPr>
         <p:spPr/>
         <p:txBody>
-          <a:bodyPr xmlns:a="http://schemas.openxmlformats.org/drawingml/2006/main"/>
-          <a:lstStyle xmlns:a="http://schemas.openxmlformats.org/drawingml/2006/main"/>
-          <a:p xmlns:a="http://schemas.openxmlformats.org/drawingml/2006/main"/>
+          <a:bodyPr/>
+          <a:lstStyle/>
+          <a:p>
+            <a:endParaRPr/>
+          </a:p>
         </p:txBody>
       </p:sp>
     </p:spTree>
   </p:cSld>
   <p:clrMapOvr>
-    <a:masterClrMapping xmlns:a="http://schemas.openxmlformats.org/drawingml/2006/main"/>
+    <a:masterClrMapping/>
   </p:clrMapOvr>
 </p:notes>
 </file>
 
 <file path=ppt/notesSlides/notesSlide8.xml><?xml version="1.0" encoding="utf-8"?>
-<p:notes xmlns:p="http://schemas.openxmlformats.org/presentationml/2006/main">
+<p:notes xmlns:a="http://schemas.openxmlformats.org/drawingml/2006/main" xmlns:r="http://schemas.openxmlformats.org/officeDocument/2006/relationships" xmlns:p="http://schemas.openxmlformats.org/presentationml/2006/main">
   <p:cSld>
     <p:spTree>
       <p:nvGrpSpPr>
@@ -1291,16 +1194,21 @@
         <p:nvPr/>
       </p:nvGrpSpPr>
       <p:grpSpPr>
-        <a:xfrm xmlns:a="http://schemas.openxmlformats.org/drawingml/2006/main"/>
+        <a:xfrm>
+          <a:off x="0" y="0"/>
+          <a:ext cx="0" cy="0"/>
+          <a:chOff x="0" y="0"/>
+          <a:chExt cx="0" cy="0"/>
+        </a:xfrm>
       </p:grpSpPr>
       <p:sp>
         <p:nvSpPr>
           <p:cNvPr id="2" name="Slide Image Placeholder 1"/>
           <p:cNvSpPr>
-            <a:spLocks xmlns:a="http://schemas.openxmlformats.org/drawingml/2006/main" noGrp="1"/>
+            <a:spLocks noGrp="1" noRot="1" noChangeAspect="1"/>
           </p:cNvSpPr>
           <p:nvPr>
-            <p:ph type="sldImg" idx="0"/>
+            <p:ph type="sldImg"/>
           </p:nvPr>
         </p:nvSpPr>
         <p:spPr/>
@@ -1309,7 +1217,7 @@
         <p:nvSpPr>
           <p:cNvPr id="3" name="Notes Placeholder 2"/>
           <p:cNvSpPr>
-            <a:spLocks xmlns:a="http://schemas.openxmlformats.org/drawingml/2006/main" noGrp="1"/>
+            <a:spLocks noGrp="1"/>
           </p:cNvSpPr>
           <p:nvPr>
             <p:ph type="body" idx="1"/>
@@ -1317,52 +1225,86 @@
         </p:nvSpPr>
         <p:spPr/>
         <p:txBody>
-          <a:bodyPr xmlns:a="http://schemas.openxmlformats.org/drawingml/2006/main"/>
-          <a:lstStyle xmlns:a="http://schemas.openxmlformats.org/drawingml/2006/main"/>
-          <a:p xmlns:a="http://schemas.openxmlformats.org/drawingml/2006/main">
-            <a:r>
-              <a:t>8:10–8:45</a:t>
-            </a:r>
-          </a:p>
-          <a:p xmlns:a="http://schemas.openxmlformats.org/drawingml/2006/main">
-            <a:r>
-              <a:t/>
-            </a:r>
-          </a:p>
-          <a:p xmlns:a="http://schemas.openxmlformats.org/drawingml/2006/main">
-            <a:r>
-              <a:t>ผลของระบบปัจจุบันใช้ชุดทดสอบใหม่ที่มีข้อเท็จจริง 8 ข้อครับ Dense ตอบถูก 6 ข้อ และได้ BERTScore จุดหกห้าสี่ ส่วน reranker ถูก 7 ข้อ แต่ได้ BERTScore จุดหกศูนย์ศูนย์ คะแนนสองแบบวัดคนละเรื่อง การตัดสินความถูกต้องเทียบกับข้อมูลอ้างอิง ส่วน BERTScore วัดความคล้ายของข้อความ จึงอาจให้ลำดับต่างกันได้ ชุดนี้ยังเล็ก และยังไม่มีการตรวจโดยคนอย่างอิสระครับ</a:t>
-            </a:r>
-          </a:p>
-          <a:p xmlns:a="http://schemas.openxmlformats.org/drawingml/2006/main">
-            <a:r>
-              <a:t/>
-            </a:r>
-          </a:p>
-          <a:p xmlns:a="http://schemas.openxmlformats.org/drawingml/2006/main">
-            <a:r>
-              <a:t>Sources (project-relative paths):</a:t>
-            </a:r>
-          </a:p>
-          <a:p xmlns:a="http://schemas.openxmlformats.org/drawingml/2006/main">
-            <a:r>
-              <a:t>results/improvement_review/summary.json</a:t>
-            </a:r>
-          </a:p>
-          <a:p xmlns:a="http://schemas.openxmlformats.org/drawingml/2006/main">
-            <a:r>
-              <a:t>results/improvement_review/RESULTS.md</a:t>
-            </a:r>
-          </a:p>
-          <a:p xmlns:a="http://schemas.openxmlformats.org/drawingml/2006/main">
-            <a:r>
-              <a:t>results/improvement_review/after_config.json</a:t>
-            </a:r>
-          </a:p>
-          <a:p xmlns:a="http://schemas.openxmlformats.org/drawingml/2006/main">
-            <a:r>
-              <a:t>results/improvement_review/paired_stats.json</a:t>
-            </a:r>
+          <a:bodyPr/>
+          <a:lstStyle/>
+          <a:p>
+            <a:r>
+              <a:rPr lang="th-TH"/>
+              <a:t>ผลประเมินด้วยสองตัวชี้วัด บนชุดทดสอบเดียวกับสไลด์ 6 คือข้อเท็จจริง 34 ข้อครับ ถ้าไม่ใช้การค้นคืน ตอบถูกแค่ 9 ข้อ และได้ </a:t>
+            </a:r>
+            <a:r>
+              <a:rPr lang="en-US"/>
+              <a:t>BERTScore </a:t>
+            </a:r>
+            <a:r>
+              <a:rPr lang="th-TH"/>
+              <a:t>จุดสองเก้าสี่ </a:t>
+            </a:r>
+            <a:r>
+              <a:rPr lang="en-US"/>
+              <a:t>Dense </a:t>
+            </a:r>
+            <a:r>
+              <a:rPr lang="th-TH"/>
+              <a:t>ตอบถูก 27 ข้อ ได้ </a:t>
+            </a:r>
+            <a:r>
+              <a:rPr lang="en-US"/>
+              <a:t>BERTScore </a:t>
+            </a:r>
+            <a:r>
+              <a:rPr lang="th-TH"/>
+              <a:t>จุดสี่เก้าสาม ส่วน </a:t>
+            </a:r>
+            <a:r>
+              <a:rPr lang="en-US"/>
+              <a:t>hybrid </a:t>
+            </a:r>
+            <a:r>
+              <a:rPr lang="th-TH"/>
+              <a:t>กับ </a:t>
+            </a:r>
+            <a:r>
+              <a:rPr lang="en-US"/>
+              <a:t>reranker </a:t>
+            </a:r>
+            <a:r>
+              <a:rPr lang="th-TH"/>
+              <a:t>ตอบถูก 26 ข้อ ได้ </a:t>
+            </a:r>
+            <a:r>
+              <a:rPr lang="en-US"/>
+              <a:t>BERTScore </a:t>
+            </a:r>
+            <a:r>
+              <a:rPr lang="th-TH"/>
+              <a:t>จุดสี่ห้าหนึ่ง ทั้งสองตัวชี้วัดบอกตรงกันว่าการค้นคืนช่วยให้คำตอบดีขึ้นมาก แต่ </a:t>
+            </a:r>
+            <a:r>
+              <a:rPr lang="en-US"/>
+              <a:t>reranker </a:t>
+            </a:r>
+            <a:r>
+              <a:rPr lang="th-TH"/>
+              <a:t>ไม่ได้ดีกว่า </a:t>
+            </a:r>
+            <a:r>
+              <a:rPr lang="en-US"/>
+              <a:t>dense </a:t>
+            </a:r>
+            <a:r>
+              <a:rPr lang="th-TH"/>
+              <a:t>การตัดสินความถูกต้องเทียบข้อเท็จจริงในคำตอบกับคำตอบอ้างอิง ส่วน </a:t>
+            </a:r>
+            <a:r>
+              <a:rPr lang="en-US"/>
+              <a:t>BERTScore </a:t>
+            </a:r>
+            <a:r>
+              <a:rPr lang="th-TH"/>
+              <a:t>วัดความคล้ายของข้อความ ผู้ตัดสินเป็นโมเดลเดียวกับที่ตอบ และยังไม่มีการตรวจโดยคนครับ</a:t>
+            </a:r>
+            <a:endParaRPr/>
           </a:p>
         </p:txBody>
       </p:sp>
@@ -1370,7 +1312,7 @@
         <p:nvSpPr>
           <p:cNvPr id="4" name="Slide Number Placeholder 3"/>
           <p:cNvSpPr>
-            <a:spLocks xmlns:a="http://schemas.openxmlformats.org/drawingml/2006/main" noGrp="1"/>
+            <a:spLocks noGrp="1"/>
           </p:cNvSpPr>
           <p:nvPr>
             <p:ph type="sldNum" idx="5"/>
@@ -1378,21 +1320,23 @@
         </p:nvSpPr>
         <p:spPr/>
         <p:txBody>
-          <a:bodyPr xmlns:a="http://schemas.openxmlformats.org/drawingml/2006/main"/>
-          <a:lstStyle xmlns:a="http://schemas.openxmlformats.org/drawingml/2006/main"/>
-          <a:p xmlns:a="http://schemas.openxmlformats.org/drawingml/2006/main"/>
+          <a:bodyPr/>
+          <a:lstStyle/>
+          <a:p>
+            <a:endParaRPr/>
+          </a:p>
         </p:txBody>
       </p:sp>
     </p:spTree>
   </p:cSld>
   <p:clrMapOvr>
-    <a:masterClrMapping xmlns:a="http://schemas.openxmlformats.org/drawingml/2006/main"/>
+    <a:masterClrMapping/>
   </p:clrMapOvr>
 </p:notes>
 </file>
 
 <file path=ppt/notesSlides/notesSlide9.xml><?xml version="1.0" encoding="utf-8"?>
-<p:notes xmlns:p="http://schemas.openxmlformats.org/presentationml/2006/main">
+<p:notes xmlns:a="http://schemas.openxmlformats.org/drawingml/2006/main" xmlns:r="http://schemas.openxmlformats.org/officeDocument/2006/relationships" xmlns:p="http://schemas.openxmlformats.org/presentationml/2006/main">
   <p:cSld>
     <p:spTree>
       <p:nvGrpSpPr>
@@ -1401,16 +1345,21 @@
         <p:nvPr/>
       </p:nvGrpSpPr>
       <p:grpSpPr>
-        <a:xfrm xmlns:a="http://schemas.openxmlformats.org/drawingml/2006/main"/>
+        <a:xfrm>
+          <a:off x="0" y="0"/>
+          <a:ext cx="0" cy="0"/>
+          <a:chOff x="0" y="0"/>
+          <a:chExt cx="0" cy="0"/>
+        </a:xfrm>
       </p:grpSpPr>
       <p:sp>
         <p:nvSpPr>
           <p:cNvPr id="2" name="Slide Image Placeholder 1"/>
           <p:cNvSpPr>
-            <a:spLocks xmlns:a="http://schemas.openxmlformats.org/drawingml/2006/main" noGrp="1"/>
+            <a:spLocks noGrp="1" noRot="1" noChangeAspect="1"/>
           </p:cNvSpPr>
           <p:nvPr>
-            <p:ph type="sldImg" idx="0"/>
+            <p:ph type="sldImg"/>
           </p:nvPr>
         </p:nvSpPr>
         <p:spPr/>
@@ -1419,7 +1368,7 @@
         <p:nvSpPr>
           <p:cNvPr id="3" name="Notes Placeholder 2"/>
           <p:cNvSpPr>
-            <a:spLocks xmlns:a="http://schemas.openxmlformats.org/drawingml/2006/main" noGrp="1"/>
+            <a:spLocks noGrp="1"/>
           </p:cNvSpPr>
           <p:nvPr>
             <p:ph type="body" idx="1"/>
@@ -1427,49 +1376,45 @@
         </p:nvSpPr>
         <p:spPr/>
         <p:txBody>
-          <a:bodyPr xmlns:a="http://schemas.openxmlformats.org/drawingml/2006/main"/>
-          <a:lstStyle xmlns:a="http://schemas.openxmlformats.org/drawingml/2006/main"/>
-          <a:p xmlns:a="http://schemas.openxmlformats.org/drawingml/2006/main">
+          <a:bodyPr/>
+          <a:lstStyle/>
+          <a:p>
             <a:r>
               <a:t>8:45–9:20</a:t>
             </a:r>
           </a:p>
-          <a:p xmlns:a="http://schemas.openxmlformats.org/drawingml/2006/main">
-            <a:r>
-              <a:t/>
-            </a:r>
-          </a:p>
-          <a:p xmlns:a="http://schemas.openxmlformats.org/drawingml/2006/main">
+          <a:p>
+            <a:endParaRPr/>
+          </a:p>
+          <a:p>
             <a:r>
               <a:t>ระบบยังมีข้อจำกัดสามเรื่องครับ หนึ่ง การกรองข้อความของเวอร์ชันอื่นอาจตัดข้อมูล Java ที่ใช้ได้ออกไปด้วย สอง คำถามหลายส่วนอาจได้ตัวเลขจากเครื่องมือถูก แต่คำอธิบายที่โมเดลเติมยังไม่มีหลักฐานรองรับ และสาม เราใช้โมเดลเดียวกันตอบและประเมิน จึงมีโอกาสประเมินผิดหรือเข้าข้างคำตอบของตัวเอง เราเก็บคำตอบดิบและแหล่งอ้างอิงไว้ เพื่อให้ย้อนตรวจข้อผิดพลาดเหล่านี้ได้ครับ</a:t>
             </a:r>
           </a:p>
-          <a:p xmlns:a="http://schemas.openxmlformats.org/drawingml/2006/main">
-            <a:r>
-              <a:t/>
-            </a:r>
-          </a:p>
-          <a:p xmlns:a="http://schemas.openxmlformats.org/drawingml/2006/main">
+          <a:p>
+            <a:endParaRPr/>
+          </a:p>
+          <a:p>
             <a:r>
               <a:t>Sources (project-relative paths):</a:t>
             </a:r>
           </a:p>
-          <a:p xmlns:a="http://schemas.openxmlformats.org/drawingml/2006/main">
+          <a:p>
             <a:r>
               <a:t>results/improvement_review/analysis_notes.md</a:t>
             </a:r>
           </a:p>
-          <a:p xmlns:a="http://schemas.openxmlformats.org/drawingml/2006/main">
+          <a:p>
             <a:r>
               <a:t>docs/failure_analysis.md</a:t>
             </a:r>
           </a:p>
-          <a:p xmlns:a="http://schemas.openxmlformats.org/drawingml/2006/main">
+          <a:p>
             <a:r>
               <a:t>results/improvement_review/after_answers.jsonl</a:t>
             </a:r>
           </a:p>
-          <a:p xmlns:a="http://schemas.openxmlformats.org/drawingml/2006/main">
+          <a:p>
             <a:r>
               <a:t>results/improvement_review/human_check.csv</a:t>
             </a:r>
@@ -1480,7 +1425,7 @@
         <p:nvSpPr>
           <p:cNvPr id="4" name="Slide Number Placeholder 3"/>
           <p:cNvSpPr>
-            <a:spLocks xmlns:a="http://schemas.openxmlformats.org/drawingml/2006/main" noGrp="1"/>
+            <a:spLocks noGrp="1"/>
           </p:cNvSpPr>
           <p:nvPr>
             <p:ph type="sldNum" idx="5"/>
@@ -1488,21 +1433,23 @@
         </p:nvSpPr>
         <p:spPr/>
         <p:txBody>
-          <a:bodyPr xmlns:a="http://schemas.openxmlformats.org/drawingml/2006/main"/>
-          <a:lstStyle xmlns:a="http://schemas.openxmlformats.org/drawingml/2006/main"/>
-          <a:p xmlns:a="http://schemas.openxmlformats.org/drawingml/2006/main"/>
+          <a:bodyPr/>
+          <a:lstStyle/>
+          <a:p>
+            <a:endParaRPr/>
+          </a:p>
         </p:txBody>
       </p:sp>
     </p:spTree>
   </p:cSld>
   <p:clrMapOvr>
-    <a:masterClrMapping xmlns:a="http://schemas.openxmlformats.org/drawingml/2006/main"/>
+    <a:masterClrMapping/>
   </p:clrMapOvr>
 </p:notes>
 </file>
 
 <file path=ppt/slideLayouts/slideLayout1.xml><?xml version="1.0" encoding="utf-8"?>
-<p:sldLayout xmlns:p="http://schemas.openxmlformats.org/presentationml/2006/main" type="title">
+<p:sldLayout xmlns:a="http://schemas.openxmlformats.org/drawingml/2006/main" xmlns:r="http://schemas.openxmlformats.org/officeDocument/2006/relationships" xmlns:p="http://schemas.openxmlformats.org/presentationml/2006/main" type="title">
   <p:cSld name="Title Slide">
     <p:spTree>
       <p:nvGrpSpPr>
@@ -1511,19 +1458,27 @@
         <p:nvPr/>
       </p:nvGrpSpPr>
       <p:grpSpPr>
-        <a:xfrm xmlns:a="http://schemas.openxmlformats.org/drawingml/2006/main"/>
+        <a:xfrm>
+          <a:off x="0" y="0"/>
+          <a:ext cx="0" cy="0"/>
+          <a:chOff x="0" y="0"/>
+          <a:chExt cx="0" cy="0"/>
+        </a:xfrm>
       </p:grpSpPr>
     </p:spTree>
   </p:cSld>
+  <p:clrMapOvr>
+    <a:masterClrMapping/>
+  </p:clrMapOvr>
 </p:sldLayout>
 </file>
 
 <file path=ppt/slideMasters/slideMaster1.xml><?xml version="1.0" encoding="utf-8"?>
-<p:sldMaster xmlns:p="http://schemas.openxmlformats.org/presentationml/2006/main">
+<p:sldMaster xmlns:a="http://schemas.openxmlformats.org/drawingml/2006/main" xmlns:r="http://schemas.openxmlformats.org/officeDocument/2006/relationships" xmlns:p="http://schemas.openxmlformats.org/presentationml/2006/main">
   <p:cSld name="Master">
     <p:bg>
       <p:bgRef idx="1001">
-        <a:schemeClr xmlns:a="http://schemas.openxmlformats.org/drawingml/2006/main" val="bg1"/>
+        <a:schemeClr val="bg1"/>
       </p:bgRef>
     </p:bg>
     <p:spTree>
@@ -1533,17 +1488,22 @@
         <p:nvPr/>
       </p:nvGrpSpPr>
       <p:grpSpPr>
-        <a:xfrm xmlns:a="http://schemas.openxmlformats.org/drawingml/2006/main"/>
+        <a:xfrm>
+          <a:off x="0" y="0"/>
+          <a:ext cx="0" cy="0"/>
+          <a:chOff x="0" y="0"/>
+          <a:chExt cx="0" cy="0"/>
+        </a:xfrm>
       </p:grpSpPr>
     </p:spTree>
   </p:cSld>
   <p:clrMap bg1="lt1" tx1="dk1" bg2="lt2" tx2="dk2" accent1="accent1" accent2="accent2" accent3="accent3" accent4="accent4" accent5="accent5" accent6="accent6" hlink="hlink" folHlink="folHlink"/>
   <p:sldLayoutIdLst>
-    <p:sldLayoutId xmlns:r="http://schemas.openxmlformats.org/officeDocument/2006/relationships" id="2147483649" r:id="R252b6bb054d34730"/>
+    <p:sldLayoutId id="2147483649" r:id="rId1"/>
   </p:sldLayoutIdLst>
   <p:txStyles>
     <p:titleStyle>
-      <a:lvl1pPr xmlns:a="http://schemas.openxmlformats.org/drawingml/2006/main" algn="l">
+      <a:lvl1pPr algn="l">
         <a:lnSpc>
           <a:spcPct val="90000"/>
         </a:lnSpc>
@@ -1562,7 +1522,7 @@
       </a:lvl1pPr>
     </p:titleStyle>
     <p:bodyStyle>
-      <a:lvl1pPr xmlns:a="http://schemas.openxmlformats.org/drawingml/2006/main" marL="228600" indent="-228600" algn="l">
+      <a:lvl1pPr marL="228600" indent="-228600" algn="l">
         <a:lnSpc>
           <a:spcPct val="90000"/>
         </a:lnSpc>
@@ -1579,7 +1539,7 @@
           <a:cs typeface="+mn-lt"/>
         </a:defRPr>
       </a:lvl1pPr>
-      <a:lvl2pPr xmlns:a="http://schemas.openxmlformats.org/drawingml/2006/main" marL="685800" indent="-228600" algn="l">
+      <a:lvl2pPr marL="685800" indent="-228600" algn="l">
         <a:lnSpc>
           <a:spcPct val="90000"/>
         </a:lnSpc>
@@ -1596,7 +1556,7 @@
           <a:cs typeface="+mn-lt"/>
         </a:defRPr>
       </a:lvl2pPr>
-      <a:lvl3pPr xmlns:a="http://schemas.openxmlformats.org/drawingml/2006/main" marL="1143000" indent="-228600" algn="l">
+      <a:lvl3pPr marL="1143000" indent="-228600" algn="l">
         <a:lnSpc>
           <a:spcPct val="90000"/>
         </a:lnSpc>
@@ -1613,7 +1573,7 @@
           <a:cs typeface="+mn-lt"/>
         </a:defRPr>
       </a:lvl3pPr>
-      <a:lvl4pPr xmlns:a="http://schemas.openxmlformats.org/drawingml/2006/main" marL="1600200" indent="-228600" algn="l">
+      <a:lvl4pPr marL="1600200" indent="-228600" algn="l">
         <a:lnSpc>
           <a:spcPct val="90000"/>
         </a:lnSpc>
@@ -1630,7 +1590,7 @@
           <a:cs typeface="+mn-lt"/>
         </a:defRPr>
       </a:lvl4pPr>
-      <a:lvl5pPr xmlns:a="http://schemas.openxmlformats.org/drawingml/2006/main" marL="2057400" indent="-228600" algn="l">
+      <a:lvl5pPr marL="2057400" indent="-228600" algn="l">
         <a:lnSpc>
           <a:spcPct val="90000"/>
         </a:lnSpc>
@@ -1647,7 +1607,7 @@
           <a:cs typeface="+mn-lt"/>
         </a:defRPr>
       </a:lvl5pPr>
-      <a:lvl6pPr xmlns:a="http://schemas.openxmlformats.org/drawingml/2006/main" marL="2514600" indent="-228600" algn="l">
+      <a:lvl6pPr marL="2514600" indent="-228600" algn="l">
         <a:lnSpc>
           <a:spcPct val="90000"/>
         </a:lnSpc>
@@ -1664,7 +1624,7 @@
           <a:cs typeface="+mn-lt"/>
         </a:defRPr>
       </a:lvl6pPr>
-      <a:lvl7pPr xmlns:a="http://schemas.openxmlformats.org/drawingml/2006/main" marL="2971800" indent="-228600" algn="l">
+      <a:lvl7pPr marL="2971800" indent="-228600" algn="l">
         <a:lnSpc>
           <a:spcPct val="90000"/>
         </a:lnSpc>
@@ -1681,7 +1641,7 @@
           <a:cs typeface="+mn-lt"/>
         </a:defRPr>
       </a:lvl7pPr>
-      <a:lvl8pPr xmlns:a="http://schemas.openxmlformats.org/drawingml/2006/main" marL="3429000" indent="-228600" algn="l">
+      <a:lvl8pPr marL="3429000" indent="-228600" algn="l">
         <a:lnSpc>
           <a:spcPct val="90000"/>
         </a:lnSpc>
@@ -1698,7 +1658,7 @@
           <a:cs typeface="+mn-lt"/>
         </a:defRPr>
       </a:lvl8pPr>
-      <a:lvl9pPr xmlns:a="http://schemas.openxmlformats.org/drawingml/2006/main" marL="3886200" indent="-228600" algn="l">
+      <a:lvl9pPr marL="3886200" indent="-228600" algn="l">
         <a:lnSpc>
           <a:spcPct val="90000"/>
         </a:lnSpc>
@@ -1717,7 +1677,7 @@
       </a:lvl9pPr>
     </p:bodyStyle>
     <p:otherStyle>
-      <a:lvl1pPr xmlns:a="http://schemas.openxmlformats.org/drawingml/2006/main" marL="0" algn="l">
+      <a:lvl1pPr marL="0" algn="l">
         <a:buNone/>
         <a:defRPr sz="1800">
           <a:solidFill>
@@ -1728,7 +1688,7 @@
           <a:cs typeface="+mn-lt"/>
         </a:defRPr>
       </a:lvl1pPr>
-      <a:lvl2pPr xmlns:a="http://schemas.openxmlformats.org/drawingml/2006/main" marL="457200" algn="l">
+      <a:lvl2pPr marL="457200" algn="l">
         <a:buNone/>
         <a:defRPr sz="1800">
           <a:solidFill>
@@ -1739,7 +1699,7 @@
           <a:cs typeface="+mn-lt"/>
         </a:defRPr>
       </a:lvl2pPr>
-      <a:lvl3pPr xmlns:a="http://schemas.openxmlformats.org/drawingml/2006/main" marL="914400" algn="l">
+      <a:lvl3pPr marL="914400" algn="l">
         <a:buNone/>
         <a:defRPr sz="1800">
           <a:solidFill>
@@ -1750,7 +1710,7 @@
           <a:cs typeface="+mn-lt"/>
         </a:defRPr>
       </a:lvl3pPr>
-      <a:lvl4pPr xmlns:a="http://schemas.openxmlformats.org/drawingml/2006/main" marL="1371600" algn="l">
+      <a:lvl4pPr marL="1371600" algn="l">
         <a:buNone/>
         <a:defRPr sz="1800">
           <a:solidFill>
@@ -1761,7 +1721,7 @@
           <a:cs typeface="+mn-lt"/>
         </a:defRPr>
       </a:lvl4pPr>
-      <a:lvl5pPr xmlns:a="http://schemas.openxmlformats.org/drawingml/2006/main" marL="1828800" algn="l">
+      <a:lvl5pPr marL="1828800" algn="l">
         <a:buNone/>
         <a:defRPr sz="1800">
           <a:solidFill>
@@ -1772,7 +1732,7 @@
           <a:cs typeface="+mn-lt"/>
         </a:defRPr>
       </a:lvl5pPr>
-      <a:lvl6pPr xmlns:a="http://schemas.openxmlformats.org/drawingml/2006/main" marL="2286000" algn="l">
+      <a:lvl6pPr marL="2286000" algn="l">
         <a:buNone/>
         <a:defRPr sz="1800">
           <a:solidFill>
@@ -1783,7 +1743,7 @@
           <a:cs typeface="+mn-lt"/>
         </a:defRPr>
       </a:lvl6pPr>
-      <a:lvl7pPr xmlns:a="http://schemas.openxmlformats.org/drawingml/2006/main" marL="2743200" algn="l">
+      <a:lvl7pPr marL="2743200" algn="l">
         <a:buNone/>
         <a:defRPr sz="1800">
           <a:solidFill>
@@ -1794,7 +1754,7 @@
           <a:cs typeface="+mn-lt"/>
         </a:defRPr>
       </a:lvl7pPr>
-      <a:lvl8pPr xmlns:a="http://schemas.openxmlformats.org/drawingml/2006/main" marL="3200400" algn="l">
+      <a:lvl8pPr marL="3200400" algn="l">
         <a:buNone/>
         <a:defRPr sz="1800">
           <a:solidFill>
@@ -1805,7 +1765,7 @@
           <a:cs typeface="+mn-lt"/>
         </a:defRPr>
       </a:lvl8pPr>
-      <a:lvl9pPr xmlns:a="http://schemas.openxmlformats.org/drawingml/2006/main" marL="3657600" algn="l">
+      <a:lvl9pPr marL="3657600" algn="l">
         <a:buNone/>
         <a:defRPr sz="1800">
           <a:solidFill>
@@ -1821,259 +1781,15 @@
 </p:sldMaster>
 </file>
 
-<file path=ppt/slideMasters/theme/theme2.xml><?xml version="1.0" encoding="utf-8"?>
-<a:theme xmlns:a="http://schemas.openxmlformats.org/drawingml/2006/main" name="ChatGPT">
-  <a:themeElements>
-    <a:clrScheme name="ChatGPT">
-      <a:dk1>
-        <a:srgbClr val="000000"/>
-      </a:dk1>
-      <a:lt1>
-        <a:srgbClr val="FFFFFF"/>
-      </a:lt1>
-      <a:dk2>
-        <a:srgbClr val="0E2841"/>
-      </a:dk2>
-      <a:lt2>
-        <a:srgbClr val="E8E8E8"/>
-      </a:lt2>
-      <a:accent1>
-        <a:srgbClr val="156082"/>
-      </a:accent1>
-      <a:accent2>
-        <a:srgbClr val="E97132"/>
-      </a:accent2>
-      <a:accent3>
-        <a:srgbClr val="196B24"/>
-      </a:accent3>
-      <a:accent4>
-        <a:srgbClr val="0F9ED5"/>
-      </a:accent4>
-      <a:accent5>
-        <a:srgbClr val="A02B93"/>
-      </a:accent5>
-      <a:accent6>
-        <a:srgbClr val="4EA72E"/>
-      </a:accent6>
-      <a:hlink>
-        <a:srgbClr val="467886"/>
-      </a:hlink>
-      <a:folHlink>
-        <a:srgbClr val="96607D"/>
-      </a:folHlink>
-    </a:clrScheme>
-    <a:fontScheme name="">
-      <a:majorFont>
-        <a:latin typeface="Aptos"/>
-        <a:ea typeface=""/>
-        <a:cs typeface=""/>
-      </a:majorFont>
-      <a:minorFont>
-        <a:latin typeface="Aptos"/>
-        <a:ea typeface=""/>
-        <a:cs typeface=""/>
-      </a:minorFont>
-    </a:fontScheme>
-    <a:fmtScheme name="ChatGPT">
-      <a:fillStyleLst>
-        <a:solidFill>
-          <a:schemeClr val="phClr"/>
-        </a:solidFill>
-        <a:gradFill>
-          <a:gsLst>
-            <a:gs pos="0">
-              <a:schemeClr val="phClr">
-                <a:tint val="67000"/>
-                <a:lumMod val="110000"/>
-                <a:satMod val="105000"/>
-              </a:schemeClr>
-            </a:gs>
-            <a:gs pos="50000">
-              <a:schemeClr val="phClr">
-                <a:tint val="73000"/>
-                <a:lumMod val="105000"/>
-                <a:satMod val="103000"/>
-              </a:schemeClr>
-            </a:gs>
-            <a:gs pos="100000">
-              <a:schemeClr val="phClr">
-                <a:tint val="81000"/>
-                <a:lumMod val="105000"/>
-                <a:satMod val="109000"/>
-              </a:schemeClr>
-            </a:gs>
-          </a:gsLst>
-          <a:lin ang="5400000" scaled="0"/>
-        </a:gradFill>
-        <a:gradFill>
-          <a:gsLst>
-            <a:gs pos="0">
-              <a:schemeClr val="phClr">
-                <a:tint val="94000"/>
-                <a:lumMod val="102000"/>
-                <a:satMod val="103000"/>
-              </a:schemeClr>
-            </a:gs>
-            <a:gs pos="50000">
-              <a:schemeClr val="phClr">
-                <a:shade val="100000"/>
-                <a:lumMod val="100000"/>
-                <a:satMod val="110000"/>
-              </a:schemeClr>
-            </a:gs>
-            <a:gs pos="100000">
-              <a:schemeClr val="phClr">
-                <a:shade val="78000"/>
-                <a:lumMod val="99000"/>
-                <a:satMod val="120000"/>
-              </a:schemeClr>
-            </a:gs>
-          </a:gsLst>
-          <a:lin ang="5400000" scaled="0"/>
-        </a:gradFill>
-      </a:fillStyleLst>
-      <a:lnStyleLst>
-        <a:ln w="12700">
-          <a:solidFill>
-            <a:schemeClr val="phClr"/>
-          </a:solidFill>
-          <a:prstDash val="solid"/>
-        </a:ln>
-        <a:ln w="19050">
-          <a:solidFill>
-            <a:schemeClr val="phClr"/>
-          </a:solidFill>
-          <a:prstDash val="solid"/>
-        </a:ln>
-        <a:ln w="25400">
-          <a:solidFill>
-            <a:schemeClr val="phClr"/>
-          </a:solidFill>
-          <a:prstDash val="solid"/>
-        </a:ln>
-      </a:lnStyleLst>
-      <a:effectStyleLst>
-        <a:effectStyle>
-          <a:effectLst/>
-        </a:effectStyle>
-        <a:effectStyle>
-          <a:effectLst/>
-        </a:effectStyle>
-        <a:effectStyle>
-          <a:effectLst>
-            <a:outerShdw blurRad="57150" dist="19050" dir="5400000">
-              <a:srgbClr val="000000">
-                <a:alpha val="16000"/>
-              </a:srgbClr>
-            </a:outerShdw>
-          </a:effectLst>
-        </a:effectStyle>
-        <a:effectStyle>
-          <a:effectLst>
-            <a:outerShdw blurRad="19050" dist="9525" dir="5400000">
-              <a:srgbClr val="000000">
-                <a:alpha val="6000"/>
-              </a:srgbClr>
-            </a:outerShdw>
-          </a:effectLst>
-        </a:effectStyle>
-        <a:effectStyle>
-          <a:effectLst>
-            <a:outerShdw blurRad="28575" dist="9525" dir="5400000">
-              <a:srgbClr val="000000">
-                <a:alpha val="8000"/>
-              </a:srgbClr>
-            </a:outerShdw>
-          </a:effectLst>
-        </a:effectStyle>
-        <a:effectStyle>
-          <a:effectLst>
-            <a:outerShdw blurRad="57150" dist="19050" dir="5400000">
-              <a:srgbClr val="000000">
-                <a:alpha val="10000"/>
-              </a:srgbClr>
-            </a:outerShdw>
-          </a:effectLst>
-        </a:effectStyle>
-        <a:effectStyle>
-          <a:effectLst>
-            <a:outerShdw blurRad="114300" dist="38100" dir="5400000">
-              <a:srgbClr val="000000">
-                <a:alpha val="12000"/>
-              </a:srgbClr>
-            </a:outerShdw>
-          </a:effectLst>
-        </a:effectStyle>
-        <a:effectStyle>
-          <a:effectLst>
-            <a:outerShdw blurRad="171450" dist="57150" dir="5400000">
-              <a:srgbClr val="000000">
-                <a:alpha val="16000"/>
-              </a:srgbClr>
-            </a:outerShdw>
-          </a:effectLst>
-        </a:effectStyle>
-        <a:effectStyle>
-          <a:effectLst>
-            <a:outerShdw blurRad="266700" dist="95250" dir="5400000">
-              <a:srgbClr val="000000">
-                <a:alpha val="24000"/>
-              </a:srgbClr>
-            </a:outerShdw>
-          </a:effectLst>
-        </a:effectStyle>
-      </a:effectStyleLst>
-      <a:bgFillStyleLst>
-        <a:solidFill>
-          <a:schemeClr val="phClr"/>
-        </a:solidFill>
-        <a:solidFill>
-          <a:schemeClr val="phClr">
-            <a:tint val="95000"/>
-            <a:satMod val="170000"/>
-          </a:schemeClr>
-        </a:solidFill>
-        <a:gradFill>
-          <a:gsLst>
-            <a:gs pos="0">
-              <a:schemeClr val="phClr">
-                <a:tint val="93000"/>
-                <a:shade val="98000"/>
-                <a:lumMod val="102000"/>
-                <a:satMod val="150000"/>
-              </a:schemeClr>
-            </a:gs>
-            <a:gs pos="50000">
-              <a:schemeClr val="phClr">
-                <a:tint val="98000"/>
-                <a:shade val="90000"/>
-                <a:lumMod val="103000"/>
-                <a:satMod val="130000"/>
-              </a:schemeClr>
-            </a:gs>
-            <a:gs pos="100000">
-              <a:schemeClr val="phClr">
-                <a:shade val="63000"/>
-                <a:satMod val="120000"/>
-              </a:schemeClr>
-            </a:gs>
-          </a:gsLst>
-          <a:lin ang="5400000" scaled="0"/>
-        </a:gradFill>
-      </a:bgFillStyleLst>
-    </a:fmtScheme>
-  </a:themeElements>
-</a:theme>
-</file>
-
 <file path=ppt/slides/slide1.xml><?xml version="1.0" encoding="utf-8"?>
-<p:sld xmlns:p="http://schemas.openxmlformats.org/presentationml/2006/main">
+<p:sld xmlns:a="http://schemas.openxmlformats.org/drawingml/2006/main" xmlns:r="http://schemas.openxmlformats.org/officeDocument/2006/relationships" xmlns:p="http://schemas.openxmlformats.org/presentationml/2006/main">
   <p:cSld>
     <p:bg>
       <p:bgPr>
-        <a:solidFill xmlns:a="http://schemas.openxmlformats.org/drawingml/2006/main">
+        <a:solidFill>
           <a:srgbClr val="142B2A"/>
         </a:solidFill>
+        <a:effectLst/>
       </p:bgPr>
     </p:bg>
     <p:spTree>
@@ -2083,41 +1799,46 @@
         <p:nvPr/>
       </p:nvGrpSpPr>
       <p:grpSpPr>
-        <a:xfrm xmlns:a="http://schemas.openxmlformats.org/drawingml/2006/main"/>
+        <a:xfrm>
+          <a:off x="0" y="0"/>
+          <a:ext cx="0" cy="0"/>
+          <a:chOff x="0" y="0"/>
+          <a:chExt cx="0" cy="0"/>
+        </a:xfrm>
       </p:grpSpPr>
       <p:sp>
         <p:nvSpPr>
-          <p:cNvPr id="7" name="">
-            <a:extLst xmlns:a="http://schemas.openxmlformats.org/drawingml/2006/main">
+          <p:cNvPr id="7" name="Rectangle 6">
+            <a:extLst>
               <a:ext uri="{FF2B5EF4-FFF2-40B4-BE49-F238E27FC236}">
                 <a16:creationId xmlns:a16="http://schemas.microsoft.com/office/drawing/2014/main" id="{9AB77E83-5F70-4FF4-91DF-5289FCCE9F6C}"/>
               </a:ext>
             </a:extLst>
           </p:cNvPr>
           <p:cNvSpPr>
-            <a:spLocks xmlns:a="http://schemas.openxmlformats.org/drawingml/2006/main" noGrp="1"/>
+            <a:spLocks noGrp="1"/>
           </p:cNvSpPr>
           <p:nvPr/>
         </p:nvSpPr>
         <p:spPr>
-          <a:xfrm xmlns:a="http://schemas.openxmlformats.org/drawingml/2006/main">
+          <a:xfrm>
             <a:off x="11106150" y="6296025"/>
             <a:ext cx="476250" cy="285750"/>
           </a:xfrm>
-          <a:prstGeom xmlns:a="http://schemas.openxmlformats.org/drawingml/2006/main" prst="rect">
+          <a:prstGeom prst="rect">
             <a:avLst/>
           </a:prstGeom>
-          <a:noFill xmlns:a="http://schemas.openxmlformats.org/drawingml/2006/main"/>
-          <a:ln xmlns:a="http://schemas.openxmlformats.org/drawingml/2006/main" w="0">
+          <a:noFill/>
+          <a:ln w="0">
             <a:noFill/>
           </a:ln>
         </p:spPr>
         <p:txBody>
-          <a:bodyPr xmlns:a="http://schemas.openxmlformats.org/drawingml/2006/main" wrap="square" lIns="0" tIns="0" rIns="0" bIns="0">
+          <a:bodyPr wrap="square" lIns="0" tIns="0" rIns="0" bIns="0">
             <a:noAutofit/>
           </a:bodyPr>
-          <a:lstStyle xmlns:a="http://schemas.openxmlformats.org/drawingml/2006/main"/>
-          <a:p xmlns:a="http://schemas.openxmlformats.org/drawingml/2006/main">
+          <a:lstStyle/>
+          <a:p>
             <a:pPr algn="r">
               <a:buNone/>
               <a:defRPr sz="1500" b="0">
@@ -2145,37 +1866,37 @@
       </p:sp>
       <p:sp>
         <p:nvSpPr>
-          <p:cNvPr id="2" name="">
-            <a:extLst xmlns:a="http://schemas.openxmlformats.org/drawingml/2006/main">
+          <p:cNvPr id="2" name="Rectangle 1">
+            <a:extLst>
               <a:ext uri="{FF2B5EF4-FFF2-40B4-BE49-F238E27FC236}">
                 <a16:creationId xmlns:a16="http://schemas.microsoft.com/office/drawing/2014/main" id="{919CFA94-FA21-4BAC-8D8F-7A9AE5B14094}"/>
               </a:ext>
             </a:extLst>
           </p:cNvPr>
           <p:cNvSpPr>
-            <a:spLocks xmlns:a="http://schemas.openxmlformats.org/drawingml/2006/main" noGrp="1"/>
+            <a:spLocks noGrp="1"/>
           </p:cNvSpPr>
           <p:nvPr/>
         </p:nvSpPr>
         <p:spPr>
-          <a:xfrm xmlns:a="http://schemas.openxmlformats.org/drawingml/2006/main">
+          <a:xfrm>
             <a:off x="609600" y="1257300"/>
             <a:ext cx="10972800" cy="1162050"/>
           </a:xfrm>
-          <a:prstGeom xmlns:a="http://schemas.openxmlformats.org/drawingml/2006/main" prst="rect">
+          <a:prstGeom prst="rect">
             <a:avLst/>
           </a:prstGeom>
-          <a:noFill xmlns:a="http://schemas.openxmlformats.org/drawingml/2006/main"/>
-          <a:ln xmlns:a="http://schemas.openxmlformats.org/drawingml/2006/main" w="0">
+          <a:noFill/>
+          <a:ln w="0">
             <a:noFill/>
           </a:ln>
         </p:spPr>
         <p:txBody>
-          <a:bodyPr xmlns:a="http://schemas.openxmlformats.org/drawingml/2006/main" wrap="square" lIns="0" tIns="0" rIns="0" bIns="0">
+          <a:bodyPr wrap="square" lIns="0" tIns="0" rIns="0" bIns="0">
             <a:noAutofit/>
           </a:bodyPr>
-          <a:lstStyle xmlns:a="http://schemas.openxmlformats.org/drawingml/2006/main"/>
-          <a:p xmlns:a="http://schemas.openxmlformats.org/drawingml/2006/main">
+          <a:lstStyle/>
+          <a:p>
             <a:pPr algn="l">
               <a:buNone/>
               <a:defRPr sz="7800" b="1">
@@ -2203,37 +1924,37 @@
       </p:sp>
       <p:sp>
         <p:nvSpPr>
-          <p:cNvPr id="3" name="">
-            <a:extLst xmlns:a="http://schemas.openxmlformats.org/drawingml/2006/main">
+          <p:cNvPr id="3" name="Rectangle 2">
+            <a:extLst>
               <a:ext uri="{FF2B5EF4-FFF2-40B4-BE49-F238E27FC236}">
                 <a16:creationId xmlns:a16="http://schemas.microsoft.com/office/drawing/2014/main" id="{5F09B892-A56F-44B5-ACB9-EC1D7AE2D7CC}"/>
               </a:ext>
             </a:extLst>
           </p:cNvPr>
           <p:cNvSpPr>
-            <a:spLocks xmlns:a="http://schemas.openxmlformats.org/drawingml/2006/main" noGrp="1"/>
+            <a:spLocks noGrp="1"/>
           </p:cNvSpPr>
           <p:nvPr/>
         </p:nvSpPr>
         <p:spPr>
-          <a:xfrm xmlns:a="http://schemas.openxmlformats.org/drawingml/2006/main">
+          <a:xfrm>
             <a:off x="647700" y="2724150"/>
             <a:ext cx="10668000" cy="838200"/>
           </a:xfrm>
-          <a:prstGeom xmlns:a="http://schemas.openxmlformats.org/drawingml/2006/main" prst="rect">
+          <a:prstGeom prst="rect">
             <a:avLst/>
           </a:prstGeom>
-          <a:noFill xmlns:a="http://schemas.openxmlformats.org/drawingml/2006/main"/>
-          <a:ln xmlns:a="http://schemas.openxmlformats.org/drawingml/2006/main" w="0">
+          <a:noFill/>
+          <a:ln w="0">
             <a:noFill/>
           </a:ln>
         </p:spPr>
         <p:txBody>
-          <a:bodyPr xmlns:a="http://schemas.openxmlformats.org/drawingml/2006/main" wrap="square" lIns="0" tIns="0" rIns="0" bIns="0">
+          <a:bodyPr wrap="square" lIns="0" tIns="0" rIns="0" bIns="0">
             <a:noAutofit/>
           </a:bodyPr>
-          <a:lstStyle xmlns:a="http://schemas.openxmlformats.org/drawingml/2006/main"/>
-          <a:p xmlns:a="http://schemas.openxmlformats.org/drawingml/2006/main">
+          <a:lstStyle/>
+          <a:p>
             <a:pPr algn="l">
               <a:buNone/>
               <a:defRPr sz="3600" b="0">
@@ -2261,37 +1982,37 @@
       </p:sp>
       <p:sp>
         <p:nvSpPr>
-          <p:cNvPr id="4" name="">
-            <a:extLst xmlns:a="http://schemas.openxmlformats.org/drawingml/2006/main">
+          <p:cNvPr id="4" name="Rectangle 3">
+            <a:extLst>
               <a:ext uri="{FF2B5EF4-FFF2-40B4-BE49-F238E27FC236}">
                 <a16:creationId xmlns:a16="http://schemas.microsoft.com/office/drawing/2014/main" id="{6890BC1D-D3A7-4DF5-91A9-254519CD0C2E}"/>
               </a:ext>
             </a:extLst>
           </p:cNvPr>
           <p:cNvSpPr>
-            <a:spLocks xmlns:a="http://schemas.openxmlformats.org/drawingml/2006/main" noGrp="1"/>
+            <a:spLocks noGrp="1"/>
           </p:cNvSpPr>
           <p:nvPr/>
         </p:nvSpPr>
         <p:spPr>
-          <a:xfrm xmlns:a="http://schemas.openxmlformats.org/drawingml/2006/main">
+          <a:xfrm>
             <a:off x="647700" y="3905250"/>
             <a:ext cx="10668000" cy="523875"/>
           </a:xfrm>
-          <a:prstGeom xmlns:a="http://schemas.openxmlformats.org/drawingml/2006/main" prst="rect">
+          <a:prstGeom prst="rect">
             <a:avLst/>
           </a:prstGeom>
-          <a:noFill xmlns:a="http://schemas.openxmlformats.org/drawingml/2006/main"/>
-          <a:ln xmlns:a="http://schemas.openxmlformats.org/drawingml/2006/main" w="0">
+          <a:noFill/>
+          <a:ln w="0">
             <a:noFill/>
           </a:ln>
         </p:spPr>
         <p:txBody>
-          <a:bodyPr xmlns:a="http://schemas.openxmlformats.org/drawingml/2006/main" wrap="square" lIns="0" tIns="0" rIns="0" bIns="0">
+          <a:bodyPr wrap="square" lIns="0" tIns="0" rIns="0" bIns="0">
             <a:noAutofit/>
           </a:bodyPr>
-          <a:lstStyle xmlns:a="http://schemas.openxmlformats.org/drawingml/2006/main"/>
-          <a:p xmlns:a="http://schemas.openxmlformats.org/drawingml/2006/main">
+          <a:lstStyle/>
+          <a:p>
             <a:pPr algn="l">
               <a:buNone/>
               <a:defRPr sz="2250" b="0">
@@ -2319,37 +2040,37 @@
       </p:sp>
       <p:sp>
         <p:nvSpPr>
-          <p:cNvPr id="5" name="">
-            <a:extLst xmlns:a="http://schemas.openxmlformats.org/drawingml/2006/main">
+          <p:cNvPr id="5" name="Rectangle 4">
+            <a:extLst>
               <a:ext uri="{FF2B5EF4-FFF2-40B4-BE49-F238E27FC236}">
                 <a16:creationId xmlns:a16="http://schemas.microsoft.com/office/drawing/2014/main" id="{D34DCBE1-4B91-4CF8-8B9F-7A0C4212DF0C}"/>
               </a:ext>
             </a:extLst>
           </p:cNvPr>
           <p:cNvSpPr>
-            <a:spLocks xmlns:a="http://schemas.openxmlformats.org/drawingml/2006/main" noGrp="1"/>
+            <a:spLocks noGrp="1"/>
           </p:cNvSpPr>
           <p:nvPr/>
         </p:nvSpPr>
         <p:spPr>
-          <a:xfrm xmlns:a="http://schemas.openxmlformats.org/drawingml/2006/main">
+          <a:xfrm>
             <a:off x="647700" y="4638675"/>
             <a:ext cx="10668000" cy="428625"/>
           </a:xfrm>
-          <a:prstGeom xmlns:a="http://schemas.openxmlformats.org/drawingml/2006/main" prst="rect">
+          <a:prstGeom prst="rect">
             <a:avLst/>
           </a:prstGeom>
-          <a:noFill xmlns:a="http://schemas.openxmlformats.org/drawingml/2006/main"/>
-          <a:ln xmlns:a="http://schemas.openxmlformats.org/drawingml/2006/main" w="0">
+          <a:noFill/>
+          <a:ln w="0">
             <a:noFill/>
           </a:ln>
         </p:spPr>
         <p:txBody>
-          <a:bodyPr xmlns:a="http://schemas.openxmlformats.org/drawingml/2006/main" wrap="square" lIns="0" tIns="0" rIns="0" bIns="0">
+          <a:bodyPr wrap="square" lIns="0" tIns="0" rIns="0" bIns="0">
             <a:noAutofit/>
           </a:bodyPr>
-          <a:lstStyle xmlns:a="http://schemas.openxmlformats.org/drawingml/2006/main"/>
-          <a:p xmlns:a="http://schemas.openxmlformats.org/drawingml/2006/main">
+          <a:lstStyle/>
+          <a:p>
             <a:pPr algn="l">
               <a:buNone/>
               <a:defRPr sz="1950" b="0">
@@ -2377,36 +2098,36 @@
       </p:sp>
       <p:sp>
         <p:nvSpPr>
-          <p:cNvPr id="6" name="">
-            <a:extLst xmlns:a="http://schemas.openxmlformats.org/drawingml/2006/main">
+          <p:cNvPr id="6" name="Rectangle 5">
+            <a:extLst>
               <a:ext uri="{FF2B5EF4-FFF2-40B4-BE49-F238E27FC236}">
                 <a16:creationId xmlns:a16="http://schemas.microsoft.com/office/drawing/2014/main" id="{84650A0C-D94E-4EF2-8B92-6763F06F0B76}"/>
               </a:ext>
             </a:extLst>
           </p:cNvPr>
           <p:cNvSpPr>
-            <a:spLocks xmlns:a="http://schemas.openxmlformats.org/drawingml/2006/main" noGrp="1"/>
+            <a:spLocks noGrp="1"/>
           </p:cNvSpPr>
           <p:nvPr/>
         </p:nvSpPr>
         <p:spPr>
-          <a:xfrm xmlns:a="http://schemas.openxmlformats.org/drawingml/2006/main">
+          <a:xfrm>
             <a:off x="647700" y="5514975"/>
             <a:ext cx="10001250" cy="742950"/>
           </a:xfrm>
-          <a:prstGeom xmlns:a="http://schemas.openxmlformats.org/drawingml/2006/main" prst="rect">
+          <a:prstGeom prst="rect">
             <a:avLst/>
           </a:prstGeom>
-          <a:noFill xmlns:a="http://schemas.openxmlformats.org/drawingml/2006/main"/>
-          <a:ln xmlns:a="http://schemas.openxmlformats.org/drawingml/2006/main" w="0">
+          <a:noFill/>
+          <a:ln w="0">
             <a:noFill/>
           </a:ln>
         </p:spPr>
         <p:txBody>
-          <a:bodyPr xmlns:a="http://schemas.openxmlformats.org/drawingml/2006/main" wrap="square" lIns="0" tIns="0" rIns="0" bIns="0">
+          <a:bodyPr wrap="square" lIns="0" tIns="0" rIns="0" bIns="0">
             <a:noAutofit/>
           </a:bodyPr>
-          <a:lstStyle xmlns:a="http://schemas.openxmlformats.org/drawingml/2006/main">
+          <a:lstStyle>
             <a:defPPr algn="l">
               <a:defRPr sz="1800">
                 <a:solidFill>
@@ -2418,7 +2139,7 @@
               </a:defRPr>
             </a:defPPr>
           </a:lstStyle>
-          <a:p xmlns:a="http://schemas.openxmlformats.org/drawingml/2006/main">
+          <a:p>
             <a:pPr algn="l">
               <a:buNone/>
               <a:defRPr sz="1800" b="0">
@@ -2442,7 +2163,7 @@
               <a:t>Natdanai Phurintanachot (67070230)</a:t>
             </a:r>
           </a:p>
-          <a:p xmlns:a="http://schemas.openxmlformats.org/drawingml/2006/main">
+          <a:p>
             <a:pPr algn="l">
               <a:buNone/>
               <a:defRPr sz="1800" b="0">
@@ -2475,17 +2196,21 @@
       </p:ext>
     </p:extLst>
   </p:cSld>
+  <p:clrMapOvr>
+    <a:masterClrMapping/>
+  </p:clrMapOvr>
 </p:sld>
 </file>
 
 <file path=ppt/slides/slide10.xml><?xml version="1.0" encoding="utf-8"?>
-<p:sld xmlns:p="http://schemas.openxmlformats.org/presentationml/2006/main">
+<p:sld xmlns:a="http://schemas.openxmlformats.org/drawingml/2006/main" xmlns:r="http://schemas.openxmlformats.org/officeDocument/2006/relationships" xmlns:p="http://schemas.openxmlformats.org/presentationml/2006/main">
   <p:cSld>
     <p:bg>
       <p:bgPr>
-        <a:solidFill xmlns:a="http://schemas.openxmlformats.org/drawingml/2006/main">
+        <a:solidFill>
           <a:srgbClr val="FFFFFF"/>
         </a:solidFill>
+        <a:effectLst/>
       </p:bgPr>
     </p:bg>
     <p:spTree>
@@ -2495,41 +2220,46 @@
         <p:nvPr/>
       </p:nvGrpSpPr>
       <p:grpSpPr>
-        <a:xfrm xmlns:a="http://schemas.openxmlformats.org/drawingml/2006/main"/>
+        <a:xfrm>
+          <a:off x="0" y="0"/>
+          <a:ext cx="0" cy="0"/>
+          <a:chOff x="0" y="0"/>
+          <a:chExt cx="0" cy="0"/>
+        </a:xfrm>
       </p:grpSpPr>
       <p:sp>
         <p:nvSpPr>
-          <p:cNvPr id="10" name="">
-            <a:extLst xmlns:a="http://schemas.openxmlformats.org/drawingml/2006/main">
+          <p:cNvPr id="10" name="Rectangle 9">
+            <a:extLst>
               <a:ext uri="{FF2B5EF4-FFF2-40B4-BE49-F238E27FC236}">
                 <a16:creationId xmlns:a16="http://schemas.microsoft.com/office/drawing/2014/main" id="{F5749FE3-850B-4FF2-A742-C90BE7CA38DA}"/>
               </a:ext>
             </a:extLst>
           </p:cNvPr>
           <p:cNvSpPr>
-            <a:spLocks xmlns:a="http://schemas.openxmlformats.org/drawingml/2006/main" noGrp="1"/>
+            <a:spLocks noGrp="1"/>
           </p:cNvSpPr>
           <p:nvPr/>
         </p:nvSpPr>
         <p:spPr>
-          <a:xfrm xmlns:a="http://schemas.openxmlformats.org/drawingml/2006/main">
+          <a:xfrm>
             <a:off x="609600" y="457200"/>
             <a:ext cx="10972800" cy="857250"/>
           </a:xfrm>
-          <a:prstGeom xmlns:a="http://schemas.openxmlformats.org/drawingml/2006/main" prst="rect">
+          <a:prstGeom prst="rect">
             <a:avLst/>
           </a:prstGeom>
-          <a:noFill xmlns:a="http://schemas.openxmlformats.org/drawingml/2006/main"/>
-          <a:ln xmlns:a="http://schemas.openxmlformats.org/drawingml/2006/main" w="0">
+          <a:noFill/>
+          <a:ln w="0">
             <a:noFill/>
           </a:ln>
         </p:spPr>
         <p:txBody>
-          <a:bodyPr xmlns:a="http://schemas.openxmlformats.org/drawingml/2006/main" wrap="square" lIns="0" tIns="0" rIns="0" bIns="0">
+          <a:bodyPr wrap="square" lIns="0" tIns="0" rIns="0" bIns="0">
             <a:noAutofit/>
           </a:bodyPr>
-          <a:lstStyle xmlns:a="http://schemas.openxmlformats.org/drawingml/2006/main"/>
-          <a:p xmlns:a="http://schemas.openxmlformats.org/drawingml/2006/main">
+          <a:lstStyle/>
+          <a:p>
             <a:pPr algn="l">
               <a:buNone/>
               <a:defRPr sz="3300" b="1">
@@ -2557,37 +2287,37 @@
       </p:sp>
       <p:sp>
         <p:nvSpPr>
-          <p:cNvPr id="2" name="">
-            <a:extLst xmlns:a="http://schemas.openxmlformats.org/drawingml/2006/main">
+          <p:cNvPr id="2" name="Rectangle 1">
+            <a:extLst>
               <a:ext uri="{FF2B5EF4-FFF2-40B4-BE49-F238E27FC236}">
                 <a16:creationId xmlns:a16="http://schemas.microsoft.com/office/drawing/2014/main" id="{EEBC83E2-0AC9-4171-A866-F493E0D62C55}"/>
               </a:ext>
             </a:extLst>
           </p:cNvPr>
           <p:cNvSpPr>
-            <a:spLocks xmlns:a="http://schemas.openxmlformats.org/drawingml/2006/main" noGrp="1"/>
+            <a:spLocks noGrp="1"/>
           </p:cNvSpPr>
           <p:nvPr/>
         </p:nvSpPr>
         <p:spPr>
-          <a:xfrm xmlns:a="http://schemas.openxmlformats.org/drawingml/2006/main">
+          <a:xfrm>
             <a:off x="11106150" y="6296025"/>
             <a:ext cx="476250" cy="285750"/>
           </a:xfrm>
-          <a:prstGeom xmlns:a="http://schemas.openxmlformats.org/drawingml/2006/main" prst="rect">
+          <a:prstGeom prst="rect">
             <a:avLst/>
           </a:prstGeom>
-          <a:noFill xmlns:a="http://schemas.openxmlformats.org/drawingml/2006/main"/>
-          <a:ln xmlns:a="http://schemas.openxmlformats.org/drawingml/2006/main" w="0">
+          <a:noFill/>
+          <a:ln w="0">
             <a:noFill/>
           </a:ln>
         </p:spPr>
         <p:txBody>
-          <a:bodyPr xmlns:a="http://schemas.openxmlformats.org/drawingml/2006/main" wrap="square" lIns="0" tIns="0" rIns="0" bIns="0">
+          <a:bodyPr wrap="square" lIns="0" tIns="0" rIns="0" bIns="0">
             <a:noAutofit/>
           </a:bodyPr>
-          <a:lstStyle xmlns:a="http://schemas.openxmlformats.org/drawingml/2006/main"/>
-          <a:p xmlns:a="http://schemas.openxmlformats.org/drawingml/2006/main">
+          <a:lstStyle/>
+          <a:p>
             <a:pPr algn="r">
               <a:buNone/>
               <a:defRPr sz="1500" b="0">
@@ -2615,37 +2345,37 @@
       </p:sp>
       <p:sp>
         <p:nvSpPr>
-          <p:cNvPr id="3" name="">
-            <a:extLst xmlns:a="http://schemas.openxmlformats.org/drawingml/2006/main">
+          <p:cNvPr id="3" name="Rectangle 2">
+            <a:extLst>
               <a:ext uri="{FF2B5EF4-FFF2-40B4-BE49-F238E27FC236}">
                 <a16:creationId xmlns:a16="http://schemas.microsoft.com/office/drawing/2014/main" id="{09A7C948-BB94-44AA-90E5-3E896F631CA3}"/>
               </a:ext>
             </a:extLst>
           </p:cNvPr>
           <p:cNvSpPr>
-            <a:spLocks xmlns:a="http://schemas.openxmlformats.org/drawingml/2006/main" noGrp="1"/>
+            <a:spLocks noGrp="1"/>
           </p:cNvSpPr>
           <p:nvPr/>
         </p:nvSpPr>
         <p:spPr>
-          <a:xfrm xmlns:a="http://schemas.openxmlformats.org/drawingml/2006/main">
+          <a:xfrm>
             <a:off x="609600" y="1619250"/>
             <a:ext cx="6858000" cy="476250"/>
           </a:xfrm>
-          <a:prstGeom xmlns:a="http://schemas.openxmlformats.org/drawingml/2006/main" prst="rect">
+          <a:prstGeom prst="rect">
             <a:avLst/>
           </a:prstGeom>
-          <a:noFill xmlns:a="http://schemas.openxmlformats.org/drawingml/2006/main"/>
-          <a:ln xmlns:a="http://schemas.openxmlformats.org/drawingml/2006/main" w="0">
+          <a:noFill/>
+          <a:ln w="0">
             <a:noFill/>
           </a:ln>
         </p:spPr>
         <p:txBody>
-          <a:bodyPr xmlns:a="http://schemas.openxmlformats.org/drawingml/2006/main" wrap="square" lIns="0" tIns="0" rIns="0" bIns="0">
+          <a:bodyPr wrap="square" lIns="0" tIns="0" rIns="0" bIns="0">
             <a:noAutofit/>
           </a:bodyPr>
-          <a:lstStyle xmlns:a="http://schemas.openxmlformats.org/drawingml/2006/main"/>
-          <a:p xmlns:a="http://schemas.openxmlformats.org/drawingml/2006/main">
+          <a:lstStyle/>
+          <a:p>
             <a:pPr algn="l">
               <a:buNone/>
               <a:defRPr sz="2400" b="1">
@@ -2673,37 +2403,37 @@
       </p:sp>
       <p:sp>
         <p:nvSpPr>
-          <p:cNvPr id="4" name="">
-            <a:extLst xmlns:a="http://schemas.openxmlformats.org/drawingml/2006/main">
+          <p:cNvPr id="4" name="Rectangle 3">
+            <a:extLst>
               <a:ext uri="{FF2B5EF4-FFF2-40B4-BE49-F238E27FC236}">
                 <a16:creationId xmlns:a16="http://schemas.microsoft.com/office/drawing/2014/main" id="{7D646553-7A8A-417B-BFE9-3A320EDAE4B9}"/>
               </a:ext>
             </a:extLst>
           </p:cNvPr>
           <p:cNvSpPr>
-            <a:spLocks xmlns:a="http://schemas.openxmlformats.org/drawingml/2006/main" noGrp="1"/>
+            <a:spLocks noGrp="1"/>
           </p:cNvSpPr>
           <p:nvPr/>
         </p:nvSpPr>
         <p:spPr>
-          <a:xfrm xmlns:a="http://schemas.openxmlformats.org/drawingml/2006/main">
+          <a:xfrm>
             <a:off x="609600" y="2324100"/>
             <a:ext cx="10972800" cy="457200"/>
           </a:xfrm>
-          <a:prstGeom xmlns:a="http://schemas.openxmlformats.org/drawingml/2006/main" prst="rect">
+          <a:prstGeom prst="rect">
             <a:avLst/>
           </a:prstGeom>
-          <a:noFill xmlns:a="http://schemas.openxmlformats.org/drawingml/2006/main"/>
-          <a:ln xmlns:a="http://schemas.openxmlformats.org/drawingml/2006/main" w="0">
+          <a:noFill/>
+          <a:ln w="0">
             <a:noFill/>
           </a:ln>
         </p:spPr>
         <p:txBody>
-          <a:bodyPr xmlns:a="http://schemas.openxmlformats.org/drawingml/2006/main" wrap="square" lIns="0" tIns="0" rIns="0" bIns="0">
+          <a:bodyPr wrap="square" lIns="0" tIns="0" rIns="0" bIns="0">
             <a:noAutofit/>
           </a:bodyPr>
-          <a:lstStyle xmlns:a="http://schemas.openxmlformats.org/drawingml/2006/main"/>
-          <a:p xmlns:a="http://schemas.openxmlformats.org/drawingml/2006/main">
+          <a:lstStyle/>
+          <a:p>
             <a:pPr algn="l">
               <a:buNone/>
               <a:defRPr sz="2175" b="0">
@@ -2731,37 +2461,37 @@
       </p:sp>
       <p:sp>
         <p:nvSpPr>
-          <p:cNvPr id="5" name="">
-            <a:extLst xmlns:a="http://schemas.openxmlformats.org/drawingml/2006/main">
+          <p:cNvPr id="5" name="Rectangle 4">
+            <a:extLst>
               <a:ext uri="{FF2B5EF4-FFF2-40B4-BE49-F238E27FC236}">
                 <a16:creationId xmlns:a16="http://schemas.microsoft.com/office/drawing/2014/main" id="{C3539958-689E-4124-BAD4-5A9ECEA9E239}"/>
               </a:ext>
             </a:extLst>
           </p:cNvPr>
           <p:cNvSpPr>
-            <a:spLocks xmlns:a="http://schemas.openxmlformats.org/drawingml/2006/main" noGrp="1"/>
+            <a:spLocks noGrp="1"/>
           </p:cNvSpPr>
           <p:nvPr/>
         </p:nvSpPr>
         <p:spPr>
-          <a:xfrm xmlns:a="http://schemas.openxmlformats.org/drawingml/2006/main">
+          <a:xfrm>
             <a:off x="609600" y="2962275"/>
             <a:ext cx="10972800" cy="457200"/>
           </a:xfrm>
-          <a:prstGeom xmlns:a="http://schemas.openxmlformats.org/drawingml/2006/main" prst="rect">
+          <a:prstGeom prst="rect">
             <a:avLst/>
           </a:prstGeom>
-          <a:noFill xmlns:a="http://schemas.openxmlformats.org/drawingml/2006/main"/>
-          <a:ln xmlns:a="http://schemas.openxmlformats.org/drawingml/2006/main" w="0">
+          <a:noFill/>
+          <a:ln w="0">
             <a:noFill/>
           </a:ln>
         </p:spPr>
         <p:txBody>
-          <a:bodyPr xmlns:a="http://schemas.openxmlformats.org/drawingml/2006/main" wrap="square" lIns="0" tIns="0" rIns="0" bIns="0">
+          <a:bodyPr wrap="square" lIns="0" tIns="0" rIns="0" bIns="0">
             <a:noAutofit/>
           </a:bodyPr>
-          <a:lstStyle xmlns:a="http://schemas.openxmlformats.org/drawingml/2006/main"/>
-          <a:p xmlns:a="http://schemas.openxmlformats.org/drawingml/2006/main">
+          <a:lstStyle/>
+          <a:p>
             <a:pPr algn="l">
               <a:buNone/>
               <a:defRPr sz="2175" b="0">
@@ -2789,37 +2519,37 @@
       </p:sp>
       <p:sp>
         <p:nvSpPr>
-          <p:cNvPr id="6" name="">
-            <a:extLst xmlns:a="http://schemas.openxmlformats.org/drawingml/2006/main">
+          <p:cNvPr id="6" name="Rectangle 5">
+            <a:extLst>
               <a:ext uri="{FF2B5EF4-FFF2-40B4-BE49-F238E27FC236}">
                 <a16:creationId xmlns:a16="http://schemas.microsoft.com/office/drawing/2014/main" id="{76DED348-36FD-42EA-9FB0-83DFED43D686}"/>
               </a:ext>
             </a:extLst>
           </p:cNvPr>
           <p:cNvSpPr>
-            <a:spLocks xmlns:a="http://schemas.openxmlformats.org/drawingml/2006/main" noGrp="1"/>
+            <a:spLocks noGrp="1"/>
           </p:cNvSpPr>
           <p:nvPr/>
         </p:nvSpPr>
         <p:spPr>
-          <a:xfrm xmlns:a="http://schemas.openxmlformats.org/drawingml/2006/main">
+          <a:xfrm>
             <a:off x="609600" y="3600450"/>
             <a:ext cx="10972800" cy="619125"/>
           </a:xfrm>
-          <a:prstGeom xmlns:a="http://schemas.openxmlformats.org/drawingml/2006/main" prst="rect">
+          <a:prstGeom prst="rect">
             <a:avLst/>
           </a:prstGeom>
-          <a:noFill xmlns:a="http://schemas.openxmlformats.org/drawingml/2006/main"/>
-          <a:ln xmlns:a="http://schemas.openxmlformats.org/drawingml/2006/main" w="0">
+          <a:noFill/>
+          <a:ln w="0">
             <a:noFill/>
           </a:ln>
         </p:spPr>
         <p:txBody>
-          <a:bodyPr xmlns:a="http://schemas.openxmlformats.org/drawingml/2006/main" wrap="square" lIns="0" tIns="0" rIns="0" bIns="0">
+          <a:bodyPr wrap="square" lIns="0" tIns="0" rIns="0" bIns="0">
             <a:noAutofit/>
           </a:bodyPr>
-          <a:lstStyle xmlns:a="http://schemas.openxmlformats.org/drawingml/2006/main"/>
-          <a:p xmlns:a="http://schemas.openxmlformats.org/drawingml/2006/main">
+          <a:lstStyle/>
+          <a:p>
             <a:pPr algn="l">
               <a:buNone/>
               <a:defRPr sz="2175" b="0">
@@ -2847,37 +2577,37 @@
       </p:sp>
       <p:sp>
         <p:nvSpPr>
-          <p:cNvPr id="7" name="">
-            <a:extLst xmlns:a="http://schemas.openxmlformats.org/drawingml/2006/main">
+          <p:cNvPr id="7" name="Rectangle 6">
+            <a:extLst>
               <a:ext uri="{FF2B5EF4-FFF2-40B4-BE49-F238E27FC236}">
                 <a16:creationId xmlns:a16="http://schemas.microsoft.com/office/drawing/2014/main" id="{72A0A79B-389E-4257-A1B1-8FA6126FB4BA}"/>
               </a:ext>
             </a:extLst>
           </p:cNvPr>
           <p:cNvSpPr>
-            <a:spLocks xmlns:a="http://schemas.openxmlformats.org/drawingml/2006/main" noGrp="1"/>
+            <a:spLocks noGrp="1"/>
           </p:cNvSpPr>
           <p:nvPr/>
         </p:nvSpPr>
         <p:spPr>
-          <a:xfrm xmlns:a="http://schemas.openxmlformats.org/drawingml/2006/main">
+          <a:xfrm>
             <a:off x="609600" y="4562475"/>
             <a:ext cx="10972800" cy="476250"/>
           </a:xfrm>
-          <a:prstGeom xmlns:a="http://schemas.openxmlformats.org/drawingml/2006/main" prst="rect">
+          <a:prstGeom prst="rect">
             <a:avLst/>
           </a:prstGeom>
-          <a:noFill xmlns:a="http://schemas.openxmlformats.org/drawingml/2006/main"/>
-          <a:ln xmlns:a="http://schemas.openxmlformats.org/drawingml/2006/main" w="0">
+          <a:noFill/>
+          <a:ln w="0">
             <a:noFill/>
           </a:ln>
         </p:spPr>
         <p:txBody>
-          <a:bodyPr xmlns:a="http://schemas.openxmlformats.org/drawingml/2006/main" wrap="square" lIns="0" tIns="0" rIns="0" bIns="0">
+          <a:bodyPr wrap="square" lIns="0" tIns="0" rIns="0" bIns="0">
             <a:noAutofit/>
           </a:bodyPr>
-          <a:lstStyle xmlns:a="http://schemas.openxmlformats.org/drawingml/2006/main"/>
-          <a:p xmlns:a="http://schemas.openxmlformats.org/drawingml/2006/main">
+          <a:lstStyle/>
+          <a:p>
             <a:pPr algn="l">
               <a:buNone/>
               <a:defRPr sz="2400" b="1">
@@ -2905,37 +2635,37 @@
       </p:sp>
       <p:sp>
         <p:nvSpPr>
-          <p:cNvPr id="8" name="">
-            <a:extLst xmlns:a="http://schemas.openxmlformats.org/drawingml/2006/main">
+          <p:cNvPr id="8" name="Rectangle 7">
+            <a:extLst>
               <a:ext uri="{FF2B5EF4-FFF2-40B4-BE49-F238E27FC236}">
                 <a16:creationId xmlns:a16="http://schemas.microsoft.com/office/drawing/2014/main" id="{2519538D-749E-4D9B-ACB5-A4A0E20A1C62}"/>
               </a:ext>
             </a:extLst>
           </p:cNvPr>
           <p:cNvSpPr>
-            <a:spLocks xmlns:a="http://schemas.openxmlformats.org/drawingml/2006/main" noGrp="1"/>
+            <a:spLocks noGrp="1"/>
           </p:cNvSpPr>
           <p:nvPr/>
         </p:nvSpPr>
         <p:spPr>
-          <a:xfrm xmlns:a="http://schemas.openxmlformats.org/drawingml/2006/main">
+          <a:xfrm>
             <a:off x="609600" y="5238750"/>
             <a:ext cx="10972800" cy="809625"/>
           </a:xfrm>
-          <a:prstGeom xmlns:a="http://schemas.openxmlformats.org/drawingml/2006/main" prst="rect">
+          <a:prstGeom prst="rect">
             <a:avLst/>
           </a:prstGeom>
-          <a:noFill xmlns:a="http://schemas.openxmlformats.org/drawingml/2006/main"/>
-          <a:ln xmlns:a="http://schemas.openxmlformats.org/drawingml/2006/main" w="0">
+          <a:noFill/>
+          <a:ln w="0">
             <a:noFill/>
           </a:ln>
         </p:spPr>
         <p:txBody>
-          <a:bodyPr xmlns:a="http://schemas.openxmlformats.org/drawingml/2006/main" wrap="square" lIns="0" tIns="0" rIns="0" bIns="0">
+          <a:bodyPr wrap="square" lIns="0" tIns="0" rIns="0" bIns="0">
             <a:noAutofit/>
           </a:bodyPr>
-          <a:lstStyle xmlns:a="http://schemas.openxmlformats.org/drawingml/2006/main"/>
-          <a:p xmlns:a="http://schemas.openxmlformats.org/drawingml/2006/main">
+          <a:lstStyle/>
+          <a:p>
             <a:pPr algn="l">
               <a:buNone/>
               <a:defRPr sz="2100" b="0">
@@ -2959,7 +2689,7 @@
               <a:t>The old scorer credited a refusal that repeated a number.</a:t>
             </a:r>
           </a:p>
-          <a:p xmlns:a="http://schemas.openxmlformats.org/drawingml/2006/main">
+          <a:p>
             <a:pPr algn="l">
               <a:buNone/>
               <a:defRPr sz="2100" b="0">
@@ -2987,37 +2717,37 @@
       </p:sp>
       <p:sp>
         <p:nvSpPr>
-          <p:cNvPr id="9" name="">
-            <a:extLst xmlns:a="http://schemas.openxmlformats.org/drawingml/2006/main">
+          <p:cNvPr id="9" name="Rectangle 8">
+            <a:extLst>
               <a:ext uri="{FF2B5EF4-FFF2-40B4-BE49-F238E27FC236}">
                 <a16:creationId xmlns:a16="http://schemas.microsoft.com/office/drawing/2014/main" id="{38F1FE97-3F23-4DE4-8197-FFFA85DDE4D1}"/>
               </a:ext>
             </a:extLst>
           </p:cNvPr>
           <p:cNvSpPr>
-            <a:spLocks xmlns:a="http://schemas.openxmlformats.org/drawingml/2006/main" noGrp="1"/>
+            <a:spLocks noGrp="1"/>
           </p:cNvSpPr>
           <p:nvPr/>
         </p:nvSpPr>
         <p:spPr>
-          <a:xfrm xmlns:a="http://schemas.openxmlformats.org/drawingml/2006/main">
+          <a:xfrm>
             <a:off x="609600" y="6219825"/>
             <a:ext cx="10382250" cy="381000"/>
           </a:xfrm>
-          <a:prstGeom xmlns:a="http://schemas.openxmlformats.org/drawingml/2006/main" prst="rect">
+          <a:prstGeom prst="rect">
             <a:avLst/>
           </a:prstGeom>
-          <a:noFill xmlns:a="http://schemas.openxmlformats.org/drawingml/2006/main"/>
-          <a:ln xmlns:a="http://schemas.openxmlformats.org/drawingml/2006/main" w="0">
+          <a:noFill/>
+          <a:ln w="0">
             <a:noFill/>
           </a:ln>
         </p:spPr>
         <p:txBody>
-          <a:bodyPr xmlns:a="http://schemas.openxmlformats.org/drawingml/2006/main" wrap="square" lIns="0" tIns="0" rIns="0" bIns="0">
+          <a:bodyPr wrap="square" lIns="0" tIns="0" rIns="0" bIns="0">
             <a:noAutofit/>
           </a:bodyPr>
-          <a:lstStyle xmlns:a="http://schemas.openxmlformats.org/drawingml/2006/main"/>
-          <a:p xmlns:a="http://schemas.openxmlformats.org/drawingml/2006/main">
+          <a:lstStyle/>
+          <a:p>
             <a:pPr algn="l">
               <a:buNone/>
               <a:defRPr sz="1575" b="0">
@@ -3050,17 +2780,21 @@
       </p:ext>
     </p:extLst>
   </p:cSld>
+  <p:clrMapOvr>
+    <a:masterClrMapping/>
+  </p:clrMapOvr>
 </p:sld>
 </file>
 
 <file path=ppt/slides/slide2.xml><?xml version="1.0" encoding="utf-8"?>
-<p:sld xmlns:p="http://schemas.openxmlformats.org/presentationml/2006/main">
+<p:sld xmlns:a="http://schemas.openxmlformats.org/drawingml/2006/main" xmlns:r="http://schemas.openxmlformats.org/officeDocument/2006/relationships" xmlns:p="http://schemas.openxmlformats.org/presentationml/2006/main">
   <p:cSld>
     <p:bg>
       <p:bgPr>
-        <a:solidFill xmlns:a="http://schemas.openxmlformats.org/drawingml/2006/main">
+        <a:solidFill>
           <a:srgbClr val="FFFFFF"/>
         </a:solidFill>
+        <a:effectLst/>
       </p:bgPr>
     </p:bg>
     <p:spTree>
@@ -3070,41 +2804,46 @@
         <p:nvPr/>
       </p:nvGrpSpPr>
       <p:grpSpPr>
-        <a:xfrm xmlns:a="http://schemas.openxmlformats.org/drawingml/2006/main"/>
+        <a:xfrm>
+          <a:off x="0" y="0"/>
+          <a:ext cx="0" cy="0"/>
+          <a:chOff x="0" y="0"/>
+          <a:chExt cx="0" cy="0"/>
+        </a:xfrm>
       </p:grpSpPr>
       <p:sp>
         <p:nvSpPr>
-          <p:cNvPr id="10" name="">
-            <a:extLst xmlns:a="http://schemas.openxmlformats.org/drawingml/2006/main">
+          <p:cNvPr id="10" name="Rectangle 9">
+            <a:extLst>
               <a:ext uri="{FF2B5EF4-FFF2-40B4-BE49-F238E27FC236}">
                 <a16:creationId xmlns:a16="http://schemas.microsoft.com/office/drawing/2014/main" id="{FB67D864-2AFB-4087-8ADC-9A72EF895952}"/>
               </a:ext>
             </a:extLst>
           </p:cNvPr>
           <p:cNvSpPr>
-            <a:spLocks xmlns:a="http://schemas.openxmlformats.org/drawingml/2006/main" noGrp="1"/>
+            <a:spLocks noGrp="1"/>
           </p:cNvSpPr>
           <p:nvPr/>
         </p:nvSpPr>
         <p:spPr>
-          <a:xfrm xmlns:a="http://schemas.openxmlformats.org/drawingml/2006/main">
+          <a:xfrm>
             <a:off x="609600" y="457200"/>
             <a:ext cx="10972800" cy="857250"/>
           </a:xfrm>
-          <a:prstGeom xmlns:a="http://schemas.openxmlformats.org/drawingml/2006/main" prst="rect">
+          <a:prstGeom prst="rect">
             <a:avLst/>
           </a:prstGeom>
-          <a:noFill xmlns:a="http://schemas.openxmlformats.org/drawingml/2006/main"/>
-          <a:ln xmlns:a="http://schemas.openxmlformats.org/drawingml/2006/main" w="0">
+          <a:noFill/>
+          <a:ln w="0">
             <a:noFill/>
           </a:ln>
         </p:spPr>
         <p:txBody>
-          <a:bodyPr xmlns:a="http://schemas.openxmlformats.org/drawingml/2006/main" wrap="square" lIns="0" tIns="0" rIns="0" bIns="0">
+          <a:bodyPr wrap="square" lIns="0" tIns="0" rIns="0" bIns="0">
             <a:noAutofit/>
           </a:bodyPr>
-          <a:lstStyle xmlns:a="http://schemas.openxmlformats.org/drawingml/2006/main"/>
-          <a:p xmlns:a="http://schemas.openxmlformats.org/drawingml/2006/main">
+          <a:lstStyle/>
+          <a:p>
             <a:pPr algn="l">
               <a:buNone/>
               <a:defRPr sz="3300" b="1">
@@ -3132,37 +2871,37 @@
       </p:sp>
       <p:sp>
         <p:nvSpPr>
-          <p:cNvPr id="2" name="">
-            <a:extLst xmlns:a="http://schemas.openxmlformats.org/drawingml/2006/main">
+          <p:cNvPr id="2" name="Rectangle 1">
+            <a:extLst>
               <a:ext uri="{FF2B5EF4-FFF2-40B4-BE49-F238E27FC236}">
                 <a16:creationId xmlns:a16="http://schemas.microsoft.com/office/drawing/2014/main" id="{A837B5C6-D1C6-4636-8F38-D1CF1E9E0F4B}"/>
               </a:ext>
             </a:extLst>
           </p:cNvPr>
           <p:cNvSpPr>
-            <a:spLocks xmlns:a="http://schemas.openxmlformats.org/drawingml/2006/main" noGrp="1"/>
+            <a:spLocks noGrp="1"/>
           </p:cNvSpPr>
           <p:nvPr/>
         </p:nvSpPr>
         <p:spPr>
-          <a:xfrm xmlns:a="http://schemas.openxmlformats.org/drawingml/2006/main">
+          <a:xfrm>
             <a:off x="11106150" y="6296025"/>
             <a:ext cx="476250" cy="285750"/>
           </a:xfrm>
-          <a:prstGeom xmlns:a="http://schemas.openxmlformats.org/drawingml/2006/main" prst="rect">
+          <a:prstGeom prst="rect">
             <a:avLst/>
           </a:prstGeom>
-          <a:noFill xmlns:a="http://schemas.openxmlformats.org/drawingml/2006/main"/>
-          <a:ln xmlns:a="http://schemas.openxmlformats.org/drawingml/2006/main" w="0">
+          <a:noFill/>
+          <a:ln w="0">
             <a:noFill/>
           </a:ln>
         </p:spPr>
         <p:txBody>
-          <a:bodyPr xmlns:a="http://schemas.openxmlformats.org/drawingml/2006/main" wrap="square" lIns="0" tIns="0" rIns="0" bIns="0">
+          <a:bodyPr wrap="square" lIns="0" tIns="0" rIns="0" bIns="0">
             <a:noAutofit/>
           </a:bodyPr>
-          <a:lstStyle xmlns:a="http://schemas.openxmlformats.org/drawingml/2006/main"/>
-          <a:p xmlns:a="http://schemas.openxmlformats.org/drawingml/2006/main">
+          <a:lstStyle/>
+          <a:p>
             <a:pPr algn="r">
               <a:buNone/>
               <a:defRPr sz="1500" b="0">
@@ -3190,37 +2929,37 @@
       </p:sp>
       <p:sp>
         <p:nvSpPr>
-          <p:cNvPr id="3" name="">
-            <a:extLst xmlns:a="http://schemas.openxmlformats.org/drawingml/2006/main">
+          <p:cNvPr id="3" name="Rectangle 2">
+            <a:extLst>
               <a:ext uri="{FF2B5EF4-FFF2-40B4-BE49-F238E27FC236}">
                 <a16:creationId xmlns:a16="http://schemas.microsoft.com/office/drawing/2014/main" id="{58E6040D-3460-4892-950F-9EDF16DE2037}"/>
               </a:ext>
             </a:extLst>
           </p:cNvPr>
           <p:cNvSpPr>
-            <a:spLocks xmlns:a="http://schemas.openxmlformats.org/drawingml/2006/main" noGrp="1"/>
+            <a:spLocks noGrp="1"/>
           </p:cNvSpPr>
           <p:nvPr/>
         </p:nvSpPr>
         <p:spPr>
-          <a:xfrm xmlns:a="http://schemas.openxmlformats.org/drawingml/2006/main">
+          <a:xfrm>
             <a:off x="609600" y="1828800"/>
             <a:ext cx="4905375" cy="476250"/>
           </a:xfrm>
-          <a:prstGeom xmlns:a="http://schemas.openxmlformats.org/drawingml/2006/main" prst="rect">
+          <a:prstGeom prst="rect">
             <a:avLst/>
           </a:prstGeom>
-          <a:noFill xmlns:a="http://schemas.openxmlformats.org/drawingml/2006/main"/>
-          <a:ln xmlns:a="http://schemas.openxmlformats.org/drawingml/2006/main" w="0">
+          <a:noFill/>
+          <a:ln w="0">
             <a:noFill/>
           </a:ln>
         </p:spPr>
         <p:txBody>
-          <a:bodyPr xmlns:a="http://schemas.openxmlformats.org/drawingml/2006/main" wrap="square" lIns="0" tIns="0" rIns="0" bIns="0">
+          <a:bodyPr wrap="square" lIns="0" tIns="0" rIns="0" bIns="0">
             <a:noAutofit/>
           </a:bodyPr>
-          <a:lstStyle xmlns:a="http://schemas.openxmlformats.org/drawingml/2006/main"/>
-          <a:p xmlns:a="http://schemas.openxmlformats.org/drawingml/2006/main">
+          <a:lstStyle/>
+          <a:p>
             <a:pPr algn="l">
               <a:buNone/>
               <a:defRPr sz="2400" b="1">
@@ -3248,37 +2987,37 @@
       </p:sp>
       <p:sp>
         <p:nvSpPr>
-          <p:cNvPr id="4" name="">
-            <a:extLst xmlns:a="http://schemas.openxmlformats.org/drawingml/2006/main">
+          <p:cNvPr id="4" name="Rectangle 3">
+            <a:extLst>
               <a:ext uri="{FF2B5EF4-FFF2-40B4-BE49-F238E27FC236}">
                 <a16:creationId xmlns:a16="http://schemas.microsoft.com/office/drawing/2014/main" id="{67ACDE35-640A-47D0-AEF3-55C1B0827BDC}"/>
               </a:ext>
             </a:extLst>
           </p:cNvPr>
           <p:cNvSpPr>
-            <a:spLocks xmlns:a="http://schemas.openxmlformats.org/drawingml/2006/main" noGrp="1"/>
+            <a:spLocks noGrp="1"/>
           </p:cNvSpPr>
           <p:nvPr/>
         </p:nvSpPr>
         <p:spPr>
-          <a:xfrm xmlns:a="http://schemas.openxmlformats.org/drawingml/2006/main">
+          <a:xfrm>
             <a:off x="609600" y="2447925"/>
             <a:ext cx="4762500" cy="1047750"/>
           </a:xfrm>
-          <a:prstGeom xmlns:a="http://schemas.openxmlformats.org/drawingml/2006/main" prst="rect">
+          <a:prstGeom prst="rect">
             <a:avLst/>
           </a:prstGeom>
-          <a:noFill xmlns:a="http://schemas.openxmlformats.org/drawingml/2006/main"/>
-          <a:ln xmlns:a="http://schemas.openxmlformats.org/drawingml/2006/main" w="0">
+          <a:noFill/>
+          <a:ln w="0">
             <a:noFill/>
           </a:ln>
         </p:spPr>
         <p:txBody>
-          <a:bodyPr xmlns:a="http://schemas.openxmlformats.org/drawingml/2006/main" wrap="square" lIns="0" tIns="0" rIns="0" bIns="0">
+          <a:bodyPr wrap="square" lIns="0" tIns="0" rIns="0" bIns="0">
             <a:noAutofit/>
           </a:bodyPr>
-          <a:lstStyle xmlns:a="http://schemas.openxmlformats.org/drawingml/2006/main"/>
-          <a:p xmlns:a="http://schemas.openxmlformats.org/drawingml/2006/main">
+          <a:lstStyle/>
+          <a:p>
             <a:pPr algn="l">
               <a:buNone/>
               <a:defRPr sz="2700" b="0">
@@ -3302,7 +3041,7 @@
               <a:t>Wiki pages mix editions</a:t>
             </a:r>
           </a:p>
-          <a:p xmlns:a="http://schemas.openxmlformats.org/drawingml/2006/main">
+          <a:p>
             <a:pPr algn="l">
               <a:buNone/>
               <a:defRPr sz="2700" b="0">
@@ -3330,37 +3069,37 @@
       </p:sp>
       <p:sp>
         <p:nvSpPr>
-          <p:cNvPr id="5" name="">
-            <a:extLst xmlns:a="http://schemas.openxmlformats.org/drawingml/2006/main">
+          <p:cNvPr id="5" name="Rectangle 4">
+            <a:extLst>
               <a:ext uri="{FF2B5EF4-FFF2-40B4-BE49-F238E27FC236}">
                 <a16:creationId xmlns:a16="http://schemas.microsoft.com/office/drawing/2014/main" id="{97792C42-A584-43E2-91D5-2AFEFD587604}"/>
               </a:ext>
             </a:extLst>
           </p:cNvPr>
           <p:cNvSpPr>
-            <a:spLocks xmlns:a="http://schemas.openxmlformats.org/drawingml/2006/main" noGrp="1"/>
+            <a:spLocks noGrp="1"/>
           </p:cNvSpPr>
           <p:nvPr/>
         </p:nvSpPr>
         <p:spPr>
-          <a:xfrm xmlns:a="http://schemas.openxmlformats.org/drawingml/2006/main">
+          <a:xfrm>
             <a:off x="609600" y="3971925"/>
             <a:ext cx="4762500" cy="990600"/>
           </a:xfrm>
-          <a:prstGeom xmlns:a="http://schemas.openxmlformats.org/drawingml/2006/main" prst="rect">
+          <a:prstGeom prst="rect">
             <a:avLst/>
           </a:prstGeom>
-          <a:noFill xmlns:a="http://schemas.openxmlformats.org/drawingml/2006/main"/>
-          <a:ln xmlns:a="http://schemas.openxmlformats.org/drawingml/2006/main" w="0">
+          <a:noFill/>
+          <a:ln w="0">
             <a:noFill/>
           </a:ln>
         </p:spPr>
         <p:txBody>
-          <a:bodyPr xmlns:a="http://schemas.openxmlformats.org/drawingml/2006/main" wrap="square" lIns="0" tIns="0" rIns="0" bIns="0">
+          <a:bodyPr wrap="square" lIns="0" tIns="0" rIns="0" bIns="0">
             <a:noAutofit/>
           </a:bodyPr>
-          <a:lstStyle xmlns:a="http://schemas.openxmlformats.org/drawingml/2006/main"/>
-          <a:p xmlns:a="http://schemas.openxmlformats.org/drawingml/2006/main">
+          <a:lstStyle/>
+          <a:p>
             <a:pPr algn="l">
               <a:buNone/>
               <a:defRPr sz="2250" b="0">
@@ -3384,7 +3123,7 @@
               <a:t>Retrieve passages and</a:t>
             </a:r>
           </a:p>
-          <a:p xmlns:a="http://schemas.openxmlformats.org/drawingml/2006/main">
+          <a:p>
             <a:pPr algn="l">
               <a:buNone/>
               <a:defRPr sz="2250" b="0">
@@ -3412,37 +3151,37 @@
       </p:sp>
       <p:sp>
         <p:nvSpPr>
-          <p:cNvPr id="6" name="">
-            <a:extLst xmlns:a="http://schemas.openxmlformats.org/drawingml/2006/main">
+          <p:cNvPr id="6" name="Rectangle 5">
+            <a:extLst>
               <a:ext uri="{FF2B5EF4-FFF2-40B4-BE49-F238E27FC236}">
                 <a16:creationId xmlns:a16="http://schemas.microsoft.com/office/drawing/2014/main" id="{5C1C6D2C-9CFE-4AE3-AA4F-A4D3B5960D11}"/>
               </a:ext>
             </a:extLst>
           </p:cNvPr>
           <p:cNvSpPr>
-            <a:spLocks xmlns:a="http://schemas.openxmlformats.org/drawingml/2006/main" noGrp="1"/>
+            <a:spLocks noGrp="1"/>
           </p:cNvSpPr>
           <p:nvPr/>
         </p:nvSpPr>
         <p:spPr>
-          <a:xfrm xmlns:a="http://schemas.openxmlformats.org/drawingml/2006/main">
+          <a:xfrm>
             <a:off x="6343650" y="1828800"/>
             <a:ext cx="5238750" cy="476250"/>
           </a:xfrm>
-          <a:prstGeom xmlns:a="http://schemas.openxmlformats.org/drawingml/2006/main" prst="rect">
+          <a:prstGeom prst="rect">
             <a:avLst/>
           </a:prstGeom>
-          <a:noFill xmlns:a="http://schemas.openxmlformats.org/drawingml/2006/main"/>
-          <a:ln xmlns:a="http://schemas.openxmlformats.org/drawingml/2006/main" w="0">
+          <a:noFill/>
+          <a:ln w="0">
             <a:noFill/>
           </a:ln>
         </p:spPr>
         <p:txBody>
-          <a:bodyPr xmlns:a="http://schemas.openxmlformats.org/drawingml/2006/main" wrap="square" lIns="0" tIns="0" rIns="0" bIns="0">
+          <a:bodyPr wrap="square" lIns="0" tIns="0" rIns="0" bIns="0">
             <a:noAutofit/>
           </a:bodyPr>
-          <a:lstStyle xmlns:a="http://schemas.openxmlformats.org/drawingml/2006/main"/>
-          <a:p xmlns:a="http://schemas.openxmlformats.org/drawingml/2006/main">
+          <a:lstStyle/>
+          <a:p>
             <a:pPr algn="l">
               <a:buNone/>
               <a:defRPr sz="2400" b="1">
@@ -3470,37 +3209,37 @@
       </p:sp>
       <p:sp>
         <p:nvSpPr>
-          <p:cNvPr id="7" name="">
-            <a:extLst xmlns:a="http://schemas.openxmlformats.org/drawingml/2006/main">
+          <p:cNvPr id="7" name="Rectangle 6">
+            <a:extLst>
               <a:ext uri="{FF2B5EF4-FFF2-40B4-BE49-F238E27FC236}">
                 <a16:creationId xmlns:a16="http://schemas.microsoft.com/office/drawing/2014/main" id="{1AD10B65-0280-4380-B912-DDAE31977914}"/>
               </a:ext>
             </a:extLst>
           </p:cNvPr>
           <p:cNvSpPr>
-            <a:spLocks xmlns:a="http://schemas.openxmlformats.org/drawingml/2006/main" noGrp="1"/>
+            <a:spLocks noGrp="1"/>
           </p:cNvSpPr>
           <p:nvPr/>
         </p:nvSpPr>
         <p:spPr>
-          <a:xfrm xmlns:a="http://schemas.openxmlformats.org/drawingml/2006/main">
+          <a:xfrm>
             <a:off x="6343650" y="2447925"/>
             <a:ext cx="5238750" cy="1047750"/>
           </a:xfrm>
-          <a:prstGeom xmlns:a="http://schemas.openxmlformats.org/drawingml/2006/main" prst="rect">
+          <a:prstGeom prst="rect">
             <a:avLst/>
           </a:prstGeom>
-          <a:noFill xmlns:a="http://schemas.openxmlformats.org/drawingml/2006/main"/>
-          <a:ln xmlns:a="http://schemas.openxmlformats.org/drawingml/2006/main" w="0">
+          <a:noFill/>
+          <a:ln w="0">
             <a:noFill/>
           </a:ln>
         </p:spPr>
         <p:txBody>
-          <a:bodyPr xmlns:a="http://schemas.openxmlformats.org/drawingml/2006/main" wrap="square" lIns="0" tIns="0" rIns="0" bIns="0">
+          <a:bodyPr wrap="square" lIns="0" tIns="0" rIns="0" bIns="0">
             <a:noAutofit/>
           </a:bodyPr>
-          <a:lstStyle xmlns:a="http://schemas.openxmlformats.org/drawingml/2006/main"/>
-          <a:p xmlns:a="http://schemas.openxmlformats.org/drawingml/2006/main">
+          <a:lstStyle/>
+          <a:p>
             <a:pPr algn="l">
               <a:buNone/>
               <a:defRPr sz="2700" b="0">
@@ -3524,7 +3263,7 @@
               <a:t>"How many iron ingots</a:t>
             </a:r>
           </a:p>
-          <a:p xmlns:a="http://schemas.openxmlformats.org/drawingml/2006/main">
+          <a:p>
             <a:pPr algn="l">
               <a:buNone/>
               <a:defRPr sz="2700" b="0">
@@ -3552,37 +3291,37 @@
       </p:sp>
       <p:sp>
         <p:nvSpPr>
-          <p:cNvPr id="8" name="">
-            <a:extLst xmlns:a="http://schemas.openxmlformats.org/drawingml/2006/main">
+          <p:cNvPr id="8" name="Rectangle 7">
+            <a:extLst>
               <a:ext uri="{FF2B5EF4-FFF2-40B4-BE49-F238E27FC236}">
                 <a16:creationId xmlns:a16="http://schemas.microsoft.com/office/drawing/2014/main" id="{6344F1D7-7135-424B-9FD0-E68C765BC8C4}"/>
               </a:ext>
             </a:extLst>
           </p:cNvPr>
           <p:cNvSpPr>
-            <a:spLocks xmlns:a="http://schemas.openxmlformats.org/drawingml/2006/main" noGrp="1"/>
+            <a:spLocks noGrp="1"/>
           </p:cNvSpPr>
           <p:nvPr/>
         </p:nvSpPr>
         <p:spPr>
-          <a:xfrm xmlns:a="http://schemas.openxmlformats.org/drawingml/2006/main">
+          <a:xfrm>
             <a:off x="6343650" y="3971925"/>
             <a:ext cx="5238750" cy="990600"/>
           </a:xfrm>
-          <a:prstGeom xmlns:a="http://schemas.openxmlformats.org/drawingml/2006/main" prst="rect">
+          <a:prstGeom prst="rect">
             <a:avLst/>
           </a:prstGeom>
-          <a:noFill xmlns:a="http://schemas.openxmlformats.org/drawingml/2006/main"/>
-          <a:ln xmlns:a="http://schemas.openxmlformats.org/drawingml/2006/main" w="0">
+          <a:noFill/>
+          <a:ln w="0">
             <a:noFill/>
           </a:ln>
         </p:spPr>
         <p:txBody>
-          <a:bodyPr xmlns:a="http://schemas.openxmlformats.org/drawingml/2006/main" wrap="square" lIns="0" tIns="0" rIns="0" bIns="0">
+          <a:bodyPr wrap="square" lIns="0" tIns="0" rIns="0" bIns="0">
             <a:noAutofit/>
           </a:bodyPr>
-          <a:lstStyle xmlns:a="http://schemas.openxmlformats.org/drawingml/2006/main"/>
-          <a:p xmlns:a="http://schemas.openxmlformats.org/drawingml/2006/main">
+          <a:lstStyle/>
+          <a:p>
             <a:pPr algn="l">
               <a:buNone/>
               <a:defRPr sz="2250" b="0">
@@ -3606,7 +3345,7 @@
               <a:t>Read an official recipe</a:t>
             </a:r>
           </a:p>
-          <a:p xmlns:a="http://schemas.openxmlformats.org/drawingml/2006/main">
+          <a:p>
             <a:pPr algn="l">
               <a:buNone/>
               <a:defRPr sz="2250" b="0">
@@ -3634,37 +3373,37 @@
       </p:sp>
       <p:sp>
         <p:nvSpPr>
-          <p:cNvPr id="9" name="">
-            <a:extLst xmlns:a="http://schemas.openxmlformats.org/drawingml/2006/main">
+          <p:cNvPr id="9" name="Rectangle 8">
+            <a:extLst>
               <a:ext uri="{FF2B5EF4-FFF2-40B4-BE49-F238E27FC236}">
                 <a16:creationId xmlns:a16="http://schemas.microsoft.com/office/drawing/2014/main" id="{74C6E4EA-D4BE-45FE-AA90-2CB48C36B80C}"/>
               </a:ext>
             </a:extLst>
           </p:cNvPr>
           <p:cNvSpPr>
-            <a:spLocks xmlns:a="http://schemas.openxmlformats.org/drawingml/2006/main" noGrp="1"/>
+            <a:spLocks noGrp="1"/>
           </p:cNvSpPr>
           <p:nvPr/>
         </p:nvSpPr>
         <p:spPr>
-          <a:xfrm xmlns:a="http://schemas.openxmlformats.org/drawingml/2006/main">
+          <a:xfrm>
             <a:off x="609600" y="5600700"/>
             <a:ext cx="10820400" cy="552450"/>
           </a:xfrm>
-          <a:prstGeom xmlns:a="http://schemas.openxmlformats.org/drawingml/2006/main" prst="rect">
+          <a:prstGeom prst="rect">
             <a:avLst/>
           </a:prstGeom>
-          <a:noFill xmlns:a="http://schemas.openxmlformats.org/drawingml/2006/main"/>
-          <a:ln xmlns:a="http://schemas.openxmlformats.org/drawingml/2006/main" w="0">
+          <a:noFill/>
+          <a:ln w="0">
             <a:noFill/>
           </a:ln>
         </p:spPr>
         <p:txBody>
-          <a:bodyPr xmlns:a="http://schemas.openxmlformats.org/drawingml/2006/main" wrap="square" lIns="0" tIns="0" rIns="0" bIns="0">
+          <a:bodyPr wrap="square" lIns="0" tIns="0" rIns="0" bIns="0">
             <a:noAutofit/>
           </a:bodyPr>
-          <a:lstStyle xmlns:a="http://schemas.openxmlformats.org/drawingml/2006/main"/>
-          <a:p xmlns:a="http://schemas.openxmlformats.org/drawingml/2006/main">
+          <a:lstStyle/>
+          <a:p>
             <a:pPr algn="l">
               <a:buNone/>
               <a:defRPr sz="1725" b="0">
@@ -3697,17 +3436,21 @@
       </p:ext>
     </p:extLst>
   </p:cSld>
+  <p:clrMapOvr>
+    <a:masterClrMapping/>
+  </p:clrMapOvr>
 </p:sld>
 </file>
 
 <file path=ppt/slides/slide3.xml><?xml version="1.0" encoding="utf-8"?>
-<p:sld xmlns:p="http://schemas.openxmlformats.org/presentationml/2006/main">
+<p:sld xmlns:a="http://schemas.openxmlformats.org/drawingml/2006/main" xmlns:r="http://schemas.openxmlformats.org/officeDocument/2006/relationships" xmlns:p="http://schemas.openxmlformats.org/presentationml/2006/main">
   <p:cSld>
     <p:bg>
       <p:bgPr>
-        <a:solidFill xmlns:a="http://schemas.openxmlformats.org/drawingml/2006/main">
+        <a:solidFill>
           <a:srgbClr val="FFFFFF"/>
         </a:solidFill>
+        <a:effectLst/>
       </p:bgPr>
     </p:bg>
     <p:spTree>
@@ -3717,35 +3460,40 @@
         <p:nvPr/>
       </p:nvGrpSpPr>
       <p:grpSpPr>
-        <a:xfrm xmlns:a="http://schemas.openxmlformats.org/drawingml/2006/main"/>
+        <a:xfrm>
+          <a:off x="0" y="0"/>
+          <a:ext cx="0" cy="0"/>
+          <a:chOff x="0" y="0"/>
+          <a:chExt cx="0" cy="0"/>
+        </a:xfrm>
       </p:grpSpPr>
       <p:cxnSp>
         <p:nvCxnSpPr>
-          <p:cNvPr id="26" name="">
-            <a:extLst xmlns:a="http://schemas.openxmlformats.org/drawingml/2006/main">
+          <p:cNvPr id="26" name="Connector: Elbow 25">
+            <a:extLst>
               <a:ext uri="{FF2B5EF4-FFF2-40B4-BE49-F238E27FC236}">
                 <a16:creationId xmlns:a16="http://schemas.microsoft.com/office/drawing/2014/main" id="{0542C0DA-62E3-4236-A481-71A52E0626CE}"/>
               </a:ext>
             </a:extLst>
           </p:cNvPr>
           <p:cNvCxnSpPr>
-            <a:stCxn xmlns:a="http://schemas.openxmlformats.org/drawingml/2006/main" id="11" idx="2"/>
-            <a:endCxn xmlns:a="http://schemas.openxmlformats.org/drawingml/2006/main" id="18" idx="0"/>
+            <a:stCxn id="11" idx="2"/>
+            <a:endCxn id="18" idx="0"/>
           </p:cNvCxnSpPr>
           <p:nvPr/>
         </p:nvCxnSpPr>
         <p:spPr>
-          <a:xfrm xmlns:a="http://schemas.openxmlformats.org/drawingml/2006/main" flipH="1">
+          <a:xfrm flipH="1">
             <a:off x="9405938" y="4181475"/>
             <a:ext cx="847725" cy="771525"/>
           </a:xfrm>
-          <a:prstGeom xmlns:a="http://schemas.openxmlformats.org/drawingml/2006/main" prst="bentConnector4">
+          <a:prstGeom prst="bentConnector4">
             <a:avLst>
               <a:gd name="adj1" fmla="val 0"/>
               <a:gd name="adj2" fmla="val 50000"/>
             </a:avLst>
           </a:prstGeom>
-          <a:ln xmlns:a="http://schemas.openxmlformats.org/drawingml/2006/main" w="19050">
+          <a:ln w="19050">
             <a:solidFill>
               <a:srgbClr val="24774F"/>
             </a:solidFill>
@@ -3757,31 +3505,31 @@
       </p:cxnSp>
       <p:cxnSp>
         <p:nvCxnSpPr>
-          <p:cNvPr id="27" name="">
-            <a:extLst xmlns:a="http://schemas.openxmlformats.org/drawingml/2006/main">
+          <p:cNvPr id="27" name="Connector: Elbow 26">
+            <a:extLst>
               <a:ext uri="{FF2B5EF4-FFF2-40B4-BE49-F238E27FC236}">
                 <a16:creationId xmlns:a16="http://schemas.microsoft.com/office/drawing/2014/main" id="{113657C3-FCEA-4C06-BE5A-79D7114EC13F}"/>
               </a:ext>
             </a:extLst>
           </p:cNvPr>
           <p:cNvCxnSpPr>
-            <a:stCxn xmlns:a="http://schemas.openxmlformats.org/drawingml/2006/main" id="8" idx="2"/>
-            <a:endCxn xmlns:a="http://schemas.openxmlformats.org/drawingml/2006/main" id="17" idx="0"/>
+            <a:stCxn id="8" idx="2"/>
+            <a:endCxn id="17" idx="0"/>
           </p:cNvCxnSpPr>
           <p:nvPr/>
         </p:nvCxnSpPr>
         <p:spPr>
-          <a:xfrm xmlns:a="http://schemas.openxmlformats.org/drawingml/2006/main">
+          <a:xfrm>
             <a:off x="1724025" y="4181475"/>
             <a:ext cx="3252788" cy="771525"/>
           </a:xfrm>
-          <a:prstGeom xmlns:a="http://schemas.openxmlformats.org/drawingml/2006/main" prst="bentConnector4">
+          <a:prstGeom prst="bentConnector4">
             <a:avLst>
               <a:gd name="adj1" fmla="val 0"/>
               <a:gd name="adj2" fmla="val 50000"/>
             </a:avLst>
           </a:prstGeom>
-          <a:ln xmlns:a="http://schemas.openxmlformats.org/drawingml/2006/main" w="19050">
+          <a:ln w="19050">
             <a:solidFill>
               <a:srgbClr val="24774F"/>
             </a:solidFill>
@@ -3793,28 +3541,28 @@
       </p:cxnSp>
       <p:cxnSp>
         <p:nvCxnSpPr>
-          <p:cNvPr id="28" name="">
-            <a:extLst xmlns:a="http://schemas.openxmlformats.org/drawingml/2006/main">
+          <p:cNvPr id="28" name="Straight Arrow Connector 27">
+            <a:extLst>
               <a:ext uri="{FF2B5EF4-FFF2-40B4-BE49-F238E27FC236}">
                 <a16:creationId xmlns:a16="http://schemas.microsoft.com/office/drawing/2014/main" id="{F1F0CD15-0903-49F4-85AD-5A674B16617C}"/>
               </a:ext>
             </a:extLst>
           </p:cNvPr>
           <p:cNvCxnSpPr>
-            <a:stCxn xmlns:a="http://schemas.openxmlformats.org/drawingml/2006/main" id="17" idx="3"/>
-            <a:endCxn xmlns:a="http://schemas.openxmlformats.org/drawingml/2006/main" id="18" idx="1"/>
+            <a:stCxn id="17" idx="3"/>
+            <a:endCxn id="18" idx="1"/>
           </p:cNvCxnSpPr>
           <p:nvPr/>
         </p:nvCxnSpPr>
         <p:spPr>
-          <a:xfrm xmlns:a="http://schemas.openxmlformats.org/drawingml/2006/main">
+          <a:xfrm>
             <a:off x="6619875" y="5334000"/>
             <a:ext cx="609600" cy="0"/>
           </a:xfrm>
-          <a:prstGeom xmlns:a="http://schemas.openxmlformats.org/drawingml/2006/main" prst="straightConnector1">
+          <a:prstGeom prst="straightConnector1">
             <a:avLst/>
           </a:prstGeom>
-          <a:ln xmlns:a="http://schemas.openxmlformats.org/drawingml/2006/main" w="19050">
+          <a:ln w="19050">
             <a:solidFill>
               <a:srgbClr val="24774F"/>
             </a:solidFill>
@@ -3826,28 +3574,28 @@
       </p:cxnSp>
       <p:cxnSp>
         <p:nvCxnSpPr>
-          <p:cNvPr id="29" name="">
-            <a:extLst xmlns:a="http://schemas.openxmlformats.org/drawingml/2006/main">
+          <p:cNvPr id="29" name="Straight Arrow Connector 28">
+            <a:extLst>
               <a:ext uri="{FF2B5EF4-FFF2-40B4-BE49-F238E27FC236}">
                 <a16:creationId xmlns:a16="http://schemas.microsoft.com/office/drawing/2014/main" id="{9D823F7A-C877-4E00-AE68-FF9590C6CFB7}"/>
               </a:ext>
             </a:extLst>
           </p:cNvPr>
           <p:cNvCxnSpPr>
-            <a:stCxn xmlns:a="http://schemas.openxmlformats.org/drawingml/2006/main" id="16" idx="3"/>
-            <a:endCxn xmlns:a="http://schemas.openxmlformats.org/drawingml/2006/main" id="17" idx="1"/>
+            <a:stCxn id="16" idx="3"/>
+            <a:endCxn id="17" idx="1"/>
           </p:cNvCxnSpPr>
           <p:nvPr/>
         </p:nvCxnSpPr>
         <p:spPr>
-          <a:xfrm xmlns:a="http://schemas.openxmlformats.org/drawingml/2006/main">
+          <a:xfrm>
             <a:off x="2838450" y="5334000"/>
             <a:ext cx="495300" cy="0"/>
           </a:xfrm>
-          <a:prstGeom xmlns:a="http://schemas.openxmlformats.org/drawingml/2006/main" prst="straightConnector1">
+          <a:prstGeom prst="straightConnector1">
             <a:avLst/>
           </a:prstGeom>
-          <a:ln xmlns:a="http://schemas.openxmlformats.org/drawingml/2006/main" w="19050">
+          <a:ln w="19050">
             <a:solidFill>
               <a:srgbClr val="24774F"/>
             </a:solidFill>
@@ -3859,31 +3607,31 @@
       </p:cxnSp>
       <p:cxnSp>
         <p:nvCxnSpPr>
-          <p:cNvPr id="30" name="">
-            <a:extLst xmlns:a="http://schemas.openxmlformats.org/drawingml/2006/main">
+          <p:cNvPr id="30" name="Connector: Elbow 29">
+            <a:extLst>
               <a:ext uri="{FF2B5EF4-FFF2-40B4-BE49-F238E27FC236}">
                 <a16:creationId xmlns:a16="http://schemas.microsoft.com/office/drawing/2014/main" id="{3698A58C-7E46-4A5D-84CF-AF6649D7882F}"/>
               </a:ext>
             </a:extLst>
           </p:cNvPr>
           <p:cNvCxnSpPr>
-            <a:stCxn xmlns:a="http://schemas.openxmlformats.org/drawingml/2006/main" id="5" idx="2"/>
-            <a:endCxn xmlns:a="http://schemas.openxmlformats.org/drawingml/2006/main" id="9" idx="0"/>
+            <a:stCxn id="5" idx="2"/>
+            <a:endCxn id="9" idx="0"/>
           </p:cNvCxnSpPr>
           <p:nvPr/>
         </p:nvCxnSpPr>
         <p:spPr>
-          <a:xfrm xmlns:a="http://schemas.openxmlformats.org/drawingml/2006/main" flipH="1">
+          <a:xfrm flipH="1">
             <a:off x="4429125" y="2419350"/>
             <a:ext cx="2757488" cy="904875"/>
           </a:xfrm>
-          <a:prstGeom xmlns:a="http://schemas.openxmlformats.org/drawingml/2006/main" prst="bentConnector4">
+          <a:prstGeom prst="bentConnector4">
             <a:avLst>
               <a:gd name="adj1" fmla="val 0"/>
               <a:gd name="adj2" fmla="val 50000"/>
             </a:avLst>
           </a:prstGeom>
-          <a:ln xmlns:a="http://schemas.openxmlformats.org/drawingml/2006/main" w="19050">
+          <a:ln w="19050">
             <a:solidFill>
               <a:srgbClr val="24774F"/>
             </a:solidFill>
@@ -3895,28 +3643,28 @@
       </p:cxnSp>
       <p:cxnSp>
         <p:nvCxnSpPr>
-          <p:cNvPr id="31" name="">
-            <a:extLst xmlns:a="http://schemas.openxmlformats.org/drawingml/2006/main">
+          <p:cNvPr id="31" name="Straight Arrow Connector 30">
+            <a:extLst>
               <a:ext uri="{FF2B5EF4-FFF2-40B4-BE49-F238E27FC236}">
                 <a16:creationId xmlns:a16="http://schemas.microsoft.com/office/drawing/2014/main" id="{425E7DFE-312F-43DC-984E-3D3C943EE863}"/>
               </a:ext>
             </a:extLst>
           </p:cNvPr>
           <p:cNvCxnSpPr>
-            <a:stCxn xmlns:a="http://schemas.openxmlformats.org/drawingml/2006/main" id="10" idx="3"/>
-            <a:endCxn xmlns:a="http://schemas.openxmlformats.org/drawingml/2006/main" id="11" idx="1"/>
+            <a:stCxn id="10" idx="3"/>
+            <a:endCxn id="11" idx="1"/>
           </p:cNvCxnSpPr>
           <p:nvPr/>
         </p:nvCxnSpPr>
         <p:spPr>
-          <a:xfrm xmlns:a="http://schemas.openxmlformats.org/drawingml/2006/main">
+          <a:xfrm>
             <a:off x="8353425" y="3752850"/>
             <a:ext cx="571500" cy="0"/>
           </a:xfrm>
-          <a:prstGeom xmlns:a="http://schemas.openxmlformats.org/drawingml/2006/main" prst="straightConnector1">
+          <a:prstGeom prst="straightConnector1">
             <a:avLst/>
           </a:prstGeom>
-          <a:ln xmlns:a="http://schemas.openxmlformats.org/drawingml/2006/main" w="19050">
+          <a:ln w="19050">
             <a:solidFill>
               <a:srgbClr val="24774F"/>
             </a:solidFill>
@@ -3928,28 +3676,28 @@
       </p:cxnSp>
       <p:cxnSp>
         <p:nvCxnSpPr>
-          <p:cNvPr id="32" name="">
-            <a:extLst xmlns:a="http://schemas.openxmlformats.org/drawingml/2006/main">
+          <p:cNvPr id="32" name="Straight Arrow Connector 31">
+            <a:extLst>
               <a:ext uri="{FF2B5EF4-FFF2-40B4-BE49-F238E27FC236}">
                 <a16:creationId xmlns:a16="http://schemas.microsoft.com/office/drawing/2014/main" id="{432AE780-3F48-4262-9045-E4DD0C77EB20}"/>
               </a:ext>
             </a:extLst>
           </p:cNvPr>
           <p:cNvCxnSpPr>
-            <a:stCxn xmlns:a="http://schemas.openxmlformats.org/drawingml/2006/main" id="9" idx="3"/>
-            <a:endCxn xmlns:a="http://schemas.openxmlformats.org/drawingml/2006/main" id="10" idx="1"/>
+            <a:stCxn id="9" idx="3"/>
+            <a:endCxn id="10" idx="1"/>
           </p:cNvCxnSpPr>
           <p:nvPr/>
         </p:nvCxnSpPr>
         <p:spPr>
-          <a:xfrm xmlns:a="http://schemas.openxmlformats.org/drawingml/2006/main">
+          <a:xfrm>
             <a:off x="5524500" y="3752850"/>
             <a:ext cx="495300" cy="0"/>
           </a:xfrm>
-          <a:prstGeom xmlns:a="http://schemas.openxmlformats.org/drawingml/2006/main" prst="straightConnector1">
+          <a:prstGeom prst="straightConnector1">
             <a:avLst/>
           </a:prstGeom>
-          <a:ln xmlns:a="http://schemas.openxmlformats.org/drawingml/2006/main" w="19050">
+          <a:ln w="19050">
             <a:solidFill>
               <a:srgbClr val="24774F"/>
             </a:solidFill>
@@ -3961,28 +3709,28 @@
       </p:cxnSp>
       <p:cxnSp>
         <p:nvCxnSpPr>
-          <p:cNvPr id="33" name="">
-            <a:extLst xmlns:a="http://schemas.openxmlformats.org/drawingml/2006/main">
+          <p:cNvPr id="33" name="Straight Arrow Connector 32">
+            <a:extLst>
               <a:ext uri="{FF2B5EF4-FFF2-40B4-BE49-F238E27FC236}">
                 <a16:creationId xmlns:a16="http://schemas.microsoft.com/office/drawing/2014/main" id="{AD1812CF-928B-4E79-B6FE-8DCAC41D7618}"/>
               </a:ext>
             </a:extLst>
           </p:cNvPr>
           <p:cNvCxnSpPr>
-            <a:stCxn xmlns:a="http://schemas.openxmlformats.org/drawingml/2006/main" id="8" idx="3"/>
-            <a:endCxn xmlns:a="http://schemas.openxmlformats.org/drawingml/2006/main" id="9" idx="1"/>
+            <a:stCxn id="8" idx="3"/>
+            <a:endCxn id="9" idx="1"/>
           </p:cNvCxnSpPr>
           <p:nvPr/>
         </p:nvCxnSpPr>
         <p:spPr>
-          <a:xfrm xmlns:a="http://schemas.openxmlformats.org/drawingml/2006/main">
+          <a:xfrm>
             <a:off x="2838450" y="3752850"/>
             <a:ext cx="495300" cy="0"/>
           </a:xfrm>
-          <a:prstGeom xmlns:a="http://schemas.openxmlformats.org/drawingml/2006/main" prst="straightConnector1">
+          <a:prstGeom prst="straightConnector1">
             <a:avLst/>
           </a:prstGeom>
-          <a:ln xmlns:a="http://schemas.openxmlformats.org/drawingml/2006/main" w="19050">
+          <a:ln w="19050">
             <a:solidFill>
               <a:srgbClr val="24774F"/>
             </a:solidFill>
@@ -3994,28 +3742,28 @@
       </p:cxnSp>
       <p:cxnSp>
         <p:nvCxnSpPr>
-          <p:cNvPr id="34" name="">
-            <a:extLst xmlns:a="http://schemas.openxmlformats.org/drawingml/2006/main">
+          <p:cNvPr id="34" name="Straight Arrow Connector 33">
+            <a:extLst>
               <a:ext uri="{FF2B5EF4-FFF2-40B4-BE49-F238E27FC236}">
                 <a16:creationId xmlns:a16="http://schemas.microsoft.com/office/drawing/2014/main" id="{CDB59689-5C6B-4D47-AEF8-4D86686022A7}"/>
               </a:ext>
             </a:extLst>
           </p:cNvPr>
           <p:cNvCxnSpPr>
-            <a:stCxn xmlns:a="http://schemas.openxmlformats.org/drawingml/2006/main" id="4" idx="3"/>
-            <a:endCxn xmlns:a="http://schemas.openxmlformats.org/drawingml/2006/main" id="5" idx="1"/>
+            <a:stCxn id="4" idx="3"/>
+            <a:endCxn id="5" idx="1"/>
           </p:cNvCxnSpPr>
           <p:nvPr/>
         </p:nvCxnSpPr>
         <p:spPr>
-          <a:xfrm xmlns:a="http://schemas.openxmlformats.org/drawingml/2006/main">
+          <a:xfrm>
             <a:off x="5524500" y="2038350"/>
             <a:ext cx="495300" cy="0"/>
           </a:xfrm>
-          <a:prstGeom xmlns:a="http://schemas.openxmlformats.org/drawingml/2006/main" prst="straightConnector1">
+          <a:prstGeom prst="straightConnector1">
             <a:avLst/>
           </a:prstGeom>
-          <a:ln xmlns:a="http://schemas.openxmlformats.org/drawingml/2006/main" w="19050">
+          <a:ln w="19050">
             <a:solidFill>
               <a:srgbClr val="24774F"/>
             </a:solidFill>
@@ -4027,28 +3775,28 @@
       </p:cxnSp>
       <p:cxnSp>
         <p:nvCxnSpPr>
-          <p:cNvPr id="35" name="">
-            <a:extLst xmlns:a="http://schemas.openxmlformats.org/drawingml/2006/main">
+          <p:cNvPr id="35" name="Straight Arrow Connector 34">
+            <a:extLst>
               <a:ext uri="{FF2B5EF4-FFF2-40B4-BE49-F238E27FC236}">
                 <a16:creationId xmlns:a16="http://schemas.microsoft.com/office/drawing/2014/main" id="{67DBCFF6-2FBB-4508-A18C-FDBB5424519C}"/>
               </a:ext>
             </a:extLst>
           </p:cNvPr>
           <p:cNvCxnSpPr>
-            <a:stCxn xmlns:a="http://schemas.openxmlformats.org/drawingml/2006/main" id="3" idx="3"/>
-            <a:endCxn xmlns:a="http://schemas.openxmlformats.org/drawingml/2006/main" id="4" idx="1"/>
+            <a:stCxn id="3" idx="3"/>
+            <a:endCxn id="4" idx="1"/>
           </p:cNvCxnSpPr>
           <p:nvPr/>
         </p:nvCxnSpPr>
         <p:spPr>
-          <a:xfrm xmlns:a="http://schemas.openxmlformats.org/drawingml/2006/main">
+          <a:xfrm>
             <a:off x="2838450" y="2038350"/>
             <a:ext cx="495300" cy="0"/>
           </a:xfrm>
-          <a:prstGeom xmlns:a="http://schemas.openxmlformats.org/drawingml/2006/main" prst="straightConnector1">
+          <a:prstGeom prst="straightConnector1">
             <a:avLst/>
           </a:prstGeom>
-          <a:ln xmlns:a="http://schemas.openxmlformats.org/drawingml/2006/main" w="19050">
+          <a:ln w="19050">
             <a:solidFill>
               <a:srgbClr val="24774F"/>
             </a:solidFill>
@@ -4060,37 +3808,37 @@
       </p:cxnSp>
       <p:sp>
         <p:nvSpPr>
-          <p:cNvPr id="36" name="">
-            <a:extLst xmlns:a="http://schemas.openxmlformats.org/drawingml/2006/main">
+          <p:cNvPr id="36" name="Rectangle 35">
+            <a:extLst>
               <a:ext uri="{FF2B5EF4-FFF2-40B4-BE49-F238E27FC236}">
                 <a16:creationId xmlns:a16="http://schemas.microsoft.com/office/drawing/2014/main" id="{CB10DBE1-F423-44D7-8B58-ECFF6C7DE9E2}"/>
               </a:ext>
             </a:extLst>
           </p:cNvPr>
           <p:cNvSpPr>
-            <a:spLocks xmlns:a="http://schemas.openxmlformats.org/drawingml/2006/main" noGrp="1"/>
+            <a:spLocks noGrp="1"/>
           </p:cNvSpPr>
           <p:nvPr/>
         </p:nvSpPr>
         <p:spPr>
-          <a:xfrm xmlns:a="http://schemas.openxmlformats.org/drawingml/2006/main">
+          <a:xfrm>
             <a:off x="609600" y="457200"/>
             <a:ext cx="10972800" cy="857250"/>
           </a:xfrm>
-          <a:prstGeom xmlns:a="http://schemas.openxmlformats.org/drawingml/2006/main" prst="rect">
+          <a:prstGeom prst="rect">
             <a:avLst/>
           </a:prstGeom>
-          <a:noFill xmlns:a="http://schemas.openxmlformats.org/drawingml/2006/main"/>
-          <a:ln xmlns:a="http://schemas.openxmlformats.org/drawingml/2006/main" w="0">
+          <a:noFill/>
+          <a:ln w="0">
             <a:noFill/>
           </a:ln>
         </p:spPr>
         <p:txBody>
-          <a:bodyPr xmlns:a="http://schemas.openxmlformats.org/drawingml/2006/main" wrap="square" lIns="0" tIns="0" rIns="0" bIns="0">
+          <a:bodyPr wrap="square" lIns="0" tIns="0" rIns="0" bIns="0">
             <a:noAutofit/>
           </a:bodyPr>
-          <a:lstStyle xmlns:a="http://schemas.openxmlformats.org/drawingml/2006/main"/>
-          <a:p xmlns:a="http://schemas.openxmlformats.org/drawingml/2006/main">
+          <a:lstStyle/>
+          <a:p>
             <a:pPr algn="l">
               <a:buNone/>
               <a:defRPr sz="3300" b="1">
@@ -4118,37 +3866,37 @@
       </p:sp>
       <p:sp>
         <p:nvSpPr>
-          <p:cNvPr id="2" name="">
-            <a:extLst xmlns:a="http://schemas.openxmlformats.org/drawingml/2006/main">
+          <p:cNvPr id="2" name="Rectangle 1">
+            <a:extLst>
               <a:ext uri="{FF2B5EF4-FFF2-40B4-BE49-F238E27FC236}">
                 <a16:creationId xmlns:a16="http://schemas.microsoft.com/office/drawing/2014/main" id="{4FB22AEE-5AD0-4250-A85A-D21FF11CA029}"/>
               </a:ext>
             </a:extLst>
           </p:cNvPr>
           <p:cNvSpPr>
-            <a:spLocks xmlns:a="http://schemas.openxmlformats.org/drawingml/2006/main" noGrp="1"/>
+            <a:spLocks noGrp="1"/>
           </p:cNvSpPr>
           <p:nvPr/>
         </p:nvSpPr>
         <p:spPr>
-          <a:xfrm xmlns:a="http://schemas.openxmlformats.org/drawingml/2006/main">
+          <a:xfrm>
             <a:off x="11106150" y="6296025"/>
             <a:ext cx="476250" cy="285750"/>
           </a:xfrm>
-          <a:prstGeom xmlns:a="http://schemas.openxmlformats.org/drawingml/2006/main" prst="rect">
+          <a:prstGeom prst="rect">
             <a:avLst/>
           </a:prstGeom>
-          <a:noFill xmlns:a="http://schemas.openxmlformats.org/drawingml/2006/main"/>
-          <a:ln xmlns:a="http://schemas.openxmlformats.org/drawingml/2006/main" w="0">
+          <a:noFill/>
+          <a:ln w="0">
             <a:noFill/>
           </a:ln>
         </p:spPr>
         <p:txBody>
-          <a:bodyPr xmlns:a="http://schemas.openxmlformats.org/drawingml/2006/main" wrap="square" lIns="0" tIns="0" rIns="0" bIns="0">
+          <a:bodyPr wrap="square" lIns="0" tIns="0" rIns="0" bIns="0">
             <a:noAutofit/>
           </a:bodyPr>
-          <a:lstStyle xmlns:a="http://schemas.openxmlformats.org/drawingml/2006/main"/>
-          <a:p xmlns:a="http://schemas.openxmlformats.org/drawingml/2006/main">
+          <a:lstStyle/>
+          <a:p>
             <a:pPr algn="r">
               <a:buNone/>
               <a:defRPr sz="1500" b="0">
@@ -4176,41 +3924,41 @@
       </p:sp>
       <p:sp>
         <p:nvSpPr>
-          <p:cNvPr id="3" name="">
-            <a:extLst xmlns:a="http://schemas.openxmlformats.org/drawingml/2006/main">
+          <p:cNvPr id="3" name="Rectangle 2">
+            <a:extLst>
               <a:ext uri="{FF2B5EF4-FFF2-40B4-BE49-F238E27FC236}">
                 <a16:creationId xmlns:a16="http://schemas.microsoft.com/office/drawing/2014/main" id="{5C401804-400D-4CE4-A2CE-62A07A76A620}"/>
               </a:ext>
             </a:extLst>
           </p:cNvPr>
           <p:cNvSpPr>
-            <a:spLocks xmlns:a="http://schemas.openxmlformats.org/drawingml/2006/main" noGrp="1"/>
+            <a:spLocks noGrp="1"/>
           </p:cNvSpPr>
           <p:nvPr/>
         </p:nvSpPr>
         <p:spPr>
-          <a:xfrm xmlns:a="http://schemas.openxmlformats.org/drawingml/2006/main">
+          <a:xfrm>
             <a:off x="609600" y="1657350"/>
             <a:ext cx="2228850" cy="762000"/>
           </a:xfrm>
-          <a:prstGeom xmlns:a="http://schemas.openxmlformats.org/drawingml/2006/main" prst="rect">
+          <a:prstGeom prst="rect">
             <a:avLst/>
           </a:prstGeom>
-          <a:solidFill xmlns:a="http://schemas.openxmlformats.org/drawingml/2006/main">
+          <a:solidFill>
             <a:srgbClr val="EFF5F1"/>
           </a:solidFill>
-          <a:ln xmlns:a="http://schemas.openxmlformats.org/drawingml/2006/main" w="9525">
+          <a:ln w="9525">
             <a:solidFill>
               <a:srgbClr val="B1C8B8"/>
             </a:solidFill>
           </a:ln>
         </p:spPr>
         <p:txBody>
-          <a:bodyPr xmlns:a="http://schemas.openxmlformats.org/drawingml/2006/main" lIns="95250" tIns="76200" rIns="95250" bIns="76200" anchor="ctr">
+          <a:bodyPr lIns="95250" tIns="76200" rIns="95250" bIns="76200" anchor="ctr">
             <a:noAutofit/>
           </a:bodyPr>
-          <a:lstStyle xmlns:a="http://schemas.openxmlformats.org/drawingml/2006/main"/>
-          <a:p xmlns:a="http://schemas.openxmlformats.org/drawingml/2006/main">
+          <a:lstStyle/>
+          <a:p>
             <a:pPr algn="ctr">
               <a:buNone/>
               <a:defRPr sz="1800" b="0">
@@ -4234,7 +3982,7 @@
               <a:t>312 Wiki pages</a:t>
             </a:r>
           </a:p>
-          <a:p xmlns:a="http://schemas.openxmlformats.org/drawingml/2006/main">
+          <a:p>
             <a:pPr algn="ctr">
               <a:buNone/>
               <a:defRPr sz="1800" b="0">
@@ -4262,41 +4010,41 @@
       </p:sp>
       <p:sp>
         <p:nvSpPr>
-          <p:cNvPr id="4" name="">
-            <a:extLst xmlns:a="http://schemas.openxmlformats.org/drawingml/2006/main">
+          <p:cNvPr id="4" name="Rectangle 3">
+            <a:extLst>
               <a:ext uri="{FF2B5EF4-FFF2-40B4-BE49-F238E27FC236}">
                 <a16:creationId xmlns:a16="http://schemas.microsoft.com/office/drawing/2014/main" id="{2A0B2CB6-4B24-40AE-8E0D-A9E04A8649AF}"/>
               </a:ext>
             </a:extLst>
           </p:cNvPr>
           <p:cNvSpPr>
-            <a:spLocks xmlns:a="http://schemas.openxmlformats.org/drawingml/2006/main" noGrp="1"/>
+            <a:spLocks noGrp="1"/>
           </p:cNvSpPr>
           <p:nvPr/>
         </p:nvSpPr>
         <p:spPr>
-          <a:xfrm xmlns:a="http://schemas.openxmlformats.org/drawingml/2006/main">
+          <a:xfrm>
             <a:off x="3333750" y="1657350"/>
             <a:ext cx="2190750" cy="762000"/>
           </a:xfrm>
-          <a:prstGeom xmlns:a="http://schemas.openxmlformats.org/drawingml/2006/main" prst="rect">
+          <a:prstGeom prst="rect">
             <a:avLst/>
           </a:prstGeom>
-          <a:solidFill xmlns:a="http://schemas.openxmlformats.org/drawingml/2006/main">
+          <a:solidFill>
             <a:srgbClr val="EFF5F1"/>
           </a:solidFill>
-          <a:ln xmlns:a="http://schemas.openxmlformats.org/drawingml/2006/main" w="9525">
+          <a:ln w="9525">
             <a:solidFill>
               <a:srgbClr val="B1C8B8"/>
             </a:solidFill>
           </a:ln>
         </p:spPr>
         <p:txBody>
-          <a:bodyPr xmlns:a="http://schemas.openxmlformats.org/drawingml/2006/main" lIns="95250" tIns="76200" rIns="95250" bIns="76200" anchor="ctr">
+          <a:bodyPr lIns="95250" tIns="76200" rIns="95250" bIns="76200" anchor="ctr">
             <a:noAutofit/>
           </a:bodyPr>
-          <a:lstStyle xmlns:a="http://schemas.openxmlformats.org/drawingml/2006/main"/>
-          <a:p xmlns:a="http://schemas.openxmlformats.org/drawingml/2006/main">
+          <a:lstStyle/>
+          <a:p>
             <a:pPr algn="ctr">
               <a:buNone/>
               <a:defRPr sz="1800" b="0">
@@ -4320,7 +4068,7 @@
               <a:t>Clean and chunk</a:t>
             </a:r>
           </a:p>
-          <a:p xmlns:a="http://schemas.openxmlformats.org/drawingml/2006/main">
+          <a:p>
             <a:pPr algn="ctr">
               <a:buNone/>
               <a:defRPr sz="1800" b="0">
@@ -4348,41 +4096,41 @@
       </p:sp>
       <p:sp>
         <p:nvSpPr>
-          <p:cNvPr id="5" name="">
-            <a:extLst xmlns:a="http://schemas.openxmlformats.org/drawingml/2006/main">
+          <p:cNvPr id="5" name="Rectangle 4">
+            <a:extLst>
               <a:ext uri="{FF2B5EF4-FFF2-40B4-BE49-F238E27FC236}">
                 <a16:creationId xmlns:a16="http://schemas.microsoft.com/office/drawing/2014/main" id="{1E81CA2A-7426-4E30-AADA-1577AB53B2AE}"/>
               </a:ext>
             </a:extLst>
           </p:cNvPr>
           <p:cNvSpPr>
-            <a:spLocks xmlns:a="http://schemas.openxmlformats.org/drawingml/2006/main" noGrp="1"/>
+            <a:spLocks noGrp="1"/>
           </p:cNvSpPr>
           <p:nvPr/>
         </p:nvSpPr>
         <p:spPr>
-          <a:xfrm xmlns:a="http://schemas.openxmlformats.org/drawingml/2006/main">
+          <a:xfrm>
             <a:off x="6019800" y="1657350"/>
             <a:ext cx="2333625" cy="762000"/>
           </a:xfrm>
-          <a:prstGeom xmlns:a="http://schemas.openxmlformats.org/drawingml/2006/main" prst="rect">
+          <a:prstGeom prst="rect">
             <a:avLst/>
           </a:prstGeom>
-          <a:solidFill xmlns:a="http://schemas.openxmlformats.org/drawingml/2006/main">
+          <a:solidFill>
             <a:srgbClr val="EFF5F1"/>
           </a:solidFill>
-          <a:ln xmlns:a="http://schemas.openxmlformats.org/drawingml/2006/main" w="9525">
+          <a:ln w="9525">
             <a:solidFill>
               <a:srgbClr val="B1C8B8"/>
             </a:solidFill>
           </a:ln>
         </p:spPr>
         <p:txBody>
-          <a:bodyPr xmlns:a="http://schemas.openxmlformats.org/drawingml/2006/main" lIns="95250" tIns="76200" rIns="95250" bIns="76200" anchor="ctr">
+          <a:bodyPr lIns="95250" tIns="76200" rIns="95250" bIns="76200" anchor="ctr">
             <a:noAutofit/>
           </a:bodyPr>
-          <a:lstStyle xmlns:a="http://schemas.openxmlformats.org/drawingml/2006/main"/>
-          <a:p xmlns:a="http://schemas.openxmlformats.org/drawingml/2006/main">
+          <a:lstStyle/>
+          <a:p>
             <a:pPr algn="ctr">
               <a:buNone/>
               <a:defRPr sz="1800" b="0">
@@ -4406,7 +4154,7 @@
               <a:t>CPU BGE index</a:t>
             </a:r>
           </a:p>
-          <a:p xmlns:a="http://schemas.openxmlformats.org/drawingml/2006/main">
+          <a:p>
             <a:pPr algn="ctr">
               <a:buNone/>
               <a:defRPr sz="1800" b="0">
@@ -4434,41 +4182,41 @@
       </p:sp>
       <p:sp>
         <p:nvSpPr>
-          <p:cNvPr id="8" name="">
-            <a:extLst xmlns:a="http://schemas.openxmlformats.org/drawingml/2006/main">
+          <p:cNvPr id="8" name="Rectangle 7">
+            <a:extLst>
               <a:ext uri="{FF2B5EF4-FFF2-40B4-BE49-F238E27FC236}">
                 <a16:creationId xmlns:a16="http://schemas.microsoft.com/office/drawing/2014/main" id="{FE4A98B3-C47C-4268-9E7A-6FBB64245152}"/>
               </a:ext>
             </a:extLst>
           </p:cNvPr>
           <p:cNvSpPr>
-            <a:spLocks xmlns:a="http://schemas.openxmlformats.org/drawingml/2006/main" noGrp="1"/>
+            <a:spLocks noGrp="1"/>
           </p:cNvSpPr>
           <p:nvPr/>
         </p:nvSpPr>
         <p:spPr>
-          <a:xfrm xmlns:a="http://schemas.openxmlformats.org/drawingml/2006/main">
+          <a:xfrm>
             <a:off x="609600" y="3324225"/>
             <a:ext cx="2228850" cy="857250"/>
           </a:xfrm>
-          <a:prstGeom xmlns:a="http://schemas.openxmlformats.org/drawingml/2006/main" prst="rect">
+          <a:prstGeom prst="rect">
             <a:avLst/>
           </a:prstGeom>
-          <a:solidFill xmlns:a="http://schemas.openxmlformats.org/drawingml/2006/main">
+          <a:solidFill>
             <a:srgbClr val="EFF5F1"/>
           </a:solidFill>
-          <a:ln xmlns:a="http://schemas.openxmlformats.org/drawingml/2006/main" w="9525">
+          <a:ln w="9525">
             <a:solidFill>
               <a:srgbClr val="B1C8B8"/>
             </a:solidFill>
           </a:ln>
         </p:spPr>
         <p:txBody>
-          <a:bodyPr xmlns:a="http://schemas.openxmlformats.org/drawingml/2006/main" lIns="95250" tIns="76200" rIns="95250" bIns="76200" anchor="ctr">
+          <a:bodyPr lIns="95250" tIns="76200" rIns="95250" bIns="76200" anchor="ctr">
             <a:noAutofit/>
           </a:bodyPr>
-          <a:lstStyle xmlns:a="http://schemas.openxmlformats.org/drawingml/2006/main"/>
-          <a:p xmlns:a="http://schemas.openxmlformats.org/drawingml/2006/main">
+          <a:lstStyle/>
+          <a:p>
             <a:pPr algn="ctr">
               <a:buNone/>
               <a:defRPr sz="1800" b="0">
@@ -4492,7 +4240,7 @@
               <a:t>Question</a:t>
             </a:r>
           </a:p>
-          <a:p xmlns:a="http://schemas.openxmlformats.org/drawingml/2006/main">
+          <a:p>
             <a:pPr algn="ctr">
               <a:buNone/>
               <a:defRPr sz="1800" b="0">
@@ -4520,41 +4268,41 @@
       </p:sp>
       <p:sp>
         <p:nvSpPr>
-          <p:cNvPr id="9" name="">
-            <a:extLst xmlns:a="http://schemas.openxmlformats.org/drawingml/2006/main">
+          <p:cNvPr id="9" name="Rectangle 8">
+            <a:extLst>
               <a:ext uri="{FF2B5EF4-FFF2-40B4-BE49-F238E27FC236}">
                 <a16:creationId xmlns:a16="http://schemas.microsoft.com/office/drawing/2014/main" id="{52901CF8-0520-4A77-BD09-44B97F2B7D21}"/>
               </a:ext>
             </a:extLst>
           </p:cNvPr>
           <p:cNvSpPr>
-            <a:spLocks xmlns:a="http://schemas.openxmlformats.org/drawingml/2006/main" noGrp="1"/>
+            <a:spLocks noGrp="1"/>
           </p:cNvSpPr>
           <p:nvPr/>
         </p:nvSpPr>
         <p:spPr>
-          <a:xfrm xmlns:a="http://schemas.openxmlformats.org/drawingml/2006/main">
+          <a:xfrm>
             <a:off x="3333750" y="3324225"/>
             <a:ext cx="2190750" cy="857250"/>
           </a:xfrm>
-          <a:prstGeom xmlns:a="http://schemas.openxmlformats.org/drawingml/2006/main" prst="rect">
+          <a:prstGeom prst="rect">
             <a:avLst/>
           </a:prstGeom>
-          <a:solidFill xmlns:a="http://schemas.openxmlformats.org/drawingml/2006/main">
+          <a:solidFill>
             <a:srgbClr val="EFF5F1"/>
           </a:solidFill>
-          <a:ln xmlns:a="http://schemas.openxmlformats.org/drawingml/2006/main" w="9525">
+          <a:ln w="9525">
             <a:solidFill>
               <a:srgbClr val="B1C8B8"/>
             </a:solidFill>
           </a:ln>
         </p:spPr>
         <p:txBody>
-          <a:bodyPr xmlns:a="http://schemas.openxmlformats.org/drawingml/2006/main" lIns="95250" tIns="76200" rIns="95250" bIns="76200" anchor="ctr">
+          <a:bodyPr lIns="95250" tIns="76200" rIns="95250" bIns="76200" anchor="ctr">
             <a:noAutofit/>
           </a:bodyPr>
-          <a:lstStyle xmlns:a="http://schemas.openxmlformats.org/drawingml/2006/main"/>
-          <a:p xmlns:a="http://schemas.openxmlformats.org/drawingml/2006/main">
+          <a:lstStyle/>
+          <a:p>
             <a:pPr algn="ctr">
               <a:buNone/>
               <a:defRPr sz="1800" b="0">
@@ -4578,7 +4326,7 @@
               <a:t>Dense + BM25</a:t>
             </a:r>
           </a:p>
-          <a:p xmlns:a="http://schemas.openxmlformats.org/drawingml/2006/main">
+          <a:p>
             <a:pPr algn="ctr">
               <a:buNone/>
               <a:defRPr sz="1800" b="0">
@@ -4606,41 +4354,41 @@
       </p:sp>
       <p:sp>
         <p:nvSpPr>
-          <p:cNvPr id="10" name="">
-            <a:extLst xmlns:a="http://schemas.openxmlformats.org/drawingml/2006/main">
+          <p:cNvPr id="10" name="Rectangle 9">
+            <a:extLst>
               <a:ext uri="{FF2B5EF4-FFF2-40B4-BE49-F238E27FC236}">
                 <a16:creationId xmlns:a16="http://schemas.microsoft.com/office/drawing/2014/main" id="{5B0CD6E7-C6D7-4D42-9F17-6EE255E8E9D3}"/>
               </a:ext>
             </a:extLst>
           </p:cNvPr>
           <p:cNvSpPr>
-            <a:spLocks xmlns:a="http://schemas.openxmlformats.org/drawingml/2006/main" noGrp="1"/>
+            <a:spLocks noGrp="1"/>
           </p:cNvSpPr>
           <p:nvPr/>
         </p:nvSpPr>
         <p:spPr>
-          <a:xfrm xmlns:a="http://schemas.openxmlformats.org/drawingml/2006/main">
+          <a:xfrm>
             <a:off x="6019800" y="3324225"/>
             <a:ext cx="2333625" cy="857250"/>
           </a:xfrm>
-          <a:prstGeom xmlns:a="http://schemas.openxmlformats.org/drawingml/2006/main" prst="rect">
+          <a:prstGeom prst="rect">
             <a:avLst/>
           </a:prstGeom>
-          <a:solidFill xmlns:a="http://schemas.openxmlformats.org/drawingml/2006/main">
+          <a:solidFill>
             <a:srgbClr val="EFF5F1"/>
           </a:solidFill>
-          <a:ln xmlns:a="http://schemas.openxmlformats.org/drawingml/2006/main" w="9525">
+          <a:ln w="9525">
             <a:solidFill>
               <a:srgbClr val="B1C8B8"/>
             </a:solidFill>
           </a:ln>
         </p:spPr>
         <p:txBody>
-          <a:bodyPr xmlns:a="http://schemas.openxmlformats.org/drawingml/2006/main" lIns="95250" tIns="76200" rIns="95250" bIns="76200" anchor="ctr">
+          <a:bodyPr lIns="95250" tIns="76200" rIns="95250" bIns="76200" anchor="ctr">
             <a:noAutofit/>
           </a:bodyPr>
-          <a:lstStyle xmlns:a="http://schemas.openxmlformats.org/drawingml/2006/main"/>
-          <a:p xmlns:a="http://schemas.openxmlformats.org/drawingml/2006/main">
+          <a:lstStyle/>
+          <a:p>
             <a:pPr algn="ctr">
               <a:buNone/>
               <a:defRPr sz="1800" b="0">
@@ -4664,7 +4412,7 @@
               <a:t>Rerank 20</a:t>
             </a:r>
           </a:p>
-          <a:p xmlns:a="http://schemas.openxmlformats.org/drawingml/2006/main">
+          <a:p>
             <a:pPr algn="ctr">
               <a:buNone/>
               <a:defRPr sz="1800" b="0">
@@ -4692,41 +4440,41 @@
       </p:sp>
       <p:sp>
         <p:nvSpPr>
-          <p:cNvPr id="11" name="">
-            <a:extLst xmlns:a="http://schemas.openxmlformats.org/drawingml/2006/main">
+          <p:cNvPr id="11" name="Rectangle 10">
+            <a:extLst>
               <a:ext uri="{FF2B5EF4-FFF2-40B4-BE49-F238E27FC236}">
                 <a16:creationId xmlns:a16="http://schemas.microsoft.com/office/drawing/2014/main" id="{DFB4EF53-4CCE-44DA-B568-5A1D759CE3D2}"/>
               </a:ext>
             </a:extLst>
           </p:cNvPr>
           <p:cNvSpPr>
-            <a:spLocks xmlns:a="http://schemas.openxmlformats.org/drawingml/2006/main" noGrp="1"/>
+            <a:spLocks noGrp="1"/>
           </p:cNvSpPr>
           <p:nvPr/>
         </p:nvSpPr>
         <p:spPr>
-          <a:xfrm xmlns:a="http://schemas.openxmlformats.org/drawingml/2006/main">
+          <a:xfrm>
             <a:off x="8924925" y="3324225"/>
             <a:ext cx="2657475" cy="857250"/>
           </a:xfrm>
-          <a:prstGeom xmlns:a="http://schemas.openxmlformats.org/drawingml/2006/main" prst="rect">
+          <a:prstGeom prst="rect">
             <a:avLst/>
           </a:prstGeom>
-          <a:solidFill xmlns:a="http://schemas.openxmlformats.org/drawingml/2006/main">
+          <a:solidFill>
             <a:srgbClr val="24774F"/>
           </a:solidFill>
-          <a:ln xmlns:a="http://schemas.openxmlformats.org/drawingml/2006/main" w="9525">
+          <a:ln w="9525">
             <a:solidFill>
               <a:srgbClr val="24774F"/>
             </a:solidFill>
           </a:ln>
         </p:spPr>
         <p:txBody>
-          <a:bodyPr xmlns:a="http://schemas.openxmlformats.org/drawingml/2006/main" lIns="95250" tIns="76200" rIns="95250" bIns="76200" anchor="ctr">
+          <a:bodyPr lIns="95250" tIns="76200" rIns="95250" bIns="76200" anchor="ctr">
             <a:noAutofit/>
           </a:bodyPr>
-          <a:lstStyle xmlns:a="http://schemas.openxmlformats.org/drawingml/2006/main"/>
-          <a:p xmlns:a="http://schemas.openxmlformats.org/drawingml/2006/main">
+          <a:lstStyle/>
+          <a:p>
             <a:pPr algn="ctr">
               <a:buNone/>
               <a:defRPr sz="1800" b="0">
@@ -4750,7 +4498,7 @@
               <a:t>Local Qwen 4B</a:t>
             </a:r>
           </a:p>
-          <a:p xmlns:a="http://schemas.openxmlformats.org/drawingml/2006/main">
+          <a:p>
             <a:pPr algn="ctr">
               <a:buNone/>
               <a:defRPr sz="1800" b="0">
@@ -4778,41 +4526,41 @@
       </p:sp>
       <p:sp>
         <p:nvSpPr>
-          <p:cNvPr id="16" name="">
-            <a:extLst xmlns:a="http://schemas.openxmlformats.org/drawingml/2006/main">
+          <p:cNvPr id="16" name="Rectangle 15">
+            <a:extLst>
               <a:ext uri="{FF2B5EF4-FFF2-40B4-BE49-F238E27FC236}">
                 <a16:creationId xmlns:a16="http://schemas.microsoft.com/office/drawing/2014/main" id="{5BD24DA1-82DE-4FFE-866D-4D6B5B1EC2D1}"/>
               </a:ext>
             </a:extLst>
           </p:cNvPr>
           <p:cNvSpPr>
-            <a:spLocks xmlns:a="http://schemas.openxmlformats.org/drawingml/2006/main" noGrp="1"/>
+            <a:spLocks noGrp="1"/>
           </p:cNvSpPr>
           <p:nvPr/>
         </p:nvSpPr>
         <p:spPr>
-          <a:xfrm xmlns:a="http://schemas.openxmlformats.org/drawingml/2006/main">
+          <a:xfrm>
             <a:off x="609600" y="4953000"/>
             <a:ext cx="2228850" cy="762000"/>
           </a:xfrm>
-          <a:prstGeom xmlns:a="http://schemas.openxmlformats.org/drawingml/2006/main" prst="rect">
+          <a:prstGeom prst="rect">
             <a:avLst/>
           </a:prstGeom>
-          <a:solidFill xmlns:a="http://schemas.openxmlformats.org/drawingml/2006/main">
+          <a:solidFill>
             <a:srgbClr val="EFF5F1"/>
           </a:solidFill>
-          <a:ln xmlns:a="http://schemas.openxmlformats.org/drawingml/2006/main" w="9525">
+          <a:ln w="9525">
             <a:solidFill>
               <a:srgbClr val="B1C8B8"/>
             </a:solidFill>
           </a:ln>
         </p:spPr>
         <p:txBody>
-          <a:bodyPr xmlns:a="http://schemas.openxmlformats.org/drawingml/2006/main" lIns="95250" tIns="76200" rIns="95250" bIns="76200" anchor="ctr">
+          <a:bodyPr lIns="95250" tIns="76200" rIns="95250" bIns="76200" anchor="ctr">
             <a:noAutofit/>
           </a:bodyPr>
-          <a:lstStyle xmlns:a="http://schemas.openxmlformats.org/drawingml/2006/main"/>
-          <a:p xmlns:a="http://schemas.openxmlformats.org/drawingml/2006/main">
+          <a:lstStyle/>
+          <a:p>
             <a:pPr algn="ctr">
               <a:buNone/>
               <a:defRPr sz="1800" b="0">
@@ -4836,7 +4584,7 @@
               <a:t>Official recipes</a:t>
             </a:r>
           </a:p>
-          <a:p xmlns:a="http://schemas.openxmlformats.org/drawingml/2006/main">
+          <a:p>
             <a:pPr algn="ctr">
               <a:buNone/>
               <a:defRPr sz="1800" b="0">
@@ -4864,41 +4612,41 @@
       </p:sp>
       <p:sp>
         <p:nvSpPr>
-          <p:cNvPr id="17" name="">
-            <a:extLst xmlns:a="http://schemas.openxmlformats.org/drawingml/2006/main">
+          <p:cNvPr id="17" name="Rectangle 16">
+            <a:extLst>
               <a:ext uri="{FF2B5EF4-FFF2-40B4-BE49-F238E27FC236}">
                 <a16:creationId xmlns:a16="http://schemas.microsoft.com/office/drawing/2014/main" id="{EEAC50F2-F5CA-4725-ABC8-B8B0DA6B2536}"/>
               </a:ext>
             </a:extLst>
           </p:cNvPr>
           <p:cNvSpPr>
-            <a:spLocks xmlns:a="http://schemas.openxmlformats.org/drawingml/2006/main" noGrp="1"/>
+            <a:spLocks noGrp="1"/>
           </p:cNvSpPr>
           <p:nvPr/>
         </p:nvSpPr>
         <p:spPr>
-          <a:xfrm xmlns:a="http://schemas.openxmlformats.org/drawingml/2006/main">
+          <a:xfrm>
             <a:off x="3333750" y="4953000"/>
             <a:ext cx="3286125" cy="762000"/>
           </a:xfrm>
-          <a:prstGeom xmlns:a="http://schemas.openxmlformats.org/drawingml/2006/main" prst="rect">
+          <a:prstGeom prst="rect">
             <a:avLst/>
           </a:prstGeom>
-          <a:solidFill xmlns:a="http://schemas.openxmlformats.org/drawingml/2006/main">
+          <a:solidFill>
             <a:srgbClr val="24774F"/>
           </a:solidFill>
-          <a:ln xmlns:a="http://schemas.openxmlformats.org/drawingml/2006/main" w="9525">
+          <a:ln w="9525">
             <a:solidFill>
               <a:srgbClr val="24774F"/>
             </a:solidFill>
           </a:ln>
         </p:spPr>
         <p:txBody>
-          <a:bodyPr xmlns:a="http://schemas.openxmlformats.org/drawingml/2006/main" lIns="95250" tIns="76200" rIns="95250" bIns="76200" anchor="ctr">
+          <a:bodyPr lIns="95250" tIns="76200" rIns="95250" bIns="76200" anchor="ctr">
             <a:noAutofit/>
           </a:bodyPr>
-          <a:lstStyle xmlns:a="http://schemas.openxmlformats.org/drawingml/2006/main"/>
-          <a:p xmlns:a="http://schemas.openxmlformats.org/drawingml/2006/main">
+          <a:lstStyle/>
+          <a:p>
             <a:pPr algn="ctr">
               <a:buNone/>
               <a:defRPr sz="1800" b="0">
@@ -4922,7 +4670,7 @@
               <a:t>Validate + calculate</a:t>
             </a:r>
           </a:p>
-          <a:p xmlns:a="http://schemas.openxmlformats.org/drawingml/2006/main">
+          <a:p>
             <a:pPr algn="ctr">
               <a:buNone/>
               <a:defRPr sz="1800" b="0">
@@ -4950,41 +4698,41 @@
       </p:sp>
       <p:sp>
         <p:nvSpPr>
-          <p:cNvPr id="18" name="">
-            <a:extLst xmlns:a="http://schemas.openxmlformats.org/drawingml/2006/main">
+          <p:cNvPr id="18" name="Rectangle 17">
+            <a:extLst>
               <a:ext uri="{FF2B5EF4-FFF2-40B4-BE49-F238E27FC236}">
                 <a16:creationId xmlns:a16="http://schemas.microsoft.com/office/drawing/2014/main" id="{DA42466E-AA69-4E97-9DCB-B57A85D08CD2}"/>
               </a:ext>
             </a:extLst>
           </p:cNvPr>
           <p:cNvSpPr>
-            <a:spLocks xmlns:a="http://schemas.openxmlformats.org/drawingml/2006/main" noGrp="1"/>
+            <a:spLocks noGrp="1"/>
           </p:cNvSpPr>
           <p:nvPr/>
         </p:nvSpPr>
         <p:spPr>
-          <a:xfrm xmlns:a="http://schemas.openxmlformats.org/drawingml/2006/main">
+          <a:xfrm>
             <a:off x="7229475" y="4953000"/>
             <a:ext cx="4352925" cy="762000"/>
           </a:xfrm>
-          <a:prstGeom xmlns:a="http://schemas.openxmlformats.org/drawingml/2006/main" prst="rect">
+          <a:prstGeom prst="rect">
             <a:avLst/>
           </a:prstGeom>
-          <a:solidFill xmlns:a="http://schemas.openxmlformats.org/drawingml/2006/main">
+          <a:solidFill>
             <a:srgbClr val="EFF5F1"/>
           </a:solidFill>
-          <a:ln xmlns:a="http://schemas.openxmlformats.org/drawingml/2006/main" w="9525">
+          <a:ln w="9525">
             <a:solidFill>
               <a:srgbClr val="B1C8B8"/>
             </a:solidFill>
           </a:ln>
         </p:spPr>
         <p:txBody>
-          <a:bodyPr xmlns:a="http://schemas.openxmlformats.org/drawingml/2006/main" lIns="95250" tIns="76200" rIns="95250" bIns="76200" anchor="ctr">
+          <a:bodyPr lIns="95250" tIns="76200" rIns="95250" bIns="76200" anchor="ctr">
             <a:noAutofit/>
           </a:bodyPr>
-          <a:lstStyle xmlns:a="http://schemas.openxmlformats.org/drawingml/2006/main"/>
-          <a:p xmlns:a="http://schemas.openxmlformats.org/drawingml/2006/main">
+          <a:lstStyle/>
+          <a:p>
             <a:pPr algn="ctr">
               <a:buNone/>
               <a:defRPr sz="1800" b="0">
@@ -5008,7 +4756,7 @@
               <a:t>Craft tool interface</a:t>
             </a:r>
           </a:p>
-          <a:p xmlns:a="http://schemas.openxmlformats.org/drawingml/2006/main">
+          <a:p>
             <a:pPr algn="ctr">
               <a:buNone/>
               <a:defRPr sz="1800" b="0">
@@ -5036,37 +4784,37 @@
       </p:sp>
       <p:sp>
         <p:nvSpPr>
-          <p:cNvPr id="23" name="">
-            <a:extLst xmlns:a="http://schemas.openxmlformats.org/drawingml/2006/main">
+          <p:cNvPr id="23" name="Rectangle 22">
+            <a:extLst>
               <a:ext uri="{FF2B5EF4-FFF2-40B4-BE49-F238E27FC236}">
                 <a16:creationId xmlns:a16="http://schemas.microsoft.com/office/drawing/2014/main" id="{47B7669F-69BB-4E00-AE0F-2E148D958972}"/>
               </a:ext>
             </a:extLst>
           </p:cNvPr>
           <p:cNvSpPr>
-            <a:spLocks xmlns:a="http://schemas.openxmlformats.org/drawingml/2006/main" noGrp="1"/>
+            <a:spLocks noGrp="1"/>
           </p:cNvSpPr>
           <p:nvPr/>
         </p:nvSpPr>
         <p:spPr>
-          <a:xfrm xmlns:a="http://schemas.openxmlformats.org/drawingml/2006/main">
+          <a:xfrm>
             <a:off x="609600" y="5829300"/>
             <a:ext cx="6858000" cy="333375"/>
           </a:xfrm>
-          <a:prstGeom xmlns:a="http://schemas.openxmlformats.org/drawingml/2006/main" prst="rect">
+          <a:prstGeom prst="rect">
             <a:avLst/>
           </a:prstGeom>
-          <a:noFill xmlns:a="http://schemas.openxmlformats.org/drawingml/2006/main"/>
-          <a:ln xmlns:a="http://schemas.openxmlformats.org/drawingml/2006/main" w="0">
+          <a:noFill/>
+          <a:ln w="0">
             <a:noFill/>
           </a:ln>
         </p:spPr>
         <p:txBody>
-          <a:bodyPr xmlns:a="http://schemas.openxmlformats.org/drawingml/2006/main" wrap="square" lIns="0" tIns="0" rIns="0" bIns="0">
+          <a:bodyPr wrap="square" lIns="0" tIns="0" rIns="0" bIns="0">
             <a:noAutofit/>
           </a:bodyPr>
-          <a:lstStyle xmlns:a="http://schemas.openxmlformats.org/drawingml/2006/main"/>
-          <a:p xmlns:a="http://schemas.openxmlformats.org/drawingml/2006/main">
+          <a:lstStyle/>
+          <a:p>
             <a:pPr algn="l">
               <a:buNone/>
               <a:defRPr sz="1725" b="0">
@@ -5094,37 +4842,37 @@
       </p:sp>
       <p:sp>
         <p:nvSpPr>
-          <p:cNvPr id="24" name="">
-            <a:extLst xmlns:a="http://schemas.openxmlformats.org/drawingml/2006/main">
+          <p:cNvPr id="24" name="Rectangle 23">
+            <a:extLst>
               <a:ext uri="{FF2B5EF4-FFF2-40B4-BE49-F238E27FC236}">
                 <a16:creationId xmlns:a16="http://schemas.microsoft.com/office/drawing/2014/main" id="{3F297000-78EC-4F95-B4AD-78CA5CB5343A}"/>
               </a:ext>
             </a:extLst>
           </p:cNvPr>
           <p:cNvSpPr>
-            <a:spLocks xmlns:a="http://schemas.openxmlformats.org/drawingml/2006/main" noGrp="1"/>
+            <a:spLocks noGrp="1"/>
           </p:cNvSpPr>
           <p:nvPr/>
         </p:nvSpPr>
         <p:spPr>
-          <a:xfrm xmlns:a="http://schemas.openxmlformats.org/drawingml/2006/main">
+          <a:xfrm>
             <a:off x="7229475" y="4419600"/>
             <a:ext cx="2095500" cy="333375"/>
           </a:xfrm>
-          <a:prstGeom xmlns:a="http://schemas.openxmlformats.org/drawingml/2006/main" prst="rect">
+          <a:prstGeom prst="rect">
             <a:avLst/>
           </a:prstGeom>
-          <a:noFill xmlns:a="http://schemas.openxmlformats.org/drawingml/2006/main"/>
-          <a:ln xmlns:a="http://schemas.openxmlformats.org/drawingml/2006/main" w="0">
+          <a:noFill/>
+          <a:ln w="0">
             <a:noFill/>
           </a:ln>
         </p:spPr>
         <p:txBody>
-          <a:bodyPr xmlns:a="http://schemas.openxmlformats.org/drawingml/2006/main" wrap="square" lIns="0" tIns="0" rIns="0" bIns="0">
+          <a:bodyPr wrap="square" lIns="0" tIns="0" rIns="0" bIns="0">
             <a:noAutofit/>
           </a:bodyPr>
-          <a:lstStyle xmlns:a="http://schemas.openxmlformats.org/drawingml/2006/main"/>
-          <a:p xmlns:a="http://schemas.openxmlformats.org/drawingml/2006/main">
+          <a:lstStyle/>
+          <a:p>
             <a:pPr algn="l">
               <a:buNone/>
               <a:defRPr sz="1725" b="0">
@@ -5152,37 +4900,37 @@
       </p:sp>
       <p:sp>
         <p:nvSpPr>
-          <p:cNvPr id="25" name="">
-            <a:extLst xmlns:a="http://schemas.openxmlformats.org/drawingml/2006/main">
+          <p:cNvPr id="25" name="Rectangle 24">
+            <a:extLst>
               <a:ext uri="{FF2B5EF4-FFF2-40B4-BE49-F238E27FC236}">
                 <a16:creationId xmlns:a16="http://schemas.microsoft.com/office/drawing/2014/main" id="{26FD9D42-D7D3-492E-9F79-8BFB9764E79F}"/>
               </a:ext>
             </a:extLst>
           </p:cNvPr>
           <p:cNvSpPr>
-            <a:spLocks xmlns:a="http://schemas.openxmlformats.org/drawingml/2006/main" noGrp="1"/>
+            <a:spLocks noGrp="1"/>
           </p:cNvSpPr>
           <p:nvPr/>
         </p:nvSpPr>
         <p:spPr>
-          <a:xfrm xmlns:a="http://schemas.openxmlformats.org/drawingml/2006/main">
+          <a:xfrm>
             <a:off x="609600" y="6153150"/>
             <a:ext cx="10001250" cy="333375"/>
           </a:xfrm>
-          <a:prstGeom xmlns:a="http://schemas.openxmlformats.org/drawingml/2006/main" prst="rect">
+          <a:prstGeom prst="rect">
             <a:avLst/>
           </a:prstGeom>
-          <a:noFill xmlns:a="http://schemas.openxmlformats.org/drawingml/2006/main"/>
-          <a:ln xmlns:a="http://schemas.openxmlformats.org/drawingml/2006/main" w="0">
+          <a:noFill/>
+          <a:ln w="0">
             <a:noFill/>
           </a:ln>
         </p:spPr>
         <p:txBody>
-          <a:bodyPr xmlns:a="http://schemas.openxmlformats.org/drawingml/2006/main" wrap="square" lIns="0" tIns="0" rIns="0" bIns="0">
+          <a:bodyPr wrap="square" lIns="0" tIns="0" rIns="0" bIns="0">
             <a:noAutofit/>
           </a:bodyPr>
-          <a:lstStyle xmlns:a="http://schemas.openxmlformats.org/drawingml/2006/main"/>
-          <a:p xmlns:a="http://schemas.openxmlformats.org/drawingml/2006/main">
+          <a:lstStyle/>
+          <a:p>
             <a:pPr algn="l">
               <a:buNone/>
               <a:defRPr sz="1725" b="0">
@@ -5215,17 +4963,21 @@
       </p:ext>
     </p:extLst>
   </p:cSld>
+  <p:clrMapOvr>
+    <a:masterClrMapping/>
+  </p:clrMapOvr>
 </p:sld>
 </file>
 
 <file path=ppt/slides/slide4.xml><?xml version="1.0" encoding="utf-8"?>
-<p:sld xmlns:p="http://schemas.openxmlformats.org/presentationml/2006/main">
+<p:sld xmlns:a="http://schemas.openxmlformats.org/drawingml/2006/main" xmlns:r="http://schemas.openxmlformats.org/officeDocument/2006/relationships" xmlns:p="http://schemas.openxmlformats.org/presentationml/2006/main">
   <p:cSld>
     <p:bg>
       <p:bgPr>
-        <a:solidFill xmlns:a="http://schemas.openxmlformats.org/drawingml/2006/main">
+        <a:solidFill>
           <a:srgbClr val="FFFFFF"/>
         </a:solidFill>
+        <a:effectLst/>
       </p:bgPr>
     </p:bg>
     <p:spTree>
@@ -5235,41 +4987,46 @@
         <p:nvPr/>
       </p:nvGrpSpPr>
       <p:grpSpPr>
-        <a:xfrm xmlns:a="http://schemas.openxmlformats.org/drawingml/2006/main"/>
+        <a:xfrm>
+          <a:off x="0" y="0"/>
+          <a:ext cx="0" cy="0"/>
+          <a:chOff x="0" y="0"/>
+          <a:chExt cx="0" cy="0"/>
+        </a:xfrm>
       </p:grpSpPr>
       <p:sp>
         <p:nvSpPr>
-          <p:cNvPr id="10" name="">
-            <a:extLst xmlns:a="http://schemas.openxmlformats.org/drawingml/2006/main">
+          <p:cNvPr id="10" name="Rectangle 9">
+            <a:extLst>
               <a:ext uri="{FF2B5EF4-FFF2-40B4-BE49-F238E27FC236}">
                 <a16:creationId xmlns:a16="http://schemas.microsoft.com/office/drawing/2014/main" id="{A738B7E8-BF3C-4487-8675-B3A1061418FB}"/>
               </a:ext>
             </a:extLst>
           </p:cNvPr>
           <p:cNvSpPr>
-            <a:spLocks xmlns:a="http://schemas.openxmlformats.org/drawingml/2006/main" noGrp="1"/>
+            <a:spLocks noGrp="1"/>
           </p:cNvSpPr>
           <p:nvPr/>
         </p:nvSpPr>
         <p:spPr>
-          <a:xfrm xmlns:a="http://schemas.openxmlformats.org/drawingml/2006/main">
+          <a:xfrm>
             <a:off x="609600" y="457200"/>
             <a:ext cx="10972800" cy="857250"/>
           </a:xfrm>
-          <a:prstGeom xmlns:a="http://schemas.openxmlformats.org/drawingml/2006/main" prst="rect">
+          <a:prstGeom prst="rect">
             <a:avLst/>
           </a:prstGeom>
-          <a:noFill xmlns:a="http://schemas.openxmlformats.org/drawingml/2006/main"/>
-          <a:ln xmlns:a="http://schemas.openxmlformats.org/drawingml/2006/main" w="0">
+          <a:noFill/>
+          <a:ln w="0">
             <a:noFill/>
           </a:ln>
         </p:spPr>
         <p:txBody>
-          <a:bodyPr xmlns:a="http://schemas.openxmlformats.org/drawingml/2006/main" wrap="square" lIns="0" tIns="0" rIns="0" bIns="0">
+          <a:bodyPr wrap="square" lIns="0" tIns="0" rIns="0" bIns="0">
             <a:noAutofit/>
           </a:bodyPr>
-          <a:lstStyle xmlns:a="http://schemas.openxmlformats.org/drawingml/2006/main"/>
-          <a:p xmlns:a="http://schemas.openxmlformats.org/drawingml/2006/main">
+          <a:lstStyle/>
+          <a:p>
             <a:pPr algn="l">
               <a:buNone/>
               <a:defRPr sz="3300" b="1">
@@ -5297,37 +5054,37 @@
       </p:sp>
       <p:sp>
         <p:nvSpPr>
-          <p:cNvPr id="2" name="">
-            <a:extLst xmlns:a="http://schemas.openxmlformats.org/drawingml/2006/main">
+          <p:cNvPr id="2" name="Rectangle 1">
+            <a:extLst>
               <a:ext uri="{FF2B5EF4-FFF2-40B4-BE49-F238E27FC236}">
                 <a16:creationId xmlns:a16="http://schemas.microsoft.com/office/drawing/2014/main" id="{993D9652-173E-4D7F-9EC4-39BA745F3811}"/>
               </a:ext>
             </a:extLst>
           </p:cNvPr>
           <p:cNvSpPr>
-            <a:spLocks xmlns:a="http://schemas.openxmlformats.org/drawingml/2006/main" noGrp="1"/>
+            <a:spLocks noGrp="1"/>
           </p:cNvSpPr>
           <p:nvPr/>
         </p:nvSpPr>
         <p:spPr>
-          <a:xfrm xmlns:a="http://schemas.openxmlformats.org/drawingml/2006/main">
+          <a:xfrm>
             <a:off x="11106150" y="6296025"/>
             <a:ext cx="476250" cy="285750"/>
           </a:xfrm>
-          <a:prstGeom xmlns:a="http://schemas.openxmlformats.org/drawingml/2006/main" prst="rect">
+          <a:prstGeom prst="rect">
             <a:avLst/>
           </a:prstGeom>
-          <a:noFill xmlns:a="http://schemas.openxmlformats.org/drawingml/2006/main"/>
-          <a:ln xmlns:a="http://schemas.openxmlformats.org/drawingml/2006/main" w="0">
+          <a:noFill/>
+          <a:ln w="0">
             <a:noFill/>
           </a:ln>
         </p:spPr>
         <p:txBody>
-          <a:bodyPr xmlns:a="http://schemas.openxmlformats.org/drawingml/2006/main" wrap="square" lIns="0" tIns="0" rIns="0" bIns="0">
+          <a:bodyPr wrap="square" lIns="0" tIns="0" rIns="0" bIns="0">
             <a:noAutofit/>
           </a:bodyPr>
-          <a:lstStyle xmlns:a="http://schemas.openxmlformats.org/drawingml/2006/main"/>
-          <a:p xmlns:a="http://schemas.openxmlformats.org/drawingml/2006/main">
+          <a:lstStyle/>
+          <a:p>
             <a:pPr algn="r">
               <a:buNone/>
               <a:defRPr sz="1500" b="0">
@@ -5355,37 +5112,37 @@
       </p:sp>
       <p:sp>
         <p:nvSpPr>
-          <p:cNvPr id="3" name="">
-            <a:extLst xmlns:a="http://schemas.openxmlformats.org/drawingml/2006/main">
+          <p:cNvPr id="3" name="Rectangle 2">
+            <a:extLst>
               <a:ext uri="{FF2B5EF4-FFF2-40B4-BE49-F238E27FC236}">
                 <a16:creationId xmlns:a16="http://schemas.microsoft.com/office/drawing/2014/main" id="{829AEC19-05EA-4DC2-B658-1674B3934A20}"/>
               </a:ext>
             </a:extLst>
           </p:cNvPr>
           <p:cNvSpPr>
-            <a:spLocks xmlns:a="http://schemas.openxmlformats.org/drawingml/2006/main" noGrp="1"/>
+            <a:spLocks noGrp="1"/>
           </p:cNvSpPr>
           <p:nvPr/>
         </p:nvSpPr>
         <p:spPr>
-          <a:xfrm xmlns:a="http://schemas.openxmlformats.org/drawingml/2006/main">
+          <a:xfrm>
             <a:off x="609600" y="1704975"/>
             <a:ext cx="4572000" cy="1190625"/>
           </a:xfrm>
-          <a:prstGeom xmlns:a="http://schemas.openxmlformats.org/drawingml/2006/main" prst="rect">
+          <a:prstGeom prst="rect">
             <a:avLst/>
           </a:prstGeom>
-          <a:noFill xmlns:a="http://schemas.openxmlformats.org/drawingml/2006/main"/>
-          <a:ln xmlns:a="http://schemas.openxmlformats.org/drawingml/2006/main" w="0">
+          <a:noFill/>
+          <a:ln w="0">
             <a:noFill/>
           </a:ln>
         </p:spPr>
         <p:txBody>
-          <a:bodyPr xmlns:a="http://schemas.openxmlformats.org/drawingml/2006/main" wrap="square" lIns="0" tIns="0" rIns="0" bIns="0">
+          <a:bodyPr wrap="square" lIns="0" tIns="0" rIns="0" bIns="0">
             <a:noAutofit/>
           </a:bodyPr>
-          <a:lstStyle xmlns:a="http://schemas.openxmlformats.org/drawingml/2006/main"/>
-          <a:p xmlns:a="http://schemas.openxmlformats.org/drawingml/2006/main">
+          <a:lstStyle/>
+          <a:p>
             <a:pPr algn="l">
               <a:buNone/>
               <a:defRPr sz="7200" b="1">
@@ -5413,37 +5170,37 @@
       </p:sp>
       <p:sp>
         <p:nvSpPr>
-          <p:cNvPr id="4" name="">
-            <a:extLst xmlns:a="http://schemas.openxmlformats.org/drawingml/2006/main">
+          <p:cNvPr id="4" name="Rectangle 3">
+            <a:extLst>
               <a:ext uri="{FF2B5EF4-FFF2-40B4-BE49-F238E27FC236}">
                 <a16:creationId xmlns:a16="http://schemas.microsoft.com/office/drawing/2014/main" id="{D87CCF57-77A9-401D-9B61-60BD7A76D98C}"/>
               </a:ext>
             </a:extLst>
           </p:cNvPr>
           <p:cNvSpPr>
-            <a:spLocks xmlns:a="http://schemas.openxmlformats.org/drawingml/2006/main" noGrp="1"/>
+            <a:spLocks noGrp="1"/>
           </p:cNvSpPr>
           <p:nvPr/>
         </p:nvSpPr>
         <p:spPr>
-          <a:xfrm xmlns:a="http://schemas.openxmlformats.org/drawingml/2006/main">
+          <a:xfrm>
             <a:off x="609600" y="3038475"/>
             <a:ext cx="4953000" cy="523875"/>
           </a:xfrm>
-          <a:prstGeom xmlns:a="http://schemas.openxmlformats.org/drawingml/2006/main" prst="rect">
+          <a:prstGeom prst="rect">
             <a:avLst/>
           </a:prstGeom>
-          <a:noFill xmlns:a="http://schemas.openxmlformats.org/drawingml/2006/main"/>
-          <a:ln xmlns:a="http://schemas.openxmlformats.org/drawingml/2006/main" w="0">
+          <a:noFill/>
+          <a:ln w="0">
             <a:noFill/>
           </a:ln>
         </p:spPr>
         <p:txBody>
-          <a:bodyPr xmlns:a="http://schemas.openxmlformats.org/drawingml/2006/main" wrap="square" lIns="0" tIns="0" rIns="0" bIns="0">
+          <a:bodyPr wrap="square" lIns="0" tIns="0" rIns="0" bIns="0">
             <a:noAutofit/>
           </a:bodyPr>
-          <a:lstStyle xmlns:a="http://schemas.openxmlformats.org/drawingml/2006/main"/>
-          <a:p xmlns:a="http://schemas.openxmlformats.org/drawingml/2006/main">
+          <a:lstStyle/>
+          <a:p>
             <a:pPr algn="l">
               <a:buNone/>
               <a:defRPr sz="2400" b="0">
@@ -5471,37 +5228,37 @@
       </p:sp>
       <p:sp>
         <p:nvSpPr>
-          <p:cNvPr id="5" name="">
-            <a:extLst xmlns:a="http://schemas.openxmlformats.org/drawingml/2006/main">
+          <p:cNvPr id="5" name="Rectangle 4">
+            <a:extLst>
               <a:ext uri="{FF2B5EF4-FFF2-40B4-BE49-F238E27FC236}">
                 <a16:creationId xmlns:a16="http://schemas.microsoft.com/office/drawing/2014/main" id="{63890E48-B8B4-4370-A990-99619DE5D741}"/>
               </a:ext>
             </a:extLst>
           </p:cNvPr>
           <p:cNvSpPr>
-            <a:spLocks xmlns:a="http://schemas.openxmlformats.org/drawingml/2006/main" noGrp="1"/>
+            <a:spLocks noGrp="1"/>
           </p:cNvSpPr>
           <p:nvPr/>
         </p:nvSpPr>
         <p:spPr>
-          <a:xfrm xmlns:a="http://schemas.openxmlformats.org/drawingml/2006/main">
+          <a:xfrm>
             <a:off x="609600" y="3962400"/>
             <a:ext cx="4857750" cy="1047750"/>
           </a:xfrm>
-          <a:prstGeom xmlns:a="http://schemas.openxmlformats.org/drawingml/2006/main" prst="rect">
+          <a:prstGeom prst="rect">
             <a:avLst/>
           </a:prstGeom>
-          <a:noFill xmlns:a="http://schemas.openxmlformats.org/drawingml/2006/main"/>
-          <a:ln xmlns:a="http://schemas.openxmlformats.org/drawingml/2006/main" w="0">
+          <a:noFill/>
+          <a:ln w="0">
             <a:noFill/>
           </a:ln>
         </p:spPr>
         <p:txBody>
-          <a:bodyPr xmlns:a="http://schemas.openxmlformats.org/drawingml/2006/main" wrap="square" lIns="0" tIns="0" rIns="0" bIns="0">
+          <a:bodyPr wrap="square" lIns="0" tIns="0" rIns="0" bIns="0">
             <a:noAutofit/>
           </a:bodyPr>
-          <a:lstStyle xmlns:a="http://schemas.openxmlformats.org/drawingml/2006/main"/>
-          <a:p xmlns:a="http://schemas.openxmlformats.org/drawingml/2006/main">
+          <a:lstStyle/>
+          <a:p>
             <a:pPr algn="l">
               <a:buNone/>
               <a:defRPr sz="2100" b="0">
@@ -5525,7 +5282,7 @@
               <a:t>About 817,000 words</a:t>
             </a:r>
           </a:p>
-          <a:p xmlns:a="http://schemas.openxmlformats.org/drawingml/2006/main">
+          <a:p>
             <a:pPr algn="l">
               <a:buNone/>
               <a:defRPr sz="2100" b="0">
@@ -5553,37 +5310,37 @@
       </p:sp>
       <p:sp>
         <p:nvSpPr>
-          <p:cNvPr id="6" name="">
-            <a:extLst xmlns:a="http://schemas.openxmlformats.org/drawingml/2006/main">
+          <p:cNvPr id="6" name="Rectangle 5">
+            <a:extLst>
               <a:ext uri="{FF2B5EF4-FFF2-40B4-BE49-F238E27FC236}">
                 <a16:creationId xmlns:a16="http://schemas.microsoft.com/office/drawing/2014/main" id="{BC0D6B94-EF34-4B54-9DF6-98A84A19CEA0}"/>
               </a:ext>
             </a:extLst>
           </p:cNvPr>
           <p:cNvSpPr>
-            <a:spLocks xmlns:a="http://schemas.openxmlformats.org/drawingml/2006/main" noGrp="1"/>
+            <a:spLocks noGrp="1"/>
           </p:cNvSpPr>
           <p:nvPr/>
         </p:nvSpPr>
         <p:spPr>
-          <a:xfrm xmlns:a="http://schemas.openxmlformats.org/drawingml/2006/main">
+          <a:xfrm>
             <a:off x="6381750" y="1828800"/>
             <a:ext cx="5200650" cy="571500"/>
           </a:xfrm>
-          <a:prstGeom xmlns:a="http://schemas.openxmlformats.org/drawingml/2006/main" prst="rect">
+          <a:prstGeom prst="rect">
             <a:avLst/>
           </a:prstGeom>
-          <a:noFill xmlns:a="http://schemas.openxmlformats.org/drawingml/2006/main"/>
-          <a:ln xmlns:a="http://schemas.openxmlformats.org/drawingml/2006/main" w="0">
+          <a:noFill/>
+          <a:ln w="0">
             <a:noFill/>
           </a:ln>
         </p:spPr>
         <p:txBody>
-          <a:bodyPr xmlns:a="http://schemas.openxmlformats.org/drawingml/2006/main" wrap="square" lIns="0" tIns="0" rIns="0" bIns="0">
+          <a:bodyPr wrap="square" lIns="0" tIns="0" rIns="0" bIns="0">
             <a:noAutofit/>
           </a:bodyPr>
-          <a:lstStyle xmlns:a="http://schemas.openxmlformats.org/drawingml/2006/main"/>
-          <a:p xmlns:a="http://schemas.openxmlformats.org/drawingml/2006/main">
+          <a:lstStyle/>
+          <a:p>
             <a:pPr algn="l">
               <a:buNone/>
               <a:defRPr sz="2700" b="1">
@@ -5611,37 +5368,37 @@
       </p:sp>
       <p:sp>
         <p:nvSpPr>
-          <p:cNvPr id="7" name="">
-            <a:extLst xmlns:a="http://schemas.openxmlformats.org/drawingml/2006/main">
+          <p:cNvPr id="7" name="Rectangle 6">
+            <a:extLst>
               <a:ext uri="{FF2B5EF4-FFF2-40B4-BE49-F238E27FC236}">
                 <a16:creationId xmlns:a16="http://schemas.microsoft.com/office/drawing/2014/main" id="{50CC26D6-DD60-450F-9B4B-9D6E5460FC2F}"/>
               </a:ext>
             </a:extLst>
           </p:cNvPr>
           <p:cNvSpPr>
-            <a:spLocks xmlns:a="http://schemas.openxmlformats.org/drawingml/2006/main" noGrp="1"/>
+            <a:spLocks noGrp="1"/>
           </p:cNvSpPr>
           <p:nvPr/>
         </p:nvSpPr>
         <p:spPr>
-          <a:xfrm xmlns:a="http://schemas.openxmlformats.org/drawingml/2006/main">
+          <a:xfrm>
             <a:off x="6381750" y="2705100"/>
             <a:ext cx="5200650" cy="1524000"/>
           </a:xfrm>
-          <a:prstGeom xmlns:a="http://schemas.openxmlformats.org/drawingml/2006/main" prst="rect">
+          <a:prstGeom prst="rect">
             <a:avLst/>
           </a:prstGeom>
-          <a:noFill xmlns:a="http://schemas.openxmlformats.org/drawingml/2006/main"/>
-          <a:ln xmlns:a="http://schemas.openxmlformats.org/drawingml/2006/main" w="0">
+          <a:noFill/>
+          <a:ln w="0">
             <a:noFill/>
           </a:ln>
         </p:spPr>
         <p:txBody>
-          <a:bodyPr xmlns:a="http://schemas.openxmlformats.org/drawingml/2006/main" wrap="square" lIns="0" tIns="0" rIns="0" bIns="0">
+          <a:bodyPr wrap="square" lIns="0" tIns="0" rIns="0" bIns="0">
             <a:noAutofit/>
           </a:bodyPr>
-          <a:lstStyle xmlns:a="http://schemas.openxmlformats.org/drawingml/2006/main"/>
-          <a:p xmlns:a="http://schemas.openxmlformats.org/drawingml/2006/main">
+          <a:lstStyle/>
+          <a:p>
             <a:pPr algn="l">
               <a:buNone/>
               <a:defRPr sz="2100" b="0">
@@ -5665,7 +5422,7 @@
               <a:t>Keep section and paragraph boundaries.</a:t>
             </a:r>
           </a:p>
-          <a:p xmlns:a="http://schemas.openxmlformats.org/drawingml/2006/main">
+          <a:p>
             <a:pPr algn="l">
               <a:buNone/>
               <a:defRPr sz="2100" b="0">
@@ -5689,7 +5446,7 @@
               <a:t>Split oversized paragraphs.</a:t>
             </a:r>
           </a:p>
-          <a:p xmlns:a="http://schemas.openxmlformats.org/drawingml/2006/main">
+          <a:p>
             <a:pPr algn="l">
               <a:buNone/>
               <a:defRPr sz="2100" b="0">
@@ -5717,37 +5474,37 @@
       </p:sp>
       <p:sp>
         <p:nvSpPr>
-          <p:cNvPr id="8" name="">
-            <a:extLst xmlns:a="http://schemas.openxmlformats.org/drawingml/2006/main">
+          <p:cNvPr id="8" name="Rectangle 7">
+            <a:extLst>
               <a:ext uri="{FF2B5EF4-FFF2-40B4-BE49-F238E27FC236}">
                 <a16:creationId xmlns:a16="http://schemas.microsoft.com/office/drawing/2014/main" id="{A3577A0B-23C2-424C-B0FA-B7B4B31FC3DD}"/>
               </a:ext>
             </a:extLst>
           </p:cNvPr>
           <p:cNvSpPr>
-            <a:spLocks xmlns:a="http://schemas.openxmlformats.org/drawingml/2006/main" noGrp="1"/>
+            <a:spLocks noGrp="1"/>
           </p:cNvSpPr>
           <p:nvPr/>
         </p:nvSpPr>
         <p:spPr>
-          <a:xfrm xmlns:a="http://schemas.openxmlformats.org/drawingml/2006/main">
+          <a:xfrm>
             <a:off x="6381750" y="4524375"/>
             <a:ext cx="5200650" cy="1162050"/>
           </a:xfrm>
-          <a:prstGeom xmlns:a="http://schemas.openxmlformats.org/drawingml/2006/main" prst="rect">
+          <a:prstGeom prst="rect">
             <a:avLst/>
           </a:prstGeom>
-          <a:noFill xmlns:a="http://schemas.openxmlformats.org/drawingml/2006/main"/>
-          <a:ln xmlns:a="http://schemas.openxmlformats.org/drawingml/2006/main" w="0">
+          <a:noFill/>
+          <a:ln w="0">
             <a:noFill/>
           </a:ln>
         </p:spPr>
         <p:txBody>
-          <a:bodyPr xmlns:a="http://schemas.openxmlformats.org/drawingml/2006/main" wrap="square" lIns="0" tIns="0" rIns="0" bIns="0">
+          <a:bodyPr wrap="square" lIns="0" tIns="0" rIns="0" bIns="0">
             <a:noAutofit/>
           </a:bodyPr>
-          <a:lstStyle xmlns:a="http://schemas.openxmlformats.org/drawingml/2006/main"/>
-          <a:p xmlns:a="http://schemas.openxmlformats.org/drawingml/2006/main">
+          <a:lstStyle/>
+          <a:p>
             <a:pPr algn="l">
               <a:buNone/>
               <a:defRPr sz="1950" b="0">
@@ -5771,7 +5528,7 @@
               <a:t>Compared 128, 256 and 512 tokens.</a:t>
             </a:r>
           </a:p>
-          <a:p xmlns:a="http://schemas.openxmlformats.org/drawingml/2006/main">
+          <a:p>
             <a:pPr algn="l">
               <a:buNone/>
               <a:defRPr sz="1950" b="0">
@@ -5795,7 +5552,7 @@
               <a:t>Historical reranker page hits</a:t>
             </a:r>
           </a:p>
-          <a:p xmlns:a="http://schemas.openxmlformats.org/drawingml/2006/main">
+          <a:p>
             <a:pPr algn="l">
               <a:buNone/>
               <a:defRPr sz="1950" b="0">
@@ -5823,37 +5580,37 @@
       </p:sp>
       <p:sp>
         <p:nvSpPr>
-          <p:cNvPr id="9" name="">
-            <a:extLst xmlns:a="http://schemas.openxmlformats.org/drawingml/2006/main">
+          <p:cNvPr id="9" name="Rectangle 8">
+            <a:extLst>
               <a:ext uri="{FF2B5EF4-FFF2-40B4-BE49-F238E27FC236}">
                 <a16:creationId xmlns:a16="http://schemas.microsoft.com/office/drawing/2014/main" id="{4023CF94-8D33-4172-B56A-82F6D09581E5}"/>
               </a:ext>
             </a:extLst>
           </p:cNvPr>
           <p:cNvSpPr>
-            <a:spLocks xmlns:a="http://schemas.openxmlformats.org/drawingml/2006/main" noGrp="1"/>
+            <a:spLocks noGrp="1"/>
           </p:cNvSpPr>
           <p:nvPr/>
         </p:nvSpPr>
         <p:spPr>
-          <a:xfrm xmlns:a="http://schemas.openxmlformats.org/drawingml/2006/main">
+          <a:xfrm>
             <a:off x="609600" y="5810250"/>
             <a:ext cx="10763250" cy="476250"/>
           </a:xfrm>
-          <a:prstGeom xmlns:a="http://schemas.openxmlformats.org/drawingml/2006/main" prst="rect">
+          <a:prstGeom prst="rect">
             <a:avLst/>
           </a:prstGeom>
-          <a:noFill xmlns:a="http://schemas.openxmlformats.org/drawingml/2006/main"/>
-          <a:ln xmlns:a="http://schemas.openxmlformats.org/drawingml/2006/main" w="0">
+          <a:noFill/>
+          <a:ln w="0">
             <a:noFill/>
           </a:ln>
         </p:spPr>
         <p:txBody>
-          <a:bodyPr xmlns:a="http://schemas.openxmlformats.org/drawingml/2006/main" wrap="square" lIns="0" tIns="0" rIns="0" bIns="0">
+          <a:bodyPr wrap="square" lIns="0" tIns="0" rIns="0" bIns="0">
             <a:noAutofit/>
           </a:bodyPr>
-          <a:lstStyle xmlns:a="http://schemas.openxmlformats.org/drawingml/2006/main"/>
-          <a:p xmlns:a="http://schemas.openxmlformats.org/drawingml/2006/main">
+          <a:lstStyle/>
+          <a:p>
             <a:pPr algn="l">
               <a:buNone/>
               <a:defRPr sz="1725" b="0">
@@ -5886,17 +5643,21 @@
       </p:ext>
     </p:extLst>
   </p:cSld>
+  <p:clrMapOvr>
+    <a:masterClrMapping/>
+  </p:clrMapOvr>
 </p:sld>
 </file>
 
 <file path=ppt/slides/slide5.xml><?xml version="1.0" encoding="utf-8"?>
-<p:sld xmlns:p="http://schemas.openxmlformats.org/presentationml/2006/main">
+<p:sld xmlns:a="http://schemas.openxmlformats.org/drawingml/2006/main" xmlns:r="http://schemas.openxmlformats.org/officeDocument/2006/relationships" xmlns:p="http://schemas.openxmlformats.org/presentationml/2006/main">
   <p:cSld>
     <p:bg>
       <p:bgPr>
-        <a:solidFill xmlns:a="http://schemas.openxmlformats.org/drawingml/2006/main">
+        <a:solidFill>
           <a:srgbClr val="FFFFFF"/>
         </a:solidFill>
+        <a:effectLst/>
       </p:bgPr>
     </p:bg>
     <p:spTree>
@@ -5906,41 +5667,46 @@
         <p:nvPr/>
       </p:nvGrpSpPr>
       <p:grpSpPr>
-        <a:xfrm xmlns:a="http://schemas.openxmlformats.org/drawingml/2006/main"/>
+        <a:xfrm>
+          <a:off x="0" y="0"/>
+          <a:ext cx="0" cy="0"/>
+          <a:chOff x="0" y="0"/>
+          <a:chExt cx="0" cy="0"/>
+        </a:xfrm>
       </p:grpSpPr>
       <p:sp>
         <p:nvSpPr>
-          <p:cNvPr id="6" name="">
-            <a:extLst xmlns:a="http://schemas.openxmlformats.org/drawingml/2006/main">
+          <p:cNvPr id="6" name="Rectangle 5">
+            <a:extLst>
               <a:ext uri="{FF2B5EF4-FFF2-40B4-BE49-F238E27FC236}">
                 <a16:creationId xmlns:a16="http://schemas.microsoft.com/office/drawing/2014/main" id="{8E876B70-C85E-4CD6-8DA0-EABCB659795A}"/>
               </a:ext>
             </a:extLst>
           </p:cNvPr>
           <p:cNvSpPr>
-            <a:spLocks xmlns:a="http://schemas.openxmlformats.org/drawingml/2006/main" noGrp="1"/>
+            <a:spLocks noGrp="1"/>
           </p:cNvSpPr>
           <p:nvPr/>
         </p:nvSpPr>
         <p:spPr>
-          <a:xfrm xmlns:a="http://schemas.openxmlformats.org/drawingml/2006/main">
+          <a:xfrm>
             <a:off x="609600" y="457200"/>
             <a:ext cx="10972800" cy="857250"/>
           </a:xfrm>
-          <a:prstGeom xmlns:a="http://schemas.openxmlformats.org/drawingml/2006/main" prst="rect">
+          <a:prstGeom prst="rect">
             <a:avLst/>
           </a:prstGeom>
-          <a:noFill xmlns:a="http://schemas.openxmlformats.org/drawingml/2006/main"/>
-          <a:ln xmlns:a="http://schemas.openxmlformats.org/drawingml/2006/main" w="0">
+          <a:noFill/>
+          <a:ln w="0">
             <a:noFill/>
           </a:ln>
         </p:spPr>
         <p:txBody>
-          <a:bodyPr xmlns:a="http://schemas.openxmlformats.org/drawingml/2006/main" wrap="square" lIns="0" tIns="0" rIns="0" bIns="0">
+          <a:bodyPr wrap="square" lIns="0" tIns="0" rIns="0" bIns="0">
             <a:noAutofit/>
           </a:bodyPr>
-          <a:lstStyle xmlns:a="http://schemas.openxmlformats.org/drawingml/2006/main"/>
-          <a:p xmlns:a="http://schemas.openxmlformats.org/drawingml/2006/main">
+          <a:lstStyle/>
+          <a:p>
             <a:pPr algn="l">
               <a:buNone/>
               <a:defRPr sz="3300" b="1">
@@ -5968,37 +5734,37 @@
       </p:sp>
       <p:sp>
         <p:nvSpPr>
-          <p:cNvPr id="2" name="">
-            <a:extLst xmlns:a="http://schemas.openxmlformats.org/drawingml/2006/main">
+          <p:cNvPr id="2" name="Rectangle 1">
+            <a:extLst>
               <a:ext uri="{FF2B5EF4-FFF2-40B4-BE49-F238E27FC236}">
                 <a16:creationId xmlns:a16="http://schemas.microsoft.com/office/drawing/2014/main" id="{63B47116-AB17-443B-A53A-BE787ECBDBAA}"/>
               </a:ext>
             </a:extLst>
           </p:cNvPr>
           <p:cNvSpPr>
-            <a:spLocks xmlns:a="http://schemas.openxmlformats.org/drawingml/2006/main" noGrp="1"/>
+            <a:spLocks noGrp="1"/>
           </p:cNvSpPr>
           <p:nvPr/>
         </p:nvSpPr>
         <p:spPr>
-          <a:xfrm xmlns:a="http://schemas.openxmlformats.org/drawingml/2006/main">
+          <a:xfrm>
             <a:off x="11106150" y="6296025"/>
             <a:ext cx="476250" cy="285750"/>
           </a:xfrm>
-          <a:prstGeom xmlns:a="http://schemas.openxmlformats.org/drawingml/2006/main" prst="rect">
+          <a:prstGeom prst="rect">
             <a:avLst/>
           </a:prstGeom>
-          <a:noFill xmlns:a="http://schemas.openxmlformats.org/drawingml/2006/main"/>
-          <a:ln xmlns:a="http://schemas.openxmlformats.org/drawingml/2006/main" w="0">
+          <a:noFill/>
+          <a:ln w="0">
             <a:noFill/>
           </a:ln>
         </p:spPr>
         <p:txBody>
-          <a:bodyPr xmlns:a="http://schemas.openxmlformats.org/drawingml/2006/main" wrap="square" lIns="0" tIns="0" rIns="0" bIns="0">
+          <a:bodyPr wrap="square" lIns="0" tIns="0" rIns="0" bIns="0">
             <a:noAutofit/>
           </a:bodyPr>
-          <a:lstStyle xmlns:a="http://schemas.openxmlformats.org/drawingml/2006/main"/>
-          <a:p xmlns:a="http://schemas.openxmlformats.org/drawingml/2006/main">
+          <a:lstStyle/>
+          <a:p>
             <a:pPr algn="r">
               <a:buNone/>
               <a:defRPr sz="1500" b="0">
@@ -6026,8 +5792,8 @@
       </p:sp>
       <p:graphicFrame>
         <p:nvGraphicFramePr>
-          <p:cNvPr id="8" name="">
-            <a:extLst xmlns:a="http://schemas.openxmlformats.org/drawingml/2006/main">
+          <p:cNvPr id="8" name="Table 7">
+            <a:extLst>
               <a:ext uri="{FF2B5EF4-FFF2-40B4-BE49-F238E27FC236}">
                 <a16:creationId xmlns:a16="http://schemas.microsoft.com/office/drawing/2014/main" id="{101A7916-3E91-4642-B4DA-C69FA60DDEA4}"/>
               </a:ext>
@@ -6037,17 +5803,35 @@
           <p:nvPr/>
         </p:nvGraphicFramePr>
         <p:xfrm>
-          <a:off xmlns:a="http://schemas.openxmlformats.org/drawingml/2006/main" x="609600" y="1647825"/>
-          <a:ext xmlns:a="http://schemas.openxmlformats.org/drawingml/2006/main" cx="10972800" cy="3571875"/>
+          <a:off x="609600" y="1647825"/>
+          <a:ext cx="10972800" cy="3571875"/>
         </p:xfrm>
-        <a:graphic xmlns:a="http://schemas.openxmlformats.org/drawingml/2006/main">
+        <a:graphic>
           <a:graphicData uri="http://schemas.openxmlformats.org/drawingml/2006/table">
             <a:tbl>
               <a:tblPr/>
               <a:tblGrid>
-                <a:gridCol w="2571750"/>
-                <a:gridCol w="4286250"/>
-                <a:gridCol w="4114800"/>
+                <a:gridCol w="2571750">
+                  <a:extLst>
+                    <a:ext uri="{9D8B030D-6E8A-4147-A177-3AD203B41FA5}">
+                      <a16:colId xmlns:a16="http://schemas.microsoft.com/office/drawing/2014/main" val="20000"/>
+                    </a:ext>
+                  </a:extLst>
+                </a:gridCol>
+                <a:gridCol w="4286250">
+                  <a:extLst>
+                    <a:ext uri="{9D8B030D-6E8A-4147-A177-3AD203B41FA5}">
+                      <a16:colId xmlns:a16="http://schemas.microsoft.com/office/drawing/2014/main" val="20001"/>
+                    </a:ext>
+                  </a:extLst>
+                </a:gridCol>
+                <a:gridCol w="4114800">
+                  <a:extLst>
+                    <a:ext uri="{9D8B030D-6E8A-4147-A177-3AD203B41FA5}">
+                      <a16:colId xmlns:a16="http://schemas.microsoft.com/office/drawing/2014/main" val="20002"/>
+                    </a:ext>
+                  </a:extLst>
+                </a:gridCol>
               </a:tblGrid>
               <a:tr h="714375">
                 <a:tc>
@@ -6122,6 +5906,11 @@
                     </a:solidFill>
                   </a:tcPr>
                 </a:tc>
+                <a:extLst>
+                  <a:ext uri="{0D108BD9-81ED-4DB2-BD59-A6C34878D82A}">
+                    <a16:rowId xmlns:a16="http://schemas.microsoft.com/office/drawing/2014/main" val="10000"/>
+                  </a:ext>
+                </a:extLst>
               </a:tr>
               <a:tr h="714375">
                 <a:tc>
@@ -6196,6 +5985,11 @@
                     </a:solidFill>
                   </a:tcPr>
                 </a:tc>
+                <a:extLst>
+                  <a:ext uri="{0D108BD9-81ED-4DB2-BD59-A6C34878D82A}">
+                    <a16:rowId xmlns:a16="http://schemas.microsoft.com/office/drawing/2014/main" val="10001"/>
+                  </a:ext>
+                </a:extLst>
               </a:tr>
               <a:tr h="714375">
                 <a:tc>
@@ -6270,6 +6064,11 @@
                     </a:solidFill>
                   </a:tcPr>
                 </a:tc>
+                <a:extLst>
+                  <a:ext uri="{0D108BD9-81ED-4DB2-BD59-A6C34878D82A}">
+                    <a16:rowId xmlns:a16="http://schemas.microsoft.com/office/drawing/2014/main" val="10002"/>
+                  </a:ext>
+                </a:extLst>
               </a:tr>
               <a:tr h="714375">
                 <a:tc>
@@ -6344,6 +6143,11 @@
                     </a:solidFill>
                   </a:tcPr>
                 </a:tc>
+                <a:extLst>
+                  <a:ext uri="{0D108BD9-81ED-4DB2-BD59-A6C34878D82A}">
+                    <a16:rowId xmlns:a16="http://schemas.microsoft.com/office/drawing/2014/main" val="10003"/>
+                  </a:ext>
+                </a:extLst>
               </a:tr>
               <a:tr h="714375">
                 <a:tc>
@@ -6418,6 +6222,11 @@
                     </a:solidFill>
                   </a:tcPr>
                 </a:tc>
+                <a:extLst>
+                  <a:ext uri="{0D108BD9-81ED-4DB2-BD59-A6C34878D82A}">
+                    <a16:rowId xmlns:a16="http://schemas.microsoft.com/office/drawing/2014/main" val="10004"/>
+                  </a:ext>
+                </a:extLst>
               </a:tr>
             </a:tbl>
           </a:graphicData>
@@ -6425,37 +6234,37 @@
       </p:graphicFrame>
       <p:sp>
         <p:nvSpPr>
-          <p:cNvPr id="4" name="">
-            <a:extLst xmlns:a="http://schemas.openxmlformats.org/drawingml/2006/main">
+          <p:cNvPr id="4" name="Rectangle 3">
+            <a:extLst>
               <a:ext uri="{FF2B5EF4-FFF2-40B4-BE49-F238E27FC236}">
                 <a16:creationId xmlns:a16="http://schemas.microsoft.com/office/drawing/2014/main" id="{9474722E-B97E-4D3E-B9C1-4E4CEE5D35E6}"/>
               </a:ext>
             </a:extLst>
           </p:cNvPr>
           <p:cNvSpPr>
-            <a:spLocks xmlns:a="http://schemas.openxmlformats.org/drawingml/2006/main" noGrp="1"/>
+            <a:spLocks noGrp="1"/>
           </p:cNvSpPr>
           <p:nvPr/>
         </p:nvSpPr>
         <p:spPr>
-          <a:xfrm xmlns:a="http://schemas.openxmlformats.org/drawingml/2006/main">
+          <a:xfrm>
             <a:off x="609600" y="5495925"/>
             <a:ext cx="10972800" cy="409575"/>
           </a:xfrm>
-          <a:prstGeom xmlns:a="http://schemas.openxmlformats.org/drawingml/2006/main" prst="rect">
+          <a:prstGeom prst="rect">
             <a:avLst/>
           </a:prstGeom>
-          <a:noFill xmlns:a="http://schemas.openxmlformats.org/drawingml/2006/main"/>
-          <a:ln xmlns:a="http://schemas.openxmlformats.org/drawingml/2006/main" w="0">
+          <a:noFill/>
+          <a:ln w="0">
             <a:noFill/>
           </a:ln>
         </p:spPr>
         <p:txBody>
-          <a:bodyPr xmlns:a="http://schemas.openxmlformats.org/drawingml/2006/main" wrap="square" lIns="0" tIns="0" rIns="0" bIns="0">
+          <a:bodyPr wrap="square" lIns="0" tIns="0" rIns="0" bIns="0">
             <a:noAutofit/>
           </a:bodyPr>
-          <a:lstStyle xmlns:a="http://schemas.openxmlformats.org/drawingml/2006/main"/>
-          <a:p xmlns:a="http://schemas.openxmlformats.org/drawingml/2006/main">
+          <a:lstStyle/>
+          <a:p>
             <a:pPr algn="l">
               <a:buNone/>
               <a:defRPr sz="1950" b="0">
@@ -6483,37 +6292,37 @@
       </p:sp>
       <p:sp>
         <p:nvSpPr>
-          <p:cNvPr id="5" name="">
-            <a:extLst xmlns:a="http://schemas.openxmlformats.org/drawingml/2006/main">
+          <p:cNvPr id="5" name="Rectangle 4">
+            <a:extLst>
               <a:ext uri="{FF2B5EF4-FFF2-40B4-BE49-F238E27FC236}">
                 <a16:creationId xmlns:a16="http://schemas.microsoft.com/office/drawing/2014/main" id="{3B350DAA-BC7D-4C6D-926E-C8D983133EBA}"/>
               </a:ext>
             </a:extLst>
           </p:cNvPr>
           <p:cNvSpPr>
-            <a:spLocks xmlns:a="http://schemas.openxmlformats.org/drawingml/2006/main" noGrp="1"/>
+            <a:spLocks noGrp="1"/>
           </p:cNvSpPr>
           <p:nvPr/>
         </p:nvSpPr>
         <p:spPr>
-          <a:xfrm xmlns:a="http://schemas.openxmlformats.org/drawingml/2006/main">
+          <a:xfrm>
             <a:off x="609600" y="6019800"/>
             <a:ext cx="10382250" cy="381000"/>
           </a:xfrm>
-          <a:prstGeom xmlns:a="http://schemas.openxmlformats.org/drawingml/2006/main" prst="rect">
+          <a:prstGeom prst="rect">
             <a:avLst/>
           </a:prstGeom>
-          <a:noFill xmlns:a="http://schemas.openxmlformats.org/drawingml/2006/main"/>
-          <a:ln xmlns:a="http://schemas.openxmlformats.org/drawingml/2006/main" w="0">
+          <a:noFill/>
+          <a:ln w="0">
             <a:noFill/>
           </a:ln>
         </p:spPr>
         <p:txBody>
-          <a:bodyPr xmlns:a="http://schemas.openxmlformats.org/drawingml/2006/main" wrap="square" lIns="0" tIns="0" rIns="0" bIns="0">
+          <a:bodyPr wrap="square" lIns="0" tIns="0" rIns="0" bIns="0">
             <a:noAutofit/>
           </a:bodyPr>
-          <a:lstStyle xmlns:a="http://schemas.openxmlformats.org/drawingml/2006/main"/>
-          <a:p xmlns:a="http://schemas.openxmlformats.org/drawingml/2006/main">
+          <a:lstStyle/>
+          <a:p>
             <a:pPr algn="l">
               <a:buNone/>
               <a:defRPr sz="1725" b="0">
@@ -6546,17 +6355,21 @@
       </p:ext>
     </p:extLst>
   </p:cSld>
+  <p:clrMapOvr>
+    <a:masterClrMapping/>
+  </p:clrMapOvr>
 </p:sld>
 </file>
 
 <file path=ppt/slides/slide6.xml><?xml version="1.0" encoding="utf-8"?>
-<p:sld xmlns:p="http://schemas.openxmlformats.org/presentationml/2006/main">
+<p:sld xmlns:a="http://schemas.openxmlformats.org/drawingml/2006/main" xmlns:r="http://schemas.openxmlformats.org/officeDocument/2006/relationships" xmlns:p="http://schemas.openxmlformats.org/presentationml/2006/main">
   <p:cSld>
     <p:bg>
       <p:bgPr>
-        <a:solidFill xmlns:a="http://schemas.openxmlformats.org/drawingml/2006/main">
+        <a:solidFill>
           <a:srgbClr val="FFFFFF"/>
         </a:solidFill>
+        <a:effectLst/>
       </p:bgPr>
     </p:bg>
     <p:spTree>
@@ -6566,41 +6379,46 @@
         <p:nvPr/>
       </p:nvGrpSpPr>
       <p:grpSpPr>
-        <a:xfrm xmlns:a="http://schemas.openxmlformats.org/drawingml/2006/main"/>
+        <a:xfrm>
+          <a:off x="0" y="0"/>
+          <a:ext cx="0" cy="0"/>
+          <a:chOff x="0" y="0"/>
+          <a:chExt cx="0" cy="0"/>
+        </a:xfrm>
       </p:grpSpPr>
       <p:sp>
         <p:nvSpPr>
-          <p:cNvPr id="7" name="">
-            <a:extLst xmlns:a="http://schemas.openxmlformats.org/drawingml/2006/main">
+          <p:cNvPr id="7" name="Rectangle 6">
+            <a:extLst>
               <a:ext uri="{FF2B5EF4-FFF2-40B4-BE49-F238E27FC236}">
                 <a16:creationId xmlns:a16="http://schemas.microsoft.com/office/drawing/2014/main" id="{371BEE17-0FE8-41DF-AF7D-FC41F4909A78}"/>
               </a:ext>
             </a:extLst>
           </p:cNvPr>
           <p:cNvSpPr>
-            <a:spLocks xmlns:a="http://schemas.openxmlformats.org/drawingml/2006/main" noGrp="1"/>
+            <a:spLocks noGrp="1"/>
           </p:cNvSpPr>
           <p:nvPr/>
         </p:nvSpPr>
         <p:spPr>
-          <a:xfrm xmlns:a="http://schemas.openxmlformats.org/drawingml/2006/main">
+          <a:xfrm>
             <a:off x="609600" y="457200"/>
             <a:ext cx="10972800" cy="857250"/>
           </a:xfrm>
-          <a:prstGeom xmlns:a="http://schemas.openxmlformats.org/drawingml/2006/main" prst="rect">
+          <a:prstGeom prst="rect">
             <a:avLst/>
           </a:prstGeom>
-          <a:noFill xmlns:a="http://schemas.openxmlformats.org/drawingml/2006/main"/>
-          <a:ln xmlns:a="http://schemas.openxmlformats.org/drawingml/2006/main" w="0">
+          <a:noFill/>
+          <a:ln w="0">
             <a:noFill/>
           </a:ln>
         </p:spPr>
         <p:txBody>
-          <a:bodyPr xmlns:a="http://schemas.openxmlformats.org/drawingml/2006/main" wrap="square" lIns="0" tIns="0" rIns="0" bIns="0">
+          <a:bodyPr wrap="square" lIns="0" tIns="0" rIns="0" bIns="0">
             <a:noAutofit/>
           </a:bodyPr>
-          <a:lstStyle xmlns:a="http://schemas.openxmlformats.org/drawingml/2006/main"/>
-          <a:p xmlns:a="http://schemas.openxmlformats.org/drawingml/2006/main">
+          <a:lstStyle/>
+          <a:p>
             <a:pPr algn="l">
               <a:buNone/>
               <a:defRPr sz="3300" b="1">
@@ -6628,37 +6446,37 @@
       </p:sp>
       <p:sp>
         <p:nvSpPr>
-          <p:cNvPr id="2" name="">
-            <a:extLst xmlns:a="http://schemas.openxmlformats.org/drawingml/2006/main">
+          <p:cNvPr id="2" name="Rectangle 1">
+            <a:extLst>
               <a:ext uri="{FF2B5EF4-FFF2-40B4-BE49-F238E27FC236}">
                 <a16:creationId xmlns:a16="http://schemas.microsoft.com/office/drawing/2014/main" id="{CD5E4940-5211-4234-8AB6-0E4997172DF2}"/>
               </a:ext>
             </a:extLst>
           </p:cNvPr>
           <p:cNvSpPr>
-            <a:spLocks xmlns:a="http://schemas.openxmlformats.org/drawingml/2006/main" noGrp="1"/>
+            <a:spLocks noGrp="1"/>
           </p:cNvSpPr>
           <p:nvPr/>
         </p:nvSpPr>
         <p:spPr>
-          <a:xfrm xmlns:a="http://schemas.openxmlformats.org/drawingml/2006/main">
+          <a:xfrm>
             <a:off x="11106150" y="6296025"/>
             <a:ext cx="476250" cy="285750"/>
           </a:xfrm>
-          <a:prstGeom xmlns:a="http://schemas.openxmlformats.org/drawingml/2006/main" prst="rect">
+          <a:prstGeom prst="rect">
             <a:avLst/>
           </a:prstGeom>
-          <a:noFill xmlns:a="http://schemas.openxmlformats.org/drawingml/2006/main"/>
-          <a:ln xmlns:a="http://schemas.openxmlformats.org/drawingml/2006/main" w="0">
+          <a:noFill/>
+          <a:ln w="0">
             <a:noFill/>
           </a:ln>
         </p:spPr>
         <p:txBody>
-          <a:bodyPr xmlns:a="http://schemas.openxmlformats.org/drawingml/2006/main" wrap="square" lIns="0" tIns="0" rIns="0" bIns="0">
+          <a:bodyPr wrap="square" lIns="0" tIns="0" rIns="0" bIns="0">
             <a:noAutofit/>
           </a:bodyPr>
-          <a:lstStyle xmlns:a="http://schemas.openxmlformats.org/drawingml/2006/main"/>
-          <a:p xmlns:a="http://schemas.openxmlformats.org/drawingml/2006/main">
+          <a:lstStyle/>
+          <a:p>
             <a:pPr algn="r">
               <a:buNone/>
               <a:defRPr sz="1500" b="0">
@@ -6686,8 +6504,8 @@
       </p:sp>
       <p:graphicFrame>
         <p:nvGraphicFramePr>
-          <p:cNvPr id="9" name="">
-            <a:extLst xmlns:a="http://schemas.openxmlformats.org/drawingml/2006/main">
+          <p:cNvPr id="9" name="Table 8">
+            <a:extLst>
               <a:ext uri="{FF2B5EF4-FFF2-40B4-BE49-F238E27FC236}">
                 <a16:creationId xmlns:a16="http://schemas.microsoft.com/office/drawing/2014/main" id="{81954367-D9AE-4D1E-909A-0934E858935A}"/>
               </a:ext>
@@ -6697,17 +6515,35 @@
           <p:nvPr/>
         </p:nvGraphicFramePr>
         <p:xfrm>
-          <a:off xmlns:a="http://schemas.openxmlformats.org/drawingml/2006/main" x="609600" y="1885950"/>
-          <a:ext xmlns:a="http://schemas.openxmlformats.org/drawingml/2006/main" cx="10972800" cy="2667000"/>
+          <a:off x="609600" y="1885950"/>
+          <a:ext cx="10972800" cy="2667000"/>
         </p:xfrm>
-        <a:graphic xmlns:a="http://schemas.openxmlformats.org/drawingml/2006/main">
+        <a:graphic>
           <a:graphicData uri="http://schemas.openxmlformats.org/drawingml/2006/table">
             <a:tbl>
               <a:tblPr/>
               <a:tblGrid>
-                <a:gridCol w="4572000"/>
-                <a:gridCol w="3124200"/>
-                <a:gridCol w="3276600"/>
+                <a:gridCol w="4572000">
+                  <a:extLst>
+                    <a:ext uri="{9D8B030D-6E8A-4147-A177-3AD203B41FA5}">
+                      <a16:colId xmlns:a16="http://schemas.microsoft.com/office/drawing/2014/main" val="20000"/>
+                    </a:ext>
+                  </a:extLst>
+                </a:gridCol>
+                <a:gridCol w="3124200">
+                  <a:extLst>
+                    <a:ext uri="{9D8B030D-6E8A-4147-A177-3AD203B41FA5}">
+                      <a16:colId xmlns:a16="http://schemas.microsoft.com/office/drawing/2014/main" val="20001"/>
+                    </a:ext>
+                  </a:extLst>
+                </a:gridCol>
+                <a:gridCol w="3276600">
+                  <a:extLst>
+                    <a:ext uri="{9D8B030D-6E8A-4147-A177-3AD203B41FA5}">
+                      <a16:colId xmlns:a16="http://schemas.microsoft.com/office/drawing/2014/main" val="20002"/>
+                    </a:ext>
+                  </a:extLst>
+                </a:gridCol>
               </a:tblGrid>
               <a:tr h="666750">
                 <a:tc>
@@ -6782,6 +6618,11 @@
                     </a:solidFill>
                   </a:tcPr>
                 </a:tc>
+                <a:extLst>
+                  <a:ext uri="{0D108BD9-81ED-4DB2-BD59-A6C34878D82A}">
+                    <a16:rowId xmlns:a16="http://schemas.microsoft.com/office/drawing/2014/main" val="10000"/>
+                  </a:ext>
+                </a:extLst>
               </a:tr>
               <a:tr h="666750">
                 <a:tc>
@@ -6856,6 +6697,11 @@
                     </a:solidFill>
                   </a:tcPr>
                 </a:tc>
+                <a:extLst>
+                  <a:ext uri="{0D108BD9-81ED-4DB2-BD59-A6C34878D82A}">
+                    <a16:rowId xmlns:a16="http://schemas.microsoft.com/office/drawing/2014/main" val="10001"/>
+                  </a:ext>
+                </a:extLst>
               </a:tr>
               <a:tr h="666750">
                 <a:tc>
@@ -6930,6 +6776,11 @@
                     </a:solidFill>
                   </a:tcPr>
                 </a:tc>
+                <a:extLst>
+                  <a:ext uri="{0D108BD9-81ED-4DB2-BD59-A6C34878D82A}">
+                    <a16:rowId xmlns:a16="http://schemas.microsoft.com/office/drawing/2014/main" val="10002"/>
+                  </a:ext>
+                </a:extLst>
               </a:tr>
               <a:tr h="666750">
                 <a:tc>
@@ -7004,6 +6855,11 @@
                     </a:solidFill>
                   </a:tcPr>
                 </a:tc>
+                <a:extLst>
+                  <a:ext uri="{0D108BD9-81ED-4DB2-BD59-A6C34878D82A}">
+                    <a16:rowId xmlns:a16="http://schemas.microsoft.com/office/drawing/2014/main" val="10003"/>
+                  </a:ext>
+                </a:extLst>
               </a:tr>
             </a:tbl>
           </a:graphicData>
@@ -7011,37 +6867,37 @@
       </p:graphicFrame>
       <p:sp>
         <p:nvSpPr>
-          <p:cNvPr id="4" name="">
-            <a:extLst xmlns:a="http://schemas.openxmlformats.org/drawingml/2006/main">
+          <p:cNvPr id="4" name="Rectangle 3">
+            <a:extLst>
               <a:ext uri="{FF2B5EF4-FFF2-40B4-BE49-F238E27FC236}">
                 <a16:creationId xmlns:a16="http://schemas.microsoft.com/office/drawing/2014/main" id="{E35967BF-92CC-4C67-BCE3-FB75E9B5C258}"/>
               </a:ext>
             </a:extLst>
           </p:cNvPr>
           <p:cNvSpPr>
-            <a:spLocks xmlns:a="http://schemas.openxmlformats.org/drawingml/2006/main" noGrp="1"/>
+            <a:spLocks noGrp="1"/>
           </p:cNvSpPr>
           <p:nvPr/>
         </p:nvSpPr>
         <p:spPr>
-          <a:xfrm xmlns:a="http://schemas.openxmlformats.org/drawingml/2006/main">
+          <a:xfrm>
             <a:off x="609600" y="4962525"/>
             <a:ext cx="10820400" cy="428625"/>
           </a:xfrm>
-          <a:prstGeom xmlns:a="http://schemas.openxmlformats.org/drawingml/2006/main" prst="rect">
+          <a:prstGeom prst="rect">
             <a:avLst/>
           </a:prstGeom>
-          <a:noFill xmlns:a="http://schemas.openxmlformats.org/drawingml/2006/main"/>
-          <a:ln xmlns:a="http://schemas.openxmlformats.org/drawingml/2006/main" w="0">
+          <a:noFill/>
+          <a:ln w="0">
             <a:noFill/>
           </a:ln>
         </p:spPr>
         <p:txBody>
-          <a:bodyPr xmlns:a="http://schemas.openxmlformats.org/drawingml/2006/main" wrap="square" lIns="0" tIns="0" rIns="0" bIns="0">
+          <a:bodyPr wrap="square" lIns="0" tIns="0" rIns="0" bIns="0">
             <a:noAutofit/>
           </a:bodyPr>
-          <a:lstStyle xmlns:a="http://schemas.openxmlformats.org/drawingml/2006/main"/>
-          <a:p xmlns:a="http://schemas.openxmlformats.org/drawingml/2006/main">
+          <a:lstStyle/>
+          <a:p>
             <a:pPr algn="l">
               <a:buNone/>
               <a:defRPr sz="2400" b="1">
@@ -7069,37 +6925,37 @@
       </p:sp>
       <p:sp>
         <p:nvSpPr>
-          <p:cNvPr id="5" name="">
-            <a:extLst xmlns:a="http://schemas.openxmlformats.org/drawingml/2006/main">
+          <p:cNvPr id="5" name="Rectangle 4">
+            <a:extLst>
               <a:ext uri="{FF2B5EF4-FFF2-40B4-BE49-F238E27FC236}">
                 <a16:creationId xmlns:a16="http://schemas.microsoft.com/office/drawing/2014/main" id="{7D3F7051-7C69-4C55-B738-047E3309FA38}"/>
               </a:ext>
             </a:extLst>
           </p:cNvPr>
           <p:cNvSpPr>
-            <a:spLocks xmlns:a="http://schemas.openxmlformats.org/drawingml/2006/main" noGrp="1"/>
+            <a:spLocks noGrp="1"/>
           </p:cNvSpPr>
           <p:nvPr/>
         </p:nvSpPr>
         <p:spPr>
-          <a:xfrm xmlns:a="http://schemas.openxmlformats.org/drawingml/2006/main">
+          <a:xfrm>
             <a:off x="609600" y="5524500"/>
             <a:ext cx="10820400" cy="419100"/>
           </a:xfrm>
-          <a:prstGeom xmlns:a="http://schemas.openxmlformats.org/drawingml/2006/main" prst="rect">
+          <a:prstGeom prst="rect">
             <a:avLst/>
           </a:prstGeom>
-          <a:noFill xmlns:a="http://schemas.openxmlformats.org/drawingml/2006/main"/>
-          <a:ln xmlns:a="http://schemas.openxmlformats.org/drawingml/2006/main" w="0">
+          <a:noFill/>
+          <a:ln w="0">
             <a:noFill/>
           </a:ln>
         </p:spPr>
         <p:txBody>
-          <a:bodyPr xmlns:a="http://schemas.openxmlformats.org/drawingml/2006/main" wrap="square" lIns="0" tIns="0" rIns="0" bIns="0">
+          <a:bodyPr wrap="square" lIns="0" tIns="0" rIns="0" bIns="0">
             <a:noAutofit/>
           </a:bodyPr>
-          <a:lstStyle xmlns:a="http://schemas.openxmlformats.org/drawingml/2006/main"/>
-          <a:p xmlns:a="http://schemas.openxmlformats.org/drawingml/2006/main">
+          <a:lstStyle/>
+          <a:p>
             <a:pPr algn="l">
               <a:buNone/>
               <a:defRPr sz="2025" b="0">
@@ -7127,37 +6983,37 @@
       </p:sp>
       <p:sp>
         <p:nvSpPr>
-          <p:cNvPr id="6" name="">
-            <a:extLst xmlns:a="http://schemas.openxmlformats.org/drawingml/2006/main">
+          <p:cNvPr id="6" name="Rectangle 5">
+            <a:extLst>
               <a:ext uri="{FF2B5EF4-FFF2-40B4-BE49-F238E27FC236}">
                 <a16:creationId xmlns:a16="http://schemas.microsoft.com/office/drawing/2014/main" id="{0E819D26-FAC0-488D-A21C-2A1CC83D3D09}"/>
               </a:ext>
             </a:extLst>
           </p:cNvPr>
           <p:cNvSpPr>
-            <a:spLocks xmlns:a="http://schemas.openxmlformats.org/drawingml/2006/main" noGrp="1"/>
+            <a:spLocks noGrp="1"/>
           </p:cNvSpPr>
           <p:nvPr/>
         </p:nvSpPr>
         <p:spPr>
-          <a:xfrm xmlns:a="http://schemas.openxmlformats.org/drawingml/2006/main">
+          <a:xfrm>
             <a:off x="609600" y="6124575"/>
             <a:ext cx="10382250" cy="381000"/>
           </a:xfrm>
-          <a:prstGeom xmlns:a="http://schemas.openxmlformats.org/drawingml/2006/main" prst="rect">
+          <a:prstGeom prst="rect">
             <a:avLst/>
           </a:prstGeom>
-          <a:noFill xmlns:a="http://schemas.openxmlformats.org/drawingml/2006/main"/>
-          <a:ln xmlns:a="http://schemas.openxmlformats.org/drawingml/2006/main" w="0">
+          <a:noFill/>
+          <a:ln w="0">
             <a:noFill/>
           </a:ln>
         </p:spPr>
         <p:txBody>
-          <a:bodyPr xmlns:a="http://schemas.openxmlformats.org/drawingml/2006/main" wrap="square" lIns="0" tIns="0" rIns="0" bIns="0">
+          <a:bodyPr wrap="square" lIns="0" tIns="0" rIns="0" bIns="0">
             <a:noAutofit/>
           </a:bodyPr>
-          <a:lstStyle xmlns:a="http://schemas.openxmlformats.org/drawingml/2006/main"/>
-          <a:p xmlns:a="http://schemas.openxmlformats.org/drawingml/2006/main">
+          <a:lstStyle/>
+          <a:p>
             <a:pPr algn="l">
               <a:buNone/>
               <a:defRPr sz="1650" b="0">
@@ -7190,17 +7046,21 @@
       </p:ext>
     </p:extLst>
   </p:cSld>
+  <p:clrMapOvr>
+    <a:masterClrMapping/>
+  </p:clrMapOvr>
 </p:sld>
 </file>
 
 <file path=ppt/slides/slide7.xml><?xml version="1.0" encoding="utf-8"?>
-<p:sld xmlns:p="http://schemas.openxmlformats.org/presentationml/2006/main">
+<p:sld xmlns:a="http://schemas.openxmlformats.org/drawingml/2006/main" xmlns:r="http://schemas.openxmlformats.org/officeDocument/2006/relationships" xmlns:p="http://schemas.openxmlformats.org/presentationml/2006/main">
   <p:cSld>
     <p:bg>
       <p:bgPr>
-        <a:solidFill xmlns:a="http://schemas.openxmlformats.org/drawingml/2006/main">
+        <a:solidFill>
           <a:srgbClr val="FFFFFF"/>
         </a:solidFill>
+        <a:effectLst/>
       </p:bgPr>
     </p:bg>
     <p:spTree>
@@ -7210,41 +7070,46 @@
         <p:nvPr/>
       </p:nvGrpSpPr>
       <p:grpSpPr>
-        <a:xfrm xmlns:a="http://schemas.openxmlformats.org/drawingml/2006/main"/>
+        <a:xfrm>
+          <a:off x="0" y="0"/>
+          <a:ext cx="0" cy="0"/>
+          <a:chOff x="0" y="0"/>
+          <a:chExt cx="0" cy="0"/>
+        </a:xfrm>
       </p:grpSpPr>
       <p:sp>
         <p:nvSpPr>
-          <p:cNvPr id="7" name="">
-            <a:extLst xmlns:a="http://schemas.openxmlformats.org/drawingml/2006/main">
+          <p:cNvPr id="7" name="Rectangle 6">
+            <a:extLst>
               <a:ext uri="{FF2B5EF4-FFF2-40B4-BE49-F238E27FC236}">
                 <a16:creationId xmlns:a16="http://schemas.microsoft.com/office/drawing/2014/main" id="{09799B8D-CE5C-4ACE-BEF5-A654E147F2F4}"/>
               </a:ext>
             </a:extLst>
           </p:cNvPr>
           <p:cNvSpPr>
-            <a:spLocks xmlns:a="http://schemas.openxmlformats.org/drawingml/2006/main" noGrp="1"/>
+            <a:spLocks noGrp="1"/>
           </p:cNvSpPr>
           <p:nvPr/>
         </p:nvSpPr>
         <p:spPr>
-          <a:xfrm xmlns:a="http://schemas.openxmlformats.org/drawingml/2006/main">
+          <a:xfrm>
             <a:off x="609600" y="457200"/>
             <a:ext cx="10972800" cy="857250"/>
           </a:xfrm>
-          <a:prstGeom xmlns:a="http://schemas.openxmlformats.org/drawingml/2006/main" prst="rect">
+          <a:prstGeom prst="rect">
             <a:avLst/>
           </a:prstGeom>
-          <a:noFill xmlns:a="http://schemas.openxmlformats.org/drawingml/2006/main"/>
-          <a:ln xmlns:a="http://schemas.openxmlformats.org/drawingml/2006/main" w="0">
+          <a:noFill/>
+          <a:ln w="0">
             <a:noFill/>
           </a:ln>
         </p:spPr>
         <p:txBody>
-          <a:bodyPr xmlns:a="http://schemas.openxmlformats.org/drawingml/2006/main" wrap="square" lIns="0" tIns="0" rIns="0" bIns="0">
+          <a:bodyPr wrap="square" lIns="0" tIns="0" rIns="0" bIns="0">
             <a:noAutofit/>
           </a:bodyPr>
-          <a:lstStyle xmlns:a="http://schemas.openxmlformats.org/drawingml/2006/main"/>
-          <a:p xmlns:a="http://schemas.openxmlformats.org/drawingml/2006/main">
+          <a:lstStyle/>
+          <a:p>
             <a:pPr algn="l">
               <a:buNone/>
               <a:defRPr sz="3300" b="1">
@@ -7272,37 +7137,37 @@
       </p:sp>
       <p:sp>
         <p:nvSpPr>
-          <p:cNvPr id="2" name="">
-            <a:extLst xmlns:a="http://schemas.openxmlformats.org/drawingml/2006/main">
+          <p:cNvPr id="2" name="Rectangle 1">
+            <a:extLst>
               <a:ext uri="{FF2B5EF4-FFF2-40B4-BE49-F238E27FC236}">
                 <a16:creationId xmlns:a16="http://schemas.microsoft.com/office/drawing/2014/main" id="{E665DD18-30DE-4BBB-BDCC-4590C73E046B}"/>
               </a:ext>
             </a:extLst>
           </p:cNvPr>
           <p:cNvSpPr>
-            <a:spLocks xmlns:a="http://schemas.openxmlformats.org/drawingml/2006/main" noGrp="1"/>
+            <a:spLocks noGrp="1"/>
           </p:cNvSpPr>
           <p:nvPr/>
         </p:nvSpPr>
         <p:spPr>
-          <a:xfrm xmlns:a="http://schemas.openxmlformats.org/drawingml/2006/main">
+          <a:xfrm>
             <a:off x="11106150" y="6296025"/>
             <a:ext cx="476250" cy="285750"/>
           </a:xfrm>
-          <a:prstGeom xmlns:a="http://schemas.openxmlformats.org/drawingml/2006/main" prst="rect">
+          <a:prstGeom prst="rect">
             <a:avLst/>
           </a:prstGeom>
-          <a:noFill xmlns:a="http://schemas.openxmlformats.org/drawingml/2006/main"/>
-          <a:ln xmlns:a="http://schemas.openxmlformats.org/drawingml/2006/main" w="0">
+          <a:noFill/>
+          <a:ln w="0">
             <a:noFill/>
           </a:ln>
         </p:spPr>
         <p:txBody>
-          <a:bodyPr xmlns:a="http://schemas.openxmlformats.org/drawingml/2006/main" wrap="square" lIns="0" tIns="0" rIns="0" bIns="0">
+          <a:bodyPr wrap="square" lIns="0" tIns="0" rIns="0" bIns="0">
             <a:noAutofit/>
           </a:bodyPr>
-          <a:lstStyle xmlns:a="http://schemas.openxmlformats.org/drawingml/2006/main"/>
-          <a:p xmlns:a="http://schemas.openxmlformats.org/drawingml/2006/main">
+          <a:lstStyle/>
+          <a:p>
             <a:pPr algn="r">
               <a:buNone/>
               <a:defRPr sz="1500" b="0">
@@ -7330,8 +7195,8 @@
       </p:sp>
       <p:graphicFrame>
         <p:nvGraphicFramePr>
-          <p:cNvPr id="9" name="">
-            <a:extLst xmlns:a="http://schemas.openxmlformats.org/drawingml/2006/main">
+          <p:cNvPr id="9" name="Table 8">
+            <a:extLst>
               <a:ext uri="{FF2B5EF4-FFF2-40B4-BE49-F238E27FC236}">
                 <a16:creationId xmlns:a16="http://schemas.microsoft.com/office/drawing/2014/main" id="{F87CE901-E860-4018-B396-1B789361D48E}"/>
               </a:ext>
@@ -7341,17 +7206,35 @@
           <p:nvPr/>
         </p:nvGraphicFramePr>
         <p:xfrm>
-          <a:off xmlns:a="http://schemas.openxmlformats.org/drawingml/2006/main" x="609600" y="1962150"/>
-          <a:ext xmlns:a="http://schemas.openxmlformats.org/drawingml/2006/main" cx="10972800" cy="2171700"/>
+          <a:off x="609600" y="1962150"/>
+          <a:ext cx="10972800" cy="2171700"/>
         </p:xfrm>
-        <a:graphic xmlns:a="http://schemas.openxmlformats.org/drawingml/2006/main">
+        <a:graphic>
           <a:graphicData uri="http://schemas.openxmlformats.org/drawingml/2006/table">
             <a:tbl>
               <a:tblPr/>
               <a:tblGrid>
-                <a:gridCol w="4572000"/>
-                <a:gridCol w="3124200"/>
-                <a:gridCol w="3276600"/>
+                <a:gridCol w="4572000">
+                  <a:extLst>
+                    <a:ext uri="{9D8B030D-6E8A-4147-A177-3AD203B41FA5}">
+                      <a16:colId xmlns:a16="http://schemas.microsoft.com/office/drawing/2014/main" val="20000"/>
+                    </a:ext>
+                  </a:extLst>
+                </a:gridCol>
+                <a:gridCol w="3124200">
+                  <a:extLst>
+                    <a:ext uri="{9D8B030D-6E8A-4147-A177-3AD203B41FA5}">
+                      <a16:colId xmlns:a16="http://schemas.microsoft.com/office/drawing/2014/main" val="20001"/>
+                    </a:ext>
+                  </a:extLst>
+                </a:gridCol>
+                <a:gridCol w="3276600">
+                  <a:extLst>
+                    <a:ext uri="{9D8B030D-6E8A-4147-A177-3AD203B41FA5}">
+                      <a16:colId xmlns:a16="http://schemas.microsoft.com/office/drawing/2014/main" val="20002"/>
+                    </a:ext>
+                  </a:extLst>
+                </a:gridCol>
               </a:tblGrid>
               <a:tr h="723900">
                 <a:tc>
@@ -7426,6 +7309,11 @@
                     </a:solidFill>
                   </a:tcPr>
                 </a:tc>
+                <a:extLst>
+                  <a:ext uri="{0D108BD9-81ED-4DB2-BD59-A6C34878D82A}">
+                    <a16:rowId xmlns:a16="http://schemas.microsoft.com/office/drawing/2014/main" val="10000"/>
+                  </a:ext>
+                </a:extLst>
               </a:tr>
               <a:tr h="723900">
                 <a:tc>
@@ -7500,6 +7388,11 @@
                     </a:solidFill>
                   </a:tcPr>
                 </a:tc>
+                <a:extLst>
+                  <a:ext uri="{0D108BD9-81ED-4DB2-BD59-A6C34878D82A}">
+                    <a16:rowId xmlns:a16="http://schemas.microsoft.com/office/drawing/2014/main" val="10001"/>
+                  </a:ext>
+                </a:extLst>
               </a:tr>
               <a:tr h="723900">
                 <a:tc>
@@ -7574,6 +7467,11 @@
                     </a:solidFill>
                   </a:tcPr>
                 </a:tc>
+                <a:extLst>
+                  <a:ext uri="{0D108BD9-81ED-4DB2-BD59-A6C34878D82A}">
+                    <a16:rowId xmlns:a16="http://schemas.microsoft.com/office/drawing/2014/main" val="10002"/>
+                  </a:ext>
+                </a:extLst>
               </a:tr>
             </a:tbl>
           </a:graphicData>
@@ -7581,37 +7479,37 @@
       </p:graphicFrame>
       <p:sp>
         <p:nvSpPr>
-          <p:cNvPr id="4" name="">
-            <a:extLst xmlns:a="http://schemas.openxmlformats.org/drawingml/2006/main">
+          <p:cNvPr id="4" name="Rectangle 3">
+            <a:extLst>
               <a:ext uri="{FF2B5EF4-FFF2-40B4-BE49-F238E27FC236}">
                 <a16:creationId xmlns:a16="http://schemas.microsoft.com/office/drawing/2014/main" id="{AA2E0609-BDB2-426D-9BBB-681B411461E8}"/>
               </a:ext>
             </a:extLst>
           </p:cNvPr>
           <p:cNvSpPr>
-            <a:spLocks xmlns:a="http://schemas.openxmlformats.org/drawingml/2006/main" noGrp="1"/>
+            <a:spLocks noGrp="1"/>
           </p:cNvSpPr>
           <p:nvPr/>
         </p:nvSpPr>
         <p:spPr>
-          <a:xfrm xmlns:a="http://schemas.openxmlformats.org/drawingml/2006/main">
+          <a:xfrm>
             <a:off x="609600" y="4676775"/>
             <a:ext cx="10820400" cy="476250"/>
           </a:xfrm>
-          <a:prstGeom xmlns:a="http://schemas.openxmlformats.org/drawingml/2006/main" prst="rect">
+          <a:prstGeom prst="rect">
             <a:avLst/>
           </a:prstGeom>
-          <a:noFill xmlns:a="http://schemas.openxmlformats.org/drawingml/2006/main"/>
-          <a:ln xmlns:a="http://schemas.openxmlformats.org/drawingml/2006/main" w="0">
+          <a:noFill/>
+          <a:ln w="0">
             <a:noFill/>
           </a:ln>
         </p:spPr>
         <p:txBody>
-          <a:bodyPr xmlns:a="http://schemas.openxmlformats.org/drawingml/2006/main" wrap="square" lIns="0" tIns="0" rIns="0" bIns="0">
+          <a:bodyPr wrap="square" lIns="0" tIns="0" rIns="0" bIns="0">
             <a:noAutofit/>
           </a:bodyPr>
-          <a:lstStyle xmlns:a="http://schemas.openxmlformats.org/drawingml/2006/main"/>
-          <a:p xmlns:a="http://schemas.openxmlformats.org/drawingml/2006/main">
+          <a:lstStyle/>
+          <a:p>
             <a:pPr algn="l">
               <a:buNone/>
               <a:defRPr sz="2325" b="1">
@@ -7639,37 +7537,37 @@
       </p:sp>
       <p:sp>
         <p:nvSpPr>
-          <p:cNvPr id="5" name="">
-            <a:extLst xmlns:a="http://schemas.openxmlformats.org/drawingml/2006/main">
+          <p:cNvPr id="5" name="Rectangle 4">
+            <a:extLst>
               <a:ext uri="{FF2B5EF4-FFF2-40B4-BE49-F238E27FC236}">
                 <a16:creationId xmlns:a16="http://schemas.microsoft.com/office/drawing/2014/main" id="{552A45EC-DD7F-45DC-A190-013E9029E604}"/>
               </a:ext>
             </a:extLst>
           </p:cNvPr>
           <p:cNvSpPr>
-            <a:spLocks xmlns:a="http://schemas.openxmlformats.org/drawingml/2006/main" noGrp="1"/>
+            <a:spLocks noGrp="1"/>
           </p:cNvSpPr>
           <p:nvPr/>
         </p:nvSpPr>
         <p:spPr>
-          <a:xfrm xmlns:a="http://schemas.openxmlformats.org/drawingml/2006/main">
+          <a:xfrm>
             <a:off x="609600" y="5334000"/>
             <a:ext cx="10820400" cy="419100"/>
           </a:xfrm>
-          <a:prstGeom xmlns:a="http://schemas.openxmlformats.org/drawingml/2006/main" prst="rect">
+          <a:prstGeom prst="rect">
             <a:avLst/>
           </a:prstGeom>
-          <a:noFill xmlns:a="http://schemas.openxmlformats.org/drawingml/2006/main"/>
-          <a:ln xmlns:a="http://schemas.openxmlformats.org/drawingml/2006/main" w="0">
+          <a:noFill/>
+          <a:ln w="0">
             <a:noFill/>
           </a:ln>
         </p:spPr>
         <p:txBody>
-          <a:bodyPr xmlns:a="http://schemas.openxmlformats.org/drawingml/2006/main" wrap="square" lIns="0" tIns="0" rIns="0" bIns="0">
+          <a:bodyPr wrap="square" lIns="0" tIns="0" rIns="0" bIns="0">
             <a:noAutofit/>
           </a:bodyPr>
-          <a:lstStyle xmlns:a="http://schemas.openxmlformats.org/drawingml/2006/main"/>
-          <a:p xmlns:a="http://schemas.openxmlformats.org/drawingml/2006/main">
+          <a:lstStyle/>
+          <a:p>
             <a:pPr algn="l">
               <a:buNone/>
               <a:defRPr sz="2100" b="0">
@@ -7697,37 +7595,37 @@
       </p:sp>
       <p:sp>
         <p:nvSpPr>
-          <p:cNvPr id="6" name="">
-            <a:extLst xmlns:a="http://schemas.openxmlformats.org/drawingml/2006/main">
+          <p:cNvPr id="6" name="Rectangle 5">
+            <a:extLst>
               <a:ext uri="{FF2B5EF4-FFF2-40B4-BE49-F238E27FC236}">
                 <a16:creationId xmlns:a16="http://schemas.microsoft.com/office/drawing/2014/main" id="{208B14E6-512E-4216-91EE-EB2280F0F95D}"/>
               </a:ext>
             </a:extLst>
           </p:cNvPr>
           <p:cNvSpPr>
-            <a:spLocks xmlns:a="http://schemas.openxmlformats.org/drawingml/2006/main" noGrp="1"/>
+            <a:spLocks noGrp="1"/>
           </p:cNvSpPr>
           <p:nvPr/>
         </p:nvSpPr>
         <p:spPr>
-          <a:xfrm xmlns:a="http://schemas.openxmlformats.org/drawingml/2006/main">
+          <a:xfrm>
             <a:off x="609600" y="6124575"/>
             <a:ext cx="10382250" cy="381000"/>
           </a:xfrm>
-          <a:prstGeom xmlns:a="http://schemas.openxmlformats.org/drawingml/2006/main" prst="rect">
+          <a:prstGeom prst="rect">
             <a:avLst/>
           </a:prstGeom>
-          <a:noFill xmlns:a="http://schemas.openxmlformats.org/drawingml/2006/main"/>
-          <a:ln xmlns:a="http://schemas.openxmlformats.org/drawingml/2006/main" w="0">
+          <a:noFill/>
+          <a:ln w="0">
             <a:noFill/>
           </a:ln>
         </p:spPr>
         <p:txBody>
-          <a:bodyPr xmlns:a="http://schemas.openxmlformats.org/drawingml/2006/main" wrap="square" lIns="0" tIns="0" rIns="0" bIns="0">
+          <a:bodyPr wrap="square" lIns="0" tIns="0" rIns="0" bIns="0">
             <a:noAutofit/>
           </a:bodyPr>
-          <a:lstStyle xmlns:a="http://schemas.openxmlformats.org/drawingml/2006/main"/>
-          <a:p xmlns:a="http://schemas.openxmlformats.org/drawingml/2006/main">
+          <a:lstStyle/>
+          <a:p>
             <a:pPr algn="l">
               <a:buNone/>
               <a:defRPr sz="1650" b="0">
@@ -7760,17 +7658,21 @@
       </p:ext>
     </p:extLst>
   </p:cSld>
+  <p:clrMapOvr>
+    <a:masterClrMapping/>
+  </p:clrMapOvr>
 </p:sld>
 </file>
 
 <file path=ppt/slides/slide8.xml><?xml version="1.0" encoding="utf-8"?>
-<p:sld xmlns:p="http://schemas.openxmlformats.org/presentationml/2006/main">
+<p:sld xmlns:a="http://schemas.openxmlformats.org/drawingml/2006/main" xmlns:r="http://schemas.openxmlformats.org/officeDocument/2006/relationships" xmlns:p="http://schemas.openxmlformats.org/presentationml/2006/main">
   <p:cSld>
     <p:bg>
       <p:bgPr>
-        <a:solidFill xmlns:a="http://schemas.openxmlformats.org/drawingml/2006/main">
+        <a:solidFill>
           <a:srgbClr val="FFFFFF"/>
         </a:solidFill>
+        <a:effectLst/>
       </p:bgPr>
     </p:bg>
     <p:spTree>
@@ -7780,41 +7682,46 @@
         <p:nvPr/>
       </p:nvGrpSpPr>
       <p:grpSpPr>
-        <a:xfrm xmlns:a="http://schemas.openxmlformats.org/drawingml/2006/main"/>
+        <a:xfrm>
+          <a:off x="0" y="0"/>
+          <a:ext cx="0" cy="0"/>
+          <a:chOff x="0" y="0"/>
+          <a:chExt cx="0" cy="0"/>
+        </a:xfrm>
       </p:grpSpPr>
       <p:sp>
         <p:nvSpPr>
-          <p:cNvPr id="7" name="">
-            <a:extLst xmlns:a="http://schemas.openxmlformats.org/drawingml/2006/main">
+          <p:cNvPr id="7" name="Rectangle 6">
+            <a:extLst>
               <a:ext uri="{FF2B5EF4-FFF2-40B4-BE49-F238E27FC236}">
                 <a16:creationId xmlns:a16="http://schemas.microsoft.com/office/drawing/2014/main" id="{863C6403-4F88-44FC-BFEC-0DB289ECE39D}"/>
               </a:ext>
             </a:extLst>
           </p:cNvPr>
           <p:cNvSpPr>
-            <a:spLocks xmlns:a="http://schemas.openxmlformats.org/drawingml/2006/main" noGrp="1"/>
+            <a:spLocks noGrp="1"/>
           </p:cNvSpPr>
           <p:nvPr/>
         </p:nvSpPr>
         <p:spPr>
-          <a:xfrm xmlns:a="http://schemas.openxmlformats.org/drawingml/2006/main">
+          <a:xfrm>
             <a:off x="609600" y="457200"/>
             <a:ext cx="10972800" cy="857250"/>
           </a:xfrm>
-          <a:prstGeom xmlns:a="http://schemas.openxmlformats.org/drawingml/2006/main" prst="rect">
+          <a:prstGeom prst="rect">
             <a:avLst/>
           </a:prstGeom>
-          <a:noFill xmlns:a="http://schemas.openxmlformats.org/drawingml/2006/main"/>
-          <a:ln xmlns:a="http://schemas.openxmlformats.org/drawingml/2006/main" w="0">
+          <a:noFill/>
+          <a:ln w="0">
             <a:noFill/>
           </a:ln>
         </p:spPr>
         <p:txBody>
-          <a:bodyPr xmlns:a="http://schemas.openxmlformats.org/drawingml/2006/main" wrap="square" lIns="0" tIns="0" rIns="0" bIns="0">
+          <a:bodyPr wrap="square" lIns="0" tIns="0" rIns="0" bIns="0">
             <a:noAutofit/>
           </a:bodyPr>
-          <a:lstStyle xmlns:a="http://schemas.openxmlformats.org/drawingml/2006/main"/>
-          <a:p xmlns:a="http://schemas.openxmlformats.org/drawingml/2006/main">
+          <a:lstStyle/>
+          <a:p>
             <a:pPr algn="l">
               <a:buNone/>
               <a:defRPr sz="3300" b="1">
@@ -7827,7 +7734,7 @@
               </a:defRPr>
             </a:pPr>
             <a:r>
-              <a:rPr sz="3300" b="1">
+              <a:rPr lang="en-US" sz="3300" b="1">
                 <a:solidFill>
                   <a:srgbClr val="142B2A"/>
                 </a:solidFill>
@@ -7835,44 +7742,52 @@
                 <a:ea typeface="Tahoma"/>
                 <a:cs typeface="Tahoma"/>
               </a:rPr>
-              <a:t>Current quality needs two kinds of checks</a:t>
-            </a:r>
-          </a:p>
-        </p:txBody>
-      </p:sp>
-      <p:sp>
-        <p:nvSpPr>
-          <p:cNvPr id="2" name="">
-            <a:extLst xmlns:a="http://schemas.openxmlformats.org/drawingml/2006/main">
+              <a:t>Both metrics favour retrieval</a:t>
+            </a:r>
+            <a:endParaRPr sz="3300" b="1">
+              <a:solidFill>
+                <a:srgbClr val="142B2A"/>
+              </a:solidFill>
+              <a:latin typeface="Tahoma"/>
+              <a:ea typeface="Tahoma"/>
+              <a:cs typeface="Tahoma"/>
+            </a:endParaRPr>
+          </a:p>
+        </p:txBody>
+      </p:sp>
+      <p:sp>
+        <p:nvSpPr>
+          <p:cNvPr id="2" name="Rectangle 1">
+            <a:extLst>
               <a:ext uri="{FF2B5EF4-FFF2-40B4-BE49-F238E27FC236}">
                 <a16:creationId xmlns:a16="http://schemas.microsoft.com/office/drawing/2014/main" id="{DEFDCD59-FC29-4838-8B47-A73798D368F7}"/>
               </a:ext>
             </a:extLst>
           </p:cNvPr>
           <p:cNvSpPr>
-            <a:spLocks xmlns:a="http://schemas.openxmlformats.org/drawingml/2006/main" noGrp="1"/>
+            <a:spLocks noGrp="1"/>
           </p:cNvSpPr>
           <p:nvPr/>
         </p:nvSpPr>
         <p:spPr>
-          <a:xfrm xmlns:a="http://schemas.openxmlformats.org/drawingml/2006/main">
+          <a:xfrm>
             <a:off x="11106150" y="6296025"/>
             <a:ext cx="476250" cy="285750"/>
           </a:xfrm>
-          <a:prstGeom xmlns:a="http://schemas.openxmlformats.org/drawingml/2006/main" prst="rect">
+          <a:prstGeom prst="rect">
             <a:avLst/>
           </a:prstGeom>
-          <a:noFill xmlns:a="http://schemas.openxmlformats.org/drawingml/2006/main"/>
-          <a:ln xmlns:a="http://schemas.openxmlformats.org/drawingml/2006/main" w="0">
+          <a:noFill/>
+          <a:ln w="0">
             <a:noFill/>
           </a:ln>
         </p:spPr>
         <p:txBody>
-          <a:bodyPr xmlns:a="http://schemas.openxmlformats.org/drawingml/2006/main" wrap="square" lIns="0" tIns="0" rIns="0" bIns="0">
+          <a:bodyPr wrap="square" lIns="0" tIns="0" rIns="0" bIns="0">
             <a:noAutofit/>
           </a:bodyPr>
-          <a:lstStyle xmlns:a="http://schemas.openxmlformats.org/drawingml/2006/main"/>
-          <a:p xmlns:a="http://schemas.openxmlformats.org/drawingml/2006/main">
+          <a:lstStyle/>
+          <a:p>
             <a:pPr algn="r">
               <a:buNone/>
               <a:defRPr sz="1500" b="0">
@@ -7900,37 +7815,61 @@
       </p:sp>
       <p:graphicFrame>
         <p:nvGraphicFramePr>
-          <p:cNvPr id="9" name="">
-            <a:extLst xmlns:a="http://schemas.openxmlformats.org/drawingml/2006/main">
+          <p:cNvPr id="9" name="Table 8">
+            <a:extLst>
               <a:ext uri="{FF2B5EF4-FFF2-40B4-BE49-F238E27FC236}">
                 <a16:creationId xmlns:a16="http://schemas.microsoft.com/office/drawing/2014/main" id="{087EB39E-DD39-45ED-BAA2-45849243182D}"/>
               </a:ext>
             </a:extLst>
           </p:cNvPr>
           <p:cNvGraphicFramePr/>
-          <p:nvPr/>
+          <p:nvPr>
+            <p:extLst>
+              <p:ext uri="{D42A27DB-BD31-4B8C-83A1-F6EECF244321}">
+                <p14:modId xmlns:p14="http://schemas.microsoft.com/office/powerpoint/2010/main" val="776104487"/>
+              </p:ext>
+            </p:extLst>
+          </p:nvPr>
         </p:nvGraphicFramePr>
         <p:xfrm>
-          <a:off xmlns:a="http://schemas.openxmlformats.org/drawingml/2006/main" x="609600" y="1962150"/>
-          <a:ext xmlns:a="http://schemas.openxmlformats.org/drawingml/2006/main" cx="10972800" cy="2171700"/>
+          <a:off x="609600" y="1714500"/>
+          <a:ext cx="10972800" cy="2171700"/>
         </p:xfrm>
-        <a:graphic xmlns:a="http://schemas.openxmlformats.org/drawingml/2006/main">
+        <a:graphic>
           <a:graphicData uri="http://schemas.openxmlformats.org/drawingml/2006/table">
             <a:tbl>
               <a:tblPr/>
               <a:tblGrid>
-                <a:gridCol w="4572000"/>
-                <a:gridCol w="3124200"/>
-                <a:gridCol w="3276600"/>
+                <a:gridCol w="4572000">
+                  <a:extLst>
+                    <a:ext uri="{9D8B030D-6E8A-4147-A177-3AD203B41FA5}">
+                      <a16:colId xmlns:a16="http://schemas.microsoft.com/office/drawing/2014/main" val="20000"/>
+                    </a:ext>
+                  </a:extLst>
+                </a:gridCol>
+                <a:gridCol w="3124200">
+                  <a:extLst>
+                    <a:ext uri="{9D8B030D-6E8A-4147-A177-3AD203B41FA5}">
+                      <a16:colId xmlns:a16="http://schemas.microsoft.com/office/drawing/2014/main" val="20001"/>
+                    </a:ext>
+                  </a:extLst>
+                </a:gridCol>
+                <a:gridCol w="3276600">
+                  <a:extLst>
+                    <a:ext uri="{9D8B030D-6E8A-4147-A177-3AD203B41FA5}">
+                      <a16:colId xmlns:a16="http://schemas.microsoft.com/office/drawing/2014/main" val="20002"/>
+                    </a:ext>
+                  </a:extLst>
+                </a:gridCol>
               </a:tblGrid>
-              <a:tr h="723900">
+              <a:tr h="609600">
                 <a:tc>
                   <a:txBody>
                     <a:bodyPr/>
                     <a:lstStyle/>
                     <a:p>
                       <a:r>
-                        <a:rPr sz="2325" b="1">
+                        <a:rPr lang="en-US" sz="2325" b="1">
                           <a:solidFill>
                             <a:srgbClr val="FFFFFF"/>
                           </a:solidFill>
@@ -7938,8 +7877,16 @@
                           <a:ea typeface="Tahoma"/>
                           <a:cs typeface="Tahoma"/>
                         </a:rPr>
-                        <a:t>Current variant</a:t>
+                        <a:t>Variant</a:t>
                       </a:r>
+                      <a:endParaRPr sz="2325" b="1">
+                        <a:solidFill>
+                          <a:srgbClr val="FFFFFF"/>
+                        </a:solidFill>
+                        <a:latin typeface="Tahoma"/>
+                        <a:ea typeface="Tahoma"/>
+                        <a:cs typeface="Tahoma"/>
+                      </a:endParaRPr>
                     </a:p>
                   </a:txBody>
                   <a:tcPr marL="171450" marR="171450" marT="133350" marB="133350" anchor="ctr">
@@ -7954,7 +7901,7 @@
                     <a:lstStyle/>
                     <a:p>
                       <a:r>
-                        <a:rPr sz="2325" b="1">
+                        <a:rPr lang="en-US" sz="2325" b="1">
                           <a:solidFill>
                             <a:srgbClr val="FFFFFF"/>
                           </a:solidFill>
@@ -7964,6 +7911,14 @@
                         </a:rPr>
                         <a:t>LLM judge correct</a:t>
                       </a:r>
+                      <a:endParaRPr sz="2325" b="1">
+                        <a:solidFill>
+                          <a:srgbClr val="FFFFFF"/>
+                        </a:solidFill>
+                        <a:latin typeface="Tahoma"/>
+                        <a:ea typeface="Tahoma"/>
+                        <a:cs typeface="Tahoma"/>
+                      </a:endParaRPr>
                     </a:p>
                   </a:txBody>
                   <a:tcPr marL="171450" marR="171450" marT="133350" marB="133350" anchor="ctr">
@@ -7978,7 +7933,7 @@
                     <a:lstStyle/>
                     <a:p>
                       <a:r>
-                        <a:rPr sz="2325" b="1">
+                        <a:rPr lang="en-US" sz="2325" b="1">
                           <a:solidFill>
                             <a:srgbClr val="FFFFFF"/>
                           </a:solidFill>
@@ -7988,6 +7943,14 @@
                         </a:rPr>
                         <a:t>BERTScore F1</a:t>
                       </a:r>
+                      <a:endParaRPr sz="2325" b="1">
+                        <a:solidFill>
+                          <a:srgbClr val="FFFFFF"/>
+                        </a:solidFill>
+                        <a:latin typeface="Tahoma"/>
+                        <a:ea typeface="Tahoma"/>
+                        <a:cs typeface="Tahoma"/>
+                      </a:endParaRPr>
                     </a:p>
                   </a:txBody>
                   <a:tcPr marL="171450" marR="171450" marT="133350" marB="133350" anchor="ctr">
@@ -7996,15 +7959,20 @@
                     </a:solidFill>
                   </a:tcPr>
                 </a:tc>
+                <a:extLst>
+                  <a:ext uri="{0D108BD9-81ED-4DB2-BD59-A6C34878D82A}">
+                    <a16:rowId xmlns:a16="http://schemas.microsoft.com/office/drawing/2014/main" val="10000"/>
+                  </a:ext>
+                </a:extLst>
               </a:tr>
-              <a:tr h="723900">
+              <a:tr h="609600">
                 <a:tc>
                   <a:txBody>
                     <a:bodyPr/>
                     <a:lstStyle/>
                     <a:p>
                       <a:r>
-                        <a:rPr sz="2325">
+                        <a:rPr lang="en-US" sz="2325">
                           <a:solidFill>
                             <a:srgbClr val="142B2A"/>
                           </a:solidFill>
@@ -8012,8 +7980,16 @@
                           <a:ea typeface="Tahoma"/>
                           <a:cs typeface="Tahoma"/>
                         </a:rPr>
-                        <a:t>Dense</a:t>
+                        <a:t>No retrieval</a:t>
                       </a:r>
+                      <a:endParaRPr sz="2325">
+                        <a:solidFill>
+                          <a:srgbClr val="142B2A"/>
+                        </a:solidFill>
+                        <a:latin typeface="Tahoma"/>
+                        <a:ea typeface="Tahoma"/>
+                        <a:cs typeface="Tahoma"/>
+                      </a:endParaRPr>
                     </a:p>
                   </a:txBody>
                   <a:tcPr marL="171450" marR="171450" marT="133350" marB="133350" anchor="ctr">
@@ -8028,7 +8004,7 @@
                     <a:lstStyle/>
                     <a:p>
                       <a:r>
-                        <a:rPr sz="2325">
+                        <a:rPr lang="en-US" sz="2325">
                           <a:solidFill>
                             <a:srgbClr val="142B2A"/>
                           </a:solidFill>
@@ -8036,8 +8012,16 @@
                           <a:ea typeface="Tahoma"/>
                           <a:cs typeface="Tahoma"/>
                         </a:rPr>
-                        <a:t>6/8</a:t>
+                        <a:t>9/34</a:t>
                       </a:r>
+                      <a:endParaRPr sz="2325">
+                        <a:solidFill>
+                          <a:srgbClr val="142B2A"/>
+                        </a:solidFill>
+                        <a:latin typeface="Tahoma"/>
+                        <a:ea typeface="Tahoma"/>
+                        <a:cs typeface="Tahoma"/>
+                      </a:endParaRPr>
                     </a:p>
                   </a:txBody>
                   <a:tcPr marL="171450" marR="171450" marT="133350" marB="133350" anchor="ctr">
@@ -8052,7 +8036,7 @@
                     <a:lstStyle/>
                     <a:p>
                       <a:r>
-                        <a:rPr sz="2325">
+                        <a:rPr lang="en-US" sz="2325">
                           <a:solidFill>
                             <a:srgbClr val="142B2A"/>
                           </a:solidFill>
@@ -8060,8 +8044,16 @@
                           <a:ea typeface="Tahoma"/>
                           <a:cs typeface="Tahoma"/>
                         </a:rPr>
-                        <a:t>0.654</a:t>
+                        <a:t>0.294</a:t>
                       </a:r>
+                      <a:endParaRPr sz="2325">
+                        <a:solidFill>
+                          <a:srgbClr val="142B2A"/>
+                        </a:solidFill>
+                        <a:latin typeface="Tahoma"/>
+                        <a:ea typeface="Tahoma"/>
+                        <a:cs typeface="Tahoma"/>
+                      </a:endParaRPr>
                     </a:p>
                   </a:txBody>
                   <a:tcPr marL="171450" marR="171450" marT="133350" marB="133350" anchor="ctr">
@@ -8070,15 +8062,20 @@
                     </a:solidFill>
                   </a:tcPr>
                 </a:tc>
+                <a:extLst>
+                  <a:ext uri="{0D108BD9-81ED-4DB2-BD59-A6C34878D82A}">
+                    <a16:rowId xmlns:a16="http://schemas.microsoft.com/office/drawing/2014/main" val="2767041207"/>
+                  </a:ext>
+                </a:extLst>
               </a:tr>
-              <a:tr h="723900">
+              <a:tr h="609600">
                 <a:tc>
                   <a:txBody>
                     <a:bodyPr/>
                     <a:lstStyle/>
                     <a:p>
                       <a:r>
-                        <a:rPr sz="2325">
+                        <a:rPr lang="en-US" sz="2325">
                           <a:solidFill>
                             <a:srgbClr val="142B2A"/>
                           </a:solidFill>
@@ -8086,8 +8083,16 @@
                           <a:ea typeface="Tahoma"/>
                           <a:cs typeface="Tahoma"/>
                         </a:rPr>
-                        <a:t>Hybrid + reranker</a:t>
+                        <a:t>Dense</a:t>
                       </a:r>
+                      <a:endParaRPr sz="2325">
+                        <a:solidFill>
+                          <a:srgbClr val="142B2A"/>
+                        </a:solidFill>
+                        <a:latin typeface="Tahoma"/>
+                        <a:ea typeface="Tahoma"/>
+                        <a:cs typeface="Tahoma"/>
+                      </a:endParaRPr>
                     </a:p>
                   </a:txBody>
                   <a:tcPr marL="171450" marR="171450" marT="133350" marB="133350" anchor="ctr">
@@ -8102,7 +8107,7 @@
                     <a:lstStyle/>
                     <a:p>
                       <a:r>
-                        <a:rPr sz="2325">
+                        <a:rPr lang="en-US" sz="2325">
                           <a:solidFill>
                             <a:srgbClr val="142B2A"/>
                           </a:solidFill>
@@ -8110,8 +8115,16 @@
                           <a:ea typeface="Tahoma"/>
                           <a:cs typeface="Tahoma"/>
                         </a:rPr>
-                        <a:t>7/8</a:t>
+                        <a:t>27/34</a:t>
                       </a:r>
+                      <a:endParaRPr sz="2325">
+                        <a:solidFill>
+                          <a:srgbClr val="142B2A"/>
+                        </a:solidFill>
+                        <a:latin typeface="Tahoma"/>
+                        <a:ea typeface="Tahoma"/>
+                        <a:cs typeface="Tahoma"/>
+                      </a:endParaRPr>
                     </a:p>
                   </a:txBody>
                   <a:tcPr marL="171450" marR="171450" marT="133350" marB="133350" anchor="ctr">
@@ -8126,7 +8139,7 @@
                     <a:lstStyle/>
                     <a:p>
                       <a:r>
-                        <a:rPr sz="2325">
+                        <a:rPr lang="en-US" sz="2325">
                           <a:solidFill>
                             <a:srgbClr val="142B2A"/>
                           </a:solidFill>
@@ -8134,8 +8147,16 @@
                           <a:ea typeface="Tahoma"/>
                           <a:cs typeface="Tahoma"/>
                         </a:rPr>
-                        <a:t>0.600</a:t>
+                        <a:t>0.493</a:t>
                       </a:r>
+                      <a:endParaRPr sz="2325">
+                        <a:solidFill>
+                          <a:srgbClr val="142B2A"/>
+                        </a:solidFill>
+                        <a:latin typeface="Tahoma"/>
+                        <a:ea typeface="Tahoma"/>
+                        <a:cs typeface="Tahoma"/>
+                      </a:endParaRPr>
                     </a:p>
                   </a:txBody>
                   <a:tcPr marL="171450" marR="171450" marT="133350" marB="133350" anchor="ctr">
@@ -8144,6 +8165,114 @@
                     </a:solidFill>
                   </a:tcPr>
                 </a:tc>
+                <a:extLst>
+                  <a:ext uri="{0D108BD9-81ED-4DB2-BD59-A6C34878D82A}">
+                    <a16:rowId xmlns:a16="http://schemas.microsoft.com/office/drawing/2014/main" val="10001"/>
+                  </a:ext>
+                </a:extLst>
+              </a:tr>
+              <a:tr h="609600">
+                <a:tc>
+                  <a:txBody>
+                    <a:bodyPr/>
+                    <a:lstStyle/>
+                    <a:p>
+                      <a:r>
+                        <a:rPr lang="en-US" sz="2325">
+                          <a:solidFill>
+                            <a:srgbClr val="142B2A"/>
+                          </a:solidFill>
+                          <a:latin typeface="Tahoma"/>
+                          <a:ea typeface="Tahoma"/>
+                          <a:cs typeface="Tahoma"/>
+                        </a:rPr>
+                        <a:t>Hybrid + reranker</a:t>
+                      </a:r>
+                      <a:endParaRPr sz="2325">
+                        <a:solidFill>
+                          <a:srgbClr val="142B2A"/>
+                        </a:solidFill>
+                        <a:latin typeface="Tahoma"/>
+                        <a:ea typeface="Tahoma"/>
+                        <a:cs typeface="Tahoma"/>
+                      </a:endParaRPr>
+                    </a:p>
+                  </a:txBody>
+                  <a:tcPr marL="171450" marR="171450" marT="133350" marB="133350" anchor="ctr">
+                    <a:solidFill>
+                      <a:srgbClr val="FFFFFF"/>
+                    </a:solidFill>
+                  </a:tcPr>
+                </a:tc>
+                <a:tc>
+                  <a:txBody>
+                    <a:bodyPr/>
+                    <a:lstStyle/>
+                    <a:p>
+                      <a:r>
+                        <a:rPr lang="en-US" sz="2325">
+                          <a:solidFill>
+                            <a:srgbClr val="142B2A"/>
+                          </a:solidFill>
+                          <a:latin typeface="Tahoma"/>
+                          <a:ea typeface="Tahoma"/>
+                          <a:cs typeface="Tahoma"/>
+                        </a:rPr>
+                        <a:t>26/34</a:t>
+                      </a:r>
+                      <a:endParaRPr sz="2325">
+                        <a:solidFill>
+                          <a:srgbClr val="142B2A"/>
+                        </a:solidFill>
+                        <a:latin typeface="Tahoma"/>
+                        <a:ea typeface="Tahoma"/>
+                        <a:cs typeface="Tahoma"/>
+                      </a:endParaRPr>
+                    </a:p>
+                  </a:txBody>
+                  <a:tcPr marL="171450" marR="171450" marT="133350" marB="133350" anchor="ctr">
+                    <a:solidFill>
+                      <a:srgbClr val="FFFFFF"/>
+                    </a:solidFill>
+                  </a:tcPr>
+                </a:tc>
+                <a:tc>
+                  <a:txBody>
+                    <a:bodyPr/>
+                    <a:lstStyle/>
+                    <a:p>
+                      <a:r>
+                        <a:rPr lang="en-US" sz="2325">
+                          <a:solidFill>
+                            <a:srgbClr val="142B2A"/>
+                          </a:solidFill>
+                          <a:latin typeface="Tahoma"/>
+                          <a:ea typeface="Tahoma"/>
+                          <a:cs typeface="Tahoma"/>
+                        </a:rPr>
+                        <a:t>0.451</a:t>
+                      </a:r>
+                      <a:endParaRPr sz="2325">
+                        <a:solidFill>
+                          <a:srgbClr val="142B2A"/>
+                        </a:solidFill>
+                        <a:latin typeface="Tahoma"/>
+                        <a:ea typeface="Tahoma"/>
+                        <a:cs typeface="Tahoma"/>
+                      </a:endParaRPr>
+                    </a:p>
+                  </a:txBody>
+                  <a:tcPr marL="171450" marR="171450" marT="133350" marB="133350" anchor="ctr">
+                    <a:solidFill>
+                      <a:srgbClr val="FFFFFF"/>
+                    </a:solidFill>
+                  </a:tcPr>
+                </a:tc>
+                <a:extLst>
+                  <a:ext uri="{0D108BD9-81ED-4DB2-BD59-A6C34878D82A}">
+                    <a16:rowId xmlns:a16="http://schemas.microsoft.com/office/drawing/2014/main" val="10002"/>
+                  </a:ext>
+                </a:extLst>
               </a:tr>
             </a:tbl>
           </a:graphicData>
@@ -8151,37 +8280,37 @@
       </p:graphicFrame>
       <p:sp>
         <p:nvSpPr>
-          <p:cNvPr id="4" name="">
-            <a:extLst xmlns:a="http://schemas.openxmlformats.org/drawingml/2006/main">
+          <p:cNvPr id="4" name="Rectangle 3">
+            <a:extLst>
               <a:ext uri="{FF2B5EF4-FFF2-40B4-BE49-F238E27FC236}">
                 <a16:creationId xmlns:a16="http://schemas.microsoft.com/office/drawing/2014/main" id="{94D74EE3-0704-4193-BE89-02B551C7201A}"/>
               </a:ext>
             </a:extLst>
           </p:cNvPr>
           <p:cNvSpPr>
-            <a:spLocks xmlns:a="http://schemas.openxmlformats.org/drawingml/2006/main" noGrp="1"/>
+            <a:spLocks noGrp="1"/>
           </p:cNvSpPr>
           <p:nvPr/>
         </p:nvSpPr>
         <p:spPr>
-          <a:xfrm xmlns:a="http://schemas.openxmlformats.org/drawingml/2006/main">
+          <a:xfrm>
             <a:off x="609600" y="4714875"/>
             <a:ext cx="10972800" cy="457200"/>
           </a:xfrm>
-          <a:prstGeom xmlns:a="http://schemas.openxmlformats.org/drawingml/2006/main" prst="rect">
+          <a:prstGeom prst="rect">
             <a:avLst/>
           </a:prstGeom>
-          <a:noFill xmlns:a="http://schemas.openxmlformats.org/drawingml/2006/main"/>
-          <a:ln xmlns:a="http://schemas.openxmlformats.org/drawingml/2006/main" w="0">
+          <a:noFill/>
+          <a:ln w="0">
             <a:noFill/>
           </a:ln>
         </p:spPr>
         <p:txBody>
-          <a:bodyPr xmlns:a="http://schemas.openxmlformats.org/drawingml/2006/main" wrap="square" lIns="0" tIns="0" rIns="0" bIns="0">
+          <a:bodyPr wrap="square" lIns="0" tIns="0" rIns="0" bIns="0">
             <a:noAutofit/>
           </a:bodyPr>
-          <a:lstStyle xmlns:a="http://schemas.openxmlformats.org/drawingml/2006/main"/>
-          <a:p xmlns:a="http://schemas.openxmlformats.org/drawingml/2006/main">
+          <a:lstStyle/>
+          <a:p>
             <a:pPr algn="l">
               <a:buNone/>
               <a:defRPr sz="2325" b="1">
@@ -8209,37 +8338,37 @@
       </p:sp>
       <p:sp>
         <p:nvSpPr>
-          <p:cNvPr id="5" name="">
-            <a:extLst xmlns:a="http://schemas.openxmlformats.org/drawingml/2006/main">
+          <p:cNvPr id="5" name="Rectangle 4">
+            <a:extLst>
               <a:ext uri="{FF2B5EF4-FFF2-40B4-BE49-F238E27FC236}">
                 <a16:creationId xmlns:a16="http://schemas.microsoft.com/office/drawing/2014/main" id="{35A8551E-AA4A-4F75-AC38-27BB3F3F3695}"/>
               </a:ext>
             </a:extLst>
           </p:cNvPr>
           <p:cNvSpPr>
-            <a:spLocks xmlns:a="http://schemas.openxmlformats.org/drawingml/2006/main" noGrp="1"/>
+            <a:spLocks noGrp="1"/>
           </p:cNvSpPr>
           <p:nvPr/>
         </p:nvSpPr>
         <p:spPr>
-          <a:xfrm xmlns:a="http://schemas.openxmlformats.org/drawingml/2006/main">
+          <a:xfrm>
             <a:off x="609600" y="5324475"/>
             <a:ext cx="10972800" cy="476250"/>
           </a:xfrm>
-          <a:prstGeom xmlns:a="http://schemas.openxmlformats.org/drawingml/2006/main" prst="rect">
+          <a:prstGeom prst="rect">
             <a:avLst/>
           </a:prstGeom>
-          <a:noFill xmlns:a="http://schemas.openxmlformats.org/drawingml/2006/main"/>
-          <a:ln xmlns:a="http://schemas.openxmlformats.org/drawingml/2006/main" w="0">
+          <a:noFill/>
+          <a:ln w="0">
             <a:noFill/>
           </a:ln>
         </p:spPr>
         <p:txBody>
-          <a:bodyPr xmlns:a="http://schemas.openxmlformats.org/drawingml/2006/main" wrap="square" lIns="0" tIns="0" rIns="0" bIns="0">
+          <a:bodyPr wrap="square" lIns="0" tIns="0" rIns="0" bIns="0">
             <a:noAutofit/>
           </a:bodyPr>
-          <a:lstStyle xmlns:a="http://schemas.openxmlformats.org/drawingml/2006/main"/>
-          <a:p xmlns:a="http://schemas.openxmlformats.org/drawingml/2006/main">
+          <a:lstStyle/>
+          <a:p>
             <a:pPr algn="l">
               <a:buNone/>
               <a:defRPr sz="2025" b="0">
@@ -8267,37 +8396,37 @@
       </p:sp>
       <p:sp>
         <p:nvSpPr>
-          <p:cNvPr id="6" name="">
-            <a:extLst xmlns:a="http://schemas.openxmlformats.org/drawingml/2006/main">
+          <p:cNvPr id="6" name="Rectangle 5">
+            <a:extLst>
               <a:ext uri="{FF2B5EF4-FFF2-40B4-BE49-F238E27FC236}">
                 <a16:creationId xmlns:a16="http://schemas.microsoft.com/office/drawing/2014/main" id="{53048D7B-7468-4129-97A8-D4400DAAD8CD}"/>
               </a:ext>
             </a:extLst>
           </p:cNvPr>
           <p:cNvSpPr>
-            <a:spLocks xmlns:a="http://schemas.openxmlformats.org/drawingml/2006/main" noGrp="1"/>
+            <a:spLocks noGrp="1"/>
           </p:cNvSpPr>
           <p:nvPr/>
         </p:nvSpPr>
         <p:spPr>
-          <a:xfrm xmlns:a="http://schemas.openxmlformats.org/drawingml/2006/main">
+          <a:xfrm>
             <a:off x="609600" y="6057900"/>
             <a:ext cx="10382250" cy="552450"/>
           </a:xfrm>
-          <a:prstGeom xmlns:a="http://schemas.openxmlformats.org/drawingml/2006/main" prst="rect">
+          <a:prstGeom prst="rect">
             <a:avLst/>
           </a:prstGeom>
-          <a:noFill xmlns:a="http://schemas.openxmlformats.org/drawingml/2006/main"/>
-          <a:ln xmlns:a="http://schemas.openxmlformats.org/drawingml/2006/main" w="0">
+          <a:noFill/>
+          <a:ln w="0">
             <a:noFill/>
           </a:ln>
         </p:spPr>
         <p:txBody>
-          <a:bodyPr xmlns:a="http://schemas.openxmlformats.org/drawingml/2006/main" wrap="square" lIns="0" tIns="0" rIns="0" bIns="0">
+          <a:bodyPr wrap="square" lIns="0" tIns="0" rIns="0" bIns="0">
             <a:noAutofit/>
           </a:bodyPr>
-          <a:lstStyle xmlns:a="http://schemas.openxmlformats.org/drawingml/2006/main"/>
-          <a:p xmlns:a="http://schemas.openxmlformats.org/drawingml/2006/main">
+          <a:lstStyle/>
+          <a:p>
             <a:pPr algn="l">
               <a:buNone/>
               <a:defRPr sz="1650" b="0">
@@ -8310,7 +8439,7 @@
               </a:defRPr>
             </a:pPr>
             <a:r>
-              <a:rPr sz="1650" b="0">
+              <a:rPr lang="en-US" sz="1650" b="0">
                 <a:solidFill>
                   <a:srgbClr val="536563"/>
                 </a:solidFill>
@@ -8318,8 +8447,16 @@
                 <a:ea typeface="Tahoma"/>
                 <a:cs typeface="Tahoma"/>
               </a:rPr>
-              <a:t>Latest separate study: 8 test facts. Small sample, same-model judge. No general accuracy gain established.</a:t>
-            </a:r>
+              <a:t>Same 34 test facts as slide 6. Same-model judge; reranking showed no gain over dense.</a:t>
+            </a:r>
+            <a:endParaRPr sz="1650" b="0">
+              <a:solidFill>
+                <a:srgbClr val="536563"/>
+              </a:solidFill>
+              <a:latin typeface="Tahoma"/>
+              <a:ea typeface="Tahoma"/>
+              <a:cs typeface="Tahoma"/>
+            </a:endParaRPr>
           </a:p>
         </p:txBody>
       </p:sp>
@@ -8330,17 +8467,21 @@
       </p:ext>
     </p:extLst>
   </p:cSld>
+  <p:clrMapOvr>
+    <a:masterClrMapping/>
+  </p:clrMapOvr>
 </p:sld>
 </file>
 
 <file path=ppt/slides/slide9.xml><?xml version="1.0" encoding="utf-8"?>
-<p:sld xmlns:p="http://schemas.openxmlformats.org/presentationml/2006/main">
+<p:sld xmlns:a="http://schemas.openxmlformats.org/drawingml/2006/main" xmlns:r="http://schemas.openxmlformats.org/officeDocument/2006/relationships" xmlns:p="http://schemas.openxmlformats.org/presentationml/2006/main">
   <p:cSld>
     <p:bg>
       <p:bgPr>
-        <a:solidFill xmlns:a="http://schemas.openxmlformats.org/drawingml/2006/main">
+        <a:solidFill>
           <a:srgbClr val="FFFFFF"/>
         </a:solidFill>
+        <a:effectLst/>
       </p:bgPr>
     </p:bg>
     <p:spTree>
@@ -8350,41 +8491,46 @@
         <p:nvPr/>
       </p:nvGrpSpPr>
       <p:grpSpPr>
-        <a:xfrm xmlns:a="http://schemas.openxmlformats.org/drawingml/2006/main"/>
+        <a:xfrm>
+          <a:off x="0" y="0"/>
+          <a:ext cx="0" cy="0"/>
+          <a:chOff x="0" y="0"/>
+          <a:chExt cx="0" cy="0"/>
+        </a:xfrm>
       </p:grpSpPr>
       <p:sp>
         <p:nvSpPr>
-          <p:cNvPr id="6" name="">
-            <a:extLst xmlns:a="http://schemas.openxmlformats.org/drawingml/2006/main">
+          <p:cNvPr id="6" name="Rectangle 5">
+            <a:extLst>
               <a:ext uri="{FF2B5EF4-FFF2-40B4-BE49-F238E27FC236}">
                 <a16:creationId xmlns:a16="http://schemas.microsoft.com/office/drawing/2014/main" id="{5AF42315-23BC-421E-86D6-02BBA903F39D}"/>
               </a:ext>
             </a:extLst>
           </p:cNvPr>
           <p:cNvSpPr>
-            <a:spLocks xmlns:a="http://schemas.openxmlformats.org/drawingml/2006/main" noGrp="1"/>
+            <a:spLocks noGrp="1"/>
           </p:cNvSpPr>
           <p:nvPr/>
         </p:nvSpPr>
         <p:spPr>
-          <a:xfrm xmlns:a="http://schemas.openxmlformats.org/drawingml/2006/main">
+          <a:xfrm>
             <a:off x="609600" y="457200"/>
             <a:ext cx="10972800" cy="857250"/>
           </a:xfrm>
-          <a:prstGeom xmlns:a="http://schemas.openxmlformats.org/drawingml/2006/main" prst="rect">
+          <a:prstGeom prst="rect">
             <a:avLst/>
           </a:prstGeom>
-          <a:noFill xmlns:a="http://schemas.openxmlformats.org/drawingml/2006/main"/>
-          <a:ln xmlns:a="http://schemas.openxmlformats.org/drawingml/2006/main" w="0">
+          <a:noFill/>
+          <a:ln w="0">
             <a:noFill/>
           </a:ln>
         </p:spPr>
         <p:txBody>
-          <a:bodyPr xmlns:a="http://schemas.openxmlformats.org/drawingml/2006/main" wrap="square" lIns="0" tIns="0" rIns="0" bIns="0">
+          <a:bodyPr wrap="square" lIns="0" tIns="0" rIns="0" bIns="0">
             <a:noAutofit/>
           </a:bodyPr>
-          <a:lstStyle xmlns:a="http://schemas.openxmlformats.org/drawingml/2006/main"/>
-          <a:p xmlns:a="http://schemas.openxmlformats.org/drawingml/2006/main">
+          <a:lstStyle/>
+          <a:p>
             <a:pPr algn="l">
               <a:buNone/>
               <a:defRPr sz="3300" b="1">
@@ -8412,37 +8558,37 @@
       </p:sp>
       <p:sp>
         <p:nvSpPr>
-          <p:cNvPr id="2" name="">
-            <a:extLst xmlns:a="http://schemas.openxmlformats.org/drawingml/2006/main">
+          <p:cNvPr id="2" name="Rectangle 1">
+            <a:extLst>
               <a:ext uri="{FF2B5EF4-FFF2-40B4-BE49-F238E27FC236}">
                 <a16:creationId xmlns:a16="http://schemas.microsoft.com/office/drawing/2014/main" id="{0FBB95E4-682F-4833-A273-D119CE7D5646}"/>
               </a:ext>
             </a:extLst>
           </p:cNvPr>
           <p:cNvSpPr>
-            <a:spLocks xmlns:a="http://schemas.openxmlformats.org/drawingml/2006/main" noGrp="1"/>
+            <a:spLocks noGrp="1"/>
           </p:cNvSpPr>
           <p:nvPr/>
         </p:nvSpPr>
         <p:spPr>
-          <a:xfrm xmlns:a="http://schemas.openxmlformats.org/drawingml/2006/main">
+          <a:xfrm>
             <a:off x="11106150" y="6296025"/>
             <a:ext cx="476250" cy="285750"/>
           </a:xfrm>
-          <a:prstGeom xmlns:a="http://schemas.openxmlformats.org/drawingml/2006/main" prst="rect">
+          <a:prstGeom prst="rect">
             <a:avLst/>
           </a:prstGeom>
-          <a:noFill xmlns:a="http://schemas.openxmlformats.org/drawingml/2006/main"/>
-          <a:ln xmlns:a="http://schemas.openxmlformats.org/drawingml/2006/main" w="0">
+          <a:noFill/>
+          <a:ln w="0">
             <a:noFill/>
           </a:ln>
         </p:spPr>
         <p:txBody>
-          <a:bodyPr xmlns:a="http://schemas.openxmlformats.org/drawingml/2006/main" wrap="square" lIns="0" tIns="0" rIns="0" bIns="0">
+          <a:bodyPr wrap="square" lIns="0" tIns="0" rIns="0" bIns="0">
             <a:noAutofit/>
           </a:bodyPr>
-          <a:lstStyle xmlns:a="http://schemas.openxmlformats.org/drawingml/2006/main"/>
-          <a:p xmlns:a="http://schemas.openxmlformats.org/drawingml/2006/main">
+          <a:lstStyle/>
+          <a:p>
             <a:pPr algn="r">
               <a:buNone/>
               <a:defRPr sz="1500" b="0">
@@ -8470,8 +8616,8 @@
       </p:sp>
       <p:graphicFrame>
         <p:nvGraphicFramePr>
-          <p:cNvPr id="8" name="">
-            <a:extLst xmlns:a="http://schemas.openxmlformats.org/drawingml/2006/main">
+          <p:cNvPr id="8" name="Table 7">
+            <a:extLst>
               <a:ext uri="{FF2B5EF4-FFF2-40B4-BE49-F238E27FC236}">
                 <a16:creationId xmlns:a16="http://schemas.microsoft.com/office/drawing/2014/main" id="{92DB226A-8567-48A0-8986-827EA4B9AF6D}"/>
               </a:ext>
@@ -8481,16 +8627,28 @@
           <p:nvPr/>
         </p:nvGraphicFramePr>
         <p:xfrm>
-          <a:off xmlns:a="http://schemas.openxmlformats.org/drawingml/2006/main" x="609600" y="1743075"/>
-          <a:ext xmlns:a="http://schemas.openxmlformats.org/drawingml/2006/main" cx="10972800" cy="3228975"/>
+          <a:off x="609600" y="1743075"/>
+          <a:ext cx="10972800" cy="3228975"/>
         </p:xfrm>
-        <a:graphic xmlns:a="http://schemas.openxmlformats.org/drawingml/2006/main">
+        <a:graphic>
           <a:graphicData uri="http://schemas.openxmlformats.org/drawingml/2006/table">
             <a:tbl>
               <a:tblPr/>
               <a:tblGrid>
-                <a:gridCol w="5219700"/>
-                <a:gridCol w="5753100"/>
+                <a:gridCol w="5219700">
+                  <a:extLst>
+                    <a:ext uri="{9D8B030D-6E8A-4147-A177-3AD203B41FA5}">
+                      <a16:colId xmlns:a16="http://schemas.microsoft.com/office/drawing/2014/main" val="20000"/>
+                    </a:ext>
+                  </a:extLst>
+                </a:gridCol>
+                <a:gridCol w="5753100">
+                  <a:extLst>
+                    <a:ext uri="{9D8B030D-6E8A-4147-A177-3AD203B41FA5}">
+                      <a16:colId xmlns:a16="http://schemas.microsoft.com/office/drawing/2014/main" val="20001"/>
+                    </a:ext>
+                  </a:extLst>
+                </a:gridCol>
               </a:tblGrid>
               <a:tr h="807244">
                 <a:tc>
@@ -8541,6 +8699,11 @@
                     </a:solidFill>
                   </a:tcPr>
                 </a:tc>
+                <a:extLst>
+                  <a:ext uri="{0D108BD9-81ED-4DB2-BD59-A6C34878D82A}">
+                    <a16:rowId xmlns:a16="http://schemas.microsoft.com/office/drawing/2014/main" val="10000"/>
+                  </a:ext>
+                </a:extLst>
               </a:tr>
               <a:tr h="807244">
                 <a:tc>
@@ -8591,6 +8754,11 @@
                     </a:solidFill>
                   </a:tcPr>
                 </a:tc>
+                <a:extLst>
+                  <a:ext uri="{0D108BD9-81ED-4DB2-BD59-A6C34878D82A}">
+                    <a16:rowId xmlns:a16="http://schemas.microsoft.com/office/drawing/2014/main" val="10001"/>
+                  </a:ext>
+                </a:extLst>
               </a:tr>
               <a:tr h="807244">
                 <a:tc>
@@ -8641,6 +8809,11 @@
                     </a:solidFill>
                   </a:tcPr>
                 </a:tc>
+                <a:extLst>
+                  <a:ext uri="{0D108BD9-81ED-4DB2-BD59-A6C34878D82A}">
+                    <a16:rowId xmlns:a16="http://schemas.microsoft.com/office/drawing/2014/main" val="10002"/>
+                  </a:ext>
+                </a:extLst>
               </a:tr>
               <a:tr h="807244">
                 <a:tc>
@@ -8691,6 +8864,11 @@
                     </a:solidFill>
                   </a:tcPr>
                 </a:tc>
+                <a:extLst>
+                  <a:ext uri="{0D108BD9-81ED-4DB2-BD59-A6C34878D82A}">
+                    <a16:rowId xmlns:a16="http://schemas.microsoft.com/office/drawing/2014/main" val="10003"/>
+                  </a:ext>
+                </a:extLst>
               </a:tr>
             </a:tbl>
           </a:graphicData>
@@ -8698,37 +8876,37 @@
       </p:graphicFrame>
       <p:sp>
         <p:nvSpPr>
-          <p:cNvPr id="4" name="">
-            <a:extLst xmlns:a="http://schemas.openxmlformats.org/drawingml/2006/main">
+          <p:cNvPr id="4" name="Rectangle 3">
+            <a:extLst>
               <a:ext uri="{FF2B5EF4-FFF2-40B4-BE49-F238E27FC236}">
                 <a16:creationId xmlns:a16="http://schemas.microsoft.com/office/drawing/2014/main" id="{15E45300-BED3-4A98-BA2C-D50880B9F077}"/>
               </a:ext>
             </a:extLst>
           </p:cNvPr>
           <p:cNvSpPr>
-            <a:spLocks xmlns:a="http://schemas.openxmlformats.org/drawingml/2006/main" noGrp="1"/>
+            <a:spLocks noGrp="1"/>
           </p:cNvSpPr>
           <p:nvPr/>
         </p:nvSpPr>
         <p:spPr>
-          <a:xfrm xmlns:a="http://schemas.openxmlformats.org/drawingml/2006/main">
+          <a:xfrm>
             <a:off x="609600" y="5353050"/>
             <a:ext cx="10972800" cy="457200"/>
           </a:xfrm>
-          <a:prstGeom xmlns:a="http://schemas.openxmlformats.org/drawingml/2006/main" prst="rect">
+          <a:prstGeom prst="rect">
             <a:avLst/>
           </a:prstGeom>
-          <a:noFill xmlns:a="http://schemas.openxmlformats.org/drawingml/2006/main"/>
-          <a:ln xmlns:a="http://schemas.openxmlformats.org/drawingml/2006/main" w="0">
+          <a:noFill/>
+          <a:ln w="0">
             <a:noFill/>
           </a:ln>
         </p:spPr>
         <p:txBody>
-          <a:bodyPr xmlns:a="http://schemas.openxmlformats.org/drawingml/2006/main" wrap="square" lIns="0" tIns="0" rIns="0" bIns="0">
+          <a:bodyPr wrap="square" lIns="0" tIns="0" rIns="0" bIns="0">
             <a:noAutofit/>
           </a:bodyPr>
-          <a:lstStyle xmlns:a="http://schemas.openxmlformats.org/drawingml/2006/main"/>
-          <a:p xmlns:a="http://schemas.openxmlformats.org/drawingml/2006/main">
+          <a:lstStyle/>
+          <a:p>
             <a:pPr algn="l">
               <a:buNone/>
               <a:defRPr sz="2325" b="1">
@@ -8756,37 +8934,37 @@
       </p:sp>
       <p:sp>
         <p:nvSpPr>
-          <p:cNvPr id="5" name="">
-            <a:extLst xmlns:a="http://schemas.openxmlformats.org/drawingml/2006/main">
+          <p:cNvPr id="5" name="Rectangle 4">
+            <a:extLst>
               <a:ext uri="{FF2B5EF4-FFF2-40B4-BE49-F238E27FC236}">
                 <a16:creationId xmlns:a16="http://schemas.microsoft.com/office/drawing/2014/main" id="{9C6912CD-4184-4AE8-854D-D24AA242B14A}"/>
               </a:ext>
             </a:extLst>
           </p:cNvPr>
           <p:cNvSpPr>
-            <a:spLocks xmlns:a="http://schemas.openxmlformats.org/drawingml/2006/main" noGrp="1"/>
+            <a:spLocks noGrp="1"/>
           </p:cNvSpPr>
           <p:nvPr/>
         </p:nvSpPr>
         <p:spPr>
-          <a:xfrm xmlns:a="http://schemas.openxmlformats.org/drawingml/2006/main">
+          <a:xfrm>
             <a:off x="609600" y="5981700"/>
             <a:ext cx="10382250" cy="476250"/>
           </a:xfrm>
-          <a:prstGeom xmlns:a="http://schemas.openxmlformats.org/drawingml/2006/main" prst="rect">
+          <a:prstGeom prst="rect">
             <a:avLst/>
           </a:prstGeom>
-          <a:noFill xmlns:a="http://schemas.openxmlformats.org/drawingml/2006/main"/>
-          <a:ln xmlns:a="http://schemas.openxmlformats.org/drawingml/2006/main" w="0">
+          <a:noFill/>
+          <a:ln w="0">
             <a:noFill/>
           </a:ln>
         </p:spPr>
         <p:txBody>
-          <a:bodyPr xmlns:a="http://schemas.openxmlformats.org/drawingml/2006/main" wrap="square" lIns="0" tIns="0" rIns="0" bIns="0">
+          <a:bodyPr wrap="square" lIns="0" tIns="0" rIns="0" bIns="0">
             <a:noAutofit/>
           </a:bodyPr>
-          <a:lstStyle xmlns:a="http://schemas.openxmlformats.org/drawingml/2006/main"/>
-          <a:p xmlns:a="http://schemas.openxmlformats.org/drawingml/2006/main">
+          <a:lstStyle/>
+          <a:p>
             <a:pPr algn="l">
               <a:buNone/>
               <a:defRPr sz="1725" b="0">
@@ -8819,6 +8997,9 @@
       </p:ext>
     </p:extLst>
   </p:cSld>
+  <p:clrMapOvr>
+    <a:masterClrMapping/>
+  </p:clrMapOvr>
 </p:sld>
 </file>
 
@@ -9064,5 +9245,254 @@
       </a:bgFillStyleLst>
     </a:fmtScheme>
   </a:themeElements>
+  <a:objectDefaults/>
+  <a:extraClrSchemeLst/>
+</a:theme>
+</file>
+
+<file path=ppt/theme/theme2.xml><?xml version="1.0" encoding="utf-8"?>
+<a:theme xmlns:a="http://schemas.openxmlformats.org/drawingml/2006/main" name="ChatGPT">
+  <a:themeElements>
+    <a:clrScheme name="ChatGPT">
+      <a:dk1>
+        <a:srgbClr val="000000"/>
+      </a:dk1>
+      <a:lt1>
+        <a:srgbClr val="FFFFFF"/>
+      </a:lt1>
+      <a:dk2>
+        <a:srgbClr val="0E2841"/>
+      </a:dk2>
+      <a:lt2>
+        <a:srgbClr val="E8E8E8"/>
+      </a:lt2>
+      <a:accent1>
+        <a:srgbClr val="156082"/>
+      </a:accent1>
+      <a:accent2>
+        <a:srgbClr val="E97132"/>
+      </a:accent2>
+      <a:accent3>
+        <a:srgbClr val="196B24"/>
+      </a:accent3>
+      <a:accent4>
+        <a:srgbClr val="0F9ED5"/>
+      </a:accent4>
+      <a:accent5>
+        <a:srgbClr val="A02B93"/>
+      </a:accent5>
+      <a:accent6>
+        <a:srgbClr val="4EA72E"/>
+      </a:accent6>
+      <a:hlink>
+        <a:srgbClr val="467886"/>
+      </a:hlink>
+      <a:folHlink>
+        <a:srgbClr val="96607D"/>
+      </a:folHlink>
+    </a:clrScheme>
+    <a:fontScheme name="">
+      <a:majorFont>
+        <a:latin typeface="Aptos"/>
+        <a:ea typeface=""/>
+        <a:cs typeface=""/>
+      </a:majorFont>
+      <a:minorFont>
+        <a:latin typeface="Aptos"/>
+        <a:ea typeface=""/>
+        <a:cs typeface=""/>
+      </a:minorFont>
+    </a:fontScheme>
+    <a:fmtScheme name="ChatGPT">
+      <a:fillStyleLst>
+        <a:solidFill>
+          <a:schemeClr val="phClr"/>
+        </a:solidFill>
+        <a:gradFill>
+          <a:gsLst>
+            <a:gs pos="0">
+              <a:schemeClr val="phClr">
+                <a:tint val="67000"/>
+                <a:lumMod val="110000"/>
+                <a:satMod val="105000"/>
+              </a:schemeClr>
+            </a:gs>
+            <a:gs pos="50000">
+              <a:schemeClr val="phClr">
+                <a:tint val="73000"/>
+                <a:lumMod val="105000"/>
+                <a:satMod val="103000"/>
+              </a:schemeClr>
+            </a:gs>
+            <a:gs pos="100000">
+              <a:schemeClr val="phClr">
+                <a:tint val="81000"/>
+                <a:lumMod val="105000"/>
+                <a:satMod val="109000"/>
+              </a:schemeClr>
+            </a:gs>
+          </a:gsLst>
+          <a:lin ang="5400000" scaled="0"/>
+        </a:gradFill>
+        <a:gradFill>
+          <a:gsLst>
+            <a:gs pos="0">
+              <a:schemeClr val="phClr">
+                <a:tint val="94000"/>
+                <a:lumMod val="102000"/>
+                <a:satMod val="103000"/>
+              </a:schemeClr>
+            </a:gs>
+            <a:gs pos="50000">
+              <a:schemeClr val="phClr">
+                <a:shade val="100000"/>
+                <a:lumMod val="100000"/>
+                <a:satMod val="110000"/>
+              </a:schemeClr>
+            </a:gs>
+            <a:gs pos="100000">
+              <a:schemeClr val="phClr">
+                <a:shade val="78000"/>
+                <a:lumMod val="99000"/>
+                <a:satMod val="120000"/>
+              </a:schemeClr>
+            </a:gs>
+          </a:gsLst>
+          <a:lin ang="5400000" scaled="0"/>
+        </a:gradFill>
+      </a:fillStyleLst>
+      <a:lnStyleLst>
+        <a:ln w="12700">
+          <a:solidFill>
+            <a:schemeClr val="phClr"/>
+          </a:solidFill>
+          <a:prstDash val="solid"/>
+        </a:ln>
+        <a:ln w="19050">
+          <a:solidFill>
+            <a:schemeClr val="phClr"/>
+          </a:solidFill>
+          <a:prstDash val="solid"/>
+        </a:ln>
+        <a:ln w="25400">
+          <a:solidFill>
+            <a:schemeClr val="phClr"/>
+          </a:solidFill>
+          <a:prstDash val="solid"/>
+        </a:ln>
+      </a:lnStyleLst>
+      <a:effectStyleLst>
+        <a:effectStyle>
+          <a:effectLst/>
+        </a:effectStyle>
+        <a:effectStyle>
+          <a:effectLst/>
+        </a:effectStyle>
+        <a:effectStyle>
+          <a:effectLst>
+            <a:outerShdw blurRad="57150" dist="19050" dir="5400000">
+              <a:srgbClr val="000000">
+                <a:alpha val="16000"/>
+              </a:srgbClr>
+            </a:outerShdw>
+          </a:effectLst>
+        </a:effectStyle>
+        <a:effectStyle>
+          <a:effectLst>
+            <a:outerShdw blurRad="19050" dist="9525" dir="5400000">
+              <a:srgbClr val="000000">
+                <a:alpha val="6000"/>
+              </a:srgbClr>
+            </a:outerShdw>
+          </a:effectLst>
+        </a:effectStyle>
+        <a:effectStyle>
+          <a:effectLst>
+            <a:outerShdw blurRad="28575" dist="9525" dir="5400000">
+              <a:srgbClr val="000000">
+                <a:alpha val="8000"/>
+              </a:srgbClr>
+            </a:outerShdw>
+          </a:effectLst>
+        </a:effectStyle>
+        <a:effectStyle>
+          <a:effectLst>
+            <a:outerShdw blurRad="57150" dist="19050" dir="5400000">
+              <a:srgbClr val="000000">
+                <a:alpha val="10000"/>
+              </a:srgbClr>
+            </a:outerShdw>
+          </a:effectLst>
+        </a:effectStyle>
+        <a:effectStyle>
+          <a:effectLst>
+            <a:outerShdw blurRad="114300" dist="38100" dir="5400000">
+              <a:srgbClr val="000000">
+                <a:alpha val="12000"/>
+              </a:srgbClr>
+            </a:outerShdw>
+          </a:effectLst>
+        </a:effectStyle>
+        <a:effectStyle>
+          <a:effectLst>
+            <a:outerShdw blurRad="171450" dist="57150" dir="5400000">
+              <a:srgbClr val="000000">
+                <a:alpha val="16000"/>
+              </a:srgbClr>
+            </a:outerShdw>
+          </a:effectLst>
+        </a:effectStyle>
+        <a:effectStyle>
+          <a:effectLst>
+            <a:outerShdw blurRad="266700" dist="95250" dir="5400000">
+              <a:srgbClr val="000000">
+                <a:alpha val="24000"/>
+              </a:srgbClr>
+            </a:outerShdw>
+          </a:effectLst>
+        </a:effectStyle>
+      </a:effectStyleLst>
+      <a:bgFillStyleLst>
+        <a:solidFill>
+          <a:schemeClr val="phClr"/>
+        </a:solidFill>
+        <a:solidFill>
+          <a:schemeClr val="phClr">
+            <a:tint val="95000"/>
+            <a:satMod val="170000"/>
+          </a:schemeClr>
+        </a:solidFill>
+        <a:gradFill>
+          <a:gsLst>
+            <a:gs pos="0">
+              <a:schemeClr val="phClr">
+                <a:tint val="93000"/>
+                <a:shade val="98000"/>
+                <a:lumMod val="102000"/>
+                <a:satMod val="150000"/>
+              </a:schemeClr>
+            </a:gs>
+            <a:gs pos="50000">
+              <a:schemeClr val="phClr">
+                <a:tint val="98000"/>
+                <a:shade val="90000"/>
+                <a:lumMod val="103000"/>
+                <a:satMod val="130000"/>
+              </a:schemeClr>
+            </a:gs>
+            <a:gs pos="100000">
+              <a:schemeClr val="phClr">
+                <a:shade val="63000"/>
+                <a:satMod val="120000"/>
+              </a:schemeClr>
+            </a:gs>
+          </a:gsLst>
+          <a:lin ang="5400000" scaled="0"/>
+        </a:gradFill>
+      </a:bgFillStyleLst>
+    </a:fmtScheme>
+  </a:themeElements>
+  <a:objectDefaults/>
+  <a:extraClrSchemeLst/>
 </a:theme>
 </file>